--- a/public/reference/lyriks-template.pptx
+++ b/public/reference/lyriks-template.pptx
@@ -16,9 +16,10 @@
     <p:sldId id="264" r:id="rId10"/>
     <p:sldId id="265" r:id="rId11"/>
     <p:sldId id="266" r:id="rId12"/>
+    <p:sldId id="267" r:id="rId13"/>
   </p:sldIdLst>
   <p:notesMasterIdLst>
-    <p:notesMasterId r:id="rId13"/>
+    <p:notesMasterId r:id="rId14"/>
   </p:notesMasterIdLst>
   <p:sldSz cx="12191695" cy="6858000"/>
   <p:notesSz cx="6858000" cy="12191695"/>
@@ -712,6 +713,94 @@
             <a:fld id="{F7021451-1387-4CA6-816F-3879F97B5CBC}" type="slidenum">
               <a:rPr lang="en-US"/>
               <a:t>11</a:t>
+            </a:fld>
+            <a:endParaRPr lang="en-US"/>
+          </a:p>
+        </p:txBody>
+      </p:sp>
+    </p:spTree>
+    <p:extLst>
+      <p:ext uri="{BB962C8B-B14F-4D97-AF65-F5344CB8AC3E}">
+        <p14:creationId xmlns:p14="http://schemas.microsoft.com/office/powerpoint/2010/main" val="1024086991"/>
+      </p:ext>
+    </p:extLst>
+  </p:cSld>
+  <p:clrMapOvr>
+    <a:masterClrMapping/>
+  </p:clrMapOvr>
+</p:notes>
+</file>
+
+<file path=ppt/notesSlides/notesSlide12.xml><?xml version="1.0" encoding="utf-8"?>
+<p:notes xmlns:a="http://schemas.openxmlformats.org/drawingml/2006/main" xmlns:r="http://schemas.openxmlformats.org/officeDocument/2006/relationships" xmlns:p="http://schemas.openxmlformats.org/presentationml/2006/main">
+  <p:cSld>
+    <p:spTree>
+      <p:nvGrpSpPr>
+        <p:cNvPr id="1" name=""/>
+        <p:cNvGrpSpPr/>
+        <p:nvPr/>
+      </p:nvGrpSpPr>
+      <p:grpSpPr>
+        <a:xfrm>
+          <a:off x="0" y="0"/>
+          <a:ext cx="0" cy="0"/>
+          <a:chOff x="0" y="0"/>
+          <a:chExt cx="0" cy="0"/>
+        </a:xfrm>
+      </p:grpSpPr>
+      <p:sp>
+        <p:nvSpPr>
+          <p:cNvPr id="2" name="Slide Image Placeholder 1"/>
+          <p:cNvSpPr>
+            <a:spLocks noGrp="1" noRot="1" noChangeAspect="1"/>
+          </p:cNvSpPr>
+          <p:nvPr>
+            <p:ph type="sldImg"/>
+          </p:nvPr>
+        </p:nvSpPr>
+        <p:spPr/>
+      </p:sp>
+      <p:sp>
+        <p:nvSpPr>
+          <p:cNvPr id="3" name="Notes Placeholder 2"/>
+          <p:cNvSpPr>
+            <a:spLocks noGrp="1"/>
+          </p:cNvSpPr>
+          <p:nvPr>
+            <p:ph type="body" idx="1"/>
+          </p:nvPr>
+        </p:nvSpPr>
+        <p:spPr/>
+        <p:txBody>
+          <a:bodyPr/>
+          <a:lstStyle/>
+          <a:p>
+            <a:r>
+              <a:rPr lang="en-US" dirty="0"/>
+              <a:t/>
+            </a:r>
+            <a:endParaRPr lang="en-US" dirty="0"/>
+          </a:p>
+        </p:txBody>
+      </p:sp>
+      <p:sp>
+        <p:nvSpPr>
+          <p:cNvPr id="4" name="Slide Number Placeholder 3"/>
+          <p:cNvSpPr>
+            <a:spLocks noGrp="1"/>
+          </p:cNvSpPr>
+          <p:nvPr>
+            <p:ph type="sldNum" sz="quarter" idx="10"/>
+          </p:nvPr>
+        </p:nvSpPr>
+        <p:spPr/>
+        <p:txBody>
+          <a:bodyPr/>
+          <a:lstStyle/>
+          <a:p>
+            <a:fld id="{F7021451-1387-4CA6-816F-3879F97B5CBC}" type="slidenum">
+              <a:rPr lang="en-US"/>
+              <a:t>12</a:t>
             </a:fld>
             <a:endParaRPr lang="en-US"/>
           </a:p>
@@ -1863,7 +1952,7 @@
         <p:spPr>
           <a:xfrm>
             <a:off x="1115568" y="493776"/>
-            <a:ext cx="1554480" cy="310896"/>
+            <a:ext cx="1645920" cy="310896"/>
           </a:xfrm>
           <a:prstGeom prst="rect">
             <a:avLst/>
@@ -1887,13 +1976,80 @@
                 <a:ea typeface="Space Grotesk" pitchFamily="34" charset="-122"/>
                 <a:cs typeface="Space Grotesk" pitchFamily="34" charset="-120"/>
               </a:rPr>
-              <a:t>Lyriks</a:t>
-            </a:r>
+              <a:t>Lyriks.io</a:t>
+            </a:r>
+            <a:endParaRPr lang="en-US" sz="1500" dirty="0"/>
+          </a:p>
+        </p:txBody>
+      </p:sp>
+      <p:sp>
+        <p:nvSpPr>
+          <p:cNvPr id="7" name="Text 4"/>
+          <p:cNvSpPr/>
+          <p:nvPr/>
+        </p:nvSpPr>
+        <p:spPr>
+          <a:xfrm>
+            <a:off x="640080" y="2103120"/>
+            <a:ext cx="8229600" cy="274320"/>
+          </a:xfrm>
+          <a:prstGeom prst="rect">
+            <a:avLst/>
+          </a:prstGeom>
+          <a:noFill/>
+          <a:ln/>
+        </p:spPr>
+        <p:txBody>
+          <a:bodyPr wrap="square" lIns="0" tIns="0" rIns="0" bIns="0" rtlCol="0" anchor="ctr"/>
+          <a:lstStyle/>
+          <a:p>
             <a:pPr indent="0" marL="0">
               <a:buNone/>
             </a:pPr>
             <a:r>
-              <a:rPr lang="en-US" sz="1500" b="1" spc="-30" kern="0" dirty="0">
+              <a:rPr lang="en-US" sz="1100" b="1" spc="250" kern="0" dirty="0">
+                <a:solidFill>
+                  <a:srgbClr val="FFA101"/>
+                </a:solidFill>
+                <a:latin typeface="JetBrains Mono" pitchFamily="34" charset="0"/>
+                <a:ea typeface="JetBrains Mono" pitchFamily="34" charset="-122"/>
+                <a:cs typeface="JetBrains Mono" pitchFamily="34" charset="-120"/>
+              </a:rPr>
+              <a:t>PRODUIT × IA</a:t>
+            </a:r>
+            <a:endParaRPr lang="en-US" sz="1100" dirty="0"/>
+          </a:p>
+        </p:txBody>
+      </p:sp>
+      <p:sp>
+        <p:nvSpPr>
+          <p:cNvPr id="8" name="Text 5"/>
+          <p:cNvSpPr/>
+          <p:nvPr/>
+        </p:nvSpPr>
+        <p:spPr>
+          <a:xfrm>
+            <a:off x="640080" y="2423160"/>
+            <a:ext cx="7315200" cy="1828800"/>
+          </a:xfrm>
+          <a:prstGeom prst="rect">
+            <a:avLst/>
+          </a:prstGeom>
+          <a:noFill/>
+          <a:ln/>
+        </p:spPr>
+        <p:txBody>
+          <a:bodyPr wrap="square" lIns="0" tIns="0" rIns="0" bIns="0" rtlCol="0" anchor="ctr"/>
+          <a:lstStyle/>
+          <a:p>
+            <a:pPr indent="0" marL="0">
+              <a:lnSpc>
+                <a:spcPct val="100000"/>
+              </a:lnSpc>
+              <a:buNone/>
+            </a:pPr>
+            <a:r>
+              <a:rPr lang="en-US" sz="4400" b="1" spc="-80" kern="0" dirty="0">
                 <a:solidFill>
                   <a:srgbClr val="0A0A0A"/>
                 </a:solidFill>
@@ -1901,22 +2057,22 @@
                 <a:ea typeface="Space Grotesk" pitchFamily="34" charset="-122"/>
                 <a:cs typeface="Space Grotesk" pitchFamily="34" charset="-120"/>
               </a:rPr>
-              <a:t>.io</a:t>
-            </a:r>
-            <a:endParaRPr lang="en-US" sz="1500" dirty="0"/>
-          </a:p>
-        </p:txBody>
-      </p:sp>
-      <p:sp>
-        <p:nvSpPr>
-          <p:cNvPr id="7" name="Text 4"/>
-          <p:cNvSpPr/>
-          <p:nvPr/>
-        </p:nvSpPr>
-        <p:spPr>
-          <a:xfrm>
-            <a:off x="640080" y="2148840"/>
-            <a:ext cx="7315200" cy="274320"/>
+              <a:t>La cohérence produit pour développer avec l'IA.</a:t>
+            </a:r>
+            <a:endParaRPr lang="en-US" sz="4400" dirty="0"/>
+          </a:p>
+        </p:txBody>
+      </p:sp>
+      <p:sp>
+        <p:nvSpPr>
+          <p:cNvPr id="9" name="Text 6"/>
+          <p:cNvSpPr/>
+          <p:nvPr/>
+        </p:nvSpPr>
+        <p:spPr>
+          <a:xfrm>
+            <a:off x="640080" y="4526280"/>
+            <a:ext cx="6949440" cy="731520"/>
           </a:xfrm>
           <a:prstGeom prst="rect">
             <a:avLst/>
@@ -1929,158 +2085,60 @@
           <a:lstStyle/>
           <a:p>
             <a:pPr indent="0" marL="0">
-              <a:buNone/>
-            </a:pPr>
-            <a:r>
-              <a:rPr lang="en-US" sz="1100" b="1" spc="250" kern="0" dirty="0">
-                <a:solidFill>
-                  <a:srgbClr val="FFA101"/>
+              <a:lnSpc>
+                <a:spcPct val="120000"/>
+              </a:lnSpc>
+              <a:buNone/>
+            </a:pPr>
+            <a:r>
+              <a:rPr lang="en-US" sz="1600" dirty="0">
+                <a:solidFill>
+                  <a:srgbClr val="535462"/>
+                </a:solidFill>
+                <a:latin typeface="Montserrat" pitchFamily="34" charset="0"/>
+                <a:ea typeface="Montserrat" pitchFamily="34" charset="-122"/>
+                <a:cs typeface="Montserrat" pitchFamily="34" charset="-120"/>
+              </a:rPr>
+              <a:t>Spécification, cohérence et supervision, avant, pendant et après l'implémentation.</a:t>
+            </a:r>
+            <a:endParaRPr lang="en-US" sz="1600" dirty="0"/>
+          </a:p>
+        </p:txBody>
+      </p:sp>
+      <p:sp>
+        <p:nvSpPr>
+          <p:cNvPr id="10" name="Text 7"/>
+          <p:cNvSpPr/>
+          <p:nvPr/>
+        </p:nvSpPr>
+        <p:spPr>
+          <a:xfrm>
+            <a:off x="640080" y="5943600"/>
+            <a:ext cx="6400800" cy="365760"/>
+          </a:xfrm>
+          <a:prstGeom prst="rect">
+            <a:avLst/>
+          </a:prstGeom>
+          <a:noFill/>
+          <a:ln/>
+        </p:spPr>
+        <p:txBody>
+          <a:bodyPr wrap="square" lIns="0" tIns="0" rIns="0" bIns="0" rtlCol="0" anchor="ctr"/>
+          <a:lstStyle/>
+          <a:p>
+            <a:pPr indent="0" marL="0">
+              <a:buNone/>
+            </a:pPr>
+            <a:r>
+              <a:rPr lang="en-US" sz="1200" spc="100" kern="0" dirty="0">
+                <a:solidFill>
+                  <a:srgbClr val="9296A6"/>
                 </a:solidFill>
                 <a:latin typeface="JetBrains Mono" pitchFamily="34" charset="0"/>
                 <a:ea typeface="JetBrains Mono" pitchFamily="34" charset="-122"/>
                 <a:cs typeface="JetBrains Mono" pitchFamily="34" charset="-120"/>
               </a:rPr>
-              <a:t>PRÉSENTATION</a:t>
-            </a:r>
-            <a:endParaRPr lang="en-US" sz="1100" dirty="0"/>
-          </a:p>
-        </p:txBody>
-      </p:sp>
-      <p:sp>
-        <p:nvSpPr>
-          <p:cNvPr id="8" name="Text 5"/>
-          <p:cNvSpPr/>
-          <p:nvPr/>
-        </p:nvSpPr>
-        <p:spPr>
-          <a:xfrm>
-            <a:off x="640080" y="2468880"/>
-            <a:ext cx="7315200" cy="1737360"/>
-          </a:xfrm>
-          <a:prstGeom prst="rect">
-            <a:avLst/>
-          </a:prstGeom>
-          <a:noFill/>
-          <a:ln/>
-        </p:spPr>
-        <p:txBody>
-          <a:bodyPr wrap="square" lIns="0" tIns="0" rIns="0" bIns="0" rtlCol="0" anchor="ctr"/>
-          <a:lstStyle/>
-          <a:p>
-            <a:pPr indent="0" marL="0">
-              <a:lnSpc>
-                <a:spcPct val="98000"/>
-              </a:lnSpc>
-              <a:buNone/>
-            </a:pPr>
-            <a:r>
-              <a:rPr lang="en-US" sz="5200" b="1" spc="-100" kern="0" dirty="0">
-                <a:solidFill>
-                  <a:srgbClr val="0A0A0A"/>
-                </a:solidFill>
-                <a:latin typeface="Space Grotesk" pitchFamily="34" charset="0"/>
-                <a:ea typeface="Space Grotesk" pitchFamily="34" charset="-122"/>
-                <a:cs typeface="Space Grotesk" pitchFamily="34" charset="-120"/>
-              </a:rPr>
-              <a:t>Titre de la</a:t>
-            </a:r>
-            <a:endParaRPr lang="en-US" sz="5200" dirty="0"/>
-          </a:p>
-          <a:p>
-            <a:pPr indent="0" marL="0">
-              <a:lnSpc>
-                <a:spcPct val="98000"/>
-              </a:lnSpc>
-              <a:buNone/>
-            </a:pPr>
-            <a:r>
-              <a:rPr lang="en-US" sz="5200" b="1" spc="-100" kern="0" dirty="0">
-                <a:solidFill>
-                  <a:srgbClr val="0A0A0A"/>
-                </a:solidFill>
-                <a:latin typeface="Space Grotesk" pitchFamily="34" charset="0"/>
-                <a:ea typeface="Space Grotesk" pitchFamily="34" charset="-122"/>
-                <a:cs typeface="Space Grotesk" pitchFamily="34" charset="-120"/>
-              </a:rPr>
-              <a:t>présentation.</a:t>
-            </a:r>
-            <a:endParaRPr lang="en-US" sz="5200" dirty="0"/>
-          </a:p>
-        </p:txBody>
-      </p:sp>
-      <p:sp>
-        <p:nvSpPr>
-          <p:cNvPr id="9" name="Text 6"/>
-          <p:cNvSpPr/>
-          <p:nvPr/>
-        </p:nvSpPr>
-        <p:spPr>
-          <a:xfrm>
-            <a:off x="640080" y="4297680"/>
-            <a:ext cx="6949440" cy="548640"/>
-          </a:xfrm>
-          <a:prstGeom prst="rect">
-            <a:avLst/>
-          </a:prstGeom>
-          <a:noFill/>
-          <a:ln/>
-        </p:spPr>
-        <p:txBody>
-          <a:bodyPr wrap="square" lIns="0" tIns="0" rIns="0" bIns="0" rtlCol="0" anchor="ctr"/>
-          <a:lstStyle/>
-          <a:p>
-            <a:pPr indent="0" marL="0">
-              <a:buNone/>
-            </a:pPr>
-            <a:r>
-              <a:rPr lang="en-US" sz="1700" dirty="0">
-                <a:solidFill>
-                  <a:srgbClr val="535462"/>
-                </a:solidFill>
-                <a:latin typeface="Montserrat" pitchFamily="34" charset="0"/>
-                <a:ea typeface="Montserrat" pitchFamily="34" charset="-122"/>
-                <a:cs typeface="Montserrat" pitchFamily="34" charset="-120"/>
-              </a:rPr>
-              <a:t>Sous-titre ou accroche en une ligne qui pose le sujet.</a:t>
-            </a:r>
-            <a:endParaRPr lang="en-US" sz="1700" dirty="0"/>
-          </a:p>
-        </p:txBody>
-      </p:sp>
-      <p:sp>
-        <p:nvSpPr>
-          <p:cNvPr id="10" name="Text 7"/>
-          <p:cNvSpPr/>
-          <p:nvPr/>
-        </p:nvSpPr>
-        <p:spPr>
-          <a:xfrm>
-            <a:off x="640080" y="5943600"/>
-            <a:ext cx="6400800" cy="365760"/>
-          </a:xfrm>
-          <a:prstGeom prst="rect">
-            <a:avLst/>
-          </a:prstGeom>
-          <a:noFill/>
-          <a:ln/>
-        </p:spPr>
-        <p:txBody>
-          <a:bodyPr wrap="square" lIns="0" tIns="0" rIns="0" bIns="0" rtlCol="0" anchor="ctr"/>
-          <a:lstStyle/>
-          <a:p>
-            <a:pPr indent="0" marL="0">
-              <a:buNone/>
-            </a:pPr>
-            <a:r>
-              <a:rPr lang="en-US" sz="1200" spc="100" kern="0" dirty="0">
-                <a:solidFill>
-                  <a:srgbClr val="9296A6"/>
-                </a:solidFill>
-                <a:latin typeface="JetBrains Mono" pitchFamily="34" charset="0"/>
-                <a:ea typeface="JetBrains Mono" pitchFamily="34" charset="-122"/>
-                <a:cs typeface="JetBrains Mono" pitchFamily="34" charset="-120"/>
-              </a:rPr>
-              <a:t>Intervenant · Date · Lieu</a:t>
+              <a:t>lyriks.io · 2026</a:t>
             </a:r>
             <a:endParaRPr lang="en-US" sz="1200" dirty="0"/>
           </a:p>
@@ -2161,7 +2219,7 @@
         <p:spPr>
           <a:xfrm>
             <a:off x="9665208" y="585216"/>
-            <a:ext cx="1554480" cy="310896"/>
+            <a:ext cx="1645920" cy="310896"/>
           </a:xfrm>
           <a:prstGeom prst="rect">
             <a:avLst/>
@@ -2185,21 +2243,7 @@
                 <a:ea typeface="Space Grotesk" pitchFamily="34" charset="-122"/>
                 <a:cs typeface="Space Grotesk" pitchFamily="34" charset="-120"/>
               </a:rPr>
-              <a:t>Lyriks</a:t>
-            </a:r>
-            <a:pPr indent="0" marL="0">
-              <a:buNone/>
-            </a:pPr>
-            <a:r>
-              <a:rPr lang="en-US" sz="1500" b="1" spc="-30" kern="0" dirty="0">
-                <a:solidFill>
-                  <a:srgbClr val="FFFFFF"/>
-                </a:solidFill>
-                <a:latin typeface="Space Grotesk" pitchFamily="34" charset="0"/>
-                <a:ea typeface="Space Grotesk" pitchFamily="34" charset="-122"/>
-                <a:cs typeface="Space Grotesk" pitchFamily="34" charset="-120"/>
-              </a:rPr>
-              <a:t>.io</a:t>
+              <a:t>Lyriks.io</a:t>
             </a:r>
             <a:endParaRPr lang="en-US" sz="1500" dirty="0"/>
           </a:p>
@@ -2246,7 +2290,7 @@
         <p:spPr>
           <a:xfrm>
             <a:off x="640080" y="640080"/>
-            <a:ext cx="7315200" cy="274320"/>
+            <a:ext cx="8229600" cy="274320"/>
           </a:xfrm>
           <a:prstGeom prst="rect">
             <a:avLst/>
@@ -2264,13 +2308,13 @@
             <a:r>
               <a:rPr lang="en-US" sz="1100" b="1" spc="250" kern="0" dirty="0">
                 <a:solidFill>
-                  <a:srgbClr val="8047F4"/>
+                  <a:srgbClr val="FA5FB2"/>
                 </a:solidFill>
                 <a:latin typeface="JetBrains Mono" pitchFamily="34" charset="0"/>
                 <a:ea typeface="JetBrains Mono" pitchFamily="34" charset="-122"/>
                 <a:cs typeface="JetBrains Mono" pitchFamily="34" charset="-120"/>
               </a:rPr>
-              <a:t>L'ÉQUIPE</a:t>
+              <a:t>OFFRES &amp; DÉPLOIEMENT</a:t>
             </a:r>
             <a:endParaRPr lang="en-US" sz="1100" dirty="0"/>
           </a:p>
@@ -2309,7 +2353,7 @@
                 <a:ea typeface="Space Grotesk" pitchFamily="34" charset="-122"/>
                 <a:cs typeface="Space Grotesk" pitchFamily="34" charset="-120"/>
               </a:rPr>
-              <a:t>Les visages du projet</a:t>
+              <a:t>Choisissez votre mode de déploiement</a:t>
             </a:r>
             <a:endParaRPr lang="en-US" sz="3000" dirty="0"/>
           </a:p>
@@ -2323,12 +2367,12 @@
         </p:nvSpPr>
         <p:spPr>
           <a:xfrm>
-            <a:off x="640080" y="2194560"/>
-            <a:ext cx="3474720" cy="2926080"/>
+            <a:off x="640080" y="1965960"/>
+            <a:ext cx="3474720" cy="4160520"/>
           </a:xfrm>
           <a:prstGeom prst="roundRect">
             <a:avLst>
-              <a:gd name="adj" fmla="val 3125"/>
+              <a:gd name="adj" fmla="val 2632"/>
             </a:avLst>
           </a:prstGeom>
           <a:solidFill>
@@ -2351,128 +2395,69 @@
       </p:sp>
       <p:sp>
         <p:nvSpPr>
-          <p:cNvPr id="5" name="Shape 3"/>
-          <p:cNvSpPr/>
-          <p:nvPr/>
-        </p:nvSpPr>
-        <p:spPr>
-          <a:xfrm>
-            <a:off x="1920240" y="2606040"/>
-            <a:ext cx="914400" cy="914400"/>
-          </a:xfrm>
-          <a:prstGeom prst="ellipse">
-            <a:avLst/>
-          </a:prstGeom>
-          <a:solidFill>
-            <a:srgbClr val="FFA101"/>
-          </a:solidFill>
-          <a:ln/>
-        </p:spPr>
-      </p:sp>
-      <p:sp>
-        <p:nvSpPr>
-          <p:cNvPr id="6" name="Text 4"/>
-          <p:cNvSpPr/>
-          <p:nvPr/>
-        </p:nvSpPr>
-        <p:spPr>
-          <a:xfrm>
-            <a:off x="1920240" y="2606040"/>
-            <a:ext cx="914400" cy="914400"/>
-          </a:xfrm>
-          <a:prstGeom prst="rect">
-            <a:avLst/>
-          </a:prstGeom>
-          <a:noFill/>
-          <a:ln/>
-        </p:spPr>
-        <p:txBody>
-          <a:bodyPr wrap="square" lIns="0" tIns="0" rIns="0" bIns="0" rtlCol="0" anchor="ctr"/>
-          <a:lstStyle/>
-          <a:p>
-            <a:pPr algn="ctr" indent="0" marL="0">
-              <a:buNone/>
-            </a:pPr>
-            <a:r>
-              <a:rPr lang="en-US" sz="2600" b="1" dirty="0">
-                <a:solidFill>
-                  <a:srgbClr val="FFFFFF"/>
+          <p:cNvPr id="5" name="Text 3"/>
+          <p:cNvSpPr/>
+          <p:nvPr/>
+        </p:nvSpPr>
+        <p:spPr>
+          <a:xfrm>
+            <a:off x="932688" y="2240280"/>
+            <a:ext cx="2926080" cy="411480"/>
+          </a:xfrm>
+          <a:prstGeom prst="rect">
+            <a:avLst/>
+          </a:prstGeom>
+          <a:noFill/>
+          <a:ln/>
+        </p:spPr>
+        <p:txBody>
+          <a:bodyPr wrap="square" lIns="0" tIns="0" rIns="0" bIns="0" rtlCol="0" anchor="ctr"/>
+          <a:lstStyle/>
+          <a:p>
+            <a:pPr indent="0" marL="0">
+              <a:buNone/>
+            </a:pPr>
+            <a:r>
+              <a:rPr lang="en-US" sz="2000" b="1" dirty="0">
+                <a:solidFill>
+                  <a:srgbClr val="BB46F5"/>
                 </a:solidFill>
                 <a:latin typeface="Space Grotesk" pitchFamily="34" charset="0"/>
                 <a:ea typeface="Space Grotesk" pitchFamily="34" charset="-122"/>
                 <a:cs typeface="Space Grotesk" pitchFamily="34" charset="-120"/>
               </a:rPr>
-              <a:t>A</a:t>
-            </a:r>
-            <a:endParaRPr lang="en-US" sz="2600" dirty="0"/>
-          </a:p>
-        </p:txBody>
-      </p:sp>
-      <p:sp>
-        <p:nvSpPr>
-          <p:cNvPr id="7" name="Text 5"/>
-          <p:cNvSpPr/>
-          <p:nvPr/>
-        </p:nvSpPr>
-        <p:spPr>
-          <a:xfrm>
-            <a:off x="914400" y="3749040"/>
-            <a:ext cx="2926080" cy="365760"/>
-          </a:xfrm>
-          <a:prstGeom prst="rect">
-            <a:avLst/>
-          </a:prstGeom>
-          <a:noFill/>
-          <a:ln/>
-        </p:spPr>
-        <p:txBody>
-          <a:bodyPr wrap="square" lIns="0" tIns="0" rIns="0" bIns="0" rtlCol="0" anchor="ctr"/>
-          <a:lstStyle/>
-          <a:p>
-            <a:pPr algn="ctr" indent="0" marL="0">
-              <a:buNone/>
-            </a:pPr>
-            <a:r>
-              <a:rPr lang="en-US" sz="1700" b="1" dirty="0">
-                <a:solidFill>
-                  <a:srgbClr val="0A0A0A"/>
-                </a:solidFill>
-                <a:latin typeface="Space Grotesk" pitchFamily="34" charset="0"/>
-                <a:ea typeface="Space Grotesk" pitchFamily="34" charset="-122"/>
-                <a:cs typeface="Space Grotesk" pitchFamily="34" charset="-120"/>
-              </a:rPr>
-              <a:t>Prénom Nom</a:t>
-            </a:r>
-            <a:endParaRPr lang="en-US" sz="1700" dirty="0"/>
-          </a:p>
-        </p:txBody>
-      </p:sp>
-      <p:sp>
-        <p:nvSpPr>
-          <p:cNvPr id="8" name="Text 6"/>
-          <p:cNvSpPr/>
-          <p:nvPr/>
-        </p:nvSpPr>
-        <p:spPr>
-          <a:xfrm>
-            <a:off x="914400" y="4160520"/>
-            <a:ext cx="2926080" cy="365760"/>
-          </a:xfrm>
-          <a:prstGeom prst="rect">
-            <a:avLst/>
-          </a:prstGeom>
-          <a:noFill/>
-          <a:ln/>
-        </p:spPr>
-        <p:txBody>
-          <a:bodyPr wrap="square" lIns="0" tIns="0" rIns="0" bIns="0" rtlCol="0" anchor="ctr"/>
-          <a:lstStyle/>
-          <a:p>
-            <a:pPr algn="ctr" indent="0" marL="0">
-              <a:buNone/>
-            </a:pPr>
-            <a:r>
-              <a:rPr lang="en-US" sz="1150" dirty="0">
+              <a:t>Community</a:t>
+            </a:r>
+            <a:endParaRPr lang="en-US" sz="2000" dirty="0"/>
+          </a:p>
+        </p:txBody>
+      </p:sp>
+      <p:sp>
+        <p:nvSpPr>
+          <p:cNvPr id="6" name="Text 4"/>
+          <p:cNvSpPr/>
+          <p:nvPr/>
+        </p:nvSpPr>
+        <p:spPr>
+          <a:xfrm>
+            <a:off x="932688" y="2670048"/>
+            <a:ext cx="2926080" cy="320040"/>
+          </a:xfrm>
+          <a:prstGeom prst="rect">
+            <a:avLst/>
+          </a:prstGeom>
+          <a:noFill/>
+          <a:ln/>
+        </p:spPr>
+        <p:txBody>
+          <a:bodyPr wrap="square" lIns="0" tIns="0" rIns="0" bIns="0" rtlCol="0" anchor="ctr"/>
+          <a:lstStyle/>
+          <a:p>
+            <a:pPr indent="0" marL="0">
+              <a:buNone/>
+            </a:pPr>
+            <a:r>
+              <a:rPr lang="en-US" sz="1050" spc="50" kern="0" dirty="0">
                 <a:solidFill>
                   <a:srgbClr val="9296A6"/>
                 </a:solidFill>
@@ -2480,9 +2465,163 @@
                 <a:ea typeface="JetBrains Mono" pitchFamily="34" charset="-122"/>
                 <a:cs typeface="JetBrains Mono" pitchFamily="34" charset="-120"/>
               </a:rPr>
-              <a:t>Rôle / fonction</a:t>
-            </a:r>
-            <a:endParaRPr lang="en-US" sz="1150" dirty="0"/>
+              <a:t>Open source · AGPL</a:t>
+            </a:r>
+            <a:endParaRPr lang="en-US" sz="1050" dirty="0"/>
+          </a:p>
+        </p:txBody>
+      </p:sp>
+      <p:sp>
+        <p:nvSpPr>
+          <p:cNvPr id="7" name="Text 5"/>
+          <p:cNvSpPr/>
+          <p:nvPr/>
+        </p:nvSpPr>
+        <p:spPr>
+          <a:xfrm>
+            <a:off x="932688" y="3154680"/>
+            <a:ext cx="2926080" cy="2103120"/>
+          </a:xfrm>
+          <a:prstGeom prst="rect">
+            <a:avLst/>
+          </a:prstGeom>
+          <a:noFill/>
+          <a:ln/>
+        </p:spPr>
+        <p:txBody>
+          <a:bodyPr wrap="square" lIns="0" tIns="0" rIns="0" bIns="0" rtlCol="0" anchor="ctr"/>
+          <a:lstStyle/>
+          <a:p>
+            <a:pPr marL="177800" indent="-177800">
+              <a:lnSpc>
+                <a:spcPct val="105000"/>
+              </a:lnSpc>
+              <a:spcAft>
+                <a:spcPts val="900"/>
+              </a:spcAft>
+              <a:buSzPct val="100000"/>
+              <a:buChar char="•"/>
+            </a:pPr>
+            <a:r>
+              <a:rPr lang="en-US" sz="1200" dirty="0">
+                <a:solidFill>
+                  <a:srgbClr val="1A1A1A"/>
+                </a:solidFill>
+                <a:latin typeface="Montserrat" pitchFamily="34" charset="0"/>
+                <a:ea typeface="Montserrat" pitchFamily="34" charset="-122"/>
+                <a:cs typeface="Montserrat" pitchFamily="34" charset="-120"/>
+              </a:rPr>
+              <a:t>Self-hébergé, sur vos serveurs</a:t>
+            </a:r>
+            <a:endParaRPr lang="en-US" sz="1200" dirty="0"/>
+          </a:p>
+          <a:p>
+            <a:pPr marL="177800" indent="-177800">
+              <a:lnSpc>
+                <a:spcPct val="105000"/>
+              </a:lnSpc>
+              <a:spcAft>
+                <a:spcPts val="900"/>
+              </a:spcAft>
+              <a:buSzPct val="100000"/>
+              <a:buChar char="•"/>
+            </a:pPr>
+            <a:r>
+              <a:rPr lang="en-US" sz="1200" dirty="0">
+                <a:solidFill>
+                  <a:srgbClr val="1A1A1A"/>
+                </a:solidFill>
+                <a:latin typeface="Montserrat" pitchFamily="34" charset="0"/>
+                <a:ea typeface="Montserrat" pitchFamily="34" charset="-122"/>
+                <a:cs typeface="Montserrat" pitchFamily="34" charset="-120"/>
+              </a:rPr>
+              <a:t>Modélisation produit complète</a:t>
+            </a:r>
+            <a:endParaRPr lang="en-US" sz="1200" dirty="0"/>
+          </a:p>
+          <a:p>
+            <a:pPr marL="177800" indent="-177800">
+              <a:lnSpc>
+                <a:spcPct val="105000"/>
+              </a:lnSpc>
+              <a:spcAft>
+                <a:spcPts val="900"/>
+              </a:spcAft>
+              <a:buSzPct val="100000"/>
+              <a:buChar char="•"/>
+            </a:pPr>
+            <a:r>
+              <a:rPr lang="en-US" sz="1200" dirty="0">
+                <a:solidFill>
+                  <a:srgbClr val="1A1A1A"/>
+                </a:solidFill>
+                <a:latin typeface="Montserrat" pitchFamily="34" charset="0"/>
+                <a:ea typeface="Montserrat" pitchFamily="34" charset="-122"/>
+                <a:cs typeface="Montserrat" pitchFamily="34" charset="-120"/>
+              </a:rPr>
+              <a:t>Spécifications prêtes pour l'IA</a:t>
+            </a:r>
+            <a:endParaRPr lang="en-US" sz="1200" dirty="0"/>
+          </a:p>
+          <a:p>
+            <a:pPr marL="177800" indent="-177800">
+              <a:lnSpc>
+                <a:spcPct val="105000"/>
+              </a:lnSpc>
+              <a:buSzPct val="100000"/>
+              <a:buChar char="•"/>
+            </a:pPr>
+            <a:r>
+              <a:rPr lang="en-US" sz="1200" dirty="0">
+                <a:solidFill>
+                  <a:srgbClr val="1A1A1A"/>
+                </a:solidFill>
+                <a:latin typeface="Montserrat" pitchFamily="34" charset="0"/>
+                <a:ea typeface="Montserrat" pitchFamily="34" charset="-122"/>
+                <a:cs typeface="Montserrat" pitchFamily="34" charset="-120"/>
+              </a:rPr>
+              <a:t>Contrôles de cohérence essentiels</a:t>
+            </a:r>
+            <a:endParaRPr lang="en-US" sz="1200" dirty="0"/>
+          </a:p>
+        </p:txBody>
+      </p:sp>
+      <p:sp>
+        <p:nvSpPr>
+          <p:cNvPr id="8" name="Text 6"/>
+          <p:cNvSpPr/>
+          <p:nvPr/>
+        </p:nvSpPr>
+        <p:spPr>
+          <a:xfrm>
+            <a:off x="932688" y="5532120"/>
+            <a:ext cx="2926080" cy="365760"/>
+          </a:xfrm>
+          <a:prstGeom prst="rect">
+            <a:avLst/>
+          </a:prstGeom>
+          <a:noFill/>
+          <a:ln/>
+        </p:spPr>
+        <p:txBody>
+          <a:bodyPr wrap="square" lIns="0" tIns="0" rIns="0" bIns="0" rtlCol="0" anchor="ctr"/>
+          <a:lstStyle/>
+          <a:p>
+            <a:pPr indent="0" marL="0">
+              <a:buNone/>
+            </a:pPr>
+            <a:r>
+              <a:rPr lang="en-US" sz="1250" b="1" dirty="0">
+                <a:solidFill>
+                  <a:srgbClr val="BB46F5"/>
+                </a:solidFill>
+                <a:latin typeface="Montserrat" pitchFamily="34" charset="0"/>
+                <a:ea typeface="Montserrat" pitchFamily="34" charset="-122"/>
+                <a:cs typeface="Montserrat" pitchFamily="34" charset="-120"/>
+              </a:rPr>
+              <a:t>Voir sur GitHub  →</a:t>
+            </a:r>
+            <a:endParaRPr lang="en-US" sz="1250" dirty="0"/>
           </a:p>
         </p:txBody>
       </p:sp>
@@ -2494,12 +2633,12 @@
         </p:nvSpPr>
         <p:spPr>
           <a:xfrm>
-            <a:off x="4398264" y="2194560"/>
-            <a:ext cx="3474720" cy="2926080"/>
+            <a:off x="4398264" y="1965960"/>
+            <a:ext cx="3474720" cy="4160520"/>
           </a:xfrm>
           <a:prstGeom prst="roundRect">
             <a:avLst>
-              <a:gd name="adj" fmla="val 3125"/>
+              <a:gd name="adj" fmla="val 2632"/>
             </a:avLst>
           </a:prstGeom>
           <a:solidFill>
@@ -2522,128 +2661,69 @@
       </p:sp>
       <p:sp>
         <p:nvSpPr>
-          <p:cNvPr id="10" name="Shape 8"/>
-          <p:cNvSpPr/>
-          <p:nvPr/>
-        </p:nvSpPr>
-        <p:spPr>
-          <a:xfrm>
-            <a:off x="5678424" y="2606040"/>
-            <a:ext cx="914400" cy="914400"/>
-          </a:xfrm>
-          <a:prstGeom prst="ellipse">
-            <a:avLst/>
-          </a:prstGeom>
-          <a:solidFill>
-            <a:srgbClr val="8047F4"/>
-          </a:solidFill>
-          <a:ln/>
-        </p:spPr>
-      </p:sp>
-      <p:sp>
-        <p:nvSpPr>
-          <p:cNvPr id="11" name="Text 9"/>
-          <p:cNvSpPr/>
-          <p:nvPr/>
-        </p:nvSpPr>
-        <p:spPr>
-          <a:xfrm>
-            <a:off x="5678424" y="2606040"/>
-            <a:ext cx="914400" cy="914400"/>
-          </a:xfrm>
-          <a:prstGeom prst="rect">
-            <a:avLst/>
-          </a:prstGeom>
-          <a:noFill/>
-          <a:ln/>
-        </p:spPr>
-        <p:txBody>
-          <a:bodyPr wrap="square" lIns="0" tIns="0" rIns="0" bIns="0" rtlCol="0" anchor="ctr"/>
-          <a:lstStyle/>
-          <a:p>
-            <a:pPr algn="ctr" indent="0" marL="0">
-              <a:buNone/>
-            </a:pPr>
-            <a:r>
-              <a:rPr lang="en-US" sz="2600" b="1" dirty="0">
-                <a:solidFill>
-                  <a:srgbClr val="FFFFFF"/>
+          <p:cNvPr id="10" name="Text 8"/>
+          <p:cNvSpPr/>
+          <p:nvPr/>
+        </p:nvSpPr>
+        <p:spPr>
+          <a:xfrm>
+            <a:off x="4690872" y="2240280"/>
+            <a:ext cx="2926080" cy="411480"/>
+          </a:xfrm>
+          <a:prstGeom prst="rect">
+            <a:avLst/>
+          </a:prstGeom>
+          <a:noFill/>
+          <a:ln/>
+        </p:spPr>
+        <p:txBody>
+          <a:bodyPr wrap="square" lIns="0" tIns="0" rIns="0" bIns="0" rtlCol="0" anchor="ctr"/>
+          <a:lstStyle/>
+          <a:p>
+            <a:pPr indent="0" marL="0">
+              <a:buNone/>
+            </a:pPr>
+            <a:r>
+              <a:rPr lang="en-US" sz="2000" b="1" dirty="0">
+                <a:solidFill>
+                  <a:srgbClr val="0066FF"/>
                 </a:solidFill>
                 <a:latin typeface="Space Grotesk" pitchFamily="34" charset="0"/>
                 <a:ea typeface="Space Grotesk" pitchFamily="34" charset="-122"/>
                 <a:cs typeface="Space Grotesk" pitchFamily="34" charset="-120"/>
               </a:rPr>
-              <a:t>B</a:t>
-            </a:r>
-            <a:endParaRPr lang="en-US" sz="2600" dirty="0"/>
-          </a:p>
-        </p:txBody>
-      </p:sp>
-      <p:sp>
-        <p:nvSpPr>
-          <p:cNvPr id="12" name="Text 10"/>
-          <p:cNvSpPr/>
-          <p:nvPr/>
-        </p:nvSpPr>
-        <p:spPr>
-          <a:xfrm>
-            <a:off x="4672584" y="3749040"/>
-            <a:ext cx="2926080" cy="365760"/>
-          </a:xfrm>
-          <a:prstGeom prst="rect">
-            <a:avLst/>
-          </a:prstGeom>
-          <a:noFill/>
-          <a:ln/>
-        </p:spPr>
-        <p:txBody>
-          <a:bodyPr wrap="square" lIns="0" tIns="0" rIns="0" bIns="0" rtlCol="0" anchor="ctr"/>
-          <a:lstStyle/>
-          <a:p>
-            <a:pPr algn="ctr" indent="0" marL="0">
-              <a:buNone/>
-            </a:pPr>
-            <a:r>
-              <a:rPr lang="en-US" sz="1700" b="1" dirty="0">
-                <a:solidFill>
-                  <a:srgbClr val="0A0A0A"/>
-                </a:solidFill>
-                <a:latin typeface="Space Grotesk" pitchFamily="34" charset="0"/>
-                <a:ea typeface="Space Grotesk" pitchFamily="34" charset="-122"/>
-                <a:cs typeface="Space Grotesk" pitchFamily="34" charset="-120"/>
-              </a:rPr>
-              <a:t>Prénom Nom</a:t>
-            </a:r>
-            <a:endParaRPr lang="en-US" sz="1700" dirty="0"/>
-          </a:p>
-        </p:txBody>
-      </p:sp>
-      <p:sp>
-        <p:nvSpPr>
-          <p:cNvPr id="13" name="Text 11"/>
-          <p:cNvSpPr/>
-          <p:nvPr/>
-        </p:nvSpPr>
-        <p:spPr>
-          <a:xfrm>
-            <a:off x="4672584" y="4160520"/>
-            <a:ext cx="2926080" cy="365760"/>
-          </a:xfrm>
-          <a:prstGeom prst="rect">
-            <a:avLst/>
-          </a:prstGeom>
-          <a:noFill/>
-          <a:ln/>
-        </p:spPr>
-        <p:txBody>
-          <a:bodyPr wrap="square" lIns="0" tIns="0" rIns="0" bIns="0" rtlCol="0" anchor="ctr"/>
-          <a:lstStyle/>
-          <a:p>
-            <a:pPr algn="ctr" indent="0" marL="0">
-              <a:buNone/>
-            </a:pPr>
-            <a:r>
-              <a:rPr lang="en-US" sz="1150" dirty="0">
+              <a:t>Enterprise</a:t>
+            </a:r>
+            <a:endParaRPr lang="en-US" sz="2000" dirty="0"/>
+          </a:p>
+        </p:txBody>
+      </p:sp>
+      <p:sp>
+        <p:nvSpPr>
+          <p:cNvPr id="11" name="Text 9"/>
+          <p:cNvSpPr/>
+          <p:nvPr/>
+        </p:nvSpPr>
+        <p:spPr>
+          <a:xfrm>
+            <a:off x="4690872" y="2670048"/>
+            <a:ext cx="2926080" cy="320040"/>
+          </a:xfrm>
+          <a:prstGeom prst="rect">
+            <a:avLst/>
+          </a:prstGeom>
+          <a:noFill/>
+          <a:ln/>
+        </p:spPr>
+        <p:txBody>
+          <a:bodyPr wrap="square" lIns="0" tIns="0" rIns="0" bIns="0" rtlCol="0" anchor="ctr"/>
+          <a:lstStyle/>
+          <a:p>
+            <a:pPr indent="0" marL="0">
+              <a:buNone/>
+            </a:pPr>
+            <a:r>
+              <a:rPr lang="en-US" sz="1050" spc="50" kern="0" dirty="0">
                 <a:solidFill>
                   <a:srgbClr val="9296A6"/>
                 </a:solidFill>
@@ -2651,9 +2731,163 @@
                 <a:ea typeface="JetBrains Mono" pitchFamily="34" charset="-122"/>
                 <a:cs typeface="JetBrains Mono" pitchFamily="34" charset="-120"/>
               </a:rPr>
-              <a:t>Rôle / fonction</a:t>
-            </a:r>
-            <a:endParaRPr lang="en-US" sz="1150" dirty="0"/>
+              <a:t>Licence annuelle · self-service</a:t>
+            </a:r>
+            <a:endParaRPr lang="en-US" sz="1050" dirty="0"/>
+          </a:p>
+        </p:txBody>
+      </p:sp>
+      <p:sp>
+        <p:nvSpPr>
+          <p:cNvPr id="12" name="Text 10"/>
+          <p:cNvSpPr/>
+          <p:nvPr/>
+        </p:nvSpPr>
+        <p:spPr>
+          <a:xfrm>
+            <a:off x="4690872" y="3154680"/>
+            <a:ext cx="2926080" cy="2103120"/>
+          </a:xfrm>
+          <a:prstGeom prst="rect">
+            <a:avLst/>
+          </a:prstGeom>
+          <a:noFill/>
+          <a:ln/>
+        </p:spPr>
+        <p:txBody>
+          <a:bodyPr wrap="square" lIns="0" tIns="0" rIns="0" bIns="0" rtlCol="0" anchor="ctr"/>
+          <a:lstStyle/>
+          <a:p>
+            <a:pPr marL="177800" indent="-177800">
+              <a:lnSpc>
+                <a:spcPct val="105000"/>
+              </a:lnSpc>
+              <a:spcAft>
+                <a:spcPts val="900"/>
+              </a:spcAft>
+              <a:buSzPct val="100000"/>
+              <a:buChar char="•"/>
+            </a:pPr>
+            <a:r>
+              <a:rPr lang="en-US" sz="1200" dirty="0">
+                <a:solidFill>
+                  <a:srgbClr val="1A1A1A"/>
+                </a:solidFill>
+                <a:latin typeface="Montserrat" pitchFamily="34" charset="0"/>
+                <a:ea typeface="Montserrat" pitchFamily="34" charset="-122"/>
+                <a:cs typeface="Montserrat" pitchFamily="34" charset="-120"/>
+              </a:rPr>
+              <a:t>Équipes multi-utilisateurs</a:t>
+            </a:r>
+            <a:endParaRPr lang="en-US" sz="1200" dirty="0"/>
+          </a:p>
+          <a:p>
+            <a:pPr marL="177800" indent="-177800">
+              <a:lnSpc>
+                <a:spcPct val="105000"/>
+              </a:lnSpc>
+              <a:spcAft>
+                <a:spcPts val="900"/>
+              </a:spcAft>
+              <a:buSzPct val="100000"/>
+              <a:buChar char="•"/>
+            </a:pPr>
+            <a:r>
+              <a:rPr lang="en-US" sz="1200" dirty="0">
+                <a:solidFill>
+                  <a:srgbClr val="1A1A1A"/>
+                </a:solidFill>
+                <a:latin typeface="Montserrat" pitchFamily="34" charset="0"/>
+                <a:ea typeface="Montserrat" pitchFamily="34" charset="-122"/>
+                <a:cs typeface="Montserrat" pitchFamily="34" charset="-120"/>
+              </a:rPr>
+              <a:t>Gestion des droits &amp; rôles</a:t>
+            </a:r>
+            <a:endParaRPr lang="en-US" sz="1200" dirty="0"/>
+          </a:p>
+          <a:p>
+            <a:pPr marL="177800" indent="-177800">
+              <a:lnSpc>
+                <a:spcPct val="105000"/>
+              </a:lnSpc>
+              <a:spcAft>
+                <a:spcPts val="900"/>
+              </a:spcAft>
+              <a:buSzPct val="100000"/>
+              <a:buChar char="•"/>
+            </a:pPr>
+            <a:r>
+              <a:rPr lang="en-US" sz="1200" dirty="0">
+                <a:solidFill>
+                  <a:srgbClr val="1A1A1A"/>
+                </a:solidFill>
+                <a:latin typeface="Montserrat" pitchFamily="34" charset="0"/>
+                <a:ea typeface="Montserrat" pitchFamily="34" charset="-122"/>
+                <a:cs typeface="Montserrat" pitchFamily="34" charset="-120"/>
+              </a:rPr>
+              <a:t>Collaboration en temps réel</a:t>
+            </a:r>
+            <a:endParaRPr lang="en-US" sz="1200" dirty="0"/>
+          </a:p>
+          <a:p>
+            <a:pPr marL="177800" indent="-177800">
+              <a:lnSpc>
+                <a:spcPct val="105000"/>
+              </a:lnSpc>
+              <a:buSzPct val="100000"/>
+              <a:buChar char="•"/>
+            </a:pPr>
+            <a:r>
+              <a:rPr lang="en-US" sz="1200" dirty="0">
+                <a:solidFill>
+                  <a:srgbClr val="1A1A1A"/>
+                </a:solidFill>
+                <a:latin typeface="Montserrat" pitchFamily="34" charset="0"/>
+                <a:ea typeface="Montserrat" pitchFamily="34" charset="-122"/>
+                <a:cs typeface="Montserrat" pitchFamily="34" charset="-120"/>
+              </a:rPr>
+              <a:t>Vérification après implémentation</a:t>
+            </a:r>
+            <a:endParaRPr lang="en-US" sz="1200" dirty="0"/>
+          </a:p>
+        </p:txBody>
+      </p:sp>
+      <p:sp>
+        <p:nvSpPr>
+          <p:cNvPr id="13" name="Text 11"/>
+          <p:cNvSpPr/>
+          <p:nvPr/>
+        </p:nvSpPr>
+        <p:spPr>
+          <a:xfrm>
+            <a:off x="4690872" y="5532120"/>
+            <a:ext cx="2926080" cy="365760"/>
+          </a:xfrm>
+          <a:prstGeom prst="rect">
+            <a:avLst/>
+          </a:prstGeom>
+          <a:noFill/>
+          <a:ln/>
+        </p:spPr>
+        <p:txBody>
+          <a:bodyPr wrap="square" lIns="0" tIns="0" rIns="0" bIns="0" rtlCol="0" anchor="ctr"/>
+          <a:lstStyle/>
+          <a:p>
+            <a:pPr indent="0" marL="0">
+              <a:buNone/>
+            </a:pPr>
+            <a:r>
+              <a:rPr lang="en-US" sz="1250" b="1" dirty="0">
+                <a:solidFill>
+                  <a:srgbClr val="0066FF"/>
+                </a:solidFill>
+                <a:latin typeface="Montserrat" pitchFamily="34" charset="0"/>
+                <a:ea typeface="Montserrat" pitchFamily="34" charset="-122"/>
+                <a:cs typeface="Montserrat" pitchFamily="34" charset="-120"/>
+              </a:rPr>
+              <a:t>Demander un devis  →</a:t>
+            </a:r>
+            <a:endParaRPr lang="en-US" sz="1250" dirty="0"/>
           </a:p>
         </p:txBody>
       </p:sp>
@@ -2665,12 +2899,12 @@
         </p:nvSpPr>
         <p:spPr>
           <a:xfrm>
-            <a:off x="8156448" y="2194560"/>
-            <a:ext cx="3474720" cy="2926080"/>
+            <a:off x="8156448" y="1965960"/>
+            <a:ext cx="3474720" cy="4160520"/>
           </a:xfrm>
           <a:prstGeom prst="roundRect">
             <a:avLst>
-              <a:gd name="adj" fmla="val 3125"/>
+              <a:gd name="adj" fmla="val 2632"/>
             </a:avLst>
           </a:prstGeom>
           <a:solidFill>
@@ -2693,128 +2927,69 @@
       </p:sp>
       <p:sp>
         <p:nvSpPr>
-          <p:cNvPr id="15" name="Shape 13"/>
-          <p:cNvSpPr/>
-          <p:nvPr/>
-        </p:nvSpPr>
-        <p:spPr>
-          <a:xfrm>
-            <a:off x="9436608" y="2606040"/>
-            <a:ext cx="914400" cy="914400"/>
-          </a:xfrm>
-          <a:prstGeom prst="ellipse">
-            <a:avLst/>
-          </a:prstGeom>
-          <a:solidFill>
-            <a:srgbClr val="0066FF"/>
-          </a:solidFill>
-          <a:ln/>
-        </p:spPr>
-      </p:sp>
-      <p:sp>
-        <p:nvSpPr>
-          <p:cNvPr id="16" name="Text 14"/>
-          <p:cNvSpPr/>
-          <p:nvPr/>
-        </p:nvSpPr>
-        <p:spPr>
-          <a:xfrm>
-            <a:off x="9436608" y="2606040"/>
-            <a:ext cx="914400" cy="914400"/>
-          </a:xfrm>
-          <a:prstGeom prst="rect">
-            <a:avLst/>
-          </a:prstGeom>
-          <a:noFill/>
-          <a:ln/>
-        </p:spPr>
-        <p:txBody>
-          <a:bodyPr wrap="square" lIns="0" tIns="0" rIns="0" bIns="0" rtlCol="0" anchor="ctr"/>
-          <a:lstStyle/>
-          <a:p>
-            <a:pPr algn="ctr" indent="0" marL="0">
-              <a:buNone/>
-            </a:pPr>
-            <a:r>
-              <a:rPr lang="en-US" sz="2600" b="1" dirty="0">
-                <a:solidFill>
-                  <a:srgbClr val="FFFFFF"/>
+          <p:cNvPr id="15" name="Text 13"/>
+          <p:cNvSpPr/>
+          <p:nvPr/>
+        </p:nvSpPr>
+        <p:spPr>
+          <a:xfrm>
+            <a:off x="8449056" y="2240280"/>
+            <a:ext cx="2926080" cy="411480"/>
+          </a:xfrm>
+          <a:prstGeom prst="rect">
+            <a:avLst/>
+          </a:prstGeom>
+          <a:noFill/>
+          <a:ln/>
+        </p:spPr>
+        <p:txBody>
+          <a:bodyPr wrap="square" lIns="0" tIns="0" rIns="0" bIns="0" rtlCol="0" anchor="ctr"/>
+          <a:lstStyle/>
+          <a:p>
+            <a:pPr indent="0" marL="0">
+              <a:buNone/>
+            </a:pPr>
+            <a:r>
+              <a:rPr lang="en-US" sz="2000" b="1" dirty="0">
+                <a:solidFill>
+                  <a:srgbClr val="FFA101"/>
                 </a:solidFill>
                 <a:latin typeface="Space Grotesk" pitchFamily="34" charset="0"/>
                 <a:ea typeface="Space Grotesk" pitchFamily="34" charset="-122"/>
                 <a:cs typeface="Space Grotesk" pitchFamily="34" charset="-120"/>
               </a:rPr>
-              <a:t>C</a:t>
-            </a:r>
-            <a:endParaRPr lang="en-US" sz="2600" dirty="0"/>
-          </a:p>
-        </p:txBody>
-      </p:sp>
-      <p:sp>
-        <p:nvSpPr>
-          <p:cNvPr id="17" name="Text 15"/>
-          <p:cNvSpPr/>
-          <p:nvPr/>
-        </p:nvSpPr>
-        <p:spPr>
-          <a:xfrm>
-            <a:off x="8430768" y="3749040"/>
-            <a:ext cx="2926080" cy="365760"/>
-          </a:xfrm>
-          <a:prstGeom prst="rect">
-            <a:avLst/>
-          </a:prstGeom>
-          <a:noFill/>
-          <a:ln/>
-        </p:spPr>
-        <p:txBody>
-          <a:bodyPr wrap="square" lIns="0" tIns="0" rIns="0" bIns="0" rtlCol="0" anchor="ctr"/>
-          <a:lstStyle/>
-          <a:p>
-            <a:pPr algn="ctr" indent="0" marL="0">
-              <a:buNone/>
-            </a:pPr>
-            <a:r>
-              <a:rPr lang="en-US" sz="1700" b="1" dirty="0">
-                <a:solidFill>
-                  <a:srgbClr val="0A0A0A"/>
-                </a:solidFill>
-                <a:latin typeface="Space Grotesk" pitchFamily="34" charset="0"/>
-                <a:ea typeface="Space Grotesk" pitchFamily="34" charset="-122"/>
-                <a:cs typeface="Space Grotesk" pitchFamily="34" charset="-120"/>
-              </a:rPr>
-              <a:t>Prénom Nom</a:t>
-            </a:r>
-            <a:endParaRPr lang="en-US" sz="1700" dirty="0"/>
-          </a:p>
-        </p:txBody>
-      </p:sp>
-      <p:sp>
-        <p:nvSpPr>
-          <p:cNvPr id="18" name="Text 16"/>
-          <p:cNvSpPr/>
-          <p:nvPr/>
-        </p:nvSpPr>
-        <p:spPr>
-          <a:xfrm>
-            <a:off x="8430768" y="4160520"/>
-            <a:ext cx="2926080" cy="365760"/>
-          </a:xfrm>
-          <a:prstGeom prst="rect">
-            <a:avLst/>
-          </a:prstGeom>
-          <a:noFill/>
-          <a:ln/>
-        </p:spPr>
-        <p:txBody>
-          <a:bodyPr wrap="square" lIns="0" tIns="0" rIns="0" bIns="0" rtlCol="0" anchor="ctr"/>
-          <a:lstStyle/>
-          <a:p>
-            <a:pPr algn="ctr" indent="0" marL="0">
-              <a:buNone/>
-            </a:pPr>
-            <a:r>
-              <a:rPr lang="en-US" sz="1150" dirty="0">
+              <a:t>Managé</a:t>
+            </a:r>
+            <a:endParaRPr lang="en-US" sz="2000" dirty="0"/>
+          </a:p>
+        </p:txBody>
+      </p:sp>
+      <p:sp>
+        <p:nvSpPr>
+          <p:cNvPr id="16" name="Text 14"/>
+          <p:cNvSpPr/>
+          <p:nvPr/>
+        </p:nvSpPr>
+        <p:spPr>
+          <a:xfrm>
+            <a:off x="8449056" y="2670048"/>
+            <a:ext cx="2926080" cy="320040"/>
+          </a:xfrm>
+          <a:prstGeom prst="rect">
+            <a:avLst/>
+          </a:prstGeom>
+          <a:noFill/>
+          <a:ln/>
+        </p:spPr>
+        <p:txBody>
+          <a:bodyPr wrap="square" lIns="0" tIns="0" rIns="0" bIns="0" rtlCol="0" anchor="ctr"/>
+          <a:lstStyle/>
+          <a:p>
+            <a:pPr indent="0" marL="0">
+              <a:buNone/>
+            </a:pPr>
+            <a:r>
+              <a:rPr lang="en-US" sz="1050" spc="50" kern="0" dirty="0">
                 <a:solidFill>
                   <a:srgbClr val="9296A6"/>
                 </a:solidFill>
@@ -2822,9 +2997,163 @@
                 <a:ea typeface="JetBrains Mono" pitchFamily="34" charset="-122"/>
                 <a:cs typeface="JetBrains Mono" pitchFamily="34" charset="-120"/>
               </a:rPr>
-              <a:t>Rôle / fonction</a:t>
-            </a:r>
-            <a:endParaRPr lang="en-US" sz="1150" dirty="0"/>
+              <a:t>Hébergé &amp; opéré par Lyriks</a:t>
+            </a:r>
+            <a:endParaRPr lang="en-US" sz="1050" dirty="0"/>
+          </a:p>
+        </p:txBody>
+      </p:sp>
+      <p:sp>
+        <p:nvSpPr>
+          <p:cNvPr id="17" name="Text 15"/>
+          <p:cNvSpPr/>
+          <p:nvPr/>
+        </p:nvSpPr>
+        <p:spPr>
+          <a:xfrm>
+            <a:off x="8449056" y="3154680"/>
+            <a:ext cx="2926080" cy="2103120"/>
+          </a:xfrm>
+          <a:prstGeom prst="rect">
+            <a:avLst/>
+          </a:prstGeom>
+          <a:noFill/>
+          <a:ln/>
+        </p:spPr>
+        <p:txBody>
+          <a:bodyPr wrap="square" lIns="0" tIns="0" rIns="0" bIns="0" rtlCol="0" anchor="ctr"/>
+          <a:lstStyle/>
+          <a:p>
+            <a:pPr marL="177800" indent="-177800">
+              <a:lnSpc>
+                <a:spcPct val="105000"/>
+              </a:lnSpc>
+              <a:spcAft>
+                <a:spcPts val="900"/>
+              </a:spcAft>
+              <a:buSzPct val="100000"/>
+              <a:buChar char="•"/>
+            </a:pPr>
+            <a:r>
+              <a:rPr lang="en-US" sz="1200" dirty="0">
+                <a:solidFill>
+                  <a:srgbClr val="1A1A1A"/>
+                </a:solidFill>
+                <a:latin typeface="Montserrat" pitchFamily="34" charset="0"/>
+                <a:ea typeface="Montserrat" pitchFamily="34" charset="-122"/>
+                <a:cs typeface="Montserrat" pitchFamily="34" charset="-120"/>
+              </a:rPr>
+              <a:t>Infogérance complète &amp; SLA</a:t>
+            </a:r>
+            <a:endParaRPr lang="en-US" sz="1200" dirty="0"/>
+          </a:p>
+          <a:p>
+            <a:pPr marL="177800" indent="-177800">
+              <a:lnSpc>
+                <a:spcPct val="105000"/>
+              </a:lnSpc>
+              <a:spcAft>
+                <a:spcPts val="900"/>
+              </a:spcAft>
+              <a:buSzPct val="100000"/>
+              <a:buChar char="•"/>
+            </a:pPr>
+            <a:r>
+              <a:rPr lang="en-US" sz="1200" dirty="0">
+                <a:solidFill>
+                  <a:srgbClr val="1A1A1A"/>
+                </a:solidFill>
+                <a:latin typeface="Montserrat" pitchFamily="34" charset="0"/>
+                <a:ea typeface="Montserrat" pitchFamily="34" charset="-122"/>
+                <a:cs typeface="Montserrat" pitchFamily="34" charset="-120"/>
+              </a:rPr>
+              <a:t>Supervision avancée des usages IA</a:t>
+            </a:r>
+            <a:endParaRPr lang="en-US" sz="1200" dirty="0"/>
+          </a:p>
+          <a:p>
+            <a:pPr marL="177800" indent="-177800">
+              <a:lnSpc>
+                <a:spcPct val="105000"/>
+              </a:lnSpc>
+              <a:spcAft>
+                <a:spcPts val="900"/>
+              </a:spcAft>
+              <a:buSzPct val="100000"/>
+              <a:buChar char="•"/>
+            </a:pPr>
+            <a:r>
+              <a:rPr lang="en-US" sz="1200" dirty="0">
+                <a:solidFill>
+                  <a:srgbClr val="1A1A1A"/>
+                </a:solidFill>
+                <a:latin typeface="Montserrat" pitchFamily="34" charset="0"/>
+                <a:ea typeface="Montserrat" pitchFamily="34" charset="-122"/>
+                <a:cs typeface="Montserrat" pitchFamily="34" charset="-120"/>
+              </a:rPr>
+              <a:t>SSO &amp; sécurité avancée</a:t>
+            </a:r>
+            <a:endParaRPr lang="en-US" sz="1200" dirty="0"/>
+          </a:p>
+          <a:p>
+            <a:pPr marL="177800" indent="-177800">
+              <a:lnSpc>
+                <a:spcPct val="105000"/>
+              </a:lnSpc>
+              <a:buSzPct val="100000"/>
+              <a:buChar char="•"/>
+            </a:pPr>
+            <a:r>
+              <a:rPr lang="en-US" sz="1200" dirty="0">
+                <a:solidFill>
+                  <a:srgbClr val="1A1A1A"/>
+                </a:solidFill>
+                <a:latin typeface="Montserrat" pitchFamily="34" charset="0"/>
+                <a:ea typeface="Montserrat" pitchFamily="34" charset="-122"/>
+                <a:cs typeface="Montserrat" pitchFamily="34" charset="-120"/>
+              </a:rPr>
+              <a:t>Accompagnement dédié</a:t>
+            </a:r>
+            <a:endParaRPr lang="en-US" sz="1200" dirty="0"/>
+          </a:p>
+        </p:txBody>
+      </p:sp>
+      <p:sp>
+        <p:nvSpPr>
+          <p:cNvPr id="18" name="Text 16"/>
+          <p:cNvSpPr/>
+          <p:nvPr/>
+        </p:nvSpPr>
+        <p:spPr>
+          <a:xfrm>
+            <a:off x="8449056" y="5532120"/>
+            <a:ext cx="2926080" cy="365760"/>
+          </a:xfrm>
+          <a:prstGeom prst="rect">
+            <a:avLst/>
+          </a:prstGeom>
+          <a:noFill/>
+          <a:ln/>
+        </p:spPr>
+        <p:txBody>
+          <a:bodyPr wrap="square" lIns="0" tIns="0" rIns="0" bIns="0" rtlCol="0" anchor="ctr"/>
+          <a:lstStyle/>
+          <a:p>
+            <a:pPr indent="0" marL="0">
+              <a:buNone/>
+            </a:pPr>
+            <a:r>
+              <a:rPr lang="en-US" sz="1250" b="1" dirty="0">
+                <a:solidFill>
+                  <a:srgbClr val="FFA101"/>
+                </a:solidFill>
+                <a:latin typeface="Montserrat" pitchFamily="34" charset="0"/>
+                <a:ea typeface="Montserrat" pitchFamily="34" charset="-122"/>
+                <a:cs typeface="Montserrat" pitchFamily="34" charset="-120"/>
+              </a:rPr>
+              <a:t>Contacter l'équipe  →</a:t>
+            </a:r>
+            <a:endParaRPr lang="en-US" sz="1250" dirty="0"/>
           </a:p>
         </p:txBody>
       </p:sp>
@@ -2878,6 +3207,668 @@
 <file path=ppt/slides/slide11.xml><?xml version="1.0" encoding="utf-8"?>
 <p:sld xmlns:a="http://schemas.openxmlformats.org/drawingml/2006/main" xmlns:r="http://schemas.openxmlformats.org/officeDocument/2006/relationships" xmlns:p="http://schemas.openxmlformats.org/presentationml/2006/main">
   <p:cSld name="Slide 11">
+    <p:bg>
+      <p:bgPr>
+        <a:solidFill>
+          <a:srgbClr val="FFFFFF"/>
+        </a:solidFill>
+      </p:bgPr>
+    </p:bg>
+    <p:spTree>
+      <p:nvGrpSpPr>
+        <p:cNvPr id="1" name=""/>
+        <p:cNvGrpSpPr/>
+        <p:nvPr/>
+      </p:nvGrpSpPr>
+      <p:grpSpPr>
+        <a:xfrm>
+          <a:off x="0" y="0"/>
+          <a:ext cx="0" cy="0"/>
+          <a:chOff x="0" y="0"/>
+          <a:chExt cx="0" cy="0"/>
+        </a:xfrm>
+      </p:grpSpPr>
+      <p:sp>
+        <p:nvSpPr>
+          <p:cNvPr id="2" name="Text 0"/>
+          <p:cNvSpPr/>
+          <p:nvPr/>
+        </p:nvSpPr>
+        <p:spPr>
+          <a:xfrm>
+            <a:off x="640080" y="640080"/>
+            <a:ext cx="8229600" cy="274320"/>
+          </a:xfrm>
+          <a:prstGeom prst="rect">
+            <a:avLst/>
+          </a:prstGeom>
+          <a:noFill/>
+          <a:ln/>
+        </p:spPr>
+        <p:txBody>
+          <a:bodyPr wrap="square" lIns="0" tIns="0" rIns="0" bIns="0" rtlCol="0" anchor="ctr"/>
+          <a:lstStyle/>
+          <a:p>
+            <a:pPr indent="0" marL="0">
+              <a:buNone/>
+            </a:pPr>
+            <a:r>
+              <a:rPr lang="en-US" sz="1100" b="1" spc="250" kern="0" dirty="0">
+                <a:solidFill>
+                  <a:srgbClr val="8047F4"/>
+                </a:solidFill>
+                <a:latin typeface="JetBrains Mono" pitchFamily="34" charset="0"/>
+                <a:ea typeface="JetBrains Mono" pitchFamily="34" charset="-122"/>
+                <a:cs typeface="JetBrains Mono" pitchFamily="34" charset="-120"/>
+              </a:rPr>
+              <a:t>L'ÉQUIPE</a:t>
+            </a:r>
+            <a:endParaRPr lang="en-US" sz="1100" dirty="0"/>
+          </a:p>
+        </p:txBody>
+      </p:sp>
+      <p:sp>
+        <p:nvSpPr>
+          <p:cNvPr id="3" name="Text 1"/>
+          <p:cNvSpPr/>
+          <p:nvPr/>
+        </p:nvSpPr>
+        <p:spPr>
+          <a:xfrm>
+            <a:off x="640080" y="960120"/>
+            <a:ext cx="10058400" cy="822960"/>
+          </a:xfrm>
+          <a:prstGeom prst="rect">
+            <a:avLst/>
+          </a:prstGeom>
+          <a:noFill/>
+          <a:ln/>
+        </p:spPr>
+        <p:txBody>
+          <a:bodyPr wrap="square" lIns="0" tIns="0" rIns="0" bIns="0" rtlCol="0" anchor="ctr"/>
+          <a:lstStyle/>
+          <a:p>
+            <a:pPr indent="0" marL="0">
+              <a:buNone/>
+            </a:pPr>
+            <a:r>
+              <a:rPr lang="en-US" sz="3000" b="1" dirty="0">
+                <a:solidFill>
+                  <a:srgbClr val="0A0A0A"/>
+                </a:solidFill>
+                <a:latin typeface="Space Grotesk" pitchFamily="34" charset="0"/>
+                <a:ea typeface="Space Grotesk" pitchFamily="34" charset="-122"/>
+                <a:cs typeface="Space Grotesk" pitchFamily="34" charset="-120"/>
+              </a:rPr>
+              <a:t>Les voix de Lyriks</a:t>
+            </a:r>
+            <a:endParaRPr lang="en-US" sz="3000" dirty="0"/>
+          </a:p>
+        </p:txBody>
+      </p:sp>
+      <p:sp>
+        <p:nvSpPr>
+          <p:cNvPr id="4" name="Shape 2"/>
+          <p:cNvSpPr/>
+          <p:nvPr/>
+        </p:nvSpPr>
+        <p:spPr>
+          <a:xfrm>
+            <a:off x="640080" y="2194560"/>
+            <a:ext cx="3474720" cy="2926080"/>
+          </a:xfrm>
+          <a:prstGeom prst="roundRect">
+            <a:avLst>
+              <a:gd name="adj" fmla="val 3125"/>
+            </a:avLst>
+          </a:prstGeom>
+          <a:solidFill>
+            <a:srgbClr val="FFFFFF"/>
+          </a:solidFill>
+          <a:ln w="12700">
+            <a:solidFill>
+              <a:srgbClr val="E8E8EE"/>
+            </a:solidFill>
+            <a:prstDash val="solid"/>
+          </a:ln>
+          <a:effectLst>
+            <a:outerShdw sx="100000" sy="100000" kx="0" ky="0" algn="bl" rotWithShape="0" blurRad="114300" dist="38100" dir="5400000">
+              <a:srgbClr val="10122A">
+                <a:alpha val="12000"/>
+              </a:srgbClr>
+            </a:outerShdw>
+          </a:effectLst>
+        </p:spPr>
+      </p:sp>
+      <p:sp>
+        <p:nvSpPr>
+          <p:cNvPr id="5" name="Shape 3"/>
+          <p:cNvSpPr/>
+          <p:nvPr/>
+        </p:nvSpPr>
+        <p:spPr>
+          <a:xfrm>
+            <a:off x="1920240" y="2606040"/>
+            <a:ext cx="914400" cy="914400"/>
+          </a:xfrm>
+          <a:prstGeom prst="ellipse">
+            <a:avLst/>
+          </a:prstGeom>
+          <a:solidFill>
+            <a:srgbClr val="FFA101"/>
+          </a:solidFill>
+          <a:ln/>
+        </p:spPr>
+      </p:sp>
+      <p:sp>
+        <p:nvSpPr>
+          <p:cNvPr id="6" name="Text 4"/>
+          <p:cNvSpPr/>
+          <p:nvPr/>
+        </p:nvSpPr>
+        <p:spPr>
+          <a:xfrm>
+            <a:off x="1920240" y="2606040"/>
+            <a:ext cx="914400" cy="914400"/>
+          </a:xfrm>
+          <a:prstGeom prst="rect">
+            <a:avLst/>
+          </a:prstGeom>
+          <a:noFill/>
+          <a:ln/>
+        </p:spPr>
+        <p:txBody>
+          <a:bodyPr wrap="square" lIns="0" tIns="0" rIns="0" bIns="0" rtlCol="0" anchor="ctr"/>
+          <a:lstStyle/>
+          <a:p>
+            <a:pPr algn="ctr" indent="0" marL="0">
+              <a:buNone/>
+            </a:pPr>
+            <a:r>
+              <a:rPr lang="en-US" sz="2200" b="1" dirty="0">
+                <a:solidFill>
+                  <a:srgbClr val="FFFFFF"/>
+                </a:solidFill>
+                <a:latin typeface="Space Grotesk" pitchFamily="34" charset="0"/>
+                <a:ea typeface="Space Grotesk" pitchFamily="34" charset="-122"/>
+                <a:cs typeface="Space Grotesk" pitchFamily="34" charset="-120"/>
+              </a:rPr>
+              <a:t>DM</a:t>
+            </a:r>
+            <a:endParaRPr lang="en-US" sz="2200" dirty="0"/>
+          </a:p>
+        </p:txBody>
+      </p:sp>
+      <p:sp>
+        <p:nvSpPr>
+          <p:cNvPr id="7" name="Text 5"/>
+          <p:cNvSpPr/>
+          <p:nvPr/>
+        </p:nvSpPr>
+        <p:spPr>
+          <a:xfrm>
+            <a:off x="822960" y="3749040"/>
+            <a:ext cx="3108960" cy="365760"/>
+          </a:xfrm>
+          <a:prstGeom prst="rect">
+            <a:avLst/>
+          </a:prstGeom>
+          <a:noFill/>
+          <a:ln/>
+        </p:spPr>
+        <p:txBody>
+          <a:bodyPr wrap="square" lIns="0" tIns="0" rIns="0" bIns="0" rtlCol="0" anchor="ctr"/>
+          <a:lstStyle/>
+          <a:p>
+            <a:pPr algn="ctr" indent="0" marL="0">
+              <a:buNone/>
+            </a:pPr>
+            <a:r>
+              <a:rPr lang="en-US" sz="1600" b="1" dirty="0">
+                <a:solidFill>
+                  <a:srgbClr val="0A0A0A"/>
+                </a:solidFill>
+                <a:latin typeface="Space Grotesk" pitchFamily="34" charset="0"/>
+                <a:ea typeface="Space Grotesk" pitchFamily="34" charset="-122"/>
+                <a:cs typeface="Space Grotesk" pitchFamily="34" charset="-120"/>
+              </a:rPr>
+              <a:t>David Mabboux</a:t>
+            </a:r>
+            <a:endParaRPr lang="en-US" sz="1600" dirty="0"/>
+          </a:p>
+        </p:txBody>
+      </p:sp>
+      <p:sp>
+        <p:nvSpPr>
+          <p:cNvPr id="8" name="Text 6"/>
+          <p:cNvSpPr/>
+          <p:nvPr/>
+        </p:nvSpPr>
+        <p:spPr>
+          <a:xfrm>
+            <a:off x="822960" y="4160520"/>
+            <a:ext cx="3108960" cy="365760"/>
+          </a:xfrm>
+          <a:prstGeom prst="rect">
+            <a:avLst/>
+          </a:prstGeom>
+          <a:noFill/>
+          <a:ln/>
+        </p:spPr>
+        <p:txBody>
+          <a:bodyPr wrap="square" lIns="0" tIns="0" rIns="0" bIns="0" rtlCol="0" anchor="ctr"/>
+          <a:lstStyle/>
+          <a:p>
+            <a:pPr algn="ctr" indent="0" marL="0">
+              <a:buNone/>
+            </a:pPr>
+            <a:r>
+              <a:rPr lang="en-US" sz="1150" dirty="0">
+                <a:solidFill>
+                  <a:srgbClr val="9296A6"/>
+                </a:solidFill>
+                <a:latin typeface="JetBrains Mono" pitchFamily="34" charset="0"/>
+                <a:ea typeface="JetBrains Mono" pitchFamily="34" charset="-122"/>
+                <a:cs typeface="JetBrains Mono" pitchFamily="34" charset="-120"/>
+              </a:rPr>
+              <a:t>Business</a:t>
+            </a:r>
+            <a:endParaRPr lang="en-US" sz="1150" dirty="0"/>
+          </a:p>
+        </p:txBody>
+      </p:sp>
+      <p:sp>
+        <p:nvSpPr>
+          <p:cNvPr id="9" name="Shape 7"/>
+          <p:cNvSpPr/>
+          <p:nvPr/>
+        </p:nvSpPr>
+        <p:spPr>
+          <a:xfrm>
+            <a:off x="4398264" y="2194560"/>
+            <a:ext cx="3474720" cy="2926080"/>
+          </a:xfrm>
+          <a:prstGeom prst="roundRect">
+            <a:avLst>
+              <a:gd name="adj" fmla="val 3125"/>
+            </a:avLst>
+          </a:prstGeom>
+          <a:solidFill>
+            <a:srgbClr val="FFFFFF"/>
+          </a:solidFill>
+          <a:ln w="12700">
+            <a:solidFill>
+              <a:srgbClr val="E8E8EE"/>
+            </a:solidFill>
+            <a:prstDash val="solid"/>
+          </a:ln>
+          <a:effectLst>
+            <a:outerShdw sx="100000" sy="100000" kx="0" ky="0" algn="bl" rotWithShape="0" blurRad="114300" dist="38100" dir="5400000">
+              <a:srgbClr val="10122A">
+                <a:alpha val="12000"/>
+              </a:srgbClr>
+            </a:outerShdw>
+          </a:effectLst>
+        </p:spPr>
+      </p:sp>
+      <p:sp>
+        <p:nvSpPr>
+          <p:cNvPr id="10" name="Shape 8"/>
+          <p:cNvSpPr/>
+          <p:nvPr/>
+        </p:nvSpPr>
+        <p:spPr>
+          <a:xfrm>
+            <a:off x="5678424" y="2606040"/>
+            <a:ext cx="914400" cy="914400"/>
+          </a:xfrm>
+          <a:prstGeom prst="ellipse">
+            <a:avLst/>
+          </a:prstGeom>
+          <a:solidFill>
+            <a:srgbClr val="BB46F5"/>
+          </a:solidFill>
+          <a:ln/>
+        </p:spPr>
+      </p:sp>
+      <p:sp>
+        <p:nvSpPr>
+          <p:cNvPr id="11" name="Text 9"/>
+          <p:cNvSpPr/>
+          <p:nvPr/>
+        </p:nvSpPr>
+        <p:spPr>
+          <a:xfrm>
+            <a:off x="5678424" y="2606040"/>
+            <a:ext cx="914400" cy="914400"/>
+          </a:xfrm>
+          <a:prstGeom prst="rect">
+            <a:avLst/>
+          </a:prstGeom>
+          <a:noFill/>
+          <a:ln/>
+        </p:spPr>
+        <p:txBody>
+          <a:bodyPr wrap="square" lIns="0" tIns="0" rIns="0" bIns="0" rtlCol="0" anchor="ctr"/>
+          <a:lstStyle/>
+          <a:p>
+            <a:pPr algn="ctr" indent="0" marL="0">
+              <a:buNone/>
+            </a:pPr>
+            <a:r>
+              <a:rPr lang="en-US" sz="2200" b="1" dirty="0">
+                <a:solidFill>
+                  <a:srgbClr val="FFFFFF"/>
+                </a:solidFill>
+                <a:latin typeface="Space Grotesk" pitchFamily="34" charset="0"/>
+                <a:ea typeface="Space Grotesk" pitchFamily="34" charset="-122"/>
+                <a:cs typeface="Space Grotesk" pitchFamily="34" charset="-120"/>
+              </a:rPr>
+              <a:t>AB</a:t>
+            </a:r>
+            <a:endParaRPr lang="en-US" sz="2200" dirty="0"/>
+          </a:p>
+        </p:txBody>
+      </p:sp>
+      <p:sp>
+        <p:nvSpPr>
+          <p:cNvPr id="12" name="Text 10"/>
+          <p:cNvSpPr/>
+          <p:nvPr/>
+        </p:nvSpPr>
+        <p:spPr>
+          <a:xfrm>
+            <a:off x="4581144" y="3749040"/>
+            <a:ext cx="3108960" cy="365760"/>
+          </a:xfrm>
+          <a:prstGeom prst="rect">
+            <a:avLst/>
+          </a:prstGeom>
+          <a:noFill/>
+          <a:ln/>
+        </p:spPr>
+        <p:txBody>
+          <a:bodyPr wrap="square" lIns="0" tIns="0" rIns="0" bIns="0" rtlCol="0" anchor="ctr"/>
+          <a:lstStyle/>
+          <a:p>
+            <a:pPr algn="ctr" indent="0" marL="0">
+              <a:buNone/>
+            </a:pPr>
+            <a:r>
+              <a:rPr lang="en-US" sz="1600" b="1" dirty="0">
+                <a:solidFill>
+                  <a:srgbClr val="0A0A0A"/>
+                </a:solidFill>
+                <a:latin typeface="Space Grotesk" pitchFamily="34" charset="0"/>
+                <a:ea typeface="Space Grotesk" pitchFamily="34" charset="-122"/>
+                <a:cs typeface="Space Grotesk" pitchFamily="34" charset="-120"/>
+              </a:rPr>
+              <a:t>Adrien Basso Blandin</a:t>
+            </a:r>
+            <a:endParaRPr lang="en-US" sz="1600" dirty="0"/>
+          </a:p>
+        </p:txBody>
+      </p:sp>
+      <p:sp>
+        <p:nvSpPr>
+          <p:cNvPr id="13" name="Text 11"/>
+          <p:cNvSpPr/>
+          <p:nvPr/>
+        </p:nvSpPr>
+        <p:spPr>
+          <a:xfrm>
+            <a:off x="4581144" y="4160520"/>
+            <a:ext cx="3108960" cy="365760"/>
+          </a:xfrm>
+          <a:prstGeom prst="rect">
+            <a:avLst/>
+          </a:prstGeom>
+          <a:noFill/>
+          <a:ln/>
+        </p:spPr>
+        <p:txBody>
+          <a:bodyPr wrap="square" lIns="0" tIns="0" rIns="0" bIns="0" rtlCol="0" anchor="ctr"/>
+          <a:lstStyle/>
+          <a:p>
+            <a:pPr algn="ctr" indent="0" marL="0">
+              <a:buNone/>
+            </a:pPr>
+            <a:r>
+              <a:rPr lang="en-US" sz="1150" dirty="0">
+                <a:solidFill>
+                  <a:srgbClr val="9296A6"/>
+                </a:solidFill>
+                <a:latin typeface="JetBrains Mono" pitchFamily="34" charset="0"/>
+                <a:ea typeface="JetBrains Mono" pitchFamily="34" charset="-122"/>
+                <a:cs typeface="JetBrains Mono" pitchFamily="34" charset="-120"/>
+              </a:rPr>
+              <a:t>Cohérence</a:t>
+            </a:r>
+            <a:endParaRPr lang="en-US" sz="1150" dirty="0"/>
+          </a:p>
+        </p:txBody>
+      </p:sp>
+      <p:sp>
+        <p:nvSpPr>
+          <p:cNvPr id="14" name="Shape 12"/>
+          <p:cNvSpPr/>
+          <p:nvPr/>
+        </p:nvSpPr>
+        <p:spPr>
+          <a:xfrm>
+            <a:off x="8156448" y="2194560"/>
+            <a:ext cx="3474720" cy="2926080"/>
+          </a:xfrm>
+          <a:prstGeom prst="roundRect">
+            <a:avLst>
+              <a:gd name="adj" fmla="val 3125"/>
+            </a:avLst>
+          </a:prstGeom>
+          <a:solidFill>
+            <a:srgbClr val="FFFFFF"/>
+          </a:solidFill>
+          <a:ln w="12700">
+            <a:solidFill>
+              <a:srgbClr val="E8E8EE"/>
+            </a:solidFill>
+            <a:prstDash val="solid"/>
+          </a:ln>
+          <a:effectLst>
+            <a:outerShdw sx="100000" sy="100000" kx="0" ky="0" algn="bl" rotWithShape="0" blurRad="114300" dist="38100" dir="5400000">
+              <a:srgbClr val="10122A">
+                <a:alpha val="12000"/>
+              </a:srgbClr>
+            </a:outerShdw>
+          </a:effectLst>
+        </p:spPr>
+      </p:sp>
+      <p:sp>
+        <p:nvSpPr>
+          <p:cNvPr id="15" name="Shape 13"/>
+          <p:cNvSpPr/>
+          <p:nvPr/>
+        </p:nvSpPr>
+        <p:spPr>
+          <a:xfrm>
+            <a:off x="9436608" y="2606040"/>
+            <a:ext cx="914400" cy="914400"/>
+          </a:xfrm>
+          <a:prstGeom prst="ellipse">
+            <a:avLst/>
+          </a:prstGeom>
+          <a:solidFill>
+            <a:srgbClr val="0066FF"/>
+          </a:solidFill>
+          <a:ln/>
+        </p:spPr>
+      </p:sp>
+      <p:sp>
+        <p:nvSpPr>
+          <p:cNvPr id="16" name="Text 14"/>
+          <p:cNvSpPr/>
+          <p:nvPr/>
+        </p:nvSpPr>
+        <p:spPr>
+          <a:xfrm>
+            <a:off x="9436608" y="2606040"/>
+            <a:ext cx="914400" cy="914400"/>
+          </a:xfrm>
+          <a:prstGeom prst="rect">
+            <a:avLst/>
+          </a:prstGeom>
+          <a:noFill/>
+          <a:ln/>
+        </p:spPr>
+        <p:txBody>
+          <a:bodyPr wrap="square" lIns="0" tIns="0" rIns="0" bIns="0" rtlCol="0" anchor="ctr"/>
+          <a:lstStyle/>
+          <a:p>
+            <a:pPr algn="ctr" indent="0" marL="0">
+              <a:buNone/>
+            </a:pPr>
+            <a:r>
+              <a:rPr lang="en-US" sz="2200" b="1" dirty="0">
+                <a:solidFill>
+                  <a:srgbClr val="FFFFFF"/>
+                </a:solidFill>
+                <a:latin typeface="Space Grotesk" pitchFamily="34" charset="0"/>
+                <a:ea typeface="Space Grotesk" pitchFamily="34" charset="-122"/>
+                <a:cs typeface="Space Grotesk" pitchFamily="34" charset="-120"/>
+              </a:rPr>
+              <a:t>AC</a:t>
+            </a:r>
+            <a:endParaRPr lang="en-US" sz="2200" dirty="0"/>
+          </a:p>
+        </p:txBody>
+      </p:sp>
+      <p:sp>
+        <p:nvSpPr>
+          <p:cNvPr id="17" name="Text 15"/>
+          <p:cNvSpPr/>
+          <p:nvPr/>
+        </p:nvSpPr>
+        <p:spPr>
+          <a:xfrm>
+            <a:off x="8339328" y="3749040"/>
+            <a:ext cx="3108960" cy="365760"/>
+          </a:xfrm>
+          <a:prstGeom prst="rect">
+            <a:avLst/>
+          </a:prstGeom>
+          <a:noFill/>
+          <a:ln/>
+        </p:spPr>
+        <p:txBody>
+          <a:bodyPr wrap="square" lIns="0" tIns="0" rIns="0" bIns="0" rtlCol="0" anchor="ctr"/>
+          <a:lstStyle/>
+          <a:p>
+            <a:pPr algn="ctr" indent="0" marL="0">
+              <a:buNone/>
+            </a:pPr>
+            <a:r>
+              <a:rPr lang="en-US" sz="1600" b="1" dirty="0">
+                <a:solidFill>
+                  <a:srgbClr val="0A0A0A"/>
+                </a:solidFill>
+                <a:latin typeface="Space Grotesk" pitchFamily="34" charset="0"/>
+                <a:ea typeface="Space Grotesk" pitchFamily="34" charset="-122"/>
+                <a:cs typeface="Space Grotesk" pitchFamily="34" charset="-120"/>
+              </a:rPr>
+              <a:t>Adrien Charles</a:t>
+            </a:r>
+            <a:endParaRPr lang="en-US" sz="1600" dirty="0"/>
+          </a:p>
+        </p:txBody>
+      </p:sp>
+      <p:sp>
+        <p:nvSpPr>
+          <p:cNvPr id="18" name="Text 16"/>
+          <p:cNvSpPr/>
+          <p:nvPr/>
+        </p:nvSpPr>
+        <p:spPr>
+          <a:xfrm>
+            <a:off x="8339328" y="4160520"/>
+            <a:ext cx="3108960" cy="365760"/>
+          </a:xfrm>
+          <a:prstGeom prst="rect">
+            <a:avLst/>
+          </a:prstGeom>
+          <a:noFill/>
+          <a:ln/>
+        </p:spPr>
+        <p:txBody>
+          <a:bodyPr wrap="square" lIns="0" tIns="0" rIns="0" bIns="0" rtlCol="0" anchor="ctr"/>
+          <a:lstStyle/>
+          <a:p>
+            <a:pPr algn="ctr" indent="0" marL="0">
+              <a:buNone/>
+            </a:pPr>
+            <a:r>
+              <a:rPr lang="en-US" sz="1150" dirty="0">
+                <a:solidFill>
+                  <a:srgbClr val="9296A6"/>
+                </a:solidFill>
+                <a:latin typeface="JetBrains Mono" pitchFamily="34" charset="0"/>
+                <a:ea typeface="JetBrains Mono" pitchFamily="34" charset="-122"/>
+                <a:cs typeface="JetBrains Mono" pitchFamily="34" charset="-120"/>
+              </a:rPr>
+              <a:t>Produit</a:t>
+            </a:r>
+            <a:endParaRPr lang="en-US" sz="1150" dirty="0"/>
+          </a:p>
+        </p:txBody>
+      </p:sp>
+      <p:sp>
+        <p:nvSpPr>
+          <p:cNvPr id="19" name="Text 17"/>
+          <p:cNvSpPr/>
+          <p:nvPr/>
+        </p:nvSpPr>
+        <p:spPr>
+          <a:xfrm>
+            <a:off x="11185855" y="6400800"/>
+            <a:ext cx="548640" cy="274320"/>
+          </a:xfrm>
+          <a:prstGeom prst="rect">
+            <a:avLst/>
+          </a:prstGeom>
+          <a:noFill/>
+          <a:ln/>
+        </p:spPr>
+        <p:txBody>
+          <a:bodyPr wrap="square" lIns="0" tIns="0" rIns="0" bIns="0" rtlCol="0" anchor="ctr"/>
+          <a:lstStyle/>
+          <a:p>
+            <a:pPr algn="r" indent="0" marL="0">
+              <a:buNone/>
+            </a:pPr>
+            <a:r>
+              <a:rPr lang="en-US" sz="1000" dirty="0">
+                <a:solidFill>
+                  <a:srgbClr val="9296A6"/>
+                </a:solidFill>
+                <a:latin typeface="JetBrains Mono" pitchFamily="34" charset="0"/>
+                <a:ea typeface="JetBrains Mono" pitchFamily="34" charset="-122"/>
+                <a:cs typeface="JetBrains Mono" pitchFamily="34" charset="-120"/>
+              </a:rPr>
+              <a:t>11</a:t>
+            </a:r>
+            <a:endParaRPr lang="en-US" sz="1000" dirty="0"/>
+          </a:p>
+        </p:txBody>
+      </p:sp>
+    </p:spTree>
+  </p:cSld>
+  <p:clrMapOvr>
+    <a:masterClrMapping/>
+  </p:clrMapOvr>
+</p:sld>
+</file>
+
+<file path=ppt/slides/slide12.xml><?xml version="1.0" encoding="utf-8"?>
+<p:sld xmlns:a="http://schemas.openxmlformats.org/drawingml/2006/main" xmlns:r="http://schemas.openxmlformats.org/officeDocument/2006/relationships" xmlns:p="http://schemas.openxmlformats.org/presentationml/2006/main">
+  <p:cSld name="Slide 12">
     <p:bg>
       <p:bgPr>
         <a:solidFill>
@@ -2932,8 +3923,8 @@
         </p:nvSpPr>
         <p:spPr>
           <a:xfrm>
-            <a:off x="640080" y="2286000"/>
-            <a:ext cx="9144000" cy="1371600"/>
+            <a:off x="640080" y="2011680"/>
+            <a:ext cx="10058400" cy="1828800"/>
           </a:xfrm>
           <a:prstGeom prst="rect">
             <a:avLst/>
@@ -2946,10 +3937,13 @@
           <a:lstStyle/>
           <a:p>
             <a:pPr indent="0" marL="0">
-              <a:buNone/>
-            </a:pPr>
-            <a:r>
-              <a:rPr lang="en-US" sz="7200" b="1" dirty="0">
+              <a:lnSpc>
+                <a:spcPct val="100000"/>
+              </a:lnSpc>
+              <a:buNone/>
+            </a:pPr>
+            <a:r>
+              <a:rPr lang="en-US" sz="5200" b="1" dirty="0">
                 <a:solidFill>
                   <a:srgbClr val="FFFFFF"/>
                 </a:solidFill>
@@ -2957,9 +3951,29 @@
                 <a:ea typeface="Space Grotesk" pitchFamily="34" charset="-122"/>
                 <a:cs typeface="Space Grotesk" pitchFamily="34" charset="-120"/>
               </a:rPr>
-              <a:t>Merci.</a:t>
-            </a:r>
-            <a:endParaRPr lang="en-US" sz="7200" dirty="0"/>
+              <a:t>Restez cohérent</a:t>
+            </a:r>
+            <a:endParaRPr lang="en-US" sz="5200" dirty="0"/>
+          </a:p>
+          <a:p>
+            <a:pPr indent="0" marL="0">
+              <a:lnSpc>
+                <a:spcPct val="100000"/>
+              </a:lnSpc>
+              <a:buNone/>
+            </a:pPr>
+            <a:r>
+              <a:rPr lang="en-US" sz="5200" b="1" dirty="0">
+                <a:solidFill>
+                  <a:srgbClr val="FFFFFF"/>
+                </a:solidFill>
+                <a:latin typeface="Space Grotesk" pitchFamily="34" charset="0"/>
+                <a:ea typeface="Space Grotesk" pitchFamily="34" charset="-122"/>
+                <a:cs typeface="Space Grotesk" pitchFamily="34" charset="-120"/>
+              </a:rPr>
+              <a:t>à l'ère de l'IA.</a:t>
+            </a:r>
+            <a:endParaRPr lang="en-US" sz="5200" dirty="0"/>
           </a:p>
         </p:txBody>
       </p:sp>
@@ -2971,8 +3985,8 @@
         </p:nvSpPr>
         <p:spPr>
           <a:xfrm>
-            <a:off x="640080" y="3931920"/>
-            <a:ext cx="7315200" cy="1371600"/>
+            <a:off x="640080" y="4297680"/>
+            <a:ext cx="8229600" cy="914400"/>
           </a:xfrm>
           <a:prstGeom prst="rect">
             <a:avLst/>
@@ -3011,9 +4025,6 @@
               <a:lnSpc>
                 <a:spcPct val="130000"/>
               </a:lnSpc>
-              <a:spcAft>
-                <a:spcPts val="600"/>
-              </a:spcAft>
               <a:buNone/>
             </a:pPr>
             <a:r>
@@ -3025,27 +4036,7 @@
                 <a:ea typeface="JetBrains Mono" pitchFamily="34" charset="-122"/>
                 <a:cs typeface="JetBrains Mono" pitchFamily="34" charset="-120"/>
               </a:rPr>
-              <a:t>lyriks.io</a:t>
-            </a:r>
-            <a:endParaRPr lang="en-US" sz="1500" dirty="0"/>
-          </a:p>
-          <a:p>
-            <a:pPr indent="0" marL="0">
-              <a:lnSpc>
-                <a:spcPct val="130000"/>
-              </a:lnSpc>
-              <a:buNone/>
-            </a:pPr>
-            <a:r>
-              <a:rPr lang="en-US" sz="1500" dirty="0">
-                <a:solidFill>
-                  <a:srgbClr val="FFFFFF"/>
-                </a:solidFill>
-                <a:latin typeface="JetBrains Mono" pitchFamily="34" charset="0"/>
-                <a:ea typeface="JetBrains Mono" pitchFamily="34" charset="-122"/>
-                <a:cs typeface="JetBrains Mono" pitchFamily="34" charset="-120"/>
-              </a:rPr>
-              <a:t>Paris · VivaTech 2026</a:t>
+              <a:t>lyriks.io · Réserver une démo</a:t>
             </a:r>
             <a:endParaRPr lang="en-US" sz="1500" dirty="0"/>
           </a:p>
@@ -3126,7 +4117,7 @@
         <p:spPr>
           <a:xfrm>
             <a:off x="1115568" y="5888736"/>
-            <a:ext cx="1554480" cy="310896"/>
+            <a:ext cx="1645920" cy="310896"/>
           </a:xfrm>
           <a:prstGeom prst="rect">
             <a:avLst/>
@@ -3150,21 +4141,7 @@
                 <a:ea typeface="Space Grotesk" pitchFamily="34" charset="-122"/>
                 <a:cs typeface="Space Grotesk" pitchFamily="34" charset="-120"/>
               </a:rPr>
-              <a:t>Lyriks</a:t>
-            </a:r>
-            <a:pPr indent="0" marL="0">
-              <a:buNone/>
-            </a:pPr>
-            <a:r>
-              <a:rPr lang="en-US" sz="1500" b="1" spc="-30" kern="0" dirty="0">
-                <a:solidFill>
-                  <a:srgbClr val="FFFFFF"/>
-                </a:solidFill>
-                <a:latin typeface="Space Grotesk" pitchFamily="34" charset="0"/>
-                <a:ea typeface="Space Grotesk" pitchFamily="34" charset="-122"/>
-                <a:cs typeface="Space Grotesk" pitchFamily="34" charset="-120"/>
-              </a:rPr>
-              <a:t>.io</a:t>
+              <a:t>Lyriks.io</a:t>
             </a:r>
             <a:endParaRPr lang="en-US" sz="1500" dirty="0"/>
           </a:p>
@@ -3211,7 +4188,7 @@
         <p:spPr>
           <a:xfrm>
             <a:off x="640080" y="640080"/>
-            <a:ext cx="7315200" cy="274320"/>
+            <a:ext cx="8229600" cy="274320"/>
           </a:xfrm>
           <a:prstGeom prst="rect">
             <a:avLst/>
@@ -3350,7 +4327,7 @@
         <p:spPr>
           <a:xfrm>
             <a:off x="1463040" y="2103120"/>
-            <a:ext cx="9144000" cy="658368"/>
+            <a:ext cx="10058400" cy="658368"/>
           </a:xfrm>
           <a:prstGeom prst="rect">
             <a:avLst/>
@@ -3377,7 +4354,7 @@
                 <a:ea typeface="Space Grotesk" pitchFamily="34" charset="-122"/>
                 <a:cs typeface="Space Grotesk" pitchFamily="34" charset="-120"/>
               </a:rPr>
-              <a:t>Contexte</a:t>
+              <a:t>Le problème</a:t>
             </a:r>
             <a:endParaRPr lang="en-US" sz="1800" dirty="0"/>
           </a:p>
@@ -3397,7 +4374,7 @@
                 <a:ea typeface="Montserrat" pitchFamily="34" charset="-122"/>
                 <a:cs typeface="Montserrat" pitchFamily="34" charset="-120"/>
               </a:rPr>
-              <a:t>Le point de départ et l'enjeu</a:t>
+              <a:t>La dérive entre intention et code</a:t>
             </a:r>
             <a:endParaRPr lang="en-US" sz="1800" dirty="0"/>
           </a:p>
@@ -3473,7 +4450,7 @@
         <p:spPr>
           <a:xfrm>
             <a:off x="1463040" y="2944368"/>
-            <a:ext cx="9144000" cy="658368"/>
+            <a:ext cx="10058400" cy="658368"/>
           </a:xfrm>
           <a:prstGeom prst="rect">
             <a:avLst/>
@@ -3500,7 +4477,7 @@
                 <a:ea typeface="Space Grotesk" pitchFamily="34" charset="-122"/>
                 <a:cs typeface="Space Grotesk" pitchFamily="34" charset="-120"/>
               </a:rPr>
-              <a:t>Notre approche</a:t>
+              <a:t>Les 3 piliers</a:t>
             </a:r>
             <a:endParaRPr lang="en-US" sz="1800" dirty="0"/>
           </a:p>
@@ -3520,7 +4497,7 @@
                 <a:ea typeface="Montserrat" pitchFamily="34" charset="-122"/>
                 <a:cs typeface="Montserrat" pitchFamily="34" charset="-120"/>
               </a:rPr>
-              <a:t>La méthode et les principes</a:t>
+              <a:t>Spécification · Cohérence · Supervision</a:t>
             </a:r>
             <a:endParaRPr lang="en-US" sz="1800" dirty="0"/>
           </a:p>
@@ -3596,7 +4573,7 @@
         <p:spPr>
           <a:xfrm>
             <a:off x="1463040" y="3785616"/>
-            <a:ext cx="9144000" cy="658368"/>
+            <a:ext cx="10058400" cy="658368"/>
           </a:xfrm>
           <a:prstGeom prst="rect">
             <a:avLst/>
@@ -3643,7 +4620,7 @@
                 <a:ea typeface="Montserrat" pitchFamily="34" charset="-122"/>
                 <a:cs typeface="Montserrat" pitchFamily="34" charset="-120"/>
               </a:rPr>
-              <a:t>Ce que nous proposons</a:t>
+              <a:t>Modéliser, vérifier, superviser</a:t>
             </a:r>
             <a:endParaRPr lang="en-US" sz="1800" dirty="0"/>
           </a:p>
@@ -3719,7 +4696,7 @@
         <p:spPr>
           <a:xfrm>
             <a:off x="1463040" y="4626864"/>
-            <a:ext cx="9144000" cy="658368"/>
+            <a:ext cx="10058400" cy="658368"/>
           </a:xfrm>
           <a:prstGeom prst="rect">
             <a:avLst/>
@@ -3746,7 +4723,7 @@
                 <a:ea typeface="Space Grotesk" pitchFamily="34" charset="-122"/>
                 <a:cs typeface="Space Grotesk" pitchFamily="34" charset="-120"/>
               </a:rPr>
-              <a:t>Résultats</a:t>
+              <a:t>Pour qui</a:t>
             </a:r>
             <a:endParaRPr lang="en-US" sz="1800" dirty="0"/>
           </a:p>
@@ -3766,7 +4743,7 @@
                 <a:ea typeface="Montserrat" pitchFamily="34" charset="-122"/>
                 <a:cs typeface="Montserrat" pitchFamily="34" charset="-120"/>
               </a:rPr>
-              <a:t>Ce que ça change concrètement</a:t>
+              <a:t>Produit · Design · Dev · Management · Finance</a:t>
             </a:r>
             <a:endParaRPr lang="en-US" sz="1800" dirty="0"/>
           </a:p>
@@ -3842,7 +4819,7 @@
         <p:spPr>
           <a:xfrm>
             <a:off x="1463040" y="5468112"/>
-            <a:ext cx="9144000" cy="658368"/>
+            <a:ext cx="10058400" cy="658368"/>
           </a:xfrm>
           <a:prstGeom prst="rect">
             <a:avLst/>
@@ -3869,7 +4846,7 @@
                 <a:ea typeface="Space Grotesk" pitchFamily="34" charset="-122"/>
                 <a:cs typeface="Space Grotesk" pitchFamily="34" charset="-120"/>
               </a:rPr>
-              <a:t>Prochaines étapes</a:t>
+              <a:t>Offres</a:t>
             </a:r>
             <a:endParaRPr lang="en-US" sz="1800" dirty="0"/>
           </a:p>
@@ -3889,7 +4866,7 @@
                 <a:ea typeface="Montserrat" pitchFamily="34" charset="-122"/>
                 <a:cs typeface="Montserrat" pitchFamily="34" charset="-120"/>
               </a:rPr>
-              <a:t>La suite et les décisions</a:t>
+              <a:t>Community · Enterprise · Managé</a:t>
             </a:r>
             <a:endParaRPr lang="en-US" sz="1800" dirty="0"/>
           </a:p>
@@ -4041,7 +5018,7 @@
         <p:spPr>
           <a:xfrm>
             <a:off x="640080" y="3794760"/>
-            <a:ext cx="7315200" cy="274320"/>
+            <a:ext cx="8229600" cy="274320"/>
           </a:xfrm>
           <a:prstGeom prst="rect">
             <a:avLst/>
@@ -4104,7 +5081,7 @@
                 <a:ea typeface="Space Grotesk" pitchFamily="34" charset="-122"/>
                 <a:cs typeface="Space Grotesk" pitchFamily="34" charset="-120"/>
               </a:rPr>
-              <a:t>Contexte</a:t>
+              <a:t>Le problème</a:t>
             </a:r>
             <a:endParaRPr lang="en-US" sz="4800" dirty="0"/>
           </a:p>
@@ -4119,7 +5096,7 @@
         <p:spPr>
           <a:xfrm>
             <a:off x="640080" y="5120640"/>
-            <a:ext cx="8229600" cy="457200"/>
+            <a:ext cx="9144000" cy="457200"/>
           </a:xfrm>
           <a:prstGeom prst="rect">
             <a:avLst/>
@@ -4145,7 +5122,7 @@
                 <a:ea typeface="Montserrat" pitchFamily="34" charset="-122"/>
                 <a:cs typeface="Montserrat" pitchFamily="34" charset="-120"/>
               </a:rPr>
-              <a:t>Une phrase qui annonce ce que couvre cette partie.</a:t>
+              <a:t>De l'intention produit à l'implémentation, sans dérive.</a:t>
             </a:r>
             <a:endParaRPr lang="en-US" sz="1500" dirty="0"/>
           </a:p>
@@ -4226,7 +5203,7 @@
         <p:spPr>
           <a:xfrm>
             <a:off x="1115568" y="5934456"/>
-            <a:ext cx="1554480" cy="310896"/>
+            <a:ext cx="1645920" cy="310896"/>
           </a:xfrm>
           <a:prstGeom prst="rect">
             <a:avLst/>
@@ -4250,21 +5227,7 @@
                 <a:ea typeface="Space Grotesk" pitchFamily="34" charset="-122"/>
                 <a:cs typeface="Space Grotesk" pitchFamily="34" charset="-120"/>
               </a:rPr>
-              <a:t>Lyriks</a:t>
-            </a:r>
-            <a:pPr indent="0" marL="0">
-              <a:buNone/>
-            </a:pPr>
-            <a:r>
-              <a:rPr lang="en-US" sz="1500" b="1" spc="-30" kern="0" dirty="0">
-                <a:solidFill>
-                  <a:srgbClr val="FFFFFF"/>
-                </a:solidFill>
-                <a:latin typeface="Space Grotesk" pitchFamily="34" charset="0"/>
-                <a:ea typeface="Space Grotesk" pitchFamily="34" charset="-122"/>
-                <a:cs typeface="Space Grotesk" pitchFamily="34" charset="-120"/>
-              </a:rPr>
-              <a:t>.io</a:t>
+              <a:t>Lyriks.io</a:t>
             </a:r>
             <a:endParaRPr lang="en-US" sz="1500" dirty="0"/>
           </a:p>
@@ -4311,7 +5274,7 @@
         <p:spPr>
           <a:xfrm>
             <a:off x="640080" y="640080"/>
-            <a:ext cx="7315200" cy="274320"/>
+            <a:ext cx="8229600" cy="274320"/>
           </a:xfrm>
           <a:prstGeom prst="rect">
             <a:avLst/>
@@ -4335,7 +5298,7 @@
                 <a:ea typeface="JetBrains Mono" pitchFamily="34" charset="-122"/>
                 <a:cs typeface="JetBrains Mono" pitchFamily="34" charset="-120"/>
               </a:rPr>
-              <a:t>CONTEXTE</a:t>
+              <a:t>LE PROBLÈME</a:t>
             </a:r>
             <a:endParaRPr lang="en-US" sz="1100" dirty="0"/>
           </a:p>
@@ -4374,7 +5337,7 @@
                 <a:ea typeface="Space Grotesk" pitchFamily="34" charset="-122"/>
                 <a:cs typeface="Space Grotesk" pitchFamily="34" charset="-120"/>
               </a:rPr>
-              <a:t>Titre de la slide de contenu</a:t>
+              <a:t>Le code va plus vite que l'alignement</a:t>
             </a:r>
             <a:endParaRPr lang="en-US" sz="3000" dirty="0"/>
           </a:p>
@@ -4416,7 +5379,7 @@
                 <a:ea typeface="Montserrat" pitchFamily="34" charset="-122"/>
                 <a:cs typeface="Montserrat" pitchFamily="34" charset="-120"/>
               </a:rPr>
-              <a:t>Un paragraphe d'introduction qui pose le propos en une à deux phrases, puis les points clés ci-dessous.</a:t>
+              <a:t>À l'ère de l'IA, on produit plus de code, plus vite. Mais l'intention produit, elle, se perd en route.</a:t>
             </a:r>
             <a:endParaRPr lang="en-US" sz="1500" dirty="0"/>
           </a:p>
@@ -4459,7 +5422,7 @@
                 <a:ea typeface="Montserrat" pitchFamily="34" charset="-122"/>
                 <a:cs typeface="Montserrat" pitchFamily="34" charset="-120"/>
               </a:rPr>
-              <a:t>Premier point clé à retenir, formulé simplement.</a:t>
+              <a:t>Ambiguïtés, contradictions et éléments manquants dans les specs.</a:t>
             </a:r>
             <a:endParaRPr lang="en-US" sz="1450" dirty="0"/>
           </a:p>
@@ -4480,7 +5443,7 @@
                 <a:ea typeface="Montserrat" pitchFamily="34" charset="-122"/>
                 <a:cs typeface="Montserrat" pitchFamily="34" charset="-120"/>
               </a:rPr>
-              <a:t>Deuxième point qui appuie le précédent.</a:t>
+              <a:t>États oubliés et ruptures dans les parcours.</a:t>
             </a:r>
             <a:endParaRPr lang="en-US" sz="1450" dirty="0"/>
           </a:p>
@@ -4501,7 +5464,7 @@
                 <a:ea typeface="Montserrat" pitchFamily="34" charset="-122"/>
                 <a:cs typeface="Montserrat" pitchFamily="34" charset="-120"/>
               </a:rPr>
-              <a:t>Troisième point avec un exemple concret.</a:t>
+              <a:t>Écarts entre ce qui est spécifié et ce qui est implémenté.</a:t>
             </a:r>
             <a:endParaRPr lang="en-US" sz="1450" dirty="0"/>
           </a:p>
@@ -4519,7 +5482,7 @@
                 <a:ea typeface="Montserrat" pitchFamily="34" charset="-122"/>
                 <a:cs typeface="Montserrat" pitchFamily="34" charset="-120"/>
               </a:rPr>
-              <a:t>Quatrième point pour conclure l'idée.</a:t>
+              <a:t>Usage de l'IA peu visible, difficile à maîtriser et à mesurer.</a:t>
             </a:r>
             <a:endParaRPr lang="en-US" sz="1450" dirty="0"/>
           </a:p>
@@ -4587,7 +5550,7 @@
                 <a:ea typeface="JetBrains Mono" pitchFamily="34" charset="-122"/>
                 <a:cs typeface="JetBrains Mono" pitchFamily="34" charset="-120"/>
               </a:rPr>
-              <a:t>À RETENIR</a:t>
+              <a:t>LA PROMESSE</a:t>
             </a:r>
             <a:endParaRPr lang="en-US" sz="1050" dirty="0"/>
           </a:p>
@@ -4601,7 +5564,7 @@
         </p:nvSpPr>
         <p:spPr>
           <a:xfrm>
-            <a:off x="8092440" y="2560320"/>
+            <a:off x="8092440" y="2606040"/>
             <a:ext cx="3154680" cy="2377440"/>
           </a:xfrm>
           <a:prstGeom prst="rect">
@@ -4616,12 +5579,12 @@
           <a:p>
             <a:pPr indent="0" marL="0">
               <a:lnSpc>
-                <a:spcPct val="105000"/>
+                <a:spcPct val="108000"/>
               </a:lnSpc>
               <a:buNone/>
             </a:pPr>
             <a:r>
-              <a:rPr lang="en-US" sz="1900" b="1" dirty="0">
+              <a:rPr lang="en-US" sz="2100" b="1" dirty="0">
                 <a:solidFill>
                   <a:srgbClr val="0A0A0A"/>
                 </a:solidFill>
@@ -4629,9 +5592,9 @@
                 <a:ea typeface="Space Grotesk" pitchFamily="34" charset="-122"/>
                 <a:cs typeface="Space Grotesk" pitchFamily="34" charset="-120"/>
               </a:rPr>
-              <a:t>La phrase la plus importante de la slide, mise en avant ici.</a:t>
-            </a:r>
-            <a:endParaRPr lang="en-US" sz="1900" dirty="0"/>
+              <a:t>De l'intention produit à l'implémentation, sans dérive.</a:t>
+            </a:r>
+            <a:endParaRPr lang="en-US" sz="2100" dirty="0"/>
           </a:p>
         </p:txBody>
       </p:sp>
@@ -4715,7 +5678,7 @@
         <p:spPr>
           <a:xfrm>
             <a:off x="640080" y="640080"/>
-            <a:ext cx="7315200" cy="274320"/>
+            <a:ext cx="8229600" cy="274320"/>
           </a:xfrm>
           <a:prstGeom prst="rect">
             <a:avLst/>
@@ -4739,7 +5702,7 @@
                 <a:ea typeface="JetBrains Mono" pitchFamily="34" charset="-122"/>
                 <a:cs typeface="JetBrains Mono" pitchFamily="34" charset="-120"/>
               </a:rPr>
-              <a:t>NOTRE APPROCHE</a:t>
+              <a:t>LA PLATEFORME</a:t>
             </a:r>
             <a:endParaRPr lang="en-US" sz="1100" dirty="0"/>
           </a:p>
@@ -4778,7 +5741,7 @@
                 <a:ea typeface="Space Grotesk" pitchFamily="34" charset="-122"/>
                 <a:cs typeface="Space Grotesk" pitchFamily="34" charset="-120"/>
               </a:rPr>
-              <a:t>Deux idées côte à côte</a:t>
+              <a:t>Trois piliers, un produit cohérent</a:t>
             </a:r>
             <a:endParaRPr lang="en-US" sz="3000" dirty="0"/>
           </a:p>
@@ -4792,12 +5755,12 @@
         </p:nvSpPr>
         <p:spPr>
           <a:xfrm>
-            <a:off x="640080" y="2011680"/>
-            <a:ext cx="5212080" cy="3566160"/>
+            <a:off x="640080" y="2103120"/>
+            <a:ext cx="3474720" cy="3474720"/>
           </a:xfrm>
           <a:prstGeom prst="roundRect">
             <a:avLst>
-              <a:gd name="adj" fmla="val 2051"/>
+              <a:gd name="adj" fmla="val 2632"/>
             </a:avLst>
           </a:prstGeom>
           <a:solidFill>
@@ -4826,7 +5789,7 @@
         </p:nvSpPr>
         <p:spPr>
           <a:xfrm>
-            <a:off x="1005840" y="2377440"/>
+            <a:off x="960120" y="2468880"/>
             <a:ext cx="457200" cy="457200"/>
           </a:xfrm>
           <a:prstGeom prst="roundRect">
@@ -4848,8 +5811,47 @@
         </p:nvSpPr>
         <p:spPr>
           <a:xfrm>
-            <a:off x="1600200" y="2377440"/>
-            <a:ext cx="3840480" cy="457200"/>
+            <a:off x="960120" y="2468880"/>
+            <a:ext cx="457200" cy="457200"/>
+          </a:xfrm>
+          <a:prstGeom prst="rect">
+            <a:avLst/>
+          </a:prstGeom>
+          <a:noFill/>
+          <a:ln/>
+        </p:spPr>
+        <p:txBody>
+          <a:bodyPr wrap="square" lIns="0" tIns="0" rIns="0" bIns="0" rtlCol="0" anchor="ctr"/>
+          <a:lstStyle/>
+          <a:p>
+            <a:pPr algn="ctr" indent="0" marL="0">
+              <a:buNone/>
+            </a:pPr>
+            <a:r>
+              <a:rPr lang="en-US" sz="1300" b="1" dirty="0">
+                <a:solidFill>
+                  <a:srgbClr val="FFFFFF"/>
+                </a:solidFill>
+                <a:latin typeface="JetBrains Mono" pitchFamily="34" charset="0"/>
+                <a:ea typeface="JetBrains Mono" pitchFamily="34" charset="-122"/>
+                <a:cs typeface="JetBrains Mono" pitchFamily="34" charset="-120"/>
+              </a:rPr>
+              <a:t>1</a:t>
+            </a:r>
+            <a:endParaRPr lang="en-US" sz="1300" dirty="0"/>
+          </a:p>
+        </p:txBody>
+      </p:sp>
+      <p:sp>
+        <p:nvSpPr>
+          <p:cNvPr id="7" name="Text 5"/>
+          <p:cNvSpPr/>
+          <p:nvPr/>
+        </p:nvSpPr>
+        <p:spPr>
+          <a:xfrm>
+            <a:off x="960120" y="3108960"/>
+            <a:ext cx="2834640" cy="457200"/>
           </a:xfrm>
           <a:prstGeom prst="rect">
             <a:avLst/>
@@ -4865,7 +5867,7 @@
               <a:buNone/>
             </a:pPr>
             <a:r>
-              <a:rPr lang="en-US" sz="1800" b="1" dirty="0">
+              <a:rPr lang="en-US" sz="1900" b="1" dirty="0">
                 <a:solidFill>
                   <a:srgbClr val="0A0A0A"/>
                 </a:solidFill>
@@ -4873,108 +5875,68 @@
                 <a:ea typeface="Space Grotesk" pitchFamily="34" charset="-122"/>
                 <a:cs typeface="Space Grotesk" pitchFamily="34" charset="-120"/>
               </a:rPr>
-              <a:t>Première colonne</a:t>
-            </a:r>
-            <a:endParaRPr lang="en-US" sz="1800" dirty="0"/>
-          </a:p>
-        </p:txBody>
-      </p:sp>
-      <p:sp>
-        <p:nvSpPr>
-          <p:cNvPr id="7" name="Text 5"/>
-          <p:cNvSpPr/>
-          <p:nvPr/>
-        </p:nvSpPr>
-        <p:spPr>
-          <a:xfrm>
-            <a:off x="1005840" y="3108960"/>
-            <a:ext cx="4480560" cy="2194560"/>
-          </a:xfrm>
-          <a:prstGeom prst="rect">
-            <a:avLst/>
-          </a:prstGeom>
-          <a:noFill/>
-          <a:ln/>
-        </p:spPr>
-        <p:txBody>
-          <a:bodyPr wrap="square" lIns="0" tIns="0" rIns="0" bIns="0" rtlCol="0" anchor="ctr"/>
-          <a:lstStyle/>
-          <a:p>
-            <a:pPr marL="203200" indent="-203200">
-              <a:spcAft>
-                <a:spcPts val="900"/>
-              </a:spcAft>
-              <a:buSzPct val="100000"/>
-              <a:buChar char="•"/>
-            </a:pPr>
-            <a:r>
-              <a:rPr lang="en-US" sz="1400" dirty="0">
-                <a:solidFill>
-                  <a:srgbClr val="1A1A1A"/>
+              <a:t>Spécification</a:t>
+            </a:r>
+            <a:endParaRPr lang="en-US" sz="1900" dirty="0"/>
+          </a:p>
+        </p:txBody>
+      </p:sp>
+      <p:sp>
+        <p:nvSpPr>
+          <p:cNvPr id="8" name="Text 6"/>
+          <p:cNvSpPr/>
+          <p:nvPr/>
+        </p:nvSpPr>
+        <p:spPr>
+          <a:xfrm>
+            <a:off x="960120" y="3611880"/>
+            <a:ext cx="2880360" cy="1737360"/>
+          </a:xfrm>
+          <a:prstGeom prst="rect">
+            <a:avLst/>
+          </a:prstGeom>
+          <a:noFill/>
+          <a:ln/>
+        </p:spPr>
+        <p:txBody>
+          <a:bodyPr wrap="square" lIns="0" tIns="0" rIns="0" bIns="0" rtlCol="0" anchor="t"/>
+          <a:lstStyle/>
+          <a:p>
+            <a:pPr indent="0" marL="0">
+              <a:lnSpc>
+                <a:spcPct val="120000"/>
+              </a:lnSpc>
+              <a:buNone/>
+            </a:pPr>
+            <a:r>
+              <a:rPr lang="en-US" sz="1300" dirty="0">
+                <a:solidFill>
+                  <a:srgbClr val="535462"/>
                 </a:solidFill>
                 <a:latin typeface="Montserrat" pitchFamily="34" charset="0"/>
                 <a:ea typeface="Montserrat" pitchFamily="34" charset="-122"/>
                 <a:cs typeface="Montserrat" pitchFamily="34" charset="-120"/>
               </a:rPr>
-              <a:t>Point qui décrit cette colonne.</a:t>
-            </a:r>
-            <a:endParaRPr lang="en-US" sz="1400" dirty="0"/>
-          </a:p>
-          <a:p>
-            <a:pPr marL="203200" indent="-203200">
-              <a:spcAft>
-                <a:spcPts val="900"/>
-              </a:spcAft>
-              <a:buSzPct val="100000"/>
-              <a:buChar char="•"/>
-            </a:pPr>
-            <a:r>
-              <a:rPr lang="en-US" sz="1400" dirty="0">
-                <a:solidFill>
-                  <a:srgbClr val="1A1A1A"/>
-                </a:solidFill>
-                <a:latin typeface="Montserrat" pitchFamily="34" charset="0"/>
-                <a:ea typeface="Montserrat" pitchFamily="34" charset="-122"/>
-                <a:cs typeface="Montserrat" pitchFamily="34" charset="-120"/>
-              </a:rPr>
-              <a:t>Un deuxième élément utile.</a:t>
-            </a:r>
-            <a:endParaRPr lang="en-US" sz="1400" dirty="0"/>
-          </a:p>
-          <a:p>
-            <a:pPr marL="203200" indent="-203200">
-              <a:buSzPct val="100000"/>
-              <a:buChar char="•"/>
-            </a:pPr>
-            <a:r>
-              <a:rPr lang="en-US" sz="1400" dirty="0">
-                <a:solidFill>
-                  <a:srgbClr val="1A1A1A"/>
-                </a:solidFill>
-                <a:latin typeface="Montserrat" pitchFamily="34" charset="0"/>
-                <a:ea typeface="Montserrat" pitchFamily="34" charset="-122"/>
-                <a:cs typeface="Montserrat" pitchFamily="34" charset="-120"/>
-              </a:rPr>
-              <a:t>Un troisième pour équilibrer.</a:t>
-            </a:r>
-            <a:endParaRPr lang="en-US" sz="1400" dirty="0"/>
-          </a:p>
-        </p:txBody>
-      </p:sp>
-      <p:sp>
-        <p:nvSpPr>
-          <p:cNvPr id="8" name="Shape 6"/>
-          <p:cNvSpPr/>
-          <p:nvPr/>
-        </p:nvSpPr>
-        <p:spPr>
-          <a:xfrm>
-            <a:off x="6272784" y="2011680"/>
-            <a:ext cx="5212080" cy="3566160"/>
+              <a:t>Transformer l'intention produit en spécifications fonctionnelles, techniques et data. Cartographier parcours clés et règles métier.</a:t>
+            </a:r>
+            <a:endParaRPr lang="en-US" sz="1300" dirty="0"/>
+          </a:p>
+        </p:txBody>
+      </p:sp>
+      <p:sp>
+        <p:nvSpPr>
+          <p:cNvPr id="9" name="Shape 7"/>
+          <p:cNvSpPr/>
+          <p:nvPr/>
+        </p:nvSpPr>
+        <p:spPr>
+          <a:xfrm>
+            <a:off x="4398264" y="2103120"/>
+            <a:ext cx="3474720" cy="3474720"/>
           </a:xfrm>
           <a:prstGeom prst="roundRect">
             <a:avLst>
-              <a:gd name="adj" fmla="val 2051"/>
+              <a:gd name="adj" fmla="val 2632"/>
             </a:avLst>
           </a:prstGeom>
           <a:solidFill>
@@ -4997,13 +5959,13 @@
       </p:sp>
       <p:sp>
         <p:nvSpPr>
-          <p:cNvPr id="9" name="Shape 7"/>
-          <p:cNvSpPr/>
-          <p:nvPr/>
-        </p:nvSpPr>
-        <p:spPr>
-          <a:xfrm>
-            <a:off x="6638544" y="2377440"/>
+          <p:cNvPr id="10" name="Shape 8"/>
+          <p:cNvSpPr/>
+          <p:nvPr/>
+        </p:nvSpPr>
+        <p:spPr>
+          <a:xfrm>
+            <a:off x="4718304" y="2468880"/>
             <a:ext cx="457200" cy="457200"/>
           </a:xfrm>
           <a:prstGeom prst="roundRect">
@@ -5012,21 +5974,60 @@
             </a:avLst>
           </a:prstGeom>
           <a:solidFill>
-            <a:srgbClr val="FFA101"/>
+            <a:srgbClr val="BB46F5"/>
           </a:solidFill>
           <a:ln/>
         </p:spPr>
       </p:sp>
       <p:sp>
         <p:nvSpPr>
-          <p:cNvPr id="10" name="Text 8"/>
-          <p:cNvSpPr/>
-          <p:nvPr/>
-        </p:nvSpPr>
-        <p:spPr>
-          <a:xfrm>
-            <a:off x="7232904" y="2377440"/>
-            <a:ext cx="3840480" cy="457200"/>
+          <p:cNvPr id="11" name="Text 9"/>
+          <p:cNvSpPr/>
+          <p:nvPr/>
+        </p:nvSpPr>
+        <p:spPr>
+          <a:xfrm>
+            <a:off x="4718304" y="2468880"/>
+            <a:ext cx="457200" cy="457200"/>
+          </a:xfrm>
+          <a:prstGeom prst="rect">
+            <a:avLst/>
+          </a:prstGeom>
+          <a:noFill/>
+          <a:ln/>
+        </p:spPr>
+        <p:txBody>
+          <a:bodyPr wrap="square" lIns="0" tIns="0" rIns="0" bIns="0" rtlCol="0" anchor="ctr"/>
+          <a:lstStyle/>
+          <a:p>
+            <a:pPr algn="ctr" indent="0" marL="0">
+              <a:buNone/>
+            </a:pPr>
+            <a:r>
+              <a:rPr lang="en-US" sz="1300" b="1" dirty="0">
+                <a:solidFill>
+                  <a:srgbClr val="FFFFFF"/>
+                </a:solidFill>
+                <a:latin typeface="JetBrains Mono" pitchFamily="34" charset="0"/>
+                <a:ea typeface="JetBrains Mono" pitchFamily="34" charset="-122"/>
+                <a:cs typeface="JetBrains Mono" pitchFamily="34" charset="-120"/>
+              </a:rPr>
+              <a:t>2</a:t>
+            </a:r>
+            <a:endParaRPr lang="en-US" sz="1300" dirty="0"/>
+          </a:p>
+        </p:txBody>
+      </p:sp>
+      <p:sp>
+        <p:nvSpPr>
+          <p:cNvPr id="12" name="Text 10"/>
+          <p:cNvSpPr/>
+          <p:nvPr/>
+        </p:nvSpPr>
+        <p:spPr>
+          <a:xfrm>
+            <a:off x="4718304" y="3108960"/>
+            <a:ext cx="2834640" cy="457200"/>
           </a:xfrm>
           <a:prstGeom prst="rect">
             <a:avLst/>
@@ -5042,7 +6043,7 @@
               <a:buNone/>
             </a:pPr>
             <a:r>
-              <a:rPr lang="en-US" sz="1800" b="1" dirty="0">
+              <a:rPr lang="en-US" sz="1900" b="1" dirty="0">
                 <a:solidFill>
                   <a:srgbClr val="0A0A0A"/>
                 </a:solidFill>
@@ -5050,97 +6051,233 @@
                 <a:ea typeface="Space Grotesk" pitchFamily="34" charset="-122"/>
                 <a:cs typeface="Space Grotesk" pitchFamily="34" charset="-120"/>
               </a:rPr>
-              <a:t>Seconde colonne</a:t>
-            </a:r>
-            <a:endParaRPr lang="en-US" sz="1800" dirty="0"/>
-          </a:p>
-        </p:txBody>
-      </p:sp>
-      <p:sp>
-        <p:nvSpPr>
-          <p:cNvPr id="11" name="Text 9"/>
-          <p:cNvSpPr/>
-          <p:nvPr/>
-        </p:nvSpPr>
-        <p:spPr>
-          <a:xfrm>
-            <a:off x="6638544" y="3108960"/>
-            <a:ext cx="4480560" cy="2194560"/>
-          </a:xfrm>
-          <a:prstGeom prst="rect">
-            <a:avLst/>
-          </a:prstGeom>
-          <a:noFill/>
-          <a:ln/>
-        </p:spPr>
-        <p:txBody>
-          <a:bodyPr wrap="square" lIns="0" tIns="0" rIns="0" bIns="0" rtlCol="0" anchor="ctr"/>
-          <a:lstStyle/>
-          <a:p>
-            <a:pPr marL="203200" indent="-203200">
-              <a:spcAft>
-                <a:spcPts val="900"/>
-              </a:spcAft>
-              <a:buSzPct val="100000"/>
-              <a:buChar char="•"/>
-            </a:pPr>
-            <a:r>
-              <a:rPr lang="en-US" sz="1400" dirty="0">
-                <a:solidFill>
-                  <a:srgbClr val="1A1A1A"/>
+              <a:t>Cohérence</a:t>
+            </a:r>
+            <a:endParaRPr lang="en-US" sz="1900" dirty="0"/>
+          </a:p>
+        </p:txBody>
+      </p:sp>
+      <p:sp>
+        <p:nvSpPr>
+          <p:cNvPr id="13" name="Text 11"/>
+          <p:cNvSpPr/>
+          <p:nvPr/>
+        </p:nvSpPr>
+        <p:spPr>
+          <a:xfrm>
+            <a:off x="4718304" y="3611880"/>
+            <a:ext cx="2880360" cy="1737360"/>
+          </a:xfrm>
+          <a:prstGeom prst="rect">
+            <a:avLst/>
+          </a:prstGeom>
+          <a:noFill/>
+          <a:ln/>
+        </p:spPr>
+        <p:txBody>
+          <a:bodyPr wrap="square" lIns="0" tIns="0" rIns="0" bIns="0" rtlCol="0" anchor="t"/>
+          <a:lstStyle/>
+          <a:p>
+            <a:pPr indent="0" marL="0">
+              <a:lnSpc>
+                <a:spcPct val="120000"/>
+              </a:lnSpc>
+              <a:buNone/>
+            </a:pPr>
+            <a:r>
+              <a:rPr lang="en-US" sz="1300" dirty="0">
+                <a:solidFill>
+                  <a:srgbClr val="535462"/>
                 </a:solidFill>
                 <a:latin typeface="Montserrat" pitchFamily="34" charset="0"/>
                 <a:ea typeface="Montserrat" pitchFamily="34" charset="-122"/>
                 <a:cs typeface="Montserrat" pitchFamily="34" charset="-120"/>
               </a:rPr>
-              <a:t>Point qui décrit cette colonne.</a:t>
-            </a:r>
-            <a:endParaRPr lang="en-US" sz="1400" dirty="0"/>
-          </a:p>
-          <a:p>
-            <a:pPr marL="203200" indent="-203200">
-              <a:spcAft>
-                <a:spcPts val="900"/>
-              </a:spcAft>
-              <a:buSzPct val="100000"/>
-              <a:buChar char="•"/>
-            </a:pPr>
-            <a:r>
-              <a:rPr lang="en-US" sz="1400" dirty="0">
-                <a:solidFill>
-                  <a:srgbClr val="1A1A1A"/>
+              <a:t>Un moteur de contrôle pour repérer les écarts avant, pendant et après le développement.</a:t>
+            </a:r>
+            <a:endParaRPr lang="en-US" sz="1300" dirty="0"/>
+          </a:p>
+        </p:txBody>
+      </p:sp>
+      <p:sp>
+        <p:nvSpPr>
+          <p:cNvPr id="14" name="Shape 12"/>
+          <p:cNvSpPr/>
+          <p:nvPr/>
+        </p:nvSpPr>
+        <p:spPr>
+          <a:xfrm>
+            <a:off x="8156448" y="2103120"/>
+            <a:ext cx="3474720" cy="3474720"/>
+          </a:xfrm>
+          <a:prstGeom prst="roundRect">
+            <a:avLst>
+              <a:gd name="adj" fmla="val 2632"/>
+            </a:avLst>
+          </a:prstGeom>
+          <a:solidFill>
+            <a:srgbClr val="FFFFFF"/>
+          </a:solidFill>
+          <a:ln w="12700">
+            <a:solidFill>
+              <a:srgbClr val="E8E8EE"/>
+            </a:solidFill>
+            <a:prstDash val="solid"/>
+          </a:ln>
+          <a:effectLst>
+            <a:outerShdw sx="100000" sy="100000" kx="0" ky="0" algn="bl" rotWithShape="0" blurRad="114300" dist="38100" dir="5400000">
+              <a:srgbClr val="10122A">
+                <a:alpha val="12000"/>
+              </a:srgbClr>
+            </a:outerShdw>
+          </a:effectLst>
+        </p:spPr>
+      </p:sp>
+      <p:sp>
+        <p:nvSpPr>
+          <p:cNvPr id="15" name="Shape 13"/>
+          <p:cNvSpPr/>
+          <p:nvPr/>
+        </p:nvSpPr>
+        <p:spPr>
+          <a:xfrm>
+            <a:off x="8476488" y="2468880"/>
+            <a:ext cx="457200" cy="457200"/>
+          </a:xfrm>
+          <a:prstGeom prst="roundRect">
+            <a:avLst>
+              <a:gd name="adj" fmla="val 14000"/>
+            </a:avLst>
+          </a:prstGeom>
+          <a:solidFill>
+            <a:srgbClr val="FFA101"/>
+          </a:solidFill>
+          <a:ln/>
+        </p:spPr>
+      </p:sp>
+      <p:sp>
+        <p:nvSpPr>
+          <p:cNvPr id="16" name="Text 14"/>
+          <p:cNvSpPr/>
+          <p:nvPr/>
+        </p:nvSpPr>
+        <p:spPr>
+          <a:xfrm>
+            <a:off x="8476488" y="2468880"/>
+            <a:ext cx="457200" cy="457200"/>
+          </a:xfrm>
+          <a:prstGeom prst="rect">
+            <a:avLst/>
+          </a:prstGeom>
+          <a:noFill/>
+          <a:ln/>
+        </p:spPr>
+        <p:txBody>
+          <a:bodyPr wrap="square" lIns="0" tIns="0" rIns="0" bIns="0" rtlCol="0" anchor="ctr"/>
+          <a:lstStyle/>
+          <a:p>
+            <a:pPr algn="ctr" indent="0" marL="0">
+              <a:buNone/>
+            </a:pPr>
+            <a:r>
+              <a:rPr lang="en-US" sz="1300" b="1" dirty="0">
+                <a:solidFill>
+                  <a:srgbClr val="FFFFFF"/>
+                </a:solidFill>
+                <a:latin typeface="JetBrains Mono" pitchFamily="34" charset="0"/>
+                <a:ea typeface="JetBrains Mono" pitchFamily="34" charset="-122"/>
+                <a:cs typeface="JetBrains Mono" pitchFamily="34" charset="-120"/>
+              </a:rPr>
+              <a:t>3</a:t>
+            </a:r>
+            <a:endParaRPr lang="en-US" sz="1300" dirty="0"/>
+          </a:p>
+        </p:txBody>
+      </p:sp>
+      <p:sp>
+        <p:nvSpPr>
+          <p:cNvPr id="17" name="Text 15"/>
+          <p:cNvSpPr/>
+          <p:nvPr/>
+        </p:nvSpPr>
+        <p:spPr>
+          <a:xfrm>
+            <a:off x="8476488" y="3108960"/>
+            <a:ext cx="2834640" cy="457200"/>
+          </a:xfrm>
+          <a:prstGeom prst="rect">
+            <a:avLst/>
+          </a:prstGeom>
+          <a:noFill/>
+          <a:ln/>
+        </p:spPr>
+        <p:txBody>
+          <a:bodyPr wrap="square" lIns="0" tIns="0" rIns="0" bIns="0" rtlCol="0" anchor="ctr"/>
+          <a:lstStyle/>
+          <a:p>
+            <a:pPr indent="0" marL="0">
+              <a:buNone/>
+            </a:pPr>
+            <a:r>
+              <a:rPr lang="en-US" sz="1900" b="1" dirty="0">
+                <a:solidFill>
+                  <a:srgbClr val="0A0A0A"/>
+                </a:solidFill>
+                <a:latin typeface="Space Grotesk" pitchFamily="34" charset="0"/>
+                <a:ea typeface="Space Grotesk" pitchFamily="34" charset="-122"/>
+                <a:cs typeface="Space Grotesk" pitchFamily="34" charset="-120"/>
+              </a:rPr>
+              <a:t>Supervision</a:t>
+            </a:r>
+            <a:endParaRPr lang="en-US" sz="1900" dirty="0"/>
+          </a:p>
+        </p:txBody>
+      </p:sp>
+      <p:sp>
+        <p:nvSpPr>
+          <p:cNvPr id="18" name="Text 16"/>
+          <p:cNvSpPr/>
+          <p:nvPr/>
+        </p:nvSpPr>
+        <p:spPr>
+          <a:xfrm>
+            <a:off x="8476488" y="3611880"/>
+            <a:ext cx="2880360" cy="1737360"/>
+          </a:xfrm>
+          <a:prstGeom prst="rect">
+            <a:avLst/>
+          </a:prstGeom>
+          <a:noFill/>
+          <a:ln/>
+        </p:spPr>
+        <p:txBody>
+          <a:bodyPr wrap="square" lIns="0" tIns="0" rIns="0" bIns="0" rtlCol="0" anchor="t"/>
+          <a:lstStyle/>
+          <a:p>
+            <a:pPr indent="0" marL="0">
+              <a:lnSpc>
+                <a:spcPct val="120000"/>
+              </a:lnSpc>
+              <a:buNone/>
+            </a:pPr>
+            <a:r>
+              <a:rPr lang="en-US" sz="1300" dirty="0">
+                <a:solidFill>
+                  <a:srgbClr val="535462"/>
                 </a:solidFill>
                 <a:latin typeface="Montserrat" pitchFamily="34" charset="0"/>
                 <a:ea typeface="Montserrat" pitchFamily="34" charset="-122"/>
                 <a:cs typeface="Montserrat" pitchFamily="34" charset="-120"/>
               </a:rPr>
-              <a:t>Un deuxième élément utile.</a:t>
-            </a:r>
-            <a:endParaRPr lang="en-US" sz="1400" dirty="0"/>
-          </a:p>
-          <a:p>
-            <a:pPr marL="203200" indent="-203200">
-              <a:buSzPct val="100000"/>
-              <a:buChar char="•"/>
-            </a:pPr>
-            <a:r>
-              <a:rPr lang="en-US" sz="1400" dirty="0">
-                <a:solidFill>
-                  <a:srgbClr val="1A1A1A"/>
-                </a:solidFill>
-                <a:latin typeface="Montserrat" pitchFamily="34" charset="0"/>
-                <a:ea typeface="Montserrat" pitchFamily="34" charset="-122"/>
-                <a:cs typeface="Montserrat" pitchFamily="34" charset="-120"/>
-              </a:rPr>
-              <a:t>Un troisième pour équilibrer.</a:t>
-            </a:r>
-            <a:endParaRPr lang="en-US" sz="1400" dirty="0"/>
-          </a:p>
-        </p:txBody>
-      </p:sp>
-      <p:sp>
-        <p:nvSpPr>
-          <p:cNvPr id="12" name="Text 10"/>
+              <a:t>Une vue consolidée pour encadrer les pratiques, contrôler les risques et mesurer la valeur réellement créée.</a:t>
+            </a:r>
+            <a:endParaRPr lang="en-US" sz="1300" dirty="0"/>
+          </a:p>
+        </p:txBody>
+      </p:sp>
+      <p:sp>
+        <p:nvSpPr>
+          <p:cNvPr id="19" name="Text 17"/>
           <p:cNvSpPr/>
           <p:nvPr/>
         </p:nvSpPr>
@@ -5218,7 +6355,7 @@
         <p:spPr>
           <a:xfrm>
             <a:off x="640080" y="640080"/>
-            <a:ext cx="7315200" cy="274320"/>
+            <a:ext cx="8229600" cy="274320"/>
           </a:xfrm>
           <a:prstGeom prst="rect">
             <a:avLst/>
@@ -5281,7 +6418,7 @@
                 <a:ea typeface="Space Grotesk" pitchFamily="34" charset="-122"/>
                 <a:cs typeface="Space Grotesk" pitchFamily="34" charset="-120"/>
               </a:rPr>
-              <a:t>Une image vaut mille mots</a:t>
+              <a:t>Modéliser, vérifier, superviser</a:t>
             </a:r>
             <a:endParaRPr lang="en-US" sz="3000" dirty="0"/>
           </a:p>
@@ -5295,8 +6432,8 @@
         </p:nvSpPr>
         <p:spPr>
           <a:xfrm>
-            <a:off x="640080" y="2103120"/>
-            <a:ext cx="4754880" cy="2926080"/>
+            <a:off x="640080" y="2011680"/>
+            <a:ext cx="4754880" cy="3108960"/>
           </a:xfrm>
           <a:prstGeom prst="rect">
             <a:avLst/>
@@ -5324,7 +6461,7 @@
                 <a:ea typeface="Montserrat" pitchFamily="34" charset="-122"/>
                 <a:cs typeface="Montserrat" pitchFamily="34" charset="-120"/>
               </a:rPr>
-              <a:t>Décrivez ici ce que montre le visuel.</a:t>
+              <a:t>Cartographie des parcours clés et des règles métier.</a:t>
             </a:r>
             <a:endParaRPr lang="en-US" sz="1500" dirty="0"/>
           </a:p>
@@ -5345,7 +6482,28 @@
                 <a:ea typeface="Montserrat" pitchFamily="34" charset="-122"/>
                 <a:cs typeface="Montserrat" pitchFamily="34" charset="-120"/>
               </a:rPr>
-              <a:t>Mettez en avant un détail clé.</a:t>
+              <a:t>Spécifications prêtes pour l'IA, ciblées par agent.</a:t>
+            </a:r>
+            <a:endParaRPr lang="en-US" sz="1500" dirty="0"/>
+          </a:p>
+          <a:p>
+            <a:pPr marL="203200" indent="-203200">
+              <a:spcAft>
+                <a:spcPts val="1000"/>
+              </a:spcAft>
+              <a:buSzPct val="100000"/>
+              <a:buChar char="•"/>
+            </a:pPr>
+            <a:r>
+              <a:rPr lang="en-US" sz="1500" dirty="0">
+                <a:solidFill>
+                  <a:srgbClr val="1A1A1A"/>
+                </a:solidFill>
+                <a:latin typeface="Montserrat" pitchFamily="34" charset="0"/>
+                <a:ea typeface="Montserrat" pitchFamily="34" charset="-122"/>
+                <a:cs typeface="Montserrat" pitchFamily="34" charset="-120"/>
+              </a:rPr>
+              <a:t>Détection des ambiguïtés et simulation avant le build.</a:t>
             </a:r>
             <a:endParaRPr lang="en-US" sz="1500" dirty="0"/>
           </a:p>
@@ -5363,7 +6521,7 @@
                 <a:ea typeface="Montserrat" pitchFamily="34" charset="-122"/>
                 <a:cs typeface="Montserrat" pitchFamily="34" charset="-120"/>
               </a:rPr>
-              <a:t>Reliez-le au bénéfice utilisateur.</a:t>
+              <a:t>Comparaison entre implémentation et spécification initiale.</a:t>
             </a:r>
             <a:endParaRPr lang="en-US" sz="1500" dirty="0"/>
           </a:p>
@@ -5451,7 +6609,7 @@
                 <a:ea typeface="JetBrains Mono" pitchFamily="34" charset="-122"/>
                 <a:cs typeface="JetBrains Mono" pitchFamily="34" charset="-120"/>
               </a:rPr>
-              <a:t>Glissez une image ici</a:t>
+              <a:t>Capture produit</a:t>
             </a:r>
             <a:endParaRPr lang="en-US" sz="1100" dirty="0"/>
           </a:p>
@@ -5537,7 +6695,7 @@
         <p:spPr>
           <a:xfrm>
             <a:off x="640080" y="640080"/>
-            <a:ext cx="7315200" cy="274320"/>
+            <a:ext cx="8229600" cy="274320"/>
           </a:xfrm>
           <a:prstGeom prst="rect">
             <a:avLst/>
@@ -5561,7 +6719,7 @@
                 <a:ea typeface="JetBrains Mono" pitchFamily="34" charset="-122"/>
                 <a:cs typeface="JetBrains Mono" pitchFamily="34" charset="-120"/>
               </a:rPr>
-              <a:t>RÉSULTATS</a:t>
+              <a:t>CE QUE ÇA CHANGE</a:t>
             </a:r>
             <a:endParaRPr lang="en-US" sz="1100" dirty="0"/>
           </a:p>
@@ -5600,7 +6758,7 @@
                 <a:ea typeface="Space Grotesk" pitchFamily="34" charset="-122"/>
                 <a:cs typeface="Space Grotesk" pitchFamily="34" charset="-120"/>
               </a:rPr>
-              <a:t>Les chiffres qui comptent</a:t>
+              <a:t>Plus vite, sans perdre le contrôle</a:t>
             </a:r>
             <a:endParaRPr lang="en-US" sz="3000" dirty="0"/>
           </a:p>
@@ -5648,24 +6806,27 @@
         </p:nvSpPr>
         <p:spPr>
           <a:xfrm>
-            <a:off x="914400" y="2697480"/>
-            <a:ext cx="2926080" cy="1188720"/>
-          </a:xfrm>
-          <a:prstGeom prst="rect">
-            <a:avLst/>
-          </a:prstGeom>
-          <a:noFill/>
-          <a:ln/>
-        </p:spPr>
-        <p:txBody>
-          <a:bodyPr wrap="square" lIns="0" tIns="0" rIns="0" bIns="0" rtlCol="0" anchor="ctr"/>
+            <a:off x="932688" y="2697480"/>
+            <a:ext cx="2926080" cy="1097280"/>
+          </a:xfrm>
+          <a:prstGeom prst="rect">
+            <a:avLst/>
+          </a:prstGeom>
+          <a:noFill/>
+          <a:ln/>
+        </p:spPr>
+        <p:txBody>
+          <a:bodyPr wrap="square" lIns="0" tIns="0" rIns="0" bIns="0" rtlCol="0" anchor="t"/>
           <a:lstStyle/>
           <a:p>
             <a:pPr indent="0" marL="0">
-              <a:buNone/>
-            </a:pPr>
-            <a:r>
-              <a:rPr lang="en-US" sz="5400" b="1" dirty="0">
+              <a:lnSpc>
+                <a:spcPct val="98000"/>
+              </a:lnSpc>
+              <a:buNone/>
+            </a:pPr>
+            <a:r>
+              <a:rPr lang="en-US" sz="2600" b="1" dirty="0">
                 <a:solidFill>
                   <a:srgbClr val="FFA101"/>
                 </a:solidFill>
@@ -5673,9 +6834,9 @@
                 <a:ea typeface="Space Grotesk" pitchFamily="34" charset="-122"/>
                 <a:cs typeface="Space Grotesk" pitchFamily="34" charset="-120"/>
               </a:rPr>
-              <a:t>85 %</a:t>
-            </a:r>
-            <a:endParaRPr lang="en-US" sz="5400" dirty="0"/>
+              <a:t>Moins de rework</a:t>
+            </a:r>
+            <a:endParaRPr lang="en-US" sz="2600" dirty="0"/>
           </a:p>
         </p:txBody>
       </p:sp>
@@ -5687,8 +6848,8 @@
         </p:nvSpPr>
         <p:spPr>
           <a:xfrm>
-            <a:off x="932688" y="3977640"/>
-            <a:ext cx="2926080" cy="822960"/>
+            <a:off x="932688" y="3886200"/>
+            <a:ext cx="2926080" cy="914400"/>
           </a:xfrm>
           <a:prstGeom prst="rect">
             <a:avLst/>
@@ -5702,12 +6863,12 @@
           <a:p>
             <a:pPr indent="0" marL="0">
               <a:lnSpc>
-                <a:spcPct val="110000"/>
+                <a:spcPct val="115000"/>
               </a:lnSpc>
               <a:buNone/>
             </a:pPr>
             <a:r>
-              <a:rPr lang="en-US" sz="1400" dirty="0">
+              <a:rPr lang="en-US" sz="1350" dirty="0">
                 <a:solidFill>
                   <a:srgbClr val="535462"/>
                 </a:solidFill>
@@ -5715,9 +6876,9 @@
                 <a:ea typeface="Montserrat" pitchFamily="34" charset="-122"/>
                 <a:cs typeface="Montserrat" pitchFamily="34" charset="-120"/>
               </a:rPr>
-              <a:t>d'un indicateur clé</a:t>
-            </a:r>
-            <a:endParaRPr lang="en-US" sz="1400" dirty="0"/>
+              <a:t>des specs claires, moins d'allers-retours</a:t>
+            </a:r>
+            <a:endParaRPr lang="en-US" sz="1350" dirty="0"/>
           </a:p>
         </p:txBody>
       </p:sp>
@@ -5763,24 +6924,27 @@
         </p:nvSpPr>
         <p:spPr>
           <a:xfrm>
-            <a:off x="4672584" y="2697480"/>
-            <a:ext cx="2926080" cy="1188720"/>
-          </a:xfrm>
-          <a:prstGeom prst="rect">
-            <a:avLst/>
-          </a:prstGeom>
-          <a:noFill/>
-          <a:ln/>
-        </p:spPr>
-        <p:txBody>
-          <a:bodyPr wrap="square" lIns="0" tIns="0" rIns="0" bIns="0" rtlCol="0" anchor="ctr"/>
+            <a:off x="4690872" y="2697480"/>
+            <a:ext cx="2926080" cy="1097280"/>
+          </a:xfrm>
+          <a:prstGeom prst="rect">
+            <a:avLst/>
+          </a:prstGeom>
+          <a:noFill/>
+          <a:ln/>
+        </p:spPr>
+        <p:txBody>
+          <a:bodyPr wrap="square" lIns="0" tIns="0" rIns="0" bIns="0" rtlCol="0" anchor="t"/>
           <a:lstStyle/>
           <a:p>
             <a:pPr indent="0" marL="0">
-              <a:buNone/>
-            </a:pPr>
-            <a:r>
-              <a:rPr lang="en-US" sz="5400" b="1" dirty="0">
+              <a:lnSpc>
+                <a:spcPct val="98000"/>
+              </a:lnSpc>
+              <a:buNone/>
+            </a:pPr>
+            <a:r>
+              <a:rPr lang="en-US" sz="2600" b="1" dirty="0">
                 <a:solidFill>
                   <a:srgbClr val="8047F4"/>
                 </a:solidFill>
@@ -5788,9 +6952,9 @@
                 <a:ea typeface="Space Grotesk" pitchFamily="34" charset="-122"/>
                 <a:cs typeface="Space Grotesk" pitchFamily="34" charset="-120"/>
               </a:rPr>
-              <a:t>2,4×</a:t>
-            </a:r>
-            <a:endParaRPr lang="en-US" sz="5400" dirty="0"/>
+              <a:t>Moins d'oublis</a:t>
+            </a:r>
+            <a:endParaRPr lang="en-US" sz="2600" dirty="0"/>
           </a:p>
         </p:txBody>
       </p:sp>
@@ -5802,8 +6966,8 @@
         </p:nvSpPr>
         <p:spPr>
           <a:xfrm>
-            <a:off x="4690872" y="3977640"/>
-            <a:ext cx="2926080" cy="822960"/>
+            <a:off x="4690872" y="3886200"/>
+            <a:ext cx="2926080" cy="914400"/>
           </a:xfrm>
           <a:prstGeom prst="rect">
             <a:avLst/>
@@ -5817,12 +6981,12 @@
           <a:p>
             <a:pPr indent="0" marL="0">
               <a:lnSpc>
-                <a:spcPct val="110000"/>
+                <a:spcPct val="115000"/>
               </a:lnSpc>
               <a:buNone/>
             </a:pPr>
             <a:r>
-              <a:rPr lang="en-US" sz="1400" dirty="0">
+              <a:rPr lang="en-US" sz="1350" dirty="0">
                 <a:solidFill>
                   <a:srgbClr val="535462"/>
                 </a:solidFill>
@@ -5830,9 +6994,9 @@
                 <a:ea typeface="Montserrat" pitchFamily="34" charset="-122"/>
                 <a:cs typeface="Montserrat" pitchFamily="34" charset="-120"/>
               </a:rPr>
-              <a:t>de progression mesurée</a:t>
-            </a:r>
-            <a:endParaRPr lang="en-US" sz="1400" dirty="0"/>
+              <a:t>états et parcours couverts de bout en bout</a:t>
+            </a:r>
+            <a:endParaRPr lang="en-US" sz="1350" dirty="0"/>
           </a:p>
         </p:txBody>
       </p:sp>
@@ -5878,24 +7042,27 @@
         </p:nvSpPr>
         <p:spPr>
           <a:xfrm>
-            <a:off x="8430768" y="2697480"/>
-            <a:ext cx="2926080" cy="1188720"/>
-          </a:xfrm>
-          <a:prstGeom prst="rect">
-            <a:avLst/>
-          </a:prstGeom>
-          <a:noFill/>
-          <a:ln/>
-        </p:spPr>
-        <p:txBody>
-          <a:bodyPr wrap="square" lIns="0" tIns="0" rIns="0" bIns="0" rtlCol="0" anchor="ctr"/>
+            <a:off x="8449056" y="2697480"/>
+            <a:ext cx="2926080" cy="1097280"/>
+          </a:xfrm>
+          <a:prstGeom prst="rect">
+            <a:avLst/>
+          </a:prstGeom>
+          <a:noFill/>
+          <a:ln/>
+        </p:spPr>
+        <p:txBody>
+          <a:bodyPr wrap="square" lIns="0" tIns="0" rIns="0" bIns="0" rtlCol="0" anchor="t"/>
           <a:lstStyle/>
           <a:p>
             <a:pPr indent="0" marL="0">
-              <a:buNone/>
-            </a:pPr>
-            <a:r>
-              <a:rPr lang="en-US" sz="5400" b="1" dirty="0">
+              <a:lnSpc>
+                <a:spcPct val="98000"/>
+              </a:lnSpc>
+              <a:buNone/>
+            </a:pPr>
+            <a:r>
+              <a:rPr lang="en-US" sz="2600" b="1" dirty="0">
                 <a:solidFill>
                   <a:srgbClr val="0066FF"/>
                 </a:solidFill>
@@ -5903,9 +7070,9 @@
                 <a:ea typeface="Space Grotesk" pitchFamily="34" charset="-122"/>
                 <a:cs typeface="Space Grotesk" pitchFamily="34" charset="-120"/>
               </a:rPr>
-              <a:t>+120</a:t>
-            </a:r>
-            <a:endParaRPr lang="en-US" sz="5400" dirty="0"/>
+              <a:t>Alignement vérifiable</a:t>
+            </a:r>
+            <a:endParaRPr lang="en-US" sz="2600" dirty="0"/>
           </a:p>
         </p:txBody>
       </p:sp>
@@ -5917,8 +7084,8 @@
         </p:nvSpPr>
         <p:spPr>
           <a:xfrm>
-            <a:off x="8449056" y="3977640"/>
-            <a:ext cx="2926080" cy="822960"/>
+            <a:off x="8449056" y="3886200"/>
+            <a:ext cx="2926080" cy="914400"/>
           </a:xfrm>
           <a:prstGeom prst="rect">
             <a:avLst/>
@@ -5932,12 +7099,12 @@
           <a:p>
             <a:pPr indent="0" marL="0">
               <a:lnSpc>
-                <a:spcPct val="110000"/>
+                <a:spcPct val="115000"/>
               </a:lnSpc>
               <a:buNone/>
             </a:pPr>
             <a:r>
-              <a:rPr lang="en-US" sz="1400" dirty="0">
+              <a:rPr lang="en-US" sz="1350" dirty="0">
                 <a:solidFill>
                   <a:srgbClr val="535462"/>
                 </a:solidFill>
@@ -5945,9 +7112,9 @@
                 <a:ea typeface="Montserrat" pitchFamily="34" charset="-122"/>
                 <a:cs typeface="Montserrat" pitchFamily="34" charset="-120"/>
               </a:rPr>
-              <a:t>unités / mois</a:t>
-            </a:r>
-            <a:endParaRPr lang="en-US" sz="1400" dirty="0"/>
+              <a:t>intention ↔ implémentation, en continu</a:t>
+            </a:r>
+            <a:endParaRPr lang="en-US" sz="1350" dirty="0"/>
           </a:p>
         </p:txBody>
       </p:sp>
@@ -6001,6 +7168,530 @@
 <file path=ppt/slides/slide8.xml><?xml version="1.0" encoding="utf-8"?>
 <p:sld xmlns:a="http://schemas.openxmlformats.org/drawingml/2006/main" xmlns:r="http://schemas.openxmlformats.org/officeDocument/2006/relationships" xmlns:p="http://schemas.openxmlformats.org/presentationml/2006/main">
   <p:cSld name="Slide 8">
+    <p:bg>
+      <p:bgPr>
+        <a:solidFill>
+          <a:srgbClr val="FFFFFF"/>
+        </a:solidFill>
+      </p:bgPr>
+    </p:bg>
+    <p:spTree>
+      <p:nvGrpSpPr>
+        <p:cNvPr id="1" name=""/>
+        <p:cNvGrpSpPr/>
+        <p:nvPr/>
+      </p:nvGrpSpPr>
+      <p:grpSpPr>
+        <a:xfrm>
+          <a:off x="0" y="0"/>
+          <a:ext cx="0" cy="0"/>
+          <a:chOff x="0" y="0"/>
+          <a:chExt cx="0" cy="0"/>
+        </a:xfrm>
+      </p:grpSpPr>
+      <p:sp>
+        <p:nvSpPr>
+          <p:cNvPr id="2" name="Text 0"/>
+          <p:cNvSpPr/>
+          <p:nvPr/>
+        </p:nvSpPr>
+        <p:spPr>
+          <a:xfrm>
+            <a:off x="640080" y="640080"/>
+            <a:ext cx="8229600" cy="274320"/>
+          </a:xfrm>
+          <a:prstGeom prst="rect">
+            <a:avLst/>
+          </a:prstGeom>
+          <a:noFill/>
+          <a:ln/>
+        </p:spPr>
+        <p:txBody>
+          <a:bodyPr wrap="square" lIns="0" tIns="0" rIns="0" bIns="0" rtlCol="0" anchor="ctr"/>
+          <a:lstStyle/>
+          <a:p>
+            <a:pPr indent="0" marL="0">
+              <a:buNone/>
+            </a:pPr>
+            <a:r>
+              <a:rPr lang="en-US" sz="1100" b="1" spc="250" kern="0" dirty="0">
+                <a:solidFill>
+                  <a:srgbClr val="1FA98A"/>
+                </a:solidFill>
+                <a:latin typeface="JetBrains Mono" pitchFamily="34" charset="0"/>
+                <a:ea typeface="JetBrains Mono" pitchFamily="34" charset="-122"/>
+                <a:cs typeface="JetBrains Mono" pitchFamily="34" charset="-120"/>
+              </a:rPr>
+              <a:t>POUR QUI</a:t>
+            </a:r>
+            <a:endParaRPr lang="en-US" sz="1100" dirty="0"/>
+          </a:p>
+        </p:txBody>
+      </p:sp>
+      <p:sp>
+        <p:nvSpPr>
+          <p:cNvPr id="3" name="Text 1"/>
+          <p:cNvSpPr/>
+          <p:nvPr/>
+        </p:nvSpPr>
+        <p:spPr>
+          <a:xfrm>
+            <a:off x="640080" y="960120"/>
+            <a:ext cx="10058400" cy="822960"/>
+          </a:xfrm>
+          <a:prstGeom prst="rect">
+            <a:avLst/>
+          </a:prstGeom>
+          <a:noFill/>
+          <a:ln/>
+        </p:spPr>
+        <p:txBody>
+          <a:bodyPr wrap="square" lIns="0" tIns="0" rIns="0" bIns="0" rtlCol="0" anchor="ctr"/>
+          <a:lstStyle/>
+          <a:p>
+            <a:pPr indent="0" marL="0">
+              <a:buNone/>
+            </a:pPr>
+            <a:r>
+              <a:rPr lang="en-US" sz="3000" b="1" dirty="0">
+                <a:solidFill>
+                  <a:srgbClr val="0A0A0A"/>
+                </a:solidFill>
+                <a:latin typeface="Space Grotesk" pitchFamily="34" charset="0"/>
+                <a:ea typeface="Space Grotesk" pitchFamily="34" charset="-122"/>
+                <a:cs typeface="Space Grotesk" pitchFamily="34" charset="-120"/>
+              </a:rPr>
+              <a:t>Chaque expertise fait avancer le produit</a:t>
+            </a:r>
+            <a:endParaRPr lang="en-US" sz="3000" dirty="0"/>
+          </a:p>
+        </p:txBody>
+      </p:sp>
+      <p:sp>
+        <p:nvSpPr>
+          <p:cNvPr id="4" name="Shape 2"/>
+          <p:cNvSpPr/>
+          <p:nvPr/>
+        </p:nvSpPr>
+        <p:spPr>
+          <a:xfrm>
+            <a:off x="640080" y="2011680"/>
+            <a:ext cx="457200" cy="457200"/>
+          </a:xfrm>
+          <a:prstGeom prst="roundRect">
+            <a:avLst>
+              <a:gd name="adj" fmla="val 16000"/>
+            </a:avLst>
+          </a:prstGeom>
+          <a:solidFill>
+            <a:srgbClr val="0066FF"/>
+          </a:solidFill>
+          <a:ln/>
+        </p:spPr>
+      </p:sp>
+      <p:sp>
+        <p:nvSpPr>
+          <p:cNvPr id="5" name="Text 3"/>
+          <p:cNvSpPr/>
+          <p:nvPr/>
+        </p:nvSpPr>
+        <p:spPr>
+          <a:xfrm>
+            <a:off x="1353312" y="1975104"/>
+            <a:ext cx="10424160" cy="530352"/>
+          </a:xfrm>
+          <a:prstGeom prst="rect">
+            <a:avLst/>
+          </a:prstGeom>
+          <a:noFill/>
+          <a:ln/>
+        </p:spPr>
+        <p:txBody>
+          <a:bodyPr wrap="square" lIns="0" tIns="0" rIns="0" bIns="0" rtlCol="0" anchor="ctr"/>
+          <a:lstStyle/>
+          <a:p>
+            <a:pPr indent="0" marL="0">
+              <a:buNone/>
+            </a:pPr>
+            <a:r>
+              <a:rPr lang="en-US" sz="1700" b="1" dirty="0">
+                <a:solidFill>
+                  <a:srgbClr val="0A0A0A"/>
+                </a:solidFill>
+                <a:latin typeface="Space Grotesk" pitchFamily="34" charset="0"/>
+                <a:ea typeface="Space Grotesk" pitchFamily="34" charset="-122"/>
+                <a:cs typeface="Space Grotesk" pitchFamily="34" charset="-120"/>
+              </a:rPr>
+              <a:t>Produit  </a:t>
+            </a:r>
+            <a:pPr indent="0" marL="0">
+              <a:buNone/>
+            </a:pPr>
+            <a:r>
+              <a:rPr lang="en-US" sz="1400" dirty="0">
+                <a:solidFill>
+                  <a:srgbClr val="535462"/>
+                </a:solidFill>
+                <a:latin typeface="Montserrat" pitchFamily="34" charset="0"/>
+                <a:ea typeface="Montserrat" pitchFamily="34" charset="-122"/>
+                <a:cs typeface="Montserrat" pitchFamily="34" charset="-120"/>
+              </a:rPr>
+              <a:t>Transformer l'intention produit en spécifications.</a:t>
+            </a:r>
+            <a:endParaRPr lang="en-US" sz="1700" dirty="0"/>
+          </a:p>
+        </p:txBody>
+      </p:sp>
+      <p:sp>
+        <p:nvSpPr>
+          <p:cNvPr id="6" name="Shape 4"/>
+          <p:cNvSpPr/>
+          <p:nvPr/>
+        </p:nvSpPr>
+        <p:spPr>
+          <a:xfrm>
+            <a:off x="640080" y="2761488"/>
+            <a:ext cx="457200" cy="457200"/>
+          </a:xfrm>
+          <a:prstGeom prst="roundRect">
+            <a:avLst>
+              <a:gd name="adj" fmla="val 16000"/>
+            </a:avLst>
+          </a:prstGeom>
+          <a:solidFill>
+            <a:srgbClr val="FA5FB2"/>
+          </a:solidFill>
+          <a:ln/>
+        </p:spPr>
+      </p:sp>
+      <p:sp>
+        <p:nvSpPr>
+          <p:cNvPr id="7" name="Text 5"/>
+          <p:cNvSpPr/>
+          <p:nvPr/>
+        </p:nvSpPr>
+        <p:spPr>
+          <a:xfrm>
+            <a:off x="1353312" y="2724912"/>
+            <a:ext cx="10424160" cy="530352"/>
+          </a:xfrm>
+          <a:prstGeom prst="rect">
+            <a:avLst/>
+          </a:prstGeom>
+          <a:noFill/>
+          <a:ln/>
+        </p:spPr>
+        <p:txBody>
+          <a:bodyPr wrap="square" lIns="0" tIns="0" rIns="0" bIns="0" rtlCol="0" anchor="ctr"/>
+          <a:lstStyle/>
+          <a:p>
+            <a:pPr indent="0" marL="0">
+              <a:buNone/>
+            </a:pPr>
+            <a:r>
+              <a:rPr lang="en-US" sz="1700" b="1" dirty="0">
+                <a:solidFill>
+                  <a:srgbClr val="0A0A0A"/>
+                </a:solidFill>
+                <a:latin typeface="Space Grotesk" pitchFamily="34" charset="0"/>
+                <a:ea typeface="Space Grotesk" pitchFamily="34" charset="-122"/>
+                <a:cs typeface="Space Grotesk" pitchFamily="34" charset="-120"/>
+              </a:rPr>
+              <a:t>Design  </a:t>
+            </a:r>
+            <a:pPr indent="0" marL="0">
+              <a:buNone/>
+            </a:pPr>
+            <a:r>
+              <a:rPr lang="en-US" sz="1400" dirty="0">
+                <a:solidFill>
+                  <a:srgbClr val="535462"/>
+                </a:solidFill>
+                <a:latin typeface="Montserrat" pitchFamily="34" charset="0"/>
+                <a:ea typeface="Montserrat" pitchFamily="34" charset="-122"/>
+                <a:cs typeface="Montserrat" pitchFamily="34" charset="-120"/>
+              </a:rPr>
+              <a:t>Concevoir des parcours cohérents de bout en bout.</a:t>
+            </a:r>
+            <a:endParaRPr lang="en-US" sz="1700" dirty="0"/>
+          </a:p>
+        </p:txBody>
+      </p:sp>
+      <p:sp>
+        <p:nvSpPr>
+          <p:cNvPr id="8" name="Shape 6"/>
+          <p:cNvSpPr/>
+          <p:nvPr/>
+        </p:nvSpPr>
+        <p:spPr>
+          <a:xfrm>
+            <a:off x="640080" y="3511296"/>
+            <a:ext cx="457200" cy="457200"/>
+          </a:xfrm>
+          <a:prstGeom prst="roundRect">
+            <a:avLst>
+              <a:gd name="adj" fmla="val 16000"/>
+            </a:avLst>
+          </a:prstGeom>
+          <a:solidFill>
+            <a:srgbClr val="8047F4"/>
+          </a:solidFill>
+          <a:ln/>
+        </p:spPr>
+      </p:sp>
+      <p:sp>
+        <p:nvSpPr>
+          <p:cNvPr id="9" name="Text 7"/>
+          <p:cNvSpPr/>
+          <p:nvPr/>
+        </p:nvSpPr>
+        <p:spPr>
+          <a:xfrm>
+            <a:off x="1353312" y="3474720"/>
+            <a:ext cx="10424160" cy="530352"/>
+          </a:xfrm>
+          <a:prstGeom prst="rect">
+            <a:avLst/>
+          </a:prstGeom>
+          <a:noFill/>
+          <a:ln/>
+        </p:spPr>
+        <p:txBody>
+          <a:bodyPr wrap="square" lIns="0" tIns="0" rIns="0" bIns="0" rtlCol="0" anchor="ctr"/>
+          <a:lstStyle/>
+          <a:p>
+            <a:pPr indent="0" marL="0">
+              <a:buNone/>
+            </a:pPr>
+            <a:r>
+              <a:rPr lang="en-US" sz="1700" b="1" dirty="0">
+                <a:solidFill>
+                  <a:srgbClr val="0A0A0A"/>
+                </a:solidFill>
+                <a:latin typeface="Space Grotesk" pitchFamily="34" charset="0"/>
+                <a:ea typeface="Space Grotesk" pitchFamily="34" charset="-122"/>
+                <a:cs typeface="Space Grotesk" pitchFamily="34" charset="-120"/>
+              </a:rPr>
+              <a:t>Développement  </a:t>
+            </a:r>
+            <a:pPr indent="0" marL="0">
+              <a:buNone/>
+            </a:pPr>
+            <a:r>
+              <a:rPr lang="en-US" sz="1400" dirty="0">
+                <a:solidFill>
+                  <a:srgbClr val="535462"/>
+                </a:solidFill>
+                <a:latin typeface="Montserrat" pitchFamily="34" charset="0"/>
+                <a:ea typeface="Montserrat" pitchFamily="34" charset="-122"/>
+                <a:cs typeface="Montserrat" pitchFamily="34" charset="-120"/>
+              </a:rPr>
+              <a:t>Construire à partir d'une spécification vérifiable.</a:t>
+            </a:r>
+            <a:endParaRPr lang="en-US" sz="1700" dirty="0"/>
+          </a:p>
+        </p:txBody>
+      </p:sp>
+      <p:sp>
+        <p:nvSpPr>
+          <p:cNvPr id="10" name="Shape 8"/>
+          <p:cNvSpPr/>
+          <p:nvPr/>
+        </p:nvSpPr>
+        <p:spPr>
+          <a:xfrm>
+            <a:off x="640080" y="4261104"/>
+            <a:ext cx="457200" cy="457200"/>
+          </a:xfrm>
+          <a:prstGeom prst="roundRect">
+            <a:avLst>
+              <a:gd name="adj" fmla="val 16000"/>
+            </a:avLst>
+          </a:prstGeom>
+          <a:solidFill>
+            <a:srgbClr val="1FA98A"/>
+          </a:solidFill>
+          <a:ln/>
+        </p:spPr>
+      </p:sp>
+      <p:sp>
+        <p:nvSpPr>
+          <p:cNvPr id="11" name="Text 9"/>
+          <p:cNvSpPr/>
+          <p:nvPr/>
+        </p:nvSpPr>
+        <p:spPr>
+          <a:xfrm>
+            <a:off x="1353312" y="4224528"/>
+            <a:ext cx="10424160" cy="530352"/>
+          </a:xfrm>
+          <a:prstGeom prst="rect">
+            <a:avLst/>
+          </a:prstGeom>
+          <a:noFill/>
+          <a:ln/>
+        </p:spPr>
+        <p:txBody>
+          <a:bodyPr wrap="square" lIns="0" tIns="0" rIns="0" bIns="0" rtlCol="0" anchor="ctr"/>
+          <a:lstStyle/>
+          <a:p>
+            <a:pPr indent="0" marL="0">
+              <a:buNone/>
+            </a:pPr>
+            <a:r>
+              <a:rPr lang="en-US" sz="1700" b="1" dirty="0">
+                <a:solidFill>
+                  <a:srgbClr val="0A0A0A"/>
+                </a:solidFill>
+                <a:latin typeface="Space Grotesk" pitchFamily="34" charset="0"/>
+                <a:ea typeface="Space Grotesk" pitchFamily="34" charset="-122"/>
+                <a:cs typeface="Space Grotesk" pitchFamily="34" charset="-120"/>
+              </a:rPr>
+              <a:t>Management  </a:t>
+            </a:r>
+            <a:pPr indent="0" marL="0">
+              <a:buNone/>
+            </a:pPr>
+            <a:r>
+              <a:rPr lang="en-US" sz="1400" dirty="0">
+                <a:solidFill>
+                  <a:srgbClr val="535462"/>
+                </a:solidFill>
+                <a:latin typeface="Montserrat" pitchFamily="34" charset="0"/>
+                <a:ea typeface="Montserrat" pitchFamily="34" charset="-122"/>
+                <a:cs typeface="Montserrat" pitchFamily="34" charset="-120"/>
+              </a:rPr>
+              <a:t>Garder l'alignement, la qualité et le contrôle.</a:t>
+            </a:r>
+            <a:endParaRPr lang="en-US" sz="1700" dirty="0"/>
+          </a:p>
+        </p:txBody>
+      </p:sp>
+      <p:sp>
+        <p:nvSpPr>
+          <p:cNvPr id="12" name="Shape 10"/>
+          <p:cNvSpPr/>
+          <p:nvPr/>
+        </p:nvSpPr>
+        <p:spPr>
+          <a:xfrm>
+            <a:off x="640080" y="5010912"/>
+            <a:ext cx="457200" cy="457200"/>
+          </a:xfrm>
+          <a:prstGeom prst="roundRect">
+            <a:avLst>
+              <a:gd name="adj" fmla="val 16000"/>
+            </a:avLst>
+          </a:prstGeom>
+          <a:solidFill>
+            <a:srgbClr val="FFA101"/>
+          </a:solidFill>
+          <a:ln/>
+        </p:spPr>
+      </p:sp>
+      <p:sp>
+        <p:nvSpPr>
+          <p:cNvPr id="13" name="Text 11"/>
+          <p:cNvSpPr/>
+          <p:nvPr/>
+        </p:nvSpPr>
+        <p:spPr>
+          <a:xfrm>
+            <a:off x="1353312" y="4974336"/>
+            <a:ext cx="10424160" cy="530352"/>
+          </a:xfrm>
+          <a:prstGeom prst="rect">
+            <a:avLst/>
+          </a:prstGeom>
+          <a:noFill/>
+          <a:ln/>
+        </p:spPr>
+        <p:txBody>
+          <a:bodyPr wrap="square" lIns="0" tIns="0" rIns="0" bIns="0" rtlCol="0" anchor="ctr"/>
+          <a:lstStyle/>
+          <a:p>
+            <a:pPr indent="0" marL="0">
+              <a:buNone/>
+            </a:pPr>
+            <a:r>
+              <a:rPr lang="en-US" sz="1700" b="1" dirty="0">
+                <a:solidFill>
+                  <a:srgbClr val="0A0A0A"/>
+                </a:solidFill>
+                <a:latin typeface="Space Grotesk" pitchFamily="34" charset="0"/>
+                <a:ea typeface="Space Grotesk" pitchFamily="34" charset="-122"/>
+                <a:cs typeface="Space Grotesk" pitchFamily="34" charset="-120"/>
+              </a:rPr>
+              <a:t>Finance  </a:t>
+            </a:r>
+            <a:pPr indent="0" marL="0">
+              <a:buNone/>
+            </a:pPr>
+            <a:r>
+              <a:rPr lang="en-US" sz="1400" dirty="0">
+                <a:solidFill>
+                  <a:srgbClr val="535462"/>
+                </a:solidFill>
+                <a:latin typeface="Montserrat" pitchFamily="34" charset="0"/>
+                <a:ea typeface="Montserrat" pitchFamily="34" charset="-122"/>
+                <a:cs typeface="Montserrat" pitchFamily="34" charset="-120"/>
+              </a:rPr>
+              <a:t>Piloter l'usage et la rentabilité réelle de l'IA.</a:t>
+            </a:r>
+            <a:endParaRPr lang="en-US" sz="1700" dirty="0"/>
+          </a:p>
+        </p:txBody>
+      </p:sp>
+      <p:sp>
+        <p:nvSpPr>
+          <p:cNvPr id="14" name="Text 12"/>
+          <p:cNvSpPr/>
+          <p:nvPr/>
+        </p:nvSpPr>
+        <p:spPr>
+          <a:xfrm>
+            <a:off x="11185855" y="6400800"/>
+            <a:ext cx="548640" cy="274320"/>
+          </a:xfrm>
+          <a:prstGeom prst="rect">
+            <a:avLst/>
+          </a:prstGeom>
+          <a:noFill/>
+          <a:ln/>
+        </p:spPr>
+        <p:txBody>
+          <a:bodyPr wrap="square" lIns="0" tIns="0" rIns="0" bIns="0" rtlCol="0" anchor="ctr"/>
+          <a:lstStyle/>
+          <a:p>
+            <a:pPr algn="r" indent="0" marL="0">
+              <a:buNone/>
+            </a:pPr>
+            <a:r>
+              <a:rPr lang="en-US" sz="1000" dirty="0">
+                <a:solidFill>
+                  <a:srgbClr val="9296A6"/>
+                </a:solidFill>
+                <a:latin typeface="JetBrains Mono" pitchFamily="34" charset="0"/>
+                <a:ea typeface="JetBrains Mono" pitchFamily="34" charset="-122"/>
+                <a:cs typeface="JetBrains Mono" pitchFamily="34" charset="-120"/>
+              </a:rPr>
+              <a:t>08</a:t>
+            </a:r>
+            <a:endParaRPr lang="en-US" sz="1000" dirty="0"/>
+          </a:p>
+        </p:txBody>
+      </p:sp>
+    </p:spTree>
+  </p:cSld>
+  <p:clrMapOvr>
+    <a:masterClrMapping/>
+  </p:clrMapOvr>
+</p:sld>
+</file>
+
+<file path=ppt/slides/slide9.xml><?xml version="1.0" encoding="utf-8"?>
+<p:sld xmlns:a="http://schemas.openxmlformats.org/drawingml/2006/main" xmlns:r="http://schemas.openxmlformats.org/officeDocument/2006/relationships" xmlns:p="http://schemas.openxmlformats.org/presentationml/2006/main">
+  <p:cSld name="Slide 9">
     <p:bg>
       <p:bgPr>
         <a:solidFill>
@@ -6030,7 +7721,7 @@
         </p:nvSpPr>
         <p:spPr>
           <a:xfrm>
-            <a:off x="548640" y="731520"/>
+            <a:off x="548640" y="640080"/>
             <a:ext cx="1828800" cy="1463040"/>
           </a:xfrm>
           <a:prstGeom prst="rect">
@@ -6070,7 +7761,7 @@
         <p:spPr>
           <a:xfrm>
             <a:off x="640080" y="2286000"/>
-            <a:ext cx="10607040" cy="2011680"/>
+            <a:ext cx="10607040" cy="1828800"/>
           </a:xfrm>
           <a:prstGeom prst="rect">
             <a:avLst/>
@@ -6089,7 +7780,7 @@
               <a:buNone/>
             </a:pPr>
             <a:r>
-              <a:rPr lang="en-US" sz="3400" b="1" i="1" dirty="0">
+              <a:rPr lang="en-US" sz="3800" b="1" i="1" dirty="0">
                 <a:solidFill>
                   <a:srgbClr val="0A0A0A"/>
                 </a:solidFill>
@@ -6097,9 +7788,9 @@
                 <a:ea typeface="Space Grotesk" pitchFamily="34" charset="-122"/>
                 <a:cs typeface="Space Grotesk" pitchFamily="34" charset="-120"/>
               </a:rPr>
-              <a:t>Une citation marquante tient en une ou deux lignes et porte une seule idée forte.</a:t>
-            </a:r>
-            <a:endParaRPr lang="en-US" sz="3400" dirty="0"/>
+              <a:t>De l'intention produit à l'implémentation, sans dérive.</a:t>
+            </a:r>
+            <a:endParaRPr lang="en-US" sz="3800" dirty="0"/>
           </a:p>
         </p:txBody>
       </p:sp>
@@ -6111,8 +7802,8 @@
         </p:nvSpPr>
         <p:spPr>
           <a:xfrm>
-            <a:off x="640080" y="4937760"/>
-            <a:ext cx="7315200" cy="731520"/>
+            <a:off x="640080" y="4754880"/>
+            <a:ext cx="8229600" cy="731520"/>
           </a:xfrm>
           <a:prstGeom prst="rect">
             <a:avLst/>
@@ -6139,7 +7830,7 @@
                 <a:ea typeface="Montserrat" pitchFamily="34" charset="-122"/>
                 <a:cs typeface="Montserrat" pitchFamily="34" charset="-120"/>
               </a:rPr>
-              <a:t>Prénom Nom</a:t>
+              <a:t>Lyriks</a:t>
             </a:r>
             <a:endParaRPr lang="en-US" sz="1500" dirty="0"/>
           </a:p>
@@ -6159,7 +7850,7 @@
                 <a:ea typeface="JetBrains Mono" pitchFamily="34" charset="-122"/>
                 <a:cs typeface="JetBrains Mono" pitchFamily="34" charset="-120"/>
               </a:rPr>
-              <a:t>Fonction · Organisation</a:t>
+              <a:t>La cohérence produit à l'ère de l'IA</a:t>
             </a:r>
             <a:endParaRPr lang="en-US" sz="1500" dirty="0"/>
           </a:p>
@@ -6168,870 +7859,6 @@
       <p:sp>
         <p:nvSpPr>
           <p:cNvPr id="5" name="Text 3"/>
-          <p:cNvSpPr/>
-          <p:nvPr/>
-        </p:nvSpPr>
-        <p:spPr>
-          <a:xfrm>
-            <a:off x="11185855" y="6400800"/>
-            <a:ext cx="548640" cy="274320"/>
-          </a:xfrm>
-          <a:prstGeom prst="rect">
-            <a:avLst/>
-          </a:prstGeom>
-          <a:noFill/>
-          <a:ln/>
-        </p:spPr>
-        <p:txBody>
-          <a:bodyPr wrap="square" lIns="0" tIns="0" rIns="0" bIns="0" rtlCol="0" anchor="ctr"/>
-          <a:lstStyle/>
-          <a:p>
-            <a:pPr algn="r" indent="0" marL="0">
-              <a:buNone/>
-            </a:pPr>
-            <a:r>
-              <a:rPr lang="en-US" sz="1000" dirty="0">
-                <a:solidFill>
-                  <a:srgbClr val="9296A6"/>
-                </a:solidFill>
-                <a:latin typeface="JetBrains Mono" pitchFamily="34" charset="0"/>
-                <a:ea typeface="JetBrains Mono" pitchFamily="34" charset="-122"/>
-                <a:cs typeface="JetBrains Mono" pitchFamily="34" charset="-120"/>
-              </a:rPr>
-              <a:t>08</a:t>
-            </a:r>
-            <a:endParaRPr lang="en-US" sz="1000" dirty="0"/>
-          </a:p>
-        </p:txBody>
-      </p:sp>
-    </p:spTree>
-  </p:cSld>
-  <p:clrMapOvr>
-    <a:masterClrMapping/>
-  </p:clrMapOvr>
-</p:sld>
-</file>
-
-<file path=ppt/slides/slide9.xml><?xml version="1.0" encoding="utf-8"?>
-<p:sld xmlns:a="http://schemas.openxmlformats.org/drawingml/2006/main" xmlns:r="http://schemas.openxmlformats.org/officeDocument/2006/relationships" xmlns:p="http://schemas.openxmlformats.org/presentationml/2006/main">
-  <p:cSld name="Slide 9">
-    <p:bg>
-      <p:bgPr>
-        <a:solidFill>
-          <a:srgbClr val="FFFFFF"/>
-        </a:solidFill>
-      </p:bgPr>
-    </p:bg>
-    <p:spTree>
-      <p:nvGrpSpPr>
-        <p:cNvPr id="1" name=""/>
-        <p:cNvGrpSpPr/>
-        <p:nvPr/>
-      </p:nvGrpSpPr>
-      <p:grpSpPr>
-        <a:xfrm>
-          <a:off x="0" y="0"/>
-          <a:ext cx="0" cy="0"/>
-          <a:chOff x="0" y="0"/>
-          <a:chExt cx="0" cy="0"/>
-        </a:xfrm>
-      </p:grpSpPr>
-      <p:sp>
-        <p:nvSpPr>
-          <p:cNvPr id="2" name="Text 0"/>
-          <p:cNvSpPr/>
-          <p:nvPr/>
-        </p:nvSpPr>
-        <p:spPr>
-          <a:xfrm>
-            <a:off x="640080" y="640080"/>
-            <a:ext cx="7315200" cy="274320"/>
-          </a:xfrm>
-          <a:prstGeom prst="rect">
-            <a:avLst/>
-          </a:prstGeom>
-          <a:noFill/>
-          <a:ln/>
-        </p:spPr>
-        <p:txBody>
-          <a:bodyPr wrap="square" lIns="0" tIns="0" rIns="0" bIns="0" rtlCol="0" anchor="ctr"/>
-          <a:lstStyle/>
-          <a:p>
-            <a:pPr indent="0" marL="0">
-              <a:buNone/>
-            </a:pPr>
-            <a:r>
-              <a:rPr lang="en-US" sz="1100" b="1" spc="250" kern="0" dirty="0">
-                <a:solidFill>
-                  <a:srgbClr val="FFA101"/>
-                </a:solidFill>
-                <a:latin typeface="JetBrains Mono" pitchFamily="34" charset="0"/>
-                <a:ea typeface="JetBrains Mono" pitchFamily="34" charset="-122"/>
-                <a:cs typeface="JetBrains Mono" pitchFamily="34" charset="-120"/>
-              </a:rPr>
-              <a:t>COMPARAISON</a:t>
-            </a:r>
-            <a:endParaRPr lang="en-US" sz="1100" dirty="0"/>
-          </a:p>
-        </p:txBody>
-      </p:sp>
-      <p:sp>
-        <p:nvSpPr>
-          <p:cNvPr id="3" name="Text 1"/>
-          <p:cNvSpPr/>
-          <p:nvPr/>
-        </p:nvSpPr>
-        <p:spPr>
-          <a:xfrm>
-            <a:off x="640080" y="960120"/>
-            <a:ext cx="10058400" cy="822960"/>
-          </a:xfrm>
-          <a:prstGeom prst="rect">
-            <a:avLst/>
-          </a:prstGeom>
-          <a:noFill/>
-          <a:ln/>
-        </p:spPr>
-        <p:txBody>
-          <a:bodyPr wrap="square" lIns="0" tIns="0" rIns="0" bIns="0" rtlCol="0" anchor="ctr"/>
-          <a:lstStyle/>
-          <a:p>
-            <a:pPr indent="0" marL="0">
-              <a:buNone/>
-            </a:pPr>
-            <a:r>
-              <a:rPr lang="en-US" sz="3000" b="1" dirty="0">
-                <a:solidFill>
-                  <a:srgbClr val="0A0A0A"/>
-                </a:solidFill>
-                <a:latin typeface="Space Grotesk" pitchFamily="34" charset="0"/>
-                <a:ea typeface="Space Grotesk" pitchFamily="34" charset="-122"/>
-                <a:cs typeface="Space Grotesk" pitchFamily="34" charset="-120"/>
-              </a:rPr>
-              <a:t>Mettre les options en regard</a:t>
-            </a:r>
-            <a:endParaRPr lang="en-US" sz="3000" dirty="0"/>
-          </a:p>
-        </p:txBody>
-      </p:sp>
-      <p:sp>
-        <p:nvSpPr>
-          <p:cNvPr id="4" name="Shape 2"/>
-          <p:cNvSpPr/>
-          <p:nvPr/>
-        </p:nvSpPr>
-        <p:spPr>
-          <a:xfrm>
-            <a:off x="640080" y="2148840"/>
-            <a:ext cx="10908792" cy="603504"/>
-          </a:xfrm>
-          <a:prstGeom prst="roundRect">
-            <a:avLst>
-              <a:gd name="adj" fmla="val 9091"/>
-            </a:avLst>
-          </a:prstGeom>
-          <a:solidFill>
-            <a:srgbClr val="0A0A0A"/>
-          </a:solidFill>
-          <a:ln/>
-        </p:spPr>
-      </p:sp>
-      <p:sp>
-        <p:nvSpPr>
-          <p:cNvPr id="5" name="Text 3"/>
-          <p:cNvSpPr/>
-          <p:nvPr/>
-        </p:nvSpPr>
-        <p:spPr>
-          <a:xfrm>
-            <a:off x="960120" y="2148840"/>
-            <a:ext cx="3566160" cy="603504"/>
-          </a:xfrm>
-          <a:prstGeom prst="rect">
-            <a:avLst/>
-          </a:prstGeom>
-          <a:noFill/>
-          <a:ln/>
-        </p:spPr>
-        <p:txBody>
-          <a:bodyPr wrap="square" lIns="0" tIns="0" rIns="0" bIns="0" rtlCol="0" anchor="ctr"/>
-          <a:lstStyle/>
-          <a:p>
-            <a:pPr indent="0" marL="0">
-              <a:buNone/>
-            </a:pPr>
-            <a:r>
-              <a:rPr lang="en-US" sz="1400" b="1" dirty="0">
-                <a:solidFill>
-                  <a:srgbClr val="FFFFFF"/>
-                </a:solidFill>
-                <a:latin typeface="Space Grotesk" pitchFamily="34" charset="0"/>
-                <a:ea typeface="Space Grotesk" pitchFamily="34" charset="-122"/>
-                <a:cs typeface="Space Grotesk" pitchFamily="34" charset="-120"/>
-              </a:rPr>
-              <a:t>Critère</a:t>
-            </a:r>
-            <a:endParaRPr lang="en-US" sz="1400" dirty="0"/>
-          </a:p>
-        </p:txBody>
-      </p:sp>
-      <p:sp>
-        <p:nvSpPr>
-          <p:cNvPr id="6" name="Text 4"/>
-          <p:cNvSpPr/>
-          <p:nvPr/>
-        </p:nvSpPr>
-        <p:spPr>
-          <a:xfrm>
-            <a:off x="4846320" y="2148840"/>
-            <a:ext cx="3200400" cy="603504"/>
-          </a:xfrm>
-          <a:prstGeom prst="rect">
-            <a:avLst/>
-          </a:prstGeom>
-          <a:noFill/>
-          <a:ln/>
-        </p:spPr>
-        <p:txBody>
-          <a:bodyPr wrap="square" lIns="0" tIns="0" rIns="0" bIns="0" rtlCol="0" anchor="ctr"/>
-          <a:lstStyle/>
-          <a:p>
-            <a:pPr indent="0" marL="0">
-              <a:buNone/>
-            </a:pPr>
-            <a:r>
-              <a:rPr lang="en-US" sz="1400" b="1" dirty="0">
-                <a:solidFill>
-                  <a:srgbClr val="FFFFFF"/>
-                </a:solidFill>
-                <a:latin typeface="Space Grotesk" pitchFamily="34" charset="0"/>
-                <a:ea typeface="Space Grotesk" pitchFamily="34" charset="-122"/>
-                <a:cs typeface="Space Grotesk" pitchFamily="34" charset="-120"/>
-              </a:rPr>
-              <a:t>Option A</a:t>
-            </a:r>
-            <a:endParaRPr lang="en-US" sz="1400" dirty="0"/>
-          </a:p>
-        </p:txBody>
-      </p:sp>
-      <p:sp>
-        <p:nvSpPr>
-          <p:cNvPr id="7" name="Text 5"/>
-          <p:cNvSpPr/>
-          <p:nvPr/>
-        </p:nvSpPr>
-        <p:spPr>
-          <a:xfrm>
-            <a:off x="8229600" y="2148840"/>
-            <a:ext cx="3200400" cy="603504"/>
-          </a:xfrm>
-          <a:prstGeom prst="rect">
-            <a:avLst/>
-          </a:prstGeom>
-          <a:noFill/>
-          <a:ln/>
-        </p:spPr>
-        <p:txBody>
-          <a:bodyPr wrap="square" lIns="0" tIns="0" rIns="0" bIns="0" rtlCol="0" anchor="ctr"/>
-          <a:lstStyle/>
-          <a:p>
-            <a:pPr indent="0" marL="0">
-              <a:buNone/>
-            </a:pPr>
-            <a:r>
-              <a:rPr lang="en-US" sz="1400" b="1" dirty="0">
-                <a:solidFill>
-                  <a:srgbClr val="FFFFFF"/>
-                </a:solidFill>
-                <a:latin typeface="Space Grotesk" pitchFamily="34" charset="0"/>
-                <a:ea typeface="Space Grotesk" pitchFamily="34" charset="-122"/>
-                <a:cs typeface="Space Grotesk" pitchFamily="34" charset="-120"/>
-              </a:rPr>
-              <a:t>Option B</a:t>
-            </a:r>
-            <a:endParaRPr lang="en-US" sz="1400" dirty="0"/>
-          </a:p>
-        </p:txBody>
-      </p:sp>
-      <p:sp>
-        <p:nvSpPr>
-          <p:cNvPr id="8" name="Shape 6"/>
-          <p:cNvSpPr/>
-          <p:nvPr/>
-        </p:nvSpPr>
-        <p:spPr>
-          <a:xfrm>
-            <a:off x="640080" y="2862072"/>
-            <a:ext cx="10908792" cy="603504"/>
-          </a:xfrm>
-          <a:prstGeom prst="roundRect">
-            <a:avLst>
-              <a:gd name="adj" fmla="val 6061"/>
-            </a:avLst>
-          </a:prstGeom>
-          <a:solidFill>
-            <a:srgbClr val="FFFFFF"/>
-          </a:solidFill>
-          <a:ln w="12700">
-            <a:solidFill>
-              <a:srgbClr val="E8E8EE"/>
-            </a:solidFill>
-            <a:prstDash val="solid"/>
-          </a:ln>
-        </p:spPr>
-      </p:sp>
-      <p:sp>
-        <p:nvSpPr>
-          <p:cNvPr id="9" name="Text 7"/>
-          <p:cNvSpPr/>
-          <p:nvPr/>
-        </p:nvSpPr>
-        <p:spPr>
-          <a:xfrm>
-            <a:off x="960120" y="2862072"/>
-            <a:ext cx="3566160" cy="603504"/>
-          </a:xfrm>
-          <a:prstGeom prst="rect">
-            <a:avLst/>
-          </a:prstGeom>
-          <a:noFill/>
-          <a:ln/>
-        </p:spPr>
-        <p:txBody>
-          <a:bodyPr wrap="square" lIns="0" tIns="0" rIns="0" bIns="0" rtlCol="0" anchor="ctr"/>
-          <a:lstStyle/>
-          <a:p>
-            <a:pPr indent="0" marL="0">
-              <a:buNone/>
-            </a:pPr>
-            <a:r>
-              <a:rPr lang="en-US" sz="1350" b="1" dirty="0">
-                <a:solidFill>
-                  <a:srgbClr val="0A0A0A"/>
-                </a:solidFill>
-                <a:latin typeface="Montserrat" pitchFamily="34" charset="0"/>
-                <a:ea typeface="Montserrat" pitchFamily="34" charset="-122"/>
-                <a:cs typeface="Montserrat" pitchFamily="34" charset="-120"/>
-              </a:rPr>
-              <a:t>Critère 1</a:t>
-            </a:r>
-            <a:endParaRPr lang="en-US" sz="1350" dirty="0"/>
-          </a:p>
-        </p:txBody>
-      </p:sp>
-      <p:sp>
-        <p:nvSpPr>
-          <p:cNvPr id="10" name="Text 8"/>
-          <p:cNvSpPr/>
-          <p:nvPr/>
-        </p:nvSpPr>
-        <p:spPr>
-          <a:xfrm>
-            <a:off x="4846320" y="2862072"/>
-            <a:ext cx="3200400" cy="603504"/>
-          </a:xfrm>
-          <a:prstGeom prst="rect">
-            <a:avLst/>
-          </a:prstGeom>
-          <a:noFill/>
-          <a:ln/>
-        </p:spPr>
-        <p:txBody>
-          <a:bodyPr wrap="square" lIns="0" tIns="0" rIns="0" bIns="0" rtlCol="0" anchor="ctr"/>
-          <a:lstStyle/>
-          <a:p>
-            <a:pPr indent="0" marL="0">
-              <a:buNone/>
-            </a:pPr>
-            <a:r>
-              <a:rPr lang="en-US" sz="1350" dirty="0">
-                <a:solidFill>
-                  <a:srgbClr val="535462"/>
-                </a:solidFill>
-                <a:latin typeface="Montserrat" pitchFamily="34" charset="0"/>
-                <a:ea typeface="Montserrat" pitchFamily="34" charset="-122"/>
-                <a:cs typeface="Montserrat" pitchFamily="34" charset="-120"/>
-              </a:rPr>
-              <a:t>Valeur</a:t>
-            </a:r>
-            <a:endParaRPr lang="en-US" sz="1350" dirty="0"/>
-          </a:p>
-        </p:txBody>
-      </p:sp>
-      <p:sp>
-        <p:nvSpPr>
-          <p:cNvPr id="11" name="Text 9"/>
-          <p:cNvSpPr/>
-          <p:nvPr/>
-        </p:nvSpPr>
-        <p:spPr>
-          <a:xfrm>
-            <a:off x="8229600" y="2862072"/>
-            <a:ext cx="3200400" cy="603504"/>
-          </a:xfrm>
-          <a:prstGeom prst="rect">
-            <a:avLst/>
-          </a:prstGeom>
-          <a:noFill/>
-          <a:ln/>
-        </p:spPr>
-        <p:txBody>
-          <a:bodyPr wrap="square" lIns="0" tIns="0" rIns="0" bIns="0" rtlCol="0" anchor="ctr"/>
-          <a:lstStyle/>
-          <a:p>
-            <a:pPr indent="0" marL="0">
-              <a:buNone/>
-            </a:pPr>
-            <a:r>
-              <a:rPr lang="en-US" sz="1350" dirty="0">
-                <a:solidFill>
-                  <a:srgbClr val="535462"/>
-                </a:solidFill>
-                <a:latin typeface="Montserrat" pitchFamily="34" charset="0"/>
-                <a:ea typeface="Montserrat" pitchFamily="34" charset="-122"/>
-                <a:cs typeface="Montserrat" pitchFamily="34" charset="-120"/>
-              </a:rPr>
-              <a:t>Valeur</a:t>
-            </a:r>
-            <a:endParaRPr lang="en-US" sz="1350" dirty="0"/>
-          </a:p>
-        </p:txBody>
-      </p:sp>
-      <p:sp>
-        <p:nvSpPr>
-          <p:cNvPr id="12" name="Shape 10"/>
-          <p:cNvSpPr/>
-          <p:nvPr/>
-        </p:nvSpPr>
-        <p:spPr>
-          <a:xfrm>
-            <a:off x="640080" y="3520440"/>
-            <a:ext cx="10908792" cy="603504"/>
-          </a:xfrm>
-          <a:prstGeom prst="roundRect">
-            <a:avLst>
-              <a:gd name="adj" fmla="val 6061"/>
-            </a:avLst>
-          </a:prstGeom>
-          <a:solidFill>
-            <a:srgbClr val="FAFAFC"/>
-          </a:solidFill>
-          <a:ln w="12700">
-            <a:solidFill>
-              <a:srgbClr val="E8E8EE"/>
-            </a:solidFill>
-            <a:prstDash val="solid"/>
-          </a:ln>
-        </p:spPr>
-      </p:sp>
-      <p:sp>
-        <p:nvSpPr>
-          <p:cNvPr id="13" name="Text 11"/>
-          <p:cNvSpPr/>
-          <p:nvPr/>
-        </p:nvSpPr>
-        <p:spPr>
-          <a:xfrm>
-            <a:off x="960120" y="3520440"/>
-            <a:ext cx="3566160" cy="603504"/>
-          </a:xfrm>
-          <a:prstGeom prst="rect">
-            <a:avLst/>
-          </a:prstGeom>
-          <a:noFill/>
-          <a:ln/>
-        </p:spPr>
-        <p:txBody>
-          <a:bodyPr wrap="square" lIns="0" tIns="0" rIns="0" bIns="0" rtlCol="0" anchor="ctr"/>
-          <a:lstStyle/>
-          <a:p>
-            <a:pPr indent="0" marL="0">
-              <a:buNone/>
-            </a:pPr>
-            <a:r>
-              <a:rPr lang="en-US" sz="1350" b="1" dirty="0">
-                <a:solidFill>
-                  <a:srgbClr val="0A0A0A"/>
-                </a:solidFill>
-                <a:latin typeface="Montserrat" pitchFamily="34" charset="0"/>
-                <a:ea typeface="Montserrat" pitchFamily="34" charset="-122"/>
-                <a:cs typeface="Montserrat" pitchFamily="34" charset="-120"/>
-              </a:rPr>
-              <a:t>Critère 2</a:t>
-            </a:r>
-            <a:endParaRPr lang="en-US" sz="1350" dirty="0"/>
-          </a:p>
-        </p:txBody>
-      </p:sp>
-      <p:sp>
-        <p:nvSpPr>
-          <p:cNvPr id="14" name="Text 12"/>
-          <p:cNvSpPr/>
-          <p:nvPr/>
-        </p:nvSpPr>
-        <p:spPr>
-          <a:xfrm>
-            <a:off x="4846320" y="3520440"/>
-            <a:ext cx="3200400" cy="603504"/>
-          </a:xfrm>
-          <a:prstGeom prst="rect">
-            <a:avLst/>
-          </a:prstGeom>
-          <a:noFill/>
-          <a:ln/>
-        </p:spPr>
-        <p:txBody>
-          <a:bodyPr wrap="square" lIns="0" tIns="0" rIns="0" bIns="0" rtlCol="0" anchor="ctr"/>
-          <a:lstStyle/>
-          <a:p>
-            <a:pPr indent="0" marL="0">
-              <a:buNone/>
-            </a:pPr>
-            <a:r>
-              <a:rPr lang="en-US" sz="1350" dirty="0">
-                <a:solidFill>
-                  <a:srgbClr val="535462"/>
-                </a:solidFill>
-                <a:latin typeface="Montserrat" pitchFamily="34" charset="0"/>
-                <a:ea typeface="Montserrat" pitchFamily="34" charset="-122"/>
-                <a:cs typeface="Montserrat" pitchFamily="34" charset="-120"/>
-              </a:rPr>
-              <a:t>Valeur</a:t>
-            </a:r>
-            <a:endParaRPr lang="en-US" sz="1350" dirty="0"/>
-          </a:p>
-        </p:txBody>
-      </p:sp>
-      <p:sp>
-        <p:nvSpPr>
-          <p:cNvPr id="15" name="Text 13"/>
-          <p:cNvSpPr/>
-          <p:nvPr/>
-        </p:nvSpPr>
-        <p:spPr>
-          <a:xfrm>
-            <a:off x="8229600" y="3520440"/>
-            <a:ext cx="3200400" cy="603504"/>
-          </a:xfrm>
-          <a:prstGeom prst="rect">
-            <a:avLst/>
-          </a:prstGeom>
-          <a:noFill/>
-          <a:ln/>
-        </p:spPr>
-        <p:txBody>
-          <a:bodyPr wrap="square" lIns="0" tIns="0" rIns="0" bIns="0" rtlCol="0" anchor="ctr"/>
-          <a:lstStyle/>
-          <a:p>
-            <a:pPr indent="0" marL="0">
-              <a:buNone/>
-            </a:pPr>
-            <a:r>
-              <a:rPr lang="en-US" sz="1350" dirty="0">
-                <a:solidFill>
-                  <a:srgbClr val="535462"/>
-                </a:solidFill>
-                <a:latin typeface="Montserrat" pitchFamily="34" charset="0"/>
-                <a:ea typeface="Montserrat" pitchFamily="34" charset="-122"/>
-                <a:cs typeface="Montserrat" pitchFamily="34" charset="-120"/>
-              </a:rPr>
-              <a:t>Valeur</a:t>
-            </a:r>
-            <a:endParaRPr lang="en-US" sz="1350" dirty="0"/>
-          </a:p>
-        </p:txBody>
-      </p:sp>
-      <p:sp>
-        <p:nvSpPr>
-          <p:cNvPr id="16" name="Shape 14"/>
-          <p:cNvSpPr/>
-          <p:nvPr/>
-        </p:nvSpPr>
-        <p:spPr>
-          <a:xfrm>
-            <a:off x="640080" y="4178808"/>
-            <a:ext cx="10908792" cy="603504"/>
-          </a:xfrm>
-          <a:prstGeom prst="roundRect">
-            <a:avLst>
-              <a:gd name="adj" fmla="val 6061"/>
-            </a:avLst>
-          </a:prstGeom>
-          <a:solidFill>
-            <a:srgbClr val="FFFFFF"/>
-          </a:solidFill>
-          <a:ln w="12700">
-            <a:solidFill>
-              <a:srgbClr val="E8E8EE"/>
-            </a:solidFill>
-            <a:prstDash val="solid"/>
-          </a:ln>
-        </p:spPr>
-      </p:sp>
-      <p:sp>
-        <p:nvSpPr>
-          <p:cNvPr id="17" name="Text 15"/>
-          <p:cNvSpPr/>
-          <p:nvPr/>
-        </p:nvSpPr>
-        <p:spPr>
-          <a:xfrm>
-            <a:off x="960120" y="4178808"/>
-            <a:ext cx="3566160" cy="603504"/>
-          </a:xfrm>
-          <a:prstGeom prst="rect">
-            <a:avLst/>
-          </a:prstGeom>
-          <a:noFill/>
-          <a:ln/>
-        </p:spPr>
-        <p:txBody>
-          <a:bodyPr wrap="square" lIns="0" tIns="0" rIns="0" bIns="0" rtlCol="0" anchor="ctr"/>
-          <a:lstStyle/>
-          <a:p>
-            <a:pPr indent="0" marL="0">
-              <a:buNone/>
-            </a:pPr>
-            <a:r>
-              <a:rPr lang="en-US" sz="1350" b="1" dirty="0">
-                <a:solidFill>
-                  <a:srgbClr val="0A0A0A"/>
-                </a:solidFill>
-                <a:latin typeface="Montserrat" pitchFamily="34" charset="0"/>
-                <a:ea typeface="Montserrat" pitchFamily="34" charset="-122"/>
-                <a:cs typeface="Montserrat" pitchFamily="34" charset="-120"/>
-              </a:rPr>
-              <a:t>Critère 3</a:t>
-            </a:r>
-            <a:endParaRPr lang="en-US" sz="1350" dirty="0"/>
-          </a:p>
-        </p:txBody>
-      </p:sp>
-      <p:sp>
-        <p:nvSpPr>
-          <p:cNvPr id="18" name="Text 16"/>
-          <p:cNvSpPr/>
-          <p:nvPr/>
-        </p:nvSpPr>
-        <p:spPr>
-          <a:xfrm>
-            <a:off x="4846320" y="4178808"/>
-            <a:ext cx="3200400" cy="603504"/>
-          </a:xfrm>
-          <a:prstGeom prst="rect">
-            <a:avLst/>
-          </a:prstGeom>
-          <a:noFill/>
-          <a:ln/>
-        </p:spPr>
-        <p:txBody>
-          <a:bodyPr wrap="square" lIns="0" tIns="0" rIns="0" bIns="0" rtlCol="0" anchor="ctr"/>
-          <a:lstStyle/>
-          <a:p>
-            <a:pPr indent="0" marL="0">
-              <a:buNone/>
-            </a:pPr>
-            <a:r>
-              <a:rPr lang="en-US" sz="1350" dirty="0">
-                <a:solidFill>
-                  <a:srgbClr val="535462"/>
-                </a:solidFill>
-                <a:latin typeface="Montserrat" pitchFamily="34" charset="0"/>
-                <a:ea typeface="Montserrat" pitchFamily="34" charset="-122"/>
-                <a:cs typeface="Montserrat" pitchFamily="34" charset="-120"/>
-              </a:rPr>
-              <a:t>Valeur</a:t>
-            </a:r>
-            <a:endParaRPr lang="en-US" sz="1350" dirty="0"/>
-          </a:p>
-        </p:txBody>
-      </p:sp>
-      <p:sp>
-        <p:nvSpPr>
-          <p:cNvPr id="19" name="Text 17"/>
-          <p:cNvSpPr/>
-          <p:nvPr/>
-        </p:nvSpPr>
-        <p:spPr>
-          <a:xfrm>
-            <a:off x="8229600" y="4178808"/>
-            <a:ext cx="3200400" cy="603504"/>
-          </a:xfrm>
-          <a:prstGeom prst="rect">
-            <a:avLst/>
-          </a:prstGeom>
-          <a:noFill/>
-          <a:ln/>
-        </p:spPr>
-        <p:txBody>
-          <a:bodyPr wrap="square" lIns="0" tIns="0" rIns="0" bIns="0" rtlCol="0" anchor="ctr"/>
-          <a:lstStyle/>
-          <a:p>
-            <a:pPr indent="0" marL="0">
-              <a:buNone/>
-            </a:pPr>
-            <a:r>
-              <a:rPr lang="en-US" sz="1350" dirty="0">
-                <a:solidFill>
-                  <a:srgbClr val="535462"/>
-                </a:solidFill>
-                <a:latin typeface="Montserrat" pitchFamily="34" charset="0"/>
-                <a:ea typeface="Montserrat" pitchFamily="34" charset="-122"/>
-                <a:cs typeface="Montserrat" pitchFamily="34" charset="-120"/>
-              </a:rPr>
-              <a:t>Valeur</a:t>
-            </a:r>
-            <a:endParaRPr lang="en-US" sz="1350" dirty="0"/>
-          </a:p>
-        </p:txBody>
-      </p:sp>
-      <p:sp>
-        <p:nvSpPr>
-          <p:cNvPr id="20" name="Shape 18"/>
-          <p:cNvSpPr/>
-          <p:nvPr/>
-        </p:nvSpPr>
-        <p:spPr>
-          <a:xfrm>
-            <a:off x="640080" y="4837176"/>
-            <a:ext cx="10908792" cy="603504"/>
-          </a:xfrm>
-          <a:prstGeom prst="roundRect">
-            <a:avLst>
-              <a:gd name="adj" fmla="val 6061"/>
-            </a:avLst>
-          </a:prstGeom>
-          <a:solidFill>
-            <a:srgbClr val="FAFAFC"/>
-          </a:solidFill>
-          <a:ln w="12700">
-            <a:solidFill>
-              <a:srgbClr val="E8E8EE"/>
-            </a:solidFill>
-            <a:prstDash val="solid"/>
-          </a:ln>
-        </p:spPr>
-      </p:sp>
-      <p:sp>
-        <p:nvSpPr>
-          <p:cNvPr id="21" name="Text 19"/>
-          <p:cNvSpPr/>
-          <p:nvPr/>
-        </p:nvSpPr>
-        <p:spPr>
-          <a:xfrm>
-            <a:off x="960120" y="4837176"/>
-            <a:ext cx="3566160" cy="603504"/>
-          </a:xfrm>
-          <a:prstGeom prst="rect">
-            <a:avLst/>
-          </a:prstGeom>
-          <a:noFill/>
-          <a:ln/>
-        </p:spPr>
-        <p:txBody>
-          <a:bodyPr wrap="square" lIns="0" tIns="0" rIns="0" bIns="0" rtlCol="0" anchor="ctr"/>
-          <a:lstStyle/>
-          <a:p>
-            <a:pPr indent="0" marL="0">
-              <a:buNone/>
-            </a:pPr>
-            <a:r>
-              <a:rPr lang="en-US" sz="1350" b="1" dirty="0">
-                <a:solidFill>
-                  <a:srgbClr val="0A0A0A"/>
-                </a:solidFill>
-                <a:latin typeface="Montserrat" pitchFamily="34" charset="0"/>
-                <a:ea typeface="Montserrat" pitchFamily="34" charset="-122"/>
-                <a:cs typeface="Montserrat" pitchFamily="34" charset="-120"/>
-              </a:rPr>
-              <a:t>Critère 4</a:t>
-            </a:r>
-            <a:endParaRPr lang="en-US" sz="1350" dirty="0"/>
-          </a:p>
-        </p:txBody>
-      </p:sp>
-      <p:sp>
-        <p:nvSpPr>
-          <p:cNvPr id="22" name="Text 20"/>
-          <p:cNvSpPr/>
-          <p:nvPr/>
-        </p:nvSpPr>
-        <p:spPr>
-          <a:xfrm>
-            <a:off x="4846320" y="4837176"/>
-            <a:ext cx="3200400" cy="603504"/>
-          </a:xfrm>
-          <a:prstGeom prst="rect">
-            <a:avLst/>
-          </a:prstGeom>
-          <a:noFill/>
-          <a:ln/>
-        </p:spPr>
-        <p:txBody>
-          <a:bodyPr wrap="square" lIns="0" tIns="0" rIns="0" bIns="0" rtlCol="0" anchor="ctr"/>
-          <a:lstStyle/>
-          <a:p>
-            <a:pPr indent="0" marL="0">
-              <a:buNone/>
-            </a:pPr>
-            <a:r>
-              <a:rPr lang="en-US" sz="1350" dirty="0">
-                <a:solidFill>
-                  <a:srgbClr val="535462"/>
-                </a:solidFill>
-                <a:latin typeface="Montserrat" pitchFamily="34" charset="0"/>
-                <a:ea typeface="Montserrat" pitchFamily="34" charset="-122"/>
-                <a:cs typeface="Montserrat" pitchFamily="34" charset="-120"/>
-              </a:rPr>
-              <a:t>Valeur</a:t>
-            </a:r>
-            <a:endParaRPr lang="en-US" sz="1350" dirty="0"/>
-          </a:p>
-        </p:txBody>
-      </p:sp>
-      <p:sp>
-        <p:nvSpPr>
-          <p:cNvPr id="23" name="Text 21"/>
-          <p:cNvSpPr/>
-          <p:nvPr/>
-        </p:nvSpPr>
-        <p:spPr>
-          <a:xfrm>
-            <a:off x="8229600" y="4837176"/>
-            <a:ext cx="3200400" cy="603504"/>
-          </a:xfrm>
-          <a:prstGeom prst="rect">
-            <a:avLst/>
-          </a:prstGeom>
-          <a:noFill/>
-          <a:ln/>
-        </p:spPr>
-        <p:txBody>
-          <a:bodyPr wrap="square" lIns="0" tIns="0" rIns="0" bIns="0" rtlCol="0" anchor="ctr"/>
-          <a:lstStyle/>
-          <a:p>
-            <a:pPr indent="0" marL="0">
-              <a:buNone/>
-            </a:pPr>
-            <a:r>
-              <a:rPr lang="en-US" sz="1350" dirty="0">
-                <a:solidFill>
-                  <a:srgbClr val="535462"/>
-                </a:solidFill>
-                <a:latin typeface="Montserrat" pitchFamily="34" charset="0"/>
-                <a:ea typeface="Montserrat" pitchFamily="34" charset="-122"/>
-                <a:cs typeface="Montserrat" pitchFamily="34" charset="-120"/>
-              </a:rPr>
-              <a:t>Valeur</a:t>
-            </a:r>
-            <a:endParaRPr lang="en-US" sz="1350" dirty="0"/>
-          </a:p>
-        </p:txBody>
-      </p:sp>
-      <p:sp>
-        <p:nvSpPr>
-          <p:cNvPr id="24" name="Text 22"/>
           <p:cNvSpPr/>
           <p:nvPr/>
         </p:nvSpPr>

--- a/public/reference/lyriks-template.pptx
+++ b/public/reference/lyriks-template.pptx
@@ -17,9 +17,10 @@
     <p:sldId id="265" r:id="rId11"/>
     <p:sldId id="266" r:id="rId12"/>
     <p:sldId id="267" r:id="rId13"/>
+    <p:sldId id="268" r:id="rId14"/>
   </p:sldIdLst>
   <p:notesMasterIdLst>
-    <p:notesMasterId r:id="rId14"/>
+    <p:notesMasterId r:id="rId15"/>
   </p:notesMasterIdLst>
   <p:sldSz cx="12191695" cy="6858000"/>
   <p:notesSz cx="6858000" cy="12191695"/>
@@ -801,6 +802,94 @@
             <a:fld id="{F7021451-1387-4CA6-816F-3879F97B5CBC}" type="slidenum">
               <a:rPr lang="en-US"/>
               <a:t>12</a:t>
+            </a:fld>
+            <a:endParaRPr lang="en-US"/>
+          </a:p>
+        </p:txBody>
+      </p:sp>
+    </p:spTree>
+    <p:extLst>
+      <p:ext uri="{BB962C8B-B14F-4D97-AF65-F5344CB8AC3E}">
+        <p14:creationId xmlns:p14="http://schemas.microsoft.com/office/powerpoint/2010/main" val="1024086991"/>
+      </p:ext>
+    </p:extLst>
+  </p:cSld>
+  <p:clrMapOvr>
+    <a:masterClrMapping/>
+  </p:clrMapOvr>
+</p:notes>
+</file>
+
+<file path=ppt/notesSlides/notesSlide13.xml><?xml version="1.0" encoding="utf-8"?>
+<p:notes xmlns:a="http://schemas.openxmlformats.org/drawingml/2006/main" xmlns:r="http://schemas.openxmlformats.org/officeDocument/2006/relationships" xmlns:p="http://schemas.openxmlformats.org/presentationml/2006/main">
+  <p:cSld>
+    <p:spTree>
+      <p:nvGrpSpPr>
+        <p:cNvPr id="1" name=""/>
+        <p:cNvGrpSpPr/>
+        <p:nvPr/>
+      </p:nvGrpSpPr>
+      <p:grpSpPr>
+        <a:xfrm>
+          <a:off x="0" y="0"/>
+          <a:ext cx="0" cy="0"/>
+          <a:chOff x="0" y="0"/>
+          <a:chExt cx="0" cy="0"/>
+        </a:xfrm>
+      </p:grpSpPr>
+      <p:sp>
+        <p:nvSpPr>
+          <p:cNvPr id="2" name="Slide Image Placeholder 1"/>
+          <p:cNvSpPr>
+            <a:spLocks noGrp="1" noRot="1" noChangeAspect="1"/>
+          </p:cNvSpPr>
+          <p:nvPr>
+            <p:ph type="sldImg"/>
+          </p:nvPr>
+        </p:nvSpPr>
+        <p:spPr/>
+      </p:sp>
+      <p:sp>
+        <p:nvSpPr>
+          <p:cNvPr id="3" name="Notes Placeholder 2"/>
+          <p:cNvSpPr>
+            <a:spLocks noGrp="1"/>
+          </p:cNvSpPr>
+          <p:nvPr>
+            <p:ph type="body" idx="1"/>
+          </p:nvPr>
+        </p:nvSpPr>
+        <p:spPr/>
+        <p:txBody>
+          <a:bodyPr/>
+          <a:lstStyle/>
+          <a:p>
+            <a:r>
+              <a:rPr lang="en-US" dirty="0"/>
+              <a:t/>
+            </a:r>
+            <a:endParaRPr lang="en-US" dirty="0"/>
+          </a:p>
+        </p:txBody>
+      </p:sp>
+      <p:sp>
+        <p:nvSpPr>
+          <p:cNvPr id="4" name="Slide Number Placeholder 3"/>
+          <p:cNvSpPr>
+            <a:spLocks noGrp="1"/>
+          </p:cNvSpPr>
+          <p:nvPr>
+            <p:ph type="sldNum" sz="quarter" idx="10"/>
+          </p:nvPr>
+        </p:nvSpPr>
+        <p:spPr/>
+        <p:txBody>
+          <a:bodyPr/>
+          <a:lstStyle/>
+          <a:p>
+            <a:fld id="{F7021451-1387-4CA6-816F-3879F97B5CBC}" type="slidenum">
+              <a:rPr lang="en-US"/>
+              <a:t>13</a:t>
             </a:fld>
             <a:endParaRPr lang="en-US"/>
           </a:p>
@@ -2263,7 +2352,7 @@
     <p:bg>
       <p:bgPr>
         <a:solidFill>
-          <a:srgbClr val="FFFFFF"/>
+          <a:srgbClr val="FAFAFC"/>
         </a:solidFill>
       </p:bgPr>
     </p:bg>
@@ -2289,8 +2378,8 @@
         </p:nvSpPr>
         <p:spPr>
           <a:xfrm>
-            <a:off x="640080" y="640080"/>
-            <a:ext cx="8229600" cy="274320"/>
+            <a:off x="548640" y="640080"/>
+            <a:ext cx="1828800" cy="1463040"/>
           </a:xfrm>
           <a:prstGeom prst="rect">
             <a:avLst/>
@@ -2306,860 +2395,127 @@
               <a:buNone/>
             </a:pPr>
             <a:r>
-              <a:rPr lang="en-US" sz="1100" b="1" spc="250" kern="0" dirty="0">
-                <a:solidFill>
-                  <a:srgbClr val="FA5FB2"/>
+              <a:rPr lang="en-US" sz="13000" b="1" dirty="0">
+                <a:solidFill>
+                  <a:srgbClr val="BB46F5"/>
+                </a:solidFill>
+                <a:latin typeface="Space Grotesk" pitchFamily="34" charset="0"/>
+                <a:ea typeface="Space Grotesk" pitchFamily="34" charset="-122"/>
+                <a:cs typeface="Space Grotesk" pitchFamily="34" charset="-120"/>
+              </a:rPr>
+              <a:t>“</a:t>
+            </a:r>
+            <a:endParaRPr lang="en-US" sz="13000" dirty="0"/>
+          </a:p>
+        </p:txBody>
+      </p:sp>
+      <p:sp>
+        <p:nvSpPr>
+          <p:cNvPr id="3" name="Text 1"/>
+          <p:cNvSpPr/>
+          <p:nvPr/>
+        </p:nvSpPr>
+        <p:spPr>
+          <a:xfrm>
+            <a:off x="640080" y="2286000"/>
+            <a:ext cx="10607040" cy="1828800"/>
+          </a:xfrm>
+          <a:prstGeom prst="rect">
+            <a:avLst/>
+          </a:prstGeom>
+          <a:noFill/>
+          <a:ln/>
+        </p:spPr>
+        <p:txBody>
+          <a:bodyPr wrap="square" lIns="0" tIns="0" rIns="0" bIns="0" rtlCol="0" anchor="ctr"/>
+          <a:lstStyle/>
+          <a:p>
+            <a:pPr indent="0" marL="0">
+              <a:lnSpc>
+                <a:spcPct val="110000"/>
+              </a:lnSpc>
+              <a:buNone/>
+            </a:pPr>
+            <a:r>
+              <a:rPr lang="en-US" sz="3800" b="1" i="1" dirty="0">
+                <a:solidFill>
+                  <a:srgbClr val="0A0A0A"/>
+                </a:solidFill>
+                <a:latin typeface="Space Grotesk" pitchFamily="34" charset="0"/>
+                <a:ea typeface="Space Grotesk" pitchFamily="34" charset="-122"/>
+                <a:cs typeface="Space Grotesk" pitchFamily="34" charset="-120"/>
+              </a:rPr>
+              <a:t>De l'intention produit à l'implémentation, sans dérive.</a:t>
+            </a:r>
+            <a:endParaRPr lang="en-US" sz="3800" dirty="0"/>
+          </a:p>
+        </p:txBody>
+      </p:sp>
+      <p:sp>
+        <p:nvSpPr>
+          <p:cNvPr id="4" name="Text 2"/>
+          <p:cNvSpPr/>
+          <p:nvPr/>
+        </p:nvSpPr>
+        <p:spPr>
+          <a:xfrm>
+            <a:off x="640080" y="4754880"/>
+            <a:ext cx="8229600" cy="731520"/>
+          </a:xfrm>
+          <a:prstGeom prst="rect">
+            <a:avLst/>
+          </a:prstGeom>
+          <a:noFill/>
+          <a:ln/>
+        </p:spPr>
+        <p:txBody>
+          <a:bodyPr wrap="square" lIns="0" tIns="0" rIns="0" bIns="0" rtlCol="0" anchor="ctr"/>
+          <a:lstStyle/>
+          <a:p>
+            <a:pPr indent="0" marL="0">
+              <a:lnSpc>
+                <a:spcPct val="120000"/>
+              </a:lnSpc>
+              <a:buNone/>
+            </a:pPr>
+            <a:r>
+              <a:rPr lang="en-US" sz="1500" b="1" dirty="0">
+                <a:solidFill>
+                  <a:srgbClr val="0A0A0A"/>
+                </a:solidFill>
+                <a:latin typeface="Montserrat" pitchFamily="34" charset="0"/>
+                <a:ea typeface="Montserrat" pitchFamily="34" charset="-122"/>
+                <a:cs typeface="Montserrat" pitchFamily="34" charset="-120"/>
+              </a:rPr>
+              <a:t>Lyriks</a:t>
+            </a:r>
+            <a:endParaRPr lang="en-US" sz="1500" dirty="0"/>
+          </a:p>
+          <a:p>
+            <a:pPr indent="0" marL="0">
+              <a:lnSpc>
+                <a:spcPct val="120000"/>
+              </a:lnSpc>
+              <a:buNone/>
+            </a:pPr>
+            <a:r>
+              <a:rPr lang="en-US" sz="1200" dirty="0">
+                <a:solidFill>
+                  <a:srgbClr val="9296A6"/>
                 </a:solidFill>
                 <a:latin typeface="JetBrains Mono" pitchFamily="34" charset="0"/>
                 <a:ea typeface="JetBrains Mono" pitchFamily="34" charset="-122"/>
                 <a:cs typeface="JetBrains Mono" pitchFamily="34" charset="-120"/>
               </a:rPr>
-              <a:t>OFFRES &amp; DÉPLOIEMENT</a:t>
-            </a:r>
-            <a:endParaRPr lang="en-US" sz="1100" dirty="0"/>
-          </a:p>
-        </p:txBody>
-      </p:sp>
-      <p:sp>
-        <p:nvSpPr>
-          <p:cNvPr id="3" name="Text 1"/>
-          <p:cNvSpPr/>
-          <p:nvPr/>
-        </p:nvSpPr>
-        <p:spPr>
-          <a:xfrm>
-            <a:off x="640080" y="960120"/>
-            <a:ext cx="10058400" cy="822960"/>
-          </a:xfrm>
-          <a:prstGeom prst="rect">
-            <a:avLst/>
-          </a:prstGeom>
-          <a:noFill/>
-          <a:ln/>
-        </p:spPr>
-        <p:txBody>
-          <a:bodyPr wrap="square" lIns="0" tIns="0" rIns="0" bIns="0" rtlCol="0" anchor="ctr"/>
-          <a:lstStyle/>
-          <a:p>
-            <a:pPr indent="0" marL="0">
-              <a:buNone/>
-            </a:pPr>
-            <a:r>
-              <a:rPr lang="en-US" sz="3000" b="1" dirty="0">
-                <a:solidFill>
-                  <a:srgbClr val="0A0A0A"/>
-                </a:solidFill>
-                <a:latin typeface="Space Grotesk" pitchFamily="34" charset="0"/>
-                <a:ea typeface="Space Grotesk" pitchFamily="34" charset="-122"/>
-                <a:cs typeface="Space Grotesk" pitchFamily="34" charset="-120"/>
-              </a:rPr>
-              <a:t>Choisissez votre mode de déploiement</a:t>
-            </a:r>
-            <a:endParaRPr lang="en-US" sz="3000" dirty="0"/>
-          </a:p>
-        </p:txBody>
-      </p:sp>
-      <p:sp>
-        <p:nvSpPr>
-          <p:cNvPr id="4" name="Shape 2"/>
-          <p:cNvSpPr/>
-          <p:nvPr/>
-        </p:nvSpPr>
-        <p:spPr>
-          <a:xfrm>
-            <a:off x="640080" y="1965960"/>
-            <a:ext cx="3474720" cy="4160520"/>
-          </a:xfrm>
-          <a:prstGeom prst="roundRect">
-            <a:avLst>
-              <a:gd name="adj" fmla="val 2632"/>
-            </a:avLst>
-          </a:prstGeom>
-          <a:solidFill>
-            <a:srgbClr val="FFFFFF"/>
-          </a:solidFill>
-          <a:ln w="12700">
-            <a:solidFill>
-              <a:srgbClr val="E8E8EE"/>
-            </a:solidFill>
-            <a:prstDash val="solid"/>
-          </a:ln>
-          <a:effectLst>
-            <a:outerShdw sx="100000" sy="100000" kx="0" ky="0" algn="bl" rotWithShape="0" blurRad="114300" dist="38100" dir="5400000">
-              <a:srgbClr val="10122A">
-                <a:alpha val="12000"/>
-              </a:srgbClr>
-            </a:outerShdw>
-          </a:effectLst>
-        </p:spPr>
+              <a:t>La cohérence produit à l'ère de l'IA</a:t>
+            </a:r>
+            <a:endParaRPr lang="en-US" sz="1500" dirty="0"/>
+          </a:p>
+        </p:txBody>
       </p:sp>
       <p:sp>
         <p:nvSpPr>
           <p:cNvPr id="5" name="Text 3"/>
-          <p:cNvSpPr/>
-          <p:nvPr/>
-        </p:nvSpPr>
-        <p:spPr>
-          <a:xfrm>
-            <a:off x="932688" y="2240280"/>
-            <a:ext cx="2926080" cy="411480"/>
-          </a:xfrm>
-          <a:prstGeom prst="rect">
-            <a:avLst/>
-          </a:prstGeom>
-          <a:noFill/>
-          <a:ln/>
-        </p:spPr>
-        <p:txBody>
-          <a:bodyPr wrap="square" lIns="0" tIns="0" rIns="0" bIns="0" rtlCol="0" anchor="ctr"/>
-          <a:lstStyle/>
-          <a:p>
-            <a:pPr indent="0" marL="0">
-              <a:buNone/>
-            </a:pPr>
-            <a:r>
-              <a:rPr lang="en-US" sz="2000" b="1" dirty="0">
-                <a:solidFill>
-                  <a:srgbClr val="BB46F5"/>
-                </a:solidFill>
-                <a:latin typeface="Space Grotesk" pitchFamily="34" charset="0"/>
-                <a:ea typeface="Space Grotesk" pitchFamily="34" charset="-122"/>
-                <a:cs typeface="Space Grotesk" pitchFamily="34" charset="-120"/>
-              </a:rPr>
-              <a:t>Community</a:t>
-            </a:r>
-            <a:endParaRPr lang="en-US" sz="2000" dirty="0"/>
-          </a:p>
-        </p:txBody>
-      </p:sp>
-      <p:sp>
-        <p:nvSpPr>
-          <p:cNvPr id="6" name="Text 4"/>
-          <p:cNvSpPr/>
-          <p:nvPr/>
-        </p:nvSpPr>
-        <p:spPr>
-          <a:xfrm>
-            <a:off x="932688" y="2670048"/>
-            <a:ext cx="2926080" cy="320040"/>
-          </a:xfrm>
-          <a:prstGeom prst="rect">
-            <a:avLst/>
-          </a:prstGeom>
-          <a:noFill/>
-          <a:ln/>
-        </p:spPr>
-        <p:txBody>
-          <a:bodyPr wrap="square" lIns="0" tIns="0" rIns="0" bIns="0" rtlCol="0" anchor="ctr"/>
-          <a:lstStyle/>
-          <a:p>
-            <a:pPr indent="0" marL="0">
-              <a:buNone/>
-            </a:pPr>
-            <a:r>
-              <a:rPr lang="en-US" sz="1050" spc="50" kern="0" dirty="0">
-                <a:solidFill>
-                  <a:srgbClr val="9296A6"/>
-                </a:solidFill>
-                <a:latin typeface="JetBrains Mono" pitchFamily="34" charset="0"/>
-                <a:ea typeface="JetBrains Mono" pitchFamily="34" charset="-122"/>
-                <a:cs typeface="JetBrains Mono" pitchFamily="34" charset="-120"/>
-              </a:rPr>
-              <a:t>Open source · AGPL</a:t>
-            </a:r>
-            <a:endParaRPr lang="en-US" sz="1050" dirty="0"/>
-          </a:p>
-        </p:txBody>
-      </p:sp>
-      <p:sp>
-        <p:nvSpPr>
-          <p:cNvPr id="7" name="Text 5"/>
-          <p:cNvSpPr/>
-          <p:nvPr/>
-        </p:nvSpPr>
-        <p:spPr>
-          <a:xfrm>
-            <a:off x="932688" y="3154680"/>
-            <a:ext cx="2926080" cy="2103120"/>
-          </a:xfrm>
-          <a:prstGeom prst="rect">
-            <a:avLst/>
-          </a:prstGeom>
-          <a:noFill/>
-          <a:ln/>
-        </p:spPr>
-        <p:txBody>
-          <a:bodyPr wrap="square" lIns="0" tIns="0" rIns="0" bIns="0" rtlCol="0" anchor="ctr"/>
-          <a:lstStyle/>
-          <a:p>
-            <a:pPr marL="177800" indent="-177800">
-              <a:lnSpc>
-                <a:spcPct val="105000"/>
-              </a:lnSpc>
-              <a:spcAft>
-                <a:spcPts val="900"/>
-              </a:spcAft>
-              <a:buSzPct val="100000"/>
-              <a:buChar char="•"/>
-            </a:pPr>
-            <a:r>
-              <a:rPr lang="en-US" sz="1200" dirty="0">
-                <a:solidFill>
-                  <a:srgbClr val="1A1A1A"/>
-                </a:solidFill>
-                <a:latin typeface="Montserrat" pitchFamily="34" charset="0"/>
-                <a:ea typeface="Montserrat" pitchFamily="34" charset="-122"/>
-                <a:cs typeface="Montserrat" pitchFamily="34" charset="-120"/>
-              </a:rPr>
-              <a:t>Self-hébergé, sur vos serveurs</a:t>
-            </a:r>
-            <a:endParaRPr lang="en-US" sz="1200" dirty="0"/>
-          </a:p>
-          <a:p>
-            <a:pPr marL="177800" indent="-177800">
-              <a:lnSpc>
-                <a:spcPct val="105000"/>
-              </a:lnSpc>
-              <a:spcAft>
-                <a:spcPts val="900"/>
-              </a:spcAft>
-              <a:buSzPct val="100000"/>
-              <a:buChar char="•"/>
-            </a:pPr>
-            <a:r>
-              <a:rPr lang="en-US" sz="1200" dirty="0">
-                <a:solidFill>
-                  <a:srgbClr val="1A1A1A"/>
-                </a:solidFill>
-                <a:latin typeface="Montserrat" pitchFamily="34" charset="0"/>
-                <a:ea typeface="Montserrat" pitchFamily="34" charset="-122"/>
-                <a:cs typeface="Montserrat" pitchFamily="34" charset="-120"/>
-              </a:rPr>
-              <a:t>Modélisation produit complète</a:t>
-            </a:r>
-            <a:endParaRPr lang="en-US" sz="1200" dirty="0"/>
-          </a:p>
-          <a:p>
-            <a:pPr marL="177800" indent="-177800">
-              <a:lnSpc>
-                <a:spcPct val="105000"/>
-              </a:lnSpc>
-              <a:spcAft>
-                <a:spcPts val="900"/>
-              </a:spcAft>
-              <a:buSzPct val="100000"/>
-              <a:buChar char="•"/>
-            </a:pPr>
-            <a:r>
-              <a:rPr lang="en-US" sz="1200" dirty="0">
-                <a:solidFill>
-                  <a:srgbClr val="1A1A1A"/>
-                </a:solidFill>
-                <a:latin typeface="Montserrat" pitchFamily="34" charset="0"/>
-                <a:ea typeface="Montserrat" pitchFamily="34" charset="-122"/>
-                <a:cs typeface="Montserrat" pitchFamily="34" charset="-120"/>
-              </a:rPr>
-              <a:t>Spécifications prêtes pour l'IA</a:t>
-            </a:r>
-            <a:endParaRPr lang="en-US" sz="1200" dirty="0"/>
-          </a:p>
-          <a:p>
-            <a:pPr marL="177800" indent="-177800">
-              <a:lnSpc>
-                <a:spcPct val="105000"/>
-              </a:lnSpc>
-              <a:buSzPct val="100000"/>
-              <a:buChar char="•"/>
-            </a:pPr>
-            <a:r>
-              <a:rPr lang="en-US" sz="1200" dirty="0">
-                <a:solidFill>
-                  <a:srgbClr val="1A1A1A"/>
-                </a:solidFill>
-                <a:latin typeface="Montserrat" pitchFamily="34" charset="0"/>
-                <a:ea typeface="Montserrat" pitchFamily="34" charset="-122"/>
-                <a:cs typeface="Montserrat" pitchFamily="34" charset="-120"/>
-              </a:rPr>
-              <a:t>Contrôles de cohérence essentiels</a:t>
-            </a:r>
-            <a:endParaRPr lang="en-US" sz="1200" dirty="0"/>
-          </a:p>
-        </p:txBody>
-      </p:sp>
-      <p:sp>
-        <p:nvSpPr>
-          <p:cNvPr id="8" name="Text 6"/>
-          <p:cNvSpPr/>
-          <p:nvPr/>
-        </p:nvSpPr>
-        <p:spPr>
-          <a:xfrm>
-            <a:off x="932688" y="5532120"/>
-            <a:ext cx="2926080" cy="365760"/>
-          </a:xfrm>
-          <a:prstGeom prst="rect">
-            <a:avLst/>
-          </a:prstGeom>
-          <a:noFill/>
-          <a:ln/>
-        </p:spPr>
-        <p:txBody>
-          <a:bodyPr wrap="square" lIns="0" tIns="0" rIns="0" bIns="0" rtlCol="0" anchor="ctr"/>
-          <a:lstStyle/>
-          <a:p>
-            <a:pPr indent="0" marL="0">
-              <a:buNone/>
-            </a:pPr>
-            <a:r>
-              <a:rPr lang="en-US" sz="1250" b="1" dirty="0">
-                <a:solidFill>
-                  <a:srgbClr val="BB46F5"/>
-                </a:solidFill>
-                <a:latin typeface="Montserrat" pitchFamily="34" charset="0"/>
-                <a:ea typeface="Montserrat" pitchFamily="34" charset="-122"/>
-                <a:cs typeface="Montserrat" pitchFamily="34" charset="-120"/>
-              </a:rPr>
-              <a:t>Voir sur GitHub  →</a:t>
-            </a:r>
-            <a:endParaRPr lang="en-US" sz="1250" dirty="0"/>
-          </a:p>
-        </p:txBody>
-      </p:sp>
-      <p:sp>
-        <p:nvSpPr>
-          <p:cNvPr id="9" name="Shape 7"/>
-          <p:cNvSpPr/>
-          <p:nvPr/>
-        </p:nvSpPr>
-        <p:spPr>
-          <a:xfrm>
-            <a:off x="4398264" y="1965960"/>
-            <a:ext cx="3474720" cy="4160520"/>
-          </a:xfrm>
-          <a:prstGeom prst="roundRect">
-            <a:avLst>
-              <a:gd name="adj" fmla="val 2632"/>
-            </a:avLst>
-          </a:prstGeom>
-          <a:solidFill>
-            <a:srgbClr val="FFFFFF"/>
-          </a:solidFill>
-          <a:ln w="12700">
-            <a:solidFill>
-              <a:srgbClr val="E8E8EE"/>
-            </a:solidFill>
-            <a:prstDash val="solid"/>
-          </a:ln>
-          <a:effectLst>
-            <a:outerShdw sx="100000" sy="100000" kx="0" ky="0" algn="bl" rotWithShape="0" blurRad="114300" dist="38100" dir="5400000">
-              <a:srgbClr val="10122A">
-                <a:alpha val="12000"/>
-              </a:srgbClr>
-            </a:outerShdw>
-          </a:effectLst>
-        </p:spPr>
-      </p:sp>
-      <p:sp>
-        <p:nvSpPr>
-          <p:cNvPr id="10" name="Text 8"/>
-          <p:cNvSpPr/>
-          <p:nvPr/>
-        </p:nvSpPr>
-        <p:spPr>
-          <a:xfrm>
-            <a:off x="4690872" y="2240280"/>
-            <a:ext cx="2926080" cy="411480"/>
-          </a:xfrm>
-          <a:prstGeom prst="rect">
-            <a:avLst/>
-          </a:prstGeom>
-          <a:noFill/>
-          <a:ln/>
-        </p:spPr>
-        <p:txBody>
-          <a:bodyPr wrap="square" lIns="0" tIns="0" rIns="0" bIns="0" rtlCol="0" anchor="ctr"/>
-          <a:lstStyle/>
-          <a:p>
-            <a:pPr indent="0" marL="0">
-              <a:buNone/>
-            </a:pPr>
-            <a:r>
-              <a:rPr lang="en-US" sz="2000" b="1" dirty="0">
-                <a:solidFill>
-                  <a:srgbClr val="0066FF"/>
-                </a:solidFill>
-                <a:latin typeface="Space Grotesk" pitchFamily="34" charset="0"/>
-                <a:ea typeface="Space Grotesk" pitchFamily="34" charset="-122"/>
-                <a:cs typeface="Space Grotesk" pitchFamily="34" charset="-120"/>
-              </a:rPr>
-              <a:t>Enterprise</a:t>
-            </a:r>
-            <a:endParaRPr lang="en-US" sz="2000" dirty="0"/>
-          </a:p>
-        </p:txBody>
-      </p:sp>
-      <p:sp>
-        <p:nvSpPr>
-          <p:cNvPr id="11" name="Text 9"/>
-          <p:cNvSpPr/>
-          <p:nvPr/>
-        </p:nvSpPr>
-        <p:spPr>
-          <a:xfrm>
-            <a:off x="4690872" y="2670048"/>
-            <a:ext cx="2926080" cy="320040"/>
-          </a:xfrm>
-          <a:prstGeom prst="rect">
-            <a:avLst/>
-          </a:prstGeom>
-          <a:noFill/>
-          <a:ln/>
-        </p:spPr>
-        <p:txBody>
-          <a:bodyPr wrap="square" lIns="0" tIns="0" rIns="0" bIns="0" rtlCol="0" anchor="ctr"/>
-          <a:lstStyle/>
-          <a:p>
-            <a:pPr indent="0" marL="0">
-              <a:buNone/>
-            </a:pPr>
-            <a:r>
-              <a:rPr lang="en-US" sz="1050" spc="50" kern="0" dirty="0">
-                <a:solidFill>
-                  <a:srgbClr val="9296A6"/>
-                </a:solidFill>
-                <a:latin typeface="JetBrains Mono" pitchFamily="34" charset="0"/>
-                <a:ea typeface="JetBrains Mono" pitchFamily="34" charset="-122"/>
-                <a:cs typeface="JetBrains Mono" pitchFamily="34" charset="-120"/>
-              </a:rPr>
-              <a:t>Licence annuelle · self-service</a:t>
-            </a:r>
-            <a:endParaRPr lang="en-US" sz="1050" dirty="0"/>
-          </a:p>
-        </p:txBody>
-      </p:sp>
-      <p:sp>
-        <p:nvSpPr>
-          <p:cNvPr id="12" name="Text 10"/>
-          <p:cNvSpPr/>
-          <p:nvPr/>
-        </p:nvSpPr>
-        <p:spPr>
-          <a:xfrm>
-            <a:off x="4690872" y="3154680"/>
-            <a:ext cx="2926080" cy="2103120"/>
-          </a:xfrm>
-          <a:prstGeom prst="rect">
-            <a:avLst/>
-          </a:prstGeom>
-          <a:noFill/>
-          <a:ln/>
-        </p:spPr>
-        <p:txBody>
-          <a:bodyPr wrap="square" lIns="0" tIns="0" rIns="0" bIns="0" rtlCol="0" anchor="ctr"/>
-          <a:lstStyle/>
-          <a:p>
-            <a:pPr marL="177800" indent="-177800">
-              <a:lnSpc>
-                <a:spcPct val="105000"/>
-              </a:lnSpc>
-              <a:spcAft>
-                <a:spcPts val="900"/>
-              </a:spcAft>
-              <a:buSzPct val="100000"/>
-              <a:buChar char="•"/>
-            </a:pPr>
-            <a:r>
-              <a:rPr lang="en-US" sz="1200" dirty="0">
-                <a:solidFill>
-                  <a:srgbClr val="1A1A1A"/>
-                </a:solidFill>
-                <a:latin typeface="Montserrat" pitchFamily="34" charset="0"/>
-                <a:ea typeface="Montserrat" pitchFamily="34" charset="-122"/>
-                <a:cs typeface="Montserrat" pitchFamily="34" charset="-120"/>
-              </a:rPr>
-              <a:t>Équipes multi-utilisateurs</a:t>
-            </a:r>
-            <a:endParaRPr lang="en-US" sz="1200" dirty="0"/>
-          </a:p>
-          <a:p>
-            <a:pPr marL="177800" indent="-177800">
-              <a:lnSpc>
-                <a:spcPct val="105000"/>
-              </a:lnSpc>
-              <a:spcAft>
-                <a:spcPts val="900"/>
-              </a:spcAft>
-              <a:buSzPct val="100000"/>
-              <a:buChar char="•"/>
-            </a:pPr>
-            <a:r>
-              <a:rPr lang="en-US" sz="1200" dirty="0">
-                <a:solidFill>
-                  <a:srgbClr val="1A1A1A"/>
-                </a:solidFill>
-                <a:latin typeface="Montserrat" pitchFamily="34" charset="0"/>
-                <a:ea typeface="Montserrat" pitchFamily="34" charset="-122"/>
-                <a:cs typeface="Montserrat" pitchFamily="34" charset="-120"/>
-              </a:rPr>
-              <a:t>Gestion des droits &amp; rôles</a:t>
-            </a:r>
-            <a:endParaRPr lang="en-US" sz="1200" dirty="0"/>
-          </a:p>
-          <a:p>
-            <a:pPr marL="177800" indent="-177800">
-              <a:lnSpc>
-                <a:spcPct val="105000"/>
-              </a:lnSpc>
-              <a:spcAft>
-                <a:spcPts val="900"/>
-              </a:spcAft>
-              <a:buSzPct val="100000"/>
-              <a:buChar char="•"/>
-            </a:pPr>
-            <a:r>
-              <a:rPr lang="en-US" sz="1200" dirty="0">
-                <a:solidFill>
-                  <a:srgbClr val="1A1A1A"/>
-                </a:solidFill>
-                <a:latin typeface="Montserrat" pitchFamily="34" charset="0"/>
-                <a:ea typeface="Montserrat" pitchFamily="34" charset="-122"/>
-                <a:cs typeface="Montserrat" pitchFamily="34" charset="-120"/>
-              </a:rPr>
-              <a:t>Collaboration en temps réel</a:t>
-            </a:r>
-            <a:endParaRPr lang="en-US" sz="1200" dirty="0"/>
-          </a:p>
-          <a:p>
-            <a:pPr marL="177800" indent="-177800">
-              <a:lnSpc>
-                <a:spcPct val="105000"/>
-              </a:lnSpc>
-              <a:buSzPct val="100000"/>
-              <a:buChar char="•"/>
-            </a:pPr>
-            <a:r>
-              <a:rPr lang="en-US" sz="1200" dirty="0">
-                <a:solidFill>
-                  <a:srgbClr val="1A1A1A"/>
-                </a:solidFill>
-                <a:latin typeface="Montserrat" pitchFamily="34" charset="0"/>
-                <a:ea typeface="Montserrat" pitchFamily="34" charset="-122"/>
-                <a:cs typeface="Montserrat" pitchFamily="34" charset="-120"/>
-              </a:rPr>
-              <a:t>Vérification après implémentation</a:t>
-            </a:r>
-            <a:endParaRPr lang="en-US" sz="1200" dirty="0"/>
-          </a:p>
-        </p:txBody>
-      </p:sp>
-      <p:sp>
-        <p:nvSpPr>
-          <p:cNvPr id="13" name="Text 11"/>
-          <p:cNvSpPr/>
-          <p:nvPr/>
-        </p:nvSpPr>
-        <p:spPr>
-          <a:xfrm>
-            <a:off x="4690872" y="5532120"/>
-            <a:ext cx="2926080" cy="365760"/>
-          </a:xfrm>
-          <a:prstGeom prst="rect">
-            <a:avLst/>
-          </a:prstGeom>
-          <a:noFill/>
-          <a:ln/>
-        </p:spPr>
-        <p:txBody>
-          <a:bodyPr wrap="square" lIns="0" tIns="0" rIns="0" bIns="0" rtlCol="0" anchor="ctr"/>
-          <a:lstStyle/>
-          <a:p>
-            <a:pPr indent="0" marL="0">
-              <a:buNone/>
-            </a:pPr>
-            <a:r>
-              <a:rPr lang="en-US" sz="1250" b="1" dirty="0">
-                <a:solidFill>
-                  <a:srgbClr val="0066FF"/>
-                </a:solidFill>
-                <a:latin typeface="Montserrat" pitchFamily="34" charset="0"/>
-                <a:ea typeface="Montserrat" pitchFamily="34" charset="-122"/>
-                <a:cs typeface="Montserrat" pitchFamily="34" charset="-120"/>
-              </a:rPr>
-              <a:t>Demander un devis  →</a:t>
-            </a:r>
-            <a:endParaRPr lang="en-US" sz="1250" dirty="0"/>
-          </a:p>
-        </p:txBody>
-      </p:sp>
-      <p:sp>
-        <p:nvSpPr>
-          <p:cNvPr id="14" name="Shape 12"/>
-          <p:cNvSpPr/>
-          <p:nvPr/>
-        </p:nvSpPr>
-        <p:spPr>
-          <a:xfrm>
-            <a:off x="8156448" y="1965960"/>
-            <a:ext cx="3474720" cy="4160520"/>
-          </a:xfrm>
-          <a:prstGeom prst="roundRect">
-            <a:avLst>
-              <a:gd name="adj" fmla="val 2632"/>
-            </a:avLst>
-          </a:prstGeom>
-          <a:solidFill>
-            <a:srgbClr val="FFFFFF"/>
-          </a:solidFill>
-          <a:ln w="12700">
-            <a:solidFill>
-              <a:srgbClr val="E8E8EE"/>
-            </a:solidFill>
-            <a:prstDash val="solid"/>
-          </a:ln>
-          <a:effectLst>
-            <a:outerShdw sx="100000" sy="100000" kx="0" ky="0" algn="bl" rotWithShape="0" blurRad="114300" dist="38100" dir="5400000">
-              <a:srgbClr val="10122A">
-                <a:alpha val="12000"/>
-              </a:srgbClr>
-            </a:outerShdw>
-          </a:effectLst>
-        </p:spPr>
-      </p:sp>
-      <p:sp>
-        <p:nvSpPr>
-          <p:cNvPr id="15" name="Text 13"/>
-          <p:cNvSpPr/>
-          <p:nvPr/>
-        </p:nvSpPr>
-        <p:spPr>
-          <a:xfrm>
-            <a:off x="8449056" y="2240280"/>
-            <a:ext cx="2926080" cy="411480"/>
-          </a:xfrm>
-          <a:prstGeom prst="rect">
-            <a:avLst/>
-          </a:prstGeom>
-          <a:noFill/>
-          <a:ln/>
-        </p:spPr>
-        <p:txBody>
-          <a:bodyPr wrap="square" lIns="0" tIns="0" rIns="0" bIns="0" rtlCol="0" anchor="ctr"/>
-          <a:lstStyle/>
-          <a:p>
-            <a:pPr indent="0" marL="0">
-              <a:buNone/>
-            </a:pPr>
-            <a:r>
-              <a:rPr lang="en-US" sz="2000" b="1" dirty="0">
-                <a:solidFill>
-                  <a:srgbClr val="FFA101"/>
-                </a:solidFill>
-                <a:latin typeface="Space Grotesk" pitchFamily="34" charset="0"/>
-                <a:ea typeface="Space Grotesk" pitchFamily="34" charset="-122"/>
-                <a:cs typeface="Space Grotesk" pitchFamily="34" charset="-120"/>
-              </a:rPr>
-              <a:t>Managé</a:t>
-            </a:r>
-            <a:endParaRPr lang="en-US" sz="2000" dirty="0"/>
-          </a:p>
-        </p:txBody>
-      </p:sp>
-      <p:sp>
-        <p:nvSpPr>
-          <p:cNvPr id="16" name="Text 14"/>
-          <p:cNvSpPr/>
-          <p:nvPr/>
-        </p:nvSpPr>
-        <p:spPr>
-          <a:xfrm>
-            <a:off x="8449056" y="2670048"/>
-            <a:ext cx="2926080" cy="320040"/>
-          </a:xfrm>
-          <a:prstGeom prst="rect">
-            <a:avLst/>
-          </a:prstGeom>
-          <a:noFill/>
-          <a:ln/>
-        </p:spPr>
-        <p:txBody>
-          <a:bodyPr wrap="square" lIns="0" tIns="0" rIns="0" bIns="0" rtlCol="0" anchor="ctr"/>
-          <a:lstStyle/>
-          <a:p>
-            <a:pPr indent="0" marL="0">
-              <a:buNone/>
-            </a:pPr>
-            <a:r>
-              <a:rPr lang="en-US" sz="1050" spc="50" kern="0" dirty="0">
-                <a:solidFill>
-                  <a:srgbClr val="9296A6"/>
-                </a:solidFill>
-                <a:latin typeface="JetBrains Mono" pitchFamily="34" charset="0"/>
-                <a:ea typeface="JetBrains Mono" pitchFamily="34" charset="-122"/>
-                <a:cs typeface="JetBrains Mono" pitchFamily="34" charset="-120"/>
-              </a:rPr>
-              <a:t>Hébergé &amp; opéré par Lyriks</a:t>
-            </a:r>
-            <a:endParaRPr lang="en-US" sz="1050" dirty="0"/>
-          </a:p>
-        </p:txBody>
-      </p:sp>
-      <p:sp>
-        <p:nvSpPr>
-          <p:cNvPr id="17" name="Text 15"/>
-          <p:cNvSpPr/>
-          <p:nvPr/>
-        </p:nvSpPr>
-        <p:spPr>
-          <a:xfrm>
-            <a:off x="8449056" y="3154680"/>
-            <a:ext cx="2926080" cy="2103120"/>
-          </a:xfrm>
-          <a:prstGeom prst="rect">
-            <a:avLst/>
-          </a:prstGeom>
-          <a:noFill/>
-          <a:ln/>
-        </p:spPr>
-        <p:txBody>
-          <a:bodyPr wrap="square" lIns="0" tIns="0" rIns="0" bIns="0" rtlCol="0" anchor="ctr"/>
-          <a:lstStyle/>
-          <a:p>
-            <a:pPr marL="177800" indent="-177800">
-              <a:lnSpc>
-                <a:spcPct val="105000"/>
-              </a:lnSpc>
-              <a:spcAft>
-                <a:spcPts val="900"/>
-              </a:spcAft>
-              <a:buSzPct val="100000"/>
-              <a:buChar char="•"/>
-            </a:pPr>
-            <a:r>
-              <a:rPr lang="en-US" sz="1200" dirty="0">
-                <a:solidFill>
-                  <a:srgbClr val="1A1A1A"/>
-                </a:solidFill>
-                <a:latin typeface="Montserrat" pitchFamily="34" charset="0"/>
-                <a:ea typeface="Montserrat" pitchFamily="34" charset="-122"/>
-                <a:cs typeface="Montserrat" pitchFamily="34" charset="-120"/>
-              </a:rPr>
-              <a:t>Infogérance complète &amp; SLA</a:t>
-            </a:r>
-            <a:endParaRPr lang="en-US" sz="1200" dirty="0"/>
-          </a:p>
-          <a:p>
-            <a:pPr marL="177800" indent="-177800">
-              <a:lnSpc>
-                <a:spcPct val="105000"/>
-              </a:lnSpc>
-              <a:spcAft>
-                <a:spcPts val="900"/>
-              </a:spcAft>
-              <a:buSzPct val="100000"/>
-              <a:buChar char="•"/>
-            </a:pPr>
-            <a:r>
-              <a:rPr lang="en-US" sz="1200" dirty="0">
-                <a:solidFill>
-                  <a:srgbClr val="1A1A1A"/>
-                </a:solidFill>
-                <a:latin typeface="Montserrat" pitchFamily="34" charset="0"/>
-                <a:ea typeface="Montserrat" pitchFamily="34" charset="-122"/>
-                <a:cs typeface="Montserrat" pitchFamily="34" charset="-120"/>
-              </a:rPr>
-              <a:t>Supervision avancée des usages IA</a:t>
-            </a:r>
-            <a:endParaRPr lang="en-US" sz="1200" dirty="0"/>
-          </a:p>
-          <a:p>
-            <a:pPr marL="177800" indent="-177800">
-              <a:lnSpc>
-                <a:spcPct val="105000"/>
-              </a:lnSpc>
-              <a:spcAft>
-                <a:spcPts val="900"/>
-              </a:spcAft>
-              <a:buSzPct val="100000"/>
-              <a:buChar char="•"/>
-            </a:pPr>
-            <a:r>
-              <a:rPr lang="en-US" sz="1200" dirty="0">
-                <a:solidFill>
-                  <a:srgbClr val="1A1A1A"/>
-                </a:solidFill>
-                <a:latin typeface="Montserrat" pitchFamily="34" charset="0"/>
-                <a:ea typeface="Montserrat" pitchFamily="34" charset="-122"/>
-                <a:cs typeface="Montserrat" pitchFamily="34" charset="-120"/>
-              </a:rPr>
-              <a:t>SSO &amp; sécurité avancée</a:t>
-            </a:r>
-            <a:endParaRPr lang="en-US" sz="1200" dirty="0"/>
-          </a:p>
-          <a:p>
-            <a:pPr marL="177800" indent="-177800">
-              <a:lnSpc>
-                <a:spcPct val="105000"/>
-              </a:lnSpc>
-              <a:buSzPct val="100000"/>
-              <a:buChar char="•"/>
-            </a:pPr>
-            <a:r>
-              <a:rPr lang="en-US" sz="1200" dirty="0">
-                <a:solidFill>
-                  <a:srgbClr val="1A1A1A"/>
-                </a:solidFill>
-                <a:latin typeface="Montserrat" pitchFamily="34" charset="0"/>
-                <a:ea typeface="Montserrat" pitchFamily="34" charset="-122"/>
-                <a:cs typeface="Montserrat" pitchFamily="34" charset="-120"/>
-              </a:rPr>
-              <a:t>Accompagnement dédié</a:t>
-            </a:r>
-            <a:endParaRPr lang="en-US" sz="1200" dirty="0"/>
-          </a:p>
-        </p:txBody>
-      </p:sp>
-      <p:sp>
-        <p:nvSpPr>
-          <p:cNvPr id="18" name="Text 16"/>
-          <p:cNvSpPr/>
-          <p:nvPr/>
-        </p:nvSpPr>
-        <p:spPr>
-          <a:xfrm>
-            <a:off x="8449056" y="5532120"/>
-            <a:ext cx="2926080" cy="365760"/>
-          </a:xfrm>
-          <a:prstGeom prst="rect">
-            <a:avLst/>
-          </a:prstGeom>
-          <a:noFill/>
-          <a:ln/>
-        </p:spPr>
-        <p:txBody>
-          <a:bodyPr wrap="square" lIns="0" tIns="0" rIns="0" bIns="0" rtlCol="0" anchor="ctr"/>
-          <a:lstStyle/>
-          <a:p>
-            <a:pPr indent="0" marL="0">
-              <a:buNone/>
-            </a:pPr>
-            <a:r>
-              <a:rPr lang="en-US" sz="1250" b="1" dirty="0">
-                <a:solidFill>
-                  <a:srgbClr val="FFA101"/>
-                </a:solidFill>
-                <a:latin typeface="Montserrat" pitchFamily="34" charset="0"/>
-                <a:ea typeface="Montserrat" pitchFamily="34" charset="-122"/>
-                <a:cs typeface="Montserrat" pitchFamily="34" charset="-120"/>
-              </a:rPr>
-              <a:t>Contacter l'équipe  →</a:t>
-            </a:r>
-            <a:endParaRPr lang="en-US" sz="1250" dirty="0"/>
-          </a:p>
-        </p:txBody>
-      </p:sp>
-      <p:sp>
-        <p:nvSpPr>
-          <p:cNvPr id="19" name="Text 17"/>
           <p:cNvSpPr/>
           <p:nvPr/>
         </p:nvSpPr>
@@ -3255,13 +2611,13 @@
             <a:r>
               <a:rPr lang="en-US" sz="1100" b="1" spc="250" kern="0" dirty="0">
                 <a:solidFill>
-                  <a:srgbClr val="8047F4"/>
+                  <a:srgbClr val="FA5FB2"/>
                 </a:solidFill>
                 <a:latin typeface="JetBrains Mono" pitchFamily="34" charset="0"/>
                 <a:ea typeface="JetBrains Mono" pitchFamily="34" charset="-122"/>
                 <a:cs typeface="JetBrains Mono" pitchFamily="34" charset="-120"/>
               </a:rPr>
-              <a:t>L'ÉQUIPE</a:t>
+              <a:t>OFFRES &amp; DÉPLOIEMENT</a:t>
             </a:r>
             <a:endParaRPr lang="en-US" sz="1100" dirty="0"/>
           </a:p>
@@ -3300,7 +2656,7 @@
                 <a:ea typeface="Space Grotesk" pitchFamily="34" charset="-122"/>
                 <a:cs typeface="Space Grotesk" pitchFamily="34" charset="-120"/>
               </a:rPr>
-              <a:t>Les voix de Lyriks</a:t>
+              <a:t>Choisissez votre mode de déploiement</a:t>
             </a:r>
             <a:endParaRPr lang="en-US" sz="3000" dirty="0"/>
           </a:p>
@@ -3314,12 +2670,12 @@
         </p:nvSpPr>
         <p:spPr>
           <a:xfrm>
-            <a:off x="640080" y="2194560"/>
-            <a:ext cx="3474720" cy="2926080"/>
+            <a:off x="640080" y="1965960"/>
+            <a:ext cx="3474720" cy="4160520"/>
           </a:xfrm>
           <a:prstGeom prst="roundRect">
             <a:avLst>
-              <a:gd name="adj" fmla="val 3125"/>
+              <a:gd name="adj" fmla="val 2632"/>
             </a:avLst>
           </a:prstGeom>
           <a:solidFill>
@@ -3342,128 +2698,69 @@
       </p:sp>
       <p:sp>
         <p:nvSpPr>
-          <p:cNvPr id="5" name="Shape 3"/>
-          <p:cNvSpPr/>
-          <p:nvPr/>
-        </p:nvSpPr>
-        <p:spPr>
-          <a:xfrm>
-            <a:off x="1920240" y="2606040"/>
-            <a:ext cx="914400" cy="914400"/>
-          </a:xfrm>
-          <a:prstGeom prst="ellipse">
-            <a:avLst/>
-          </a:prstGeom>
-          <a:solidFill>
-            <a:srgbClr val="FFA101"/>
-          </a:solidFill>
-          <a:ln/>
-        </p:spPr>
-      </p:sp>
-      <p:sp>
-        <p:nvSpPr>
-          <p:cNvPr id="6" name="Text 4"/>
-          <p:cNvSpPr/>
-          <p:nvPr/>
-        </p:nvSpPr>
-        <p:spPr>
-          <a:xfrm>
-            <a:off x="1920240" y="2606040"/>
-            <a:ext cx="914400" cy="914400"/>
-          </a:xfrm>
-          <a:prstGeom prst="rect">
-            <a:avLst/>
-          </a:prstGeom>
-          <a:noFill/>
-          <a:ln/>
-        </p:spPr>
-        <p:txBody>
-          <a:bodyPr wrap="square" lIns="0" tIns="0" rIns="0" bIns="0" rtlCol="0" anchor="ctr"/>
-          <a:lstStyle/>
-          <a:p>
-            <a:pPr algn="ctr" indent="0" marL="0">
-              <a:buNone/>
-            </a:pPr>
-            <a:r>
-              <a:rPr lang="en-US" sz="2200" b="1" dirty="0">
-                <a:solidFill>
-                  <a:srgbClr val="FFFFFF"/>
+          <p:cNvPr id="5" name="Text 3"/>
+          <p:cNvSpPr/>
+          <p:nvPr/>
+        </p:nvSpPr>
+        <p:spPr>
+          <a:xfrm>
+            <a:off x="932688" y="2240280"/>
+            <a:ext cx="2926080" cy="411480"/>
+          </a:xfrm>
+          <a:prstGeom prst="rect">
+            <a:avLst/>
+          </a:prstGeom>
+          <a:noFill/>
+          <a:ln/>
+        </p:spPr>
+        <p:txBody>
+          <a:bodyPr wrap="square" lIns="0" tIns="0" rIns="0" bIns="0" rtlCol="0" anchor="ctr"/>
+          <a:lstStyle/>
+          <a:p>
+            <a:pPr indent="0" marL="0">
+              <a:buNone/>
+            </a:pPr>
+            <a:r>
+              <a:rPr lang="en-US" sz="2000" b="1" dirty="0">
+                <a:solidFill>
+                  <a:srgbClr val="BB46F5"/>
                 </a:solidFill>
                 <a:latin typeface="Space Grotesk" pitchFamily="34" charset="0"/>
                 <a:ea typeface="Space Grotesk" pitchFamily="34" charset="-122"/>
                 <a:cs typeface="Space Grotesk" pitchFamily="34" charset="-120"/>
               </a:rPr>
-              <a:t>DM</a:t>
-            </a:r>
-            <a:endParaRPr lang="en-US" sz="2200" dirty="0"/>
-          </a:p>
-        </p:txBody>
-      </p:sp>
-      <p:sp>
-        <p:nvSpPr>
-          <p:cNvPr id="7" name="Text 5"/>
-          <p:cNvSpPr/>
-          <p:nvPr/>
-        </p:nvSpPr>
-        <p:spPr>
-          <a:xfrm>
-            <a:off x="822960" y="3749040"/>
-            <a:ext cx="3108960" cy="365760"/>
-          </a:xfrm>
-          <a:prstGeom prst="rect">
-            <a:avLst/>
-          </a:prstGeom>
-          <a:noFill/>
-          <a:ln/>
-        </p:spPr>
-        <p:txBody>
-          <a:bodyPr wrap="square" lIns="0" tIns="0" rIns="0" bIns="0" rtlCol="0" anchor="ctr"/>
-          <a:lstStyle/>
-          <a:p>
-            <a:pPr algn="ctr" indent="0" marL="0">
-              <a:buNone/>
-            </a:pPr>
-            <a:r>
-              <a:rPr lang="en-US" sz="1600" b="1" dirty="0">
-                <a:solidFill>
-                  <a:srgbClr val="0A0A0A"/>
-                </a:solidFill>
-                <a:latin typeface="Space Grotesk" pitchFamily="34" charset="0"/>
-                <a:ea typeface="Space Grotesk" pitchFamily="34" charset="-122"/>
-                <a:cs typeface="Space Grotesk" pitchFamily="34" charset="-120"/>
-              </a:rPr>
-              <a:t>David Mabboux</a:t>
-            </a:r>
-            <a:endParaRPr lang="en-US" sz="1600" dirty="0"/>
-          </a:p>
-        </p:txBody>
-      </p:sp>
-      <p:sp>
-        <p:nvSpPr>
-          <p:cNvPr id="8" name="Text 6"/>
-          <p:cNvSpPr/>
-          <p:nvPr/>
-        </p:nvSpPr>
-        <p:spPr>
-          <a:xfrm>
-            <a:off x="822960" y="4160520"/>
-            <a:ext cx="3108960" cy="365760"/>
-          </a:xfrm>
-          <a:prstGeom prst="rect">
-            <a:avLst/>
-          </a:prstGeom>
-          <a:noFill/>
-          <a:ln/>
-        </p:spPr>
-        <p:txBody>
-          <a:bodyPr wrap="square" lIns="0" tIns="0" rIns="0" bIns="0" rtlCol="0" anchor="ctr"/>
-          <a:lstStyle/>
-          <a:p>
-            <a:pPr algn="ctr" indent="0" marL="0">
-              <a:buNone/>
-            </a:pPr>
-            <a:r>
-              <a:rPr lang="en-US" sz="1150" dirty="0">
+              <a:t>Community</a:t>
+            </a:r>
+            <a:endParaRPr lang="en-US" sz="2000" dirty="0"/>
+          </a:p>
+        </p:txBody>
+      </p:sp>
+      <p:sp>
+        <p:nvSpPr>
+          <p:cNvPr id="6" name="Text 4"/>
+          <p:cNvSpPr/>
+          <p:nvPr/>
+        </p:nvSpPr>
+        <p:spPr>
+          <a:xfrm>
+            <a:off x="932688" y="2670048"/>
+            <a:ext cx="2926080" cy="320040"/>
+          </a:xfrm>
+          <a:prstGeom prst="rect">
+            <a:avLst/>
+          </a:prstGeom>
+          <a:noFill/>
+          <a:ln/>
+        </p:spPr>
+        <p:txBody>
+          <a:bodyPr wrap="square" lIns="0" tIns="0" rIns="0" bIns="0" rtlCol="0" anchor="ctr"/>
+          <a:lstStyle/>
+          <a:p>
+            <a:pPr indent="0" marL="0">
+              <a:buNone/>
+            </a:pPr>
+            <a:r>
+              <a:rPr lang="en-US" sz="1050" spc="50" kern="0" dirty="0">
                 <a:solidFill>
                   <a:srgbClr val="9296A6"/>
                 </a:solidFill>
@@ -3471,9 +2768,163 @@
                 <a:ea typeface="JetBrains Mono" pitchFamily="34" charset="-122"/>
                 <a:cs typeface="JetBrains Mono" pitchFamily="34" charset="-120"/>
               </a:rPr>
-              <a:t>Business</a:t>
-            </a:r>
-            <a:endParaRPr lang="en-US" sz="1150" dirty="0"/>
+              <a:t>Open source · AGPL</a:t>
+            </a:r>
+            <a:endParaRPr lang="en-US" sz="1050" dirty="0"/>
+          </a:p>
+        </p:txBody>
+      </p:sp>
+      <p:sp>
+        <p:nvSpPr>
+          <p:cNvPr id="7" name="Text 5"/>
+          <p:cNvSpPr/>
+          <p:nvPr/>
+        </p:nvSpPr>
+        <p:spPr>
+          <a:xfrm>
+            <a:off x="932688" y="3154680"/>
+            <a:ext cx="2926080" cy="2103120"/>
+          </a:xfrm>
+          <a:prstGeom prst="rect">
+            <a:avLst/>
+          </a:prstGeom>
+          <a:noFill/>
+          <a:ln/>
+        </p:spPr>
+        <p:txBody>
+          <a:bodyPr wrap="square" lIns="0" tIns="0" rIns="0" bIns="0" rtlCol="0" anchor="ctr"/>
+          <a:lstStyle/>
+          <a:p>
+            <a:pPr marL="177800" indent="-177800">
+              <a:lnSpc>
+                <a:spcPct val="105000"/>
+              </a:lnSpc>
+              <a:spcAft>
+                <a:spcPts val="900"/>
+              </a:spcAft>
+              <a:buSzPct val="100000"/>
+              <a:buChar char="•"/>
+            </a:pPr>
+            <a:r>
+              <a:rPr lang="en-US" sz="1200" dirty="0">
+                <a:solidFill>
+                  <a:srgbClr val="1A1A1A"/>
+                </a:solidFill>
+                <a:latin typeface="Montserrat" pitchFamily="34" charset="0"/>
+                <a:ea typeface="Montserrat" pitchFamily="34" charset="-122"/>
+                <a:cs typeface="Montserrat" pitchFamily="34" charset="-120"/>
+              </a:rPr>
+              <a:t>Self-hébergé, sur vos serveurs</a:t>
+            </a:r>
+            <a:endParaRPr lang="en-US" sz="1200" dirty="0"/>
+          </a:p>
+          <a:p>
+            <a:pPr marL="177800" indent="-177800">
+              <a:lnSpc>
+                <a:spcPct val="105000"/>
+              </a:lnSpc>
+              <a:spcAft>
+                <a:spcPts val="900"/>
+              </a:spcAft>
+              <a:buSzPct val="100000"/>
+              <a:buChar char="•"/>
+            </a:pPr>
+            <a:r>
+              <a:rPr lang="en-US" sz="1200" dirty="0">
+                <a:solidFill>
+                  <a:srgbClr val="1A1A1A"/>
+                </a:solidFill>
+                <a:latin typeface="Montserrat" pitchFamily="34" charset="0"/>
+                <a:ea typeface="Montserrat" pitchFamily="34" charset="-122"/>
+                <a:cs typeface="Montserrat" pitchFamily="34" charset="-120"/>
+              </a:rPr>
+              <a:t>Modélisation produit complète</a:t>
+            </a:r>
+            <a:endParaRPr lang="en-US" sz="1200" dirty="0"/>
+          </a:p>
+          <a:p>
+            <a:pPr marL="177800" indent="-177800">
+              <a:lnSpc>
+                <a:spcPct val="105000"/>
+              </a:lnSpc>
+              <a:spcAft>
+                <a:spcPts val="900"/>
+              </a:spcAft>
+              <a:buSzPct val="100000"/>
+              <a:buChar char="•"/>
+            </a:pPr>
+            <a:r>
+              <a:rPr lang="en-US" sz="1200" dirty="0">
+                <a:solidFill>
+                  <a:srgbClr val="1A1A1A"/>
+                </a:solidFill>
+                <a:latin typeface="Montserrat" pitchFamily="34" charset="0"/>
+                <a:ea typeface="Montserrat" pitchFamily="34" charset="-122"/>
+                <a:cs typeface="Montserrat" pitchFamily="34" charset="-120"/>
+              </a:rPr>
+              <a:t>Spécifications prêtes pour l'IA</a:t>
+            </a:r>
+            <a:endParaRPr lang="en-US" sz="1200" dirty="0"/>
+          </a:p>
+          <a:p>
+            <a:pPr marL="177800" indent="-177800">
+              <a:lnSpc>
+                <a:spcPct val="105000"/>
+              </a:lnSpc>
+              <a:buSzPct val="100000"/>
+              <a:buChar char="•"/>
+            </a:pPr>
+            <a:r>
+              <a:rPr lang="en-US" sz="1200" dirty="0">
+                <a:solidFill>
+                  <a:srgbClr val="1A1A1A"/>
+                </a:solidFill>
+                <a:latin typeface="Montserrat" pitchFamily="34" charset="0"/>
+                <a:ea typeface="Montserrat" pitchFamily="34" charset="-122"/>
+                <a:cs typeface="Montserrat" pitchFamily="34" charset="-120"/>
+              </a:rPr>
+              <a:t>Contrôles de cohérence essentiels</a:t>
+            </a:r>
+            <a:endParaRPr lang="en-US" sz="1200" dirty="0"/>
+          </a:p>
+        </p:txBody>
+      </p:sp>
+      <p:sp>
+        <p:nvSpPr>
+          <p:cNvPr id="8" name="Text 6"/>
+          <p:cNvSpPr/>
+          <p:nvPr/>
+        </p:nvSpPr>
+        <p:spPr>
+          <a:xfrm>
+            <a:off x="932688" y="5532120"/>
+            <a:ext cx="2926080" cy="365760"/>
+          </a:xfrm>
+          <a:prstGeom prst="rect">
+            <a:avLst/>
+          </a:prstGeom>
+          <a:noFill/>
+          <a:ln/>
+        </p:spPr>
+        <p:txBody>
+          <a:bodyPr wrap="square" lIns="0" tIns="0" rIns="0" bIns="0" rtlCol="0" anchor="ctr"/>
+          <a:lstStyle/>
+          <a:p>
+            <a:pPr indent="0" marL="0">
+              <a:buNone/>
+            </a:pPr>
+            <a:r>
+              <a:rPr lang="en-US" sz="1250" b="1" dirty="0">
+                <a:solidFill>
+                  <a:srgbClr val="BB46F5"/>
+                </a:solidFill>
+                <a:latin typeface="Montserrat" pitchFamily="34" charset="0"/>
+                <a:ea typeface="Montserrat" pitchFamily="34" charset="-122"/>
+                <a:cs typeface="Montserrat" pitchFamily="34" charset="-120"/>
+              </a:rPr>
+              <a:t>Voir sur GitHub  →</a:t>
+            </a:r>
+            <a:endParaRPr lang="en-US" sz="1250" dirty="0"/>
           </a:p>
         </p:txBody>
       </p:sp>
@@ -3485,12 +2936,12 @@
         </p:nvSpPr>
         <p:spPr>
           <a:xfrm>
-            <a:off x="4398264" y="2194560"/>
-            <a:ext cx="3474720" cy="2926080"/>
+            <a:off x="4398264" y="1965960"/>
+            <a:ext cx="3474720" cy="4160520"/>
           </a:xfrm>
           <a:prstGeom prst="roundRect">
             <a:avLst>
-              <a:gd name="adj" fmla="val 3125"/>
+              <a:gd name="adj" fmla="val 2632"/>
             </a:avLst>
           </a:prstGeom>
           <a:solidFill>
@@ -3513,128 +2964,69 @@
       </p:sp>
       <p:sp>
         <p:nvSpPr>
-          <p:cNvPr id="10" name="Shape 8"/>
-          <p:cNvSpPr/>
-          <p:nvPr/>
-        </p:nvSpPr>
-        <p:spPr>
-          <a:xfrm>
-            <a:off x="5678424" y="2606040"/>
-            <a:ext cx="914400" cy="914400"/>
-          </a:xfrm>
-          <a:prstGeom prst="ellipse">
-            <a:avLst/>
-          </a:prstGeom>
-          <a:solidFill>
-            <a:srgbClr val="BB46F5"/>
-          </a:solidFill>
-          <a:ln/>
-        </p:spPr>
-      </p:sp>
-      <p:sp>
-        <p:nvSpPr>
-          <p:cNvPr id="11" name="Text 9"/>
-          <p:cNvSpPr/>
-          <p:nvPr/>
-        </p:nvSpPr>
-        <p:spPr>
-          <a:xfrm>
-            <a:off x="5678424" y="2606040"/>
-            <a:ext cx="914400" cy="914400"/>
-          </a:xfrm>
-          <a:prstGeom prst="rect">
-            <a:avLst/>
-          </a:prstGeom>
-          <a:noFill/>
-          <a:ln/>
-        </p:spPr>
-        <p:txBody>
-          <a:bodyPr wrap="square" lIns="0" tIns="0" rIns="0" bIns="0" rtlCol="0" anchor="ctr"/>
-          <a:lstStyle/>
-          <a:p>
-            <a:pPr algn="ctr" indent="0" marL="0">
-              <a:buNone/>
-            </a:pPr>
-            <a:r>
-              <a:rPr lang="en-US" sz="2200" b="1" dirty="0">
-                <a:solidFill>
-                  <a:srgbClr val="FFFFFF"/>
+          <p:cNvPr id="10" name="Text 8"/>
+          <p:cNvSpPr/>
+          <p:nvPr/>
+        </p:nvSpPr>
+        <p:spPr>
+          <a:xfrm>
+            <a:off x="4690872" y="2240280"/>
+            <a:ext cx="2926080" cy="411480"/>
+          </a:xfrm>
+          <a:prstGeom prst="rect">
+            <a:avLst/>
+          </a:prstGeom>
+          <a:noFill/>
+          <a:ln/>
+        </p:spPr>
+        <p:txBody>
+          <a:bodyPr wrap="square" lIns="0" tIns="0" rIns="0" bIns="0" rtlCol="0" anchor="ctr"/>
+          <a:lstStyle/>
+          <a:p>
+            <a:pPr indent="0" marL="0">
+              <a:buNone/>
+            </a:pPr>
+            <a:r>
+              <a:rPr lang="en-US" sz="2000" b="1" dirty="0">
+                <a:solidFill>
+                  <a:srgbClr val="0066FF"/>
                 </a:solidFill>
                 <a:latin typeface="Space Grotesk" pitchFamily="34" charset="0"/>
                 <a:ea typeface="Space Grotesk" pitchFamily="34" charset="-122"/>
                 <a:cs typeface="Space Grotesk" pitchFamily="34" charset="-120"/>
               </a:rPr>
-              <a:t>AB</a:t>
-            </a:r>
-            <a:endParaRPr lang="en-US" sz="2200" dirty="0"/>
-          </a:p>
-        </p:txBody>
-      </p:sp>
-      <p:sp>
-        <p:nvSpPr>
-          <p:cNvPr id="12" name="Text 10"/>
-          <p:cNvSpPr/>
-          <p:nvPr/>
-        </p:nvSpPr>
-        <p:spPr>
-          <a:xfrm>
-            <a:off x="4581144" y="3749040"/>
-            <a:ext cx="3108960" cy="365760"/>
-          </a:xfrm>
-          <a:prstGeom prst="rect">
-            <a:avLst/>
-          </a:prstGeom>
-          <a:noFill/>
-          <a:ln/>
-        </p:spPr>
-        <p:txBody>
-          <a:bodyPr wrap="square" lIns="0" tIns="0" rIns="0" bIns="0" rtlCol="0" anchor="ctr"/>
-          <a:lstStyle/>
-          <a:p>
-            <a:pPr algn="ctr" indent="0" marL="0">
-              <a:buNone/>
-            </a:pPr>
-            <a:r>
-              <a:rPr lang="en-US" sz="1600" b="1" dirty="0">
-                <a:solidFill>
-                  <a:srgbClr val="0A0A0A"/>
-                </a:solidFill>
-                <a:latin typeface="Space Grotesk" pitchFamily="34" charset="0"/>
-                <a:ea typeface="Space Grotesk" pitchFamily="34" charset="-122"/>
-                <a:cs typeface="Space Grotesk" pitchFamily="34" charset="-120"/>
-              </a:rPr>
-              <a:t>Adrien Basso Blandin</a:t>
-            </a:r>
-            <a:endParaRPr lang="en-US" sz="1600" dirty="0"/>
-          </a:p>
-        </p:txBody>
-      </p:sp>
-      <p:sp>
-        <p:nvSpPr>
-          <p:cNvPr id="13" name="Text 11"/>
-          <p:cNvSpPr/>
-          <p:nvPr/>
-        </p:nvSpPr>
-        <p:spPr>
-          <a:xfrm>
-            <a:off x="4581144" y="4160520"/>
-            <a:ext cx="3108960" cy="365760"/>
-          </a:xfrm>
-          <a:prstGeom prst="rect">
-            <a:avLst/>
-          </a:prstGeom>
-          <a:noFill/>
-          <a:ln/>
-        </p:spPr>
-        <p:txBody>
-          <a:bodyPr wrap="square" lIns="0" tIns="0" rIns="0" bIns="0" rtlCol="0" anchor="ctr"/>
-          <a:lstStyle/>
-          <a:p>
-            <a:pPr algn="ctr" indent="0" marL="0">
-              <a:buNone/>
-            </a:pPr>
-            <a:r>
-              <a:rPr lang="en-US" sz="1150" dirty="0">
+              <a:t>Enterprise</a:t>
+            </a:r>
+            <a:endParaRPr lang="en-US" sz="2000" dirty="0"/>
+          </a:p>
+        </p:txBody>
+      </p:sp>
+      <p:sp>
+        <p:nvSpPr>
+          <p:cNvPr id="11" name="Text 9"/>
+          <p:cNvSpPr/>
+          <p:nvPr/>
+        </p:nvSpPr>
+        <p:spPr>
+          <a:xfrm>
+            <a:off x="4690872" y="2670048"/>
+            <a:ext cx="2926080" cy="320040"/>
+          </a:xfrm>
+          <a:prstGeom prst="rect">
+            <a:avLst/>
+          </a:prstGeom>
+          <a:noFill/>
+          <a:ln/>
+        </p:spPr>
+        <p:txBody>
+          <a:bodyPr wrap="square" lIns="0" tIns="0" rIns="0" bIns="0" rtlCol="0" anchor="ctr"/>
+          <a:lstStyle/>
+          <a:p>
+            <a:pPr indent="0" marL="0">
+              <a:buNone/>
+            </a:pPr>
+            <a:r>
+              <a:rPr lang="en-US" sz="1050" spc="50" kern="0" dirty="0">
                 <a:solidFill>
                   <a:srgbClr val="9296A6"/>
                 </a:solidFill>
@@ -3642,9 +3034,163 @@
                 <a:ea typeface="JetBrains Mono" pitchFamily="34" charset="-122"/>
                 <a:cs typeface="JetBrains Mono" pitchFamily="34" charset="-120"/>
               </a:rPr>
-              <a:t>Cohérence</a:t>
-            </a:r>
-            <a:endParaRPr lang="en-US" sz="1150" dirty="0"/>
+              <a:t>Licence annuelle · self-service</a:t>
+            </a:r>
+            <a:endParaRPr lang="en-US" sz="1050" dirty="0"/>
+          </a:p>
+        </p:txBody>
+      </p:sp>
+      <p:sp>
+        <p:nvSpPr>
+          <p:cNvPr id="12" name="Text 10"/>
+          <p:cNvSpPr/>
+          <p:nvPr/>
+        </p:nvSpPr>
+        <p:spPr>
+          <a:xfrm>
+            <a:off x="4690872" y="3154680"/>
+            <a:ext cx="2926080" cy="2103120"/>
+          </a:xfrm>
+          <a:prstGeom prst="rect">
+            <a:avLst/>
+          </a:prstGeom>
+          <a:noFill/>
+          <a:ln/>
+        </p:spPr>
+        <p:txBody>
+          <a:bodyPr wrap="square" lIns="0" tIns="0" rIns="0" bIns="0" rtlCol="0" anchor="ctr"/>
+          <a:lstStyle/>
+          <a:p>
+            <a:pPr marL="177800" indent="-177800">
+              <a:lnSpc>
+                <a:spcPct val="105000"/>
+              </a:lnSpc>
+              <a:spcAft>
+                <a:spcPts val="900"/>
+              </a:spcAft>
+              <a:buSzPct val="100000"/>
+              <a:buChar char="•"/>
+            </a:pPr>
+            <a:r>
+              <a:rPr lang="en-US" sz="1200" dirty="0">
+                <a:solidFill>
+                  <a:srgbClr val="1A1A1A"/>
+                </a:solidFill>
+                <a:latin typeface="Montserrat" pitchFamily="34" charset="0"/>
+                <a:ea typeface="Montserrat" pitchFamily="34" charset="-122"/>
+                <a:cs typeface="Montserrat" pitchFamily="34" charset="-120"/>
+              </a:rPr>
+              <a:t>Équipes multi-utilisateurs</a:t>
+            </a:r>
+            <a:endParaRPr lang="en-US" sz="1200" dirty="0"/>
+          </a:p>
+          <a:p>
+            <a:pPr marL="177800" indent="-177800">
+              <a:lnSpc>
+                <a:spcPct val="105000"/>
+              </a:lnSpc>
+              <a:spcAft>
+                <a:spcPts val="900"/>
+              </a:spcAft>
+              <a:buSzPct val="100000"/>
+              <a:buChar char="•"/>
+            </a:pPr>
+            <a:r>
+              <a:rPr lang="en-US" sz="1200" dirty="0">
+                <a:solidFill>
+                  <a:srgbClr val="1A1A1A"/>
+                </a:solidFill>
+                <a:latin typeface="Montserrat" pitchFamily="34" charset="0"/>
+                <a:ea typeface="Montserrat" pitchFamily="34" charset="-122"/>
+                <a:cs typeface="Montserrat" pitchFamily="34" charset="-120"/>
+              </a:rPr>
+              <a:t>Gestion des droits &amp; rôles</a:t>
+            </a:r>
+            <a:endParaRPr lang="en-US" sz="1200" dirty="0"/>
+          </a:p>
+          <a:p>
+            <a:pPr marL="177800" indent="-177800">
+              <a:lnSpc>
+                <a:spcPct val="105000"/>
+              </a:lnSpc>
+              <a:spcAft>
+                <a:spcPts val="900"/>
+              </a:spcAft>
+              <a:buSzPct val="100000"/>
+              <a:buChar char="•"/>
+            </a:pPr>
+            <a:r>
+              <a:rPr lang="en-US" sz="1200" dirty="0">
+                <a:solidFill>
+                  <a:srgbClr val="1A1A1A"/>
+                </a:solidFill>
+                <a:latin typeface="Montserrat" pitchFamily="34" charset="0"/>
+                <a:ea typeface="Montserrat" pitchFamily="34" charset="-122"/>
+                <a:cs typeface="Montserrat" pitchFamily="34" charset="-120"/>
+              </a:rPr>
+              <a:t>Collaboration en temps réel</a:t>
+            </a:r>
+            <a:endParaRPr lang="en-US" sz="1200" dirty="0"/>
+          </a:p>
+          <a:p>
+            <a:pPr marL="177800" indent="-177800">
+              <a:lnSpc>
+                <a:spcPct val="105000"/>
+              </a:lnSpc>
+              <a:buSzPct val="100000"/>
+              <a:buChar char="•"/>
+            </a:pPr>
+            <a:r>
+              <a:rPr lang="en-US" sz="1200" dirty="0">
+                <a:solidFill>
+                  <a:srgbClr val="1A1A1A"/>
+                </a:solidFill>
+                <a:latin typeface="Montserrat" pitchFamily="34" charset="0"/>
+                <a:ea typeface="Montserrat" pitchFamily="34" charset="-122"/>
+                <a:cs typeface="Montserrat" pitchFamily="34" charset="-120"/>
+              </a:rPr>
+              <a:t>Vérification après implémentation</a:t>
+            </a:r>
+            <a:endParaRPr lang="en-US" sz="1200" dirty="0"/>
+          </a:p>
+        </p:txBody>
+      </p:sp>
+      <p:sp>
+        <p:nvSpPr>
+          <p:cNvPr id="13" name="Text 11"/>
+          <p:cNvSpPr/>
+          <p:nvPr/>
+        </p:nvSpPr>
+        <p:spPr>
+          <a:xfrm>
+            <a:off x="4690872" y="5532120"/>
+            <a:ext cx="2926080" cy="365760"/>
+          </a:xfrm>
+          <a:prstGeom prst="rect">
+            <a:avLst/>
+          </a:prstGeom>
+          <a:noFill/>
+          <a:ln/>
+        </p:spPr>
+        <p:txBody>
+          <a:bodyPr wrap="square" lIns="0" tIns="0" rIns="0" bIns="0" rtlCol="0" anchor="ctr"/>
+          <a:lstStyle/>
+          <a:p>
+            <a:pPr indent="0" marL="0">
+              <a:buNone/>
+            </a:pPr>
+            <a:r>
+              <a:rPr lang="en-US" sz="1250" b="1" dirty="0">
+                <a:solidFill>
+                  <a:srgbClr val="0066FF"/>
+                </a:solidFill>
+                <a:latin typeface="Montserrat" pitchFamily="34" charset="0"/>
+                <a:ea typeface="Montserrat" pitchFamily="34" charset="-122"/>
+                <a:cs typeface="Montserrat" pitchFamily="34" charset="-120"/>
+              </a:rPr>
+              <a:t>Demander un devis  →</a:t>
+            </a:r>
+            <a:endParaRPr lang="en-US" sz="1250" dirty="0"/>
           </a:p>
         </p:txBody>
       </p:sp>
@@ -3656,12 +3202,12 @@
         </p:nvSpPr>
         <p:spPr>
           <a:xfrm>
-            <a:off x="8156448" y="2194560"/>
-            <a:ext cx="3474720" cy="2926080"/>
+            <a:off x="8156448" y="1965960"/>
+            <a:ext cx="3474720" cy="4160520"/>
           </a:xfrm>
           <a:prstGeom prst="roundRect">
             <a:avLst>
-              <a:gd name="adj" fmla="val 3125"/>
+              <a:gd name="adj" fmla="val 2632"/>
             </a:avLst>
           </a:prstGeom>
           <a:solidFill>
@@ -3684,128 +3230,69 @@
       </p:sp>
       <p:sp>
         <p:nvSpPr>
-          <p:cNvPr id="15" name="Shape 13"/>
-          <p:cNvSpPr/>
-          <p:nvPr/>
-        </p:nvSpPr>
-        <p:spPr>
-          <a:xfrm>
-            <a:off x="9436608" y="2606040"/>
-            <a:ext cx="914400" cy="914400"/>
-          </a:xfrm>
-          <a:prstGeom prst="ellipse">
-            <a:avLst/>
-          </a:prstGeom>
-          <a:solidFill>
-            <a:srgbClr val="0066FF"/>
-          </a:solidFill>
-          <a:ln/>
-        </p:spPr>
-      </p:sp>
-      <p:sp>
-        <p:nvSpPr>
-          <p:cNvPr id="16" name="Text 14"/>
-          <p:cNvSpPr/>
-          <p:nvPr/>
-        </p:nvSpPr>
-        <p:spPr>
-          <a:xfrm>
-            <a:off x="9436608" y="2606040"/>
-            <a:ext cx="914400" cy="914400"/>
-          </a:xfrm>
-          <a:prstGeom prst="rect">
-            <a:avLst/>
-          </a:prstGeom>
-          <a:noFill/>
-          <a:ln/>
-        </p:spPr>
-        <p:txBody>
-          <a:bodyPr wrap="square" lIns="0" tIns="0" rIns="0" bIns="0" rtlCol="0" anchor="ctr"/>
-          <a:lstStyle/>
-          <a:p>
-            <a:pPr algn="ctr" indent="0" marL="0">
-              <a:buNone/>
-            </a:pPr>
-            <a:r>
-              <a:rPr lang="en-US" sz="2200" b="1" dirty="0">
-                <a:solidFill>
-                  <a:srgbClr val="FFFFFF"/>
+          <p:cNvPr id="15" name="Text 13"/>
+          <p:cNvSpPr/>
+          <p:nvPr/>
+        </p:nvSpPr>
+        <p:spPr>
+          <a:xfrm>
+            <a:off x="8449056" y="2240280"/>
+            <a:ext cx="2926080" cy="411480"/>
+          </a:xfrm>
+          <a:prstGeom prst="rect">
+            <a:avLst/>
+          </a:prstGeom>
+          <a:noFill/>
+          <a:ln/>
+        </p:spPr>
+        <p:txBody>
+          <a:bodyPr wrap="square" lIns="0" tIns="0" rIns="0" bIns="0" rtlCol="0" anchor="ctr"/>
+          <a:lstStyle/>
+          <a:p>
+            <a:pPr indent="0" marL="0">
+              <a:buNone/>
+            </a:pPr>
+            <a:r>
+              <a:rPr lang="en-US" sz="2000" b="1" dirty="0">
+                <a:solidFill>
+                  <a:srgbClr val="FFA101"/>
                 </a:solidFill>
                 <a:latin typeface="Space Grotesk" pitchFamily="34" charset="0"/>
                 <a:ea typeface="Space Grotesk" pitchFamily="34" charset="-122"/>
                 <a:cs typeface="Space Grotesk" pitchFamily="34" charset="-120"/>
               </a:rPr>
-              <a:t>AC</a:t>
-            </a:r>
-            <a:endParaRPr lang="en-US" sz="2200" dirty="0"/>
-          </a:p>
-        </p:txBody>
-      </p:sp>
-      <p:sp>
-        <p:nvSpPr>
-          <p:cNvPr id="17" name="Text 15"/>
-          <p:cNvSpPr/>
-          <p:nvPr/>
-        </p:nvSpPr>
-        <p:spPr>
-          <a:xfrm>
-            <a:off x="8339328" y="3749040"/>
-            <a:ext cx="3108960" cy="365760"/>
-          </a:xfrm>
-          <a:prstGeom prst="rect">
-            <a:avLst/>
-          </a:prstGeom>
-          <a:noFill/>
-          <a:ln/>
-        </p:spPr>
-        <p:txBody>
-          <a:bodyPr wrap="square" lIns="0" tIns="0" rIns="0" bIns="0" rtlCol="0" anchor="ctr"/>
-          <a:lstStyle/>
-          <a:p>
-            <a:pPr algn="ctr" indent="0" marL="0">
-              <a:buNone/>
-            </a:pPr>
-            <a:r>
-              <a:rPr lang="en-US" sz="1600" b="1" dirty="0">
-                <a:solidFill>
-                  <a:srgbClr val="0A0A0A"/>
-                </a:solidFill>
-                <a:latin typeface="Space Grotesk" pitchFamily="34" charset="0"/>
-                <a:ea typeface="Space Grotesk" pitchFamily="34" charset="-122"/>
-                <a:cs typeface="Space Grotesk" pitchFamily="34" charset="-120"/>
-              </a:rPr>
-              <a:t>Adrien Charles</a:t>
-            </a:r>
-            <a:endParaRPr lang="en-US" sz="1600" dirty="0"/>
-          </a:p>
-        </p:txBody>
-      </p:sp>
-      <p:sp>
-        <p:nvSpPr>
-          <p:cNvPr id="18" name="Text 16"/>
-          <p:cNvSpPr/>
-          <p:nvPr/>
-        </p:nvSpPr>
-        <p:spPr>
-          <a:xfrm>
-            <a:off x="8339328" y="4160520"/>
-            <a:ext cx="3108960" cy="365760"/>
-          </a:xfrm>
-          <a:prstGeom prst="rect">
-            <a:avLst/>
-          </a:prstGeom>
-          <a:noFill/>
-          <a:ln/>
-        </p:spPr>
-        <p:txBody>
-          <a:bodyPr wrap="square" lIns="0" tIns="0" rIns="0" bIns="0" rtlCol="0" anchor="ctr"/>
-          <a:lstStyle/>
-          <a:p>
-            <a:pPr algn="ctr" indent="0" marL="0">
-              <a:buNone/>
-            </a:pPr>
-            <a:r>
-              <a:rPr lang="en-US" sz="1150" dirty="0">
+              <a:t>Managé</a:t>
+            </a:r>
+            <a:endParaRPr lang="en-US" sz="2000" dirty="0"/>
+          </a:p>
+        </p:txBody>
+      </p:sp>
+      <p:sp>
+        <p:nvSpPr>
+          <p:cNvPr id="16" name="Text 14"/>
+          <p:cNvSpPr/>
+          <p:nvPr/>
+        </p:nvSpPr>
+        <p:spPr>
+          <a:xfrm>
+            <a:off x="8449056" y="2670048"/>
+            <a:ext cx="2926080" cy="320040"/>
+          </a:xfrm>
+          <a:prstGeom prst="rect">
+            <a:avLst/>
+          </a:prstGeom>
+          <a:noFill/>
+          <a:ln/>
+        </p:spPr>
+        <p:txBody>
+          <a:bodyPr wrap="square" lIns="0" tIns="0" rIns="0" bIns="0" rtlCol="0" anchor="ctr"/>
+          <a:lstStyle/>
+          <a:p>
+            <a:pPr indent="0" marL="0">
+              <a:buNone/>
+            </a:pPr>
+            <a:r>
+              <a:rPr lang="en-US" sz="1050" spc="50" kern="0" dirty="0">
                 <a:solidFill>
                   <a:srgbClr val="9296A6"/>
                 </a:solidFill>
@@ -3813,9 +3300,163 @@
                 <a:ea typeface="JetBrains Mono" pitchFamily="34" charset="-122"/>
                 <a:cs typeface="JetBrains Mono" pitchFamily="34" charset="-120"/>
               </a:rPr>
-              <a:t>Produit</a:t>
-            </a:r>
-            <a:endParaRPr lang="en-US" sz="1150" dirty="0"/>
+              <a:t>Hébergé &amp; opéré par Lyriks</a:t>
+            </a:r>
+            <a:endParaRPr lang="en-US" sz="1050" dirty="0"/>
+          </a:p>
+        </p:txBody>
+      </p:sp>
+      <p:sp>
+        <p:nvSpPr>
+          <p:cNvPr id="17" name="Text 15"/>
+          <p:cNvSpPr/>
+          <p:nvPr/>
+        </p:nvSpPr>
+        <p:spPr>
+          <a:xfrm>
+            <a:off x="8449056" y="3154680"/>
+            <a:ext cx="2926080" cy="2103120"/>
+          </a:xfrm>
+          <a:prstGeom prst="rect">
+            <a:avLst/>
+          </a:prstGeom>
+          <a:noFill/>
+          <a:ln/>
+        </p:spPr>
+        <p:txBody>
+          <a:bodyPr wrap="square" lIns="0" tIns="0" rIns="0" bIns="0" rtlCol="0" anchor="ctr"/>
+          <a:lstStyle/>
+          <a:p>
+            <a:pPr marL="177800" indent="-177800">
+              <a:lnSpc>
+                <a:spcPct val="105000"/>
+              </a:lnSpc>
+              <a:spcAft>
+                <a:spcPts val="900"/>
+              </a:spcAft>
+              <a:buSzPct val="100000"/>
+              <a:buChar char="•"/>
+            </a:pPr>
+            <a:r>
+              <a:rPr lang="en-US" sz="1200" dirty="0">
+                <a:solidFill>
+                  <a:srgbClr val="1A1A1A"/>
+                </a:solidFill>
+                <a:latin typeface="Montserrat" pitchFamily="34" charset="0"/>
+                <a:ea typeface="Montserrat" pitchFamily="34" charset="-122"/>
+                <a:cs typeface="Montserrat" pitchFamily="34" charset="-120"/>
+              </a:rPr>
+              <a:t>Infogérance complète &amp; SLA</a:t>
+            </a:r>
+            <a:endParaRPr lang="en-US" sz="1200" dirty="0"/>
+          </a:p>
+          <a:p>
+            <a:pPr marL="177800" indent="-177800">
+              <a:lnSpc>
+                <a:spcPct val="105000"/>
+              </a:lnSpc>
+              <a:spcAft>
+                <a:spcPts val="900"/>
+              </a:spcAft>
+              <a:buSzPct val="100000"/>
+              <a:buChar char="•"/>
+            </a:pPr>
+            <a:r>
+              <a:rPr lang="en-US" sz="1200" dirty="0">
+                <a:solidFill>
+                  <a:srgbClr val="1A1A1A"/>
+                </a:solidFill>
+                <a:latin typeface="Montserrat" pitchFamily="34" charset="0"/>
+                <a:ea typeface="Montserrat" pitchFamily="34" charset="-122"/>
+                <a:cs typeface="Montserrat" pitchFamily="34" charset="-120"/>
+              </a:rPr>
+              <a:t>Supervision avancée des usages IA</a:t>
+            </a:r>
+            <a:endParaRPr lang="en-US" sz="1200" dirty="0"/>
+          </a:p>
+          <a:p>
+            <a:pPr marL="177800" indent="-177800">
+              <a:lnSpc>
+                <a:spcPct val="105000"/>
+              </a:lnSpc>
+              <a:spcAft>
+                <a:spcPts val="900"/>
+              </a:spcAft>
+              <a:buSzPct val="100000"/>
+              <a:buChar char="•"/>
+            </a:pPr>
+            <a:r>
+              <a:rPr lang="en-US" sz="1200" dirty="0">
+                <a:solidFill>
+                  <a:srgbClr val="1A1A1A"/>
+                </a:solidFill>
+                <a:latin typeface="Montserrat" pitchFamily="34" charset="0"/>
+                <a:ea typeface="Montserrat" pitchFamily="34" charset="-122"/>
+                <a:cs typeface="Montserrat" pitchFamily="34" charset="-120"/>
+              </a:rPr>
+              <a:t>SSO &amp; sécurité avancée</a:t>
+            </a:r>
+            <a:endParaRPr lang="en-US" sz="1200" dirty="0"/>
+          </a:p>
+          <a:p>
+            <a:pPr marL="177800" indent="-177800">
+              <a:lnSpc>
+                <a:spcPct val="105000"/>
+              </a:lnSpc>
+              <a:buSzPct val="100000"/>
+              <a:buChar char="•"/>
+            </a:pPr>
+            <a:r>
+              <a:rPr lang="en-US" sz="1200" dirty="0">
+                <a:solidFill>
+                  <a:srgbClr val="1A1A1A"/>
+                </a:solidFill>
+                <a:latin typeface="Montserrat" pitchFamily="34" charset="0"/>
+                <a:ea typeface="Montserrat" pitchFamily="34" charset="-122"/>
+                <a:cs typeface="Montserrat" pitchFamily="34" charset="-120"/>
+              </a:rPr>
+              <a:t>Accompagnement dédié</a:t>
+            </a:r>
+            <a:endParaRPr lang="en-US" sz="1200" dirty="0"/>
+          </a:p>
+        </p:txBody>
+      </p:sp>
+      <p:sp>
+        <p:nvSpPr>
+          <p:cNvPr id="18" name="Text 16"/>
+          <p:cNvSpPr/>
+          <p:nvPr/>
+        </p:nvSpPr>
+        <p:spPr>
+          <a:xfrm>
+            <a:off x="8449056" y="5532120"/>
+            <a:ext cx="2926080" cy="365760"/>
+          </a:xfrm>
+          <a:prstGeom prst="rect">
+            <a:avLst/>
+          </a:prstGeom>
+          <a:noFill/>
+          <a:ln/>
+        </p:spPr>
+        <p:txBody>
+          <a:bodyPr wrap="square" lIns="0" tIns="0" rIns="0" bIns="0" rtlCol="0" anchor="ctr"/>
+          <a:lstStyle/>
+          <a:p>
+            <a:pPr indent="0" marL="0">
+              <a:buNone/>
+            </a:pPr>
+            <a:r>
+              <a:rPr lang="en-US" sz="1250" b="1" dirty="0">
+                <a:solidFill>
+                  <a:srgbClr val="FFA101"/>
+                </a:solidFill>
+                <a:latin typeface="Montserrat" pitchFamily="34" charset="0"/>
+                <a:ea typeface="Montserrat" pitchFamily="34" charset="-122"/>
+                <a:cs typeface="Montserrat" pitchFamily="34" charset="-120"/>
+              </a:rPr>
+              <a:t>Contacter l'équipe  →</a:t>
+            </a:r>
+            <a:endParaRPr lang="en-US" sz="1250" dirty="0"/>
           </a:p>
         </p:txBody>
       </p:sp>
@@ -3869,6 +3510,668 @@
 <file path=ppt/slides/slide12.xml><?xml version="1.0" encoding="utf-8"?>
 <p:sld xmlns:a="http://schemas.openxmlformats.org/drawingml/2006/main" xmlns:r="http://schemas.openxmlformats.org/officeDocument/2006/relationships" xmlns:p="http://schemas.openxmlformats.org/presentationml/2006/main">
   <p:cSld name="Slide 12">
+    <p:bg>
+      <p:bgPr>
+        <a:solidFill>
+          <a:srgbClr val="FFFFFF"/>
+        </a:solidFill>
+      </p:bgPr>
+    </p:bg>
+    <p:spTree>
+      <p:nvGrpSpPr>
+        <p:cNvPr id="1" name=""/>
+        <p:cNvGrpSpPr/>
+        <p:nvPr/>
+      </p:nvGrpSpPr>
+      <p:grpSpPr>
+        <a:xfrm>
+          <a:off x="0" y="0"/>
+          <a:ext cx="0" cy="0"/>
+          <a:chOff x="0" y="0"/>
+          <a:chExt cx="0" cy="0"/>
+        </a:xfrm>
+      </p:grpSpPr>
+      <p:sp>
+        <p:nvSpPr>
+          <p:cNvPr id="2" name="Text 0"/>
+          <p:cNvSpPr/>
+          <p:nvPr/>
+        </p:nvSpPr>
+        <p:spPr>
+          <a:xfrm>
+            <a:off x="640080" y="640080"/>
+            <a:ext cx="8229600" cy="274320"/>
+          </a:xfrm>
+          <a:prstGeom prst="rect">
+            <a:avLst/>
+          </a:prstGeom>
+          <a:noFill/>
+          <a:ln/>
+        </p:spPr>
+        <p:txBody>
+          <a:bodyPr wrap="square" lIns="0" tIns="0" rIns="0" bIns="0" rtlCol="0" anchor="ctr"/>
+          <a:lstStyle/>
+          <a:p>
+            <a:pPr indent="0" marL="0">
+              <a:buNone/>
+            </a:pPr>
+            <a:r>
+              <a:rPr lang="en-US" sz="1100" b="1" spc="250" kern="0" dirty="0">
+                <a:solidFill>
+                  <a:srgbClr val="8047F4"/>
+                </a:solidFill>
+                <a:latin typeface="JetBrains Mono" pitchFamily="34" charset="0"/>
+                <a:ea typeface="JetBrains Mono" pitchFamily="34" charset="-122"/>
+                <a:cs typeface="JetBrains Mono" pitchFamily="34" charset="-120"/>
+              </a:rPr>
+              <a:t>L'ÉQUIPE</a:t>
+            </a:r>
+            <a:endParaRPr lang="en-US" sz="1100" dirty="0"/>
+          </a:p>
+        </p:txBody>
+      </p:sp>
+      <p:sp>
+        <p:nvSpPr>
+          <p:cNvPr id="3" name="Text 1"/>
+          <p:cNvSpPr/>
+          <p:nvPr/>
+        </p:nvSpPr>
+        <p:spPr>
+          <a:xfrm>
+            <a:off x="640080" y="960120"/>
+            <a:ext cx="10058400" cy="822960"/>
+          </a:xfrm>
+          <a:prstGeom prst="rect">
+            <a:avLst/>
+          </a:prstGeom>
+          <a:noFill/>
+          <a:ln/>
+        </p:spPr>
+        <p:txBody>
+          <a:bodyPr wrap="square" lIns="0" tIns="0" rIns="0" bIns="0" rtlCol="0" anchor="ctr"/>
+          <a:lstStyle/>
+          <a:p>
+            <a:pPr indent="0" marL="0">
+              <a:buNone/>
+            </a:pPr>
+            <a:r>
+              <a:rPr lang="en-US" sz="3000" b="1" dirty="0">
+                <a:solidFill>
+                  <a:srgbClr val="0A0A0A"/>
+                </a:solidFill>
+                <a:latin typeface="Space Grotesk" pitchFamily="34" charset="0"/>
+                <a:ea typeface="Space Grotesk" pitchFamily="34" charset="-122"/>
+                <a:cs typeface="Space Grotesk" pitchFamily="34" charset="-120"/>
+              </a:rPr>
+              <a:t>Les voix de Lyriks</a:t>
+            </a:r>
+            <a:endParaRPr lang="en-US" sz="3000" dirty="0"/>
+          </a:p>
+        </p:txBody>
+      </p:sp>
+      <p:sp>
+        <p:nvSpPr>
+          <p:cNvPr id="4" name="Shape 2"/>
+          <p:cNvSpPr/>
+          <p:nvPr/>
+        </p:nvSpPr>
+        <p:spPr>
+          <a:xfrm>
+            <a:off x="640080" y="2194560"/>
+            <a:ext cx="3474720" cy="2926080"/>
+          </a:xfrm>
+          <a:prstGeom prst="roundRect">
+            <a:avLst>
+              <a:gd name="adj" fmla="val 3125"/>
+            </a:avLst>
+          </a:prstGeom>
+          <a:solidFill>
+            <a:srgbClr val="FFFFFF"/>
+          </a:solidFill>
+          <a:ln w="12700">
+            <a:solidFill>
+              <a:srgbClr val="E8E8EE"/>
+            </a:solidFill>
+            <a:prstDash val="solid"/>
+          </a:ln>
+          <a:effectLst>
+            <a:outerShdw sx="100000" sy="100000" kx="0" ky="0" algn="bl" rotWithShape="0" blurRad="114300" dist="38100" dir="5400000">
+              <a:srgbClr val="10122A">
+                <a:alpha val="12000"/>
+              </a:srgbClr>
+            </a:outerShdw>
+          </a:effectLst>
+        </p:spPr>
+      </p:sp>
+      <p:sp>
+        <p:nvSpPr>
+          <p:cNvPr id="5" name="Shape 3"/>
+          <p:cNvSpPr/>
+          <p:nvPr/>
+        </p:nvSpPr>
+        <p:spPr>
+          <a:xfrm>
+            <a:off x="1920240" y="2606040"/>
+            <a:ext cx="914400" cy="914400"/>
+          </a:xfrm>
+          <a:prstGeom prst="ellipse">
+            <a:avLst/>
+          </a:prstGeom>
+          <a:solidFill>
+            <a:srgbClr val="FFA101"/>
+          </a:solidFill>
+          <a:ln/>
+        </p:spPr>
+      </p:sp>
+      <p:sp>
+        <p:nvSpPr>
+          <p:cNvPr id="6" name="Text 4"/>
+          <p:cNvSpPr/>
+          <p:nvPr/>
+        </p:nvSpPr>
+        <p:spPr>
+          <a:xfrm>
+            <a:off x="1920240" y="2606040"/>
+            <a:ext cx="914400" cy="914400"/>
+          </a:xfrm>
+          <a:prstGeom prst="rect">
+            <a:avLst/>
+          </a:prstGeom>
+          <a:noFill/>
+          <a:ln/>
+        </p:spPr>
+        <p:txBody>
+          <a:bodyPr wrap="square" lIns="0" tIns="0" rIns="0" bIns="0" rtlCol="0" anchor="ctr"/>
+          <a:lstStyle/>
+          <a:p>
+            <a:pPr algn="ctr" indent="0" marL="0">
+              <a:buNone/>
+            </a:pPr>
+            <a:r>
+              <a:rPr lang="en-US" sz="2200" b="1" dirty="0">
+                <a:solidFill>
+                  <a:srgbClr val="FFFFFF"/>
+                </a:solidFill>
+                <a:latin typeface="Space Grotesk" pitchFamily="34" charset="0"/>
+                <a:ea typeface="Space Grotesk" pitchFamily="34" charset="-122"/>
+                <a:cs typeface="Space Grotesk" pitchFamily="34" charset="-120"/>
+              </a:rPr>
+              <a:t>DM</a:t>
+            </a:r>
+            <a:endParaRPr lang="en-US" sz="2200" dirty="0"/>
+          </a:p>
+        </p:txBody>
+      </p:sp>
+      <p:sp>
+        <p:nvSpPr>
+          <p:cNvPr id="7" name="Text 5"/>
+          <p:cNvSpPr/>
+          <p:nvPr/>
+        </p:nvSpPr>
+        <p:spPr>
+          <a:xfrm>
+            <a:off x="822960" y="3749040"/>
+            <a:ext cx="3108960" cy="365760"/>
+          </a:xfrm>
+          <a:prstGeom prst="rect">
+            <a:avLst/>
+          </a:prstGeom>
+          <a:noFill/>
+          <a:ln/>
+        </p:spPr>
+        <p:txBody>
+          <a:bodyPr wrap="square" lIns="0" tIns="0" rIns="0" bIns="0" rtlCol="0" anchor="ctr"/>
+          <a:lstStyle/>
+          <a:p>
+            <a:pPr algn="ctr" indent="0" marL="0">
+              <a:buNone/>
+            </a:pPr>
+            <a:r>
+              <a:rPr lang="en-US" sz="1600" b="1" dirty="0">
+                <a:solidFill>
+                  <a:srgbClr val="0A0A0A"/>
+                </a:solidFill>
+                <a:latin typeface="Space Grotesk" pitchFamily="34" charset="0"/>
+                <a:ea typeface="Space Grotesk" pitchFamily="34" charset="-122"/>
+                <a:cs typeface="Space Grotesk" pitchFamily="34" charset="-120"/>
+              </a:rPr>
+              <a:t>David Mabboux</a:t>
+            </a:r>
+            <a:endParaRPr lang="en-US" sz="1600" dirty="0"/>
+          </a:p>
+        </p:txBody>
+      </p:sp>
+      <p:sp>
+        <p:nvSpPr>
+          <p:cNvPr id="8" name="Text 6"/>
+          <p:cNvSpPr/>
+          <p:nvPr/>
+        </p:nvSpPr>
+        <p:spPr>
+          <a:xfrm>
+            <a:off x="822960" y="4160520"/>
+            <a:ext cx="3108960" cy="365760"/>
+          </a:xfrm>
+          <a:prstGeom prst="rect">
+            <a:avLst/>
+          </a:prstGeom>
+          <a:noFill/>
+          <a:ln/>
+        </p:spPr>
+        <p:txBody>
+          <a:bodyPr wrap="square" lIns="0" tIns="0" rIns="0" bIns="0" rtlCol="0" anchor="ctr"/>
+          <a:lstStyle/>
+          <a:p>
+            <a:pPr algn="ctr" indent="0" marL="0">
+              <a:buNone/>
+            </a:pPr>
+            <a:r>
+              <a:rPr lang="en-US" sz="1150" dirty="0">
+                <a:solidFill>
+                  <a:srgbClr val="9296A6"/>
+                </a:solidFill>
+                <a:latin typeface="JetBrains Mono" pitchFamily="34" charset="0"/>
+                <a:ea typeface="JetBrains Mono" pitchFamily="34" charset="-122"/>
+                <a:cs typeface="JetBrains Mono" pitchFamily="34" charset="-120"/>
+              </a:rPr>
+              <a:t>Business</a:t>
+            </a:r>
+            <a:endParaRPr lang="en-US" sz="1150" dirty="0"/>
+          </a:p>
+        </p:txBody>
+      </p:sp>
+      <p:sp>
+        <p:nvSpPr>
+          <p:cNvPr id="9" name="Shape 7"/>
+          <p:cNvSpPr/>
+          <p:nvPr/>
+        </p:nvSpPr>
+        <p:spPr>
+          <a:xfrm>
+            <a:off x="4398264" y="2194560"/>
+            <a:ext cx="3474720" cy="2926080"/>
+          </a:xfrm>
+          <a:prstGeom prst="roundRect">
+            <a:avLst>
+              <a:gd name="adj" fmla="val 3125"/>
+            </a:avLst>
+          </a:prstGeom>
+          <a:solidFill>
+            <a:srgbClr val="FFFFFF"/>
+          </a:solidFill>
+          <a:ln w="12700">
+            <a:solidFill>
+              <a:srgbClr val="E8E8EE"/>
+            </a:solidFill>
+            <a:prstDash val="solid"/>
+          </a:ln>
+          <a:effectLst>
+            <a:outerShdw sx="100000" sy="100000" kx="0" ky="0" algn="bl" rotWithShape="0" blurRad="114300" dist="38100" dir="5400000">
+              <a:srgbClr val="10122A">
+                <a:alpha val="12000"/>
+              </a:srgbClr>
+            </a:outerShdw>
+          </a:effectLst>
+        </p:spPr>
+      </p:sp>
+      <p:sp>
+        <p:nvSpPr>
+          <p:cNvPr id="10" name="Shape 8"/>
+          <p:cNvSpPr/>
+          <p:nvPr/>
+        </p:nvSpPr>
+        <p:spPr>
+          <a:xfrm>
+            <a:off x="5678424" y="2606040"/>
+            <a:ext cx="914400" cy="914400"/>
+          </a:xfrm>
+          <a:prstGeom prst="ellipse">
+            <a:avLst/>
+          </a:prstGeom>
+          <a:solidFill>
+            <a:srgbClr val="BB46F5"/>
+          </a:solidFill>
+          <a:ln/>
+        </p:spPr>
+      </p:sp>
+      <p:sp>
+        <p:nvSpPr>
+          <p:cNvPr id="11" name="Text 9"/>
+          <p:cNvSpPr/>
+          <p:nvPr/>
+        </p:nvSpPr>
+        <p:spPr>
+          <a:xfrm>
+            <a:off x="5678424" y="2606040"/>
+            <a:ext cx="914400" cy="914400"/>
+          </a:xfrm>
+          <a:prstGeom prst="rect">
+            <a:avLst/>
+          </a:prstGeom>
+          <a:noFill/>
+          <a:ln/>
+        </p:spPr>
+        <p:txBody>
+          <a:bodyPr wrap="square" lIns="0" tIns="0" rIns="0" bIns="0" rtlCol="0" anchor="ctr"/>
+          <a:lstStyle/>
+          <a:p>
+            <a:pPr algn="ctr" indent="0" marL="0">
+              <a:buNone/>
+            </a:pPr>
+            <a:r>
+              <a:rPr lang="en-US" sz="2200" b="1" dirty="0">
+                <a:solidFill>
+                  <a:srgbClr val="FFFFFF"/>
+                </a:solidFill>
+                <a:latin typeface="Space Grotesk" pitchFamily="34" charset="0"/>
+                <a:ea typeface="Space Grotesk" pitchFamily="34" charset="-122"/>
+                <a:cs typeface="Space Grotesk" pitchFamily="34" charset="-120"/>
+              </a:rPr>
+              <a:t>AB</a:t>
+            </a:r>
+            <a:endParaRPr lang="en-US" sz="2200" dirty="0"/>
+          </a:p>
+        </p:txBody>
+      </p:sp>
+      <p:sp>
+        <p:nvSpPr>
+          <p:cNvPr id="12" name="Text 10"/>
+          <p:cNvSpPr/>
+          <p:nvPr/>
+        </p:nvSpPr>
+        <p:spPr>
+          <a:xfrm>
+            <a:off x="4581144" y="3749040"/>
+            <a:ext cx="3108960" cy="365760"/>
+          </a:xfrm>
+          <a:prstGeom prst="rect">
+            <a:avLst/>
+          </a:prstGeom>
+          <a:noFill/>
+          <a:ln/>
+        </p:spPr>
+        <p:txBody>
+          <a:bodyPr wrap="square" lIns="0" tIns="0" rIns="0" bIns="0" rtlCol="0" anchor="ctr"/>
+          <a:lstStyle/>
+          <a:p>
+            <a:pPr algn="ctr" indent="0" marL="0">
+              <a:buNone/>
+            </a:pPr>
+            <a:r>
+              <a:rPr lang="en-US" sz="1600" b="1" dirty="0">
+                <a:solidFill>
+                  <a:srgbClr val="0A0A0A"/>
+                </a:solidFill>
+                <a:latin typeface="Space Grotesk" pitchFamily="34" charset="0"/>
+                <a:ea typeface="Space Grotesk" pitchFamily="34" charset="-122"/>
+                <a:cs typeface="Space Grotesk" pitchFamily="34" charset="-120"/>
+              </a:rPr>
+              <a:t>Adrien Basso Blandin</a:t>
+            </a:r>
+            <a:endParaRPr lang="en-US" sz="1600" dirty="0"/>
+          </a:p>
+        </p:txBody>
+      </p:sp>
+      <p:sp>
+        <p:nvSpPr>
+          <p:cNvPr id="13" name="Text 11"/>
+          <p:cNvSpPr/>
+          <p:nvPr/>
+        </p:nvSpPr>
+        <p:spPr>
+          <a:xfrm>
+            <a:off x="4581144" y="4160520"/>
+            <a:ext cx="3108960" cy="365760"/>
+          </a:xfrm>
+          <a:prstGeom prst="rect">
+            <a:avLst/>
+          </a:prstGeom>
+          <a:noFill/>
+          <a:ln/>
+        </p:spPr>
+        <p:txBody>
+          <a:bodyPr wrap="square" lIns="0" tIns="0" rIns="0" bIns="0" rtlCol="0" anchor="ctr"/>
+          <a:lstStyle/>
+          <a:p>
+            <a:pPr algn="ctr" indent="0" marL="0">
+              <a:buNone/>
+            </a:pPr>
+            <a:r>
+              <a:rPr lang="en-US" sz="1150" dirty="0">
+                <a:solidFill>
+                  <a:srgbClr val="9296A6"/>
+                </a:solidFill>
+                <a:latin typeface="JetBrains Mono" pitchFamily="34" charset="0"/>
+                <a:ea typeface="JetBrains Mono" pitchFamily="34" charset="-122"/>
+                <a:cs typeface="JetBrains Mono" pitchFamily="34" charset="-120"/>
+              </a:rPr>
+              <a:t>Cohérence</a:t>
+            </a:r>
+            <a:endParaRPr lang="en-US" sz="1150" dirty="0"/>
+          </a:p>
+        </p:txBody>
+      </p:sp>
+      <p:sp>
+        <p:nvSpPr>
+          <p:cNvPr id="14" name="Shape 12"/>
+          <p:cNvSpPr/>
+          <p:nvPr/>
+        </p:nvSpPr>
+        <p:spPr>
+          <a:xfrm>
+            <a:off x="8156448" y="2194560"/>
+            <a:ext cx="3474720" cy="2926080"/>
+          </a:xfrm>
+          <a:prstGeom prst="roundRect">
+            <a:avLst>
+              <a:gd name="adj" fmla="val 3125"/>
+            </a:avLst>
+          </a:prstGeom>
+          <a:solidFill>
+            <a:srgbClr val="FFFFFF"/>
+          </a:solidFill>
+          <a:ln w="12700">
+            <a:solidFill>
+              <a:srgbClr val="E8E8EE"/>
+            </a:solidFill>
+            <a:prstDash val="solid"/>
+          </a:ln>
+          <a:effectLst>
+            <a:outerShdw sx="100000" sy="100000" kx="0" ky="0" algn="bl" rotWithShape="0" blurRad="114300" dist="38100" dir="5400000">
+              <a:srgbClr val="10122A">
+                <a:alpha val="12000"/>
+              </a:srgbClr>
+            </a:outerShdw>
+          </a:effectLst>
+        </p:spPr>
+      </p:sp>
+      <p:sp>
+        <p:nvSpPr>
+          <p:cNvPr id="15" name="Shape 13"/>
+          <p:cNvSpPr/>
+          <p:nvPr/>
+        </p:nvSpPr>
+        <p:spPr>
+          <a:xfrm>
+            <a:off x="9436608" y="2606040"/>
+            <a:ext cx="914400" cy="914400"/>
+          </a:xfrm>
+          <a:prstGeom prst="ellipse">
+            <a:avLst/>
+          </a:prstGeom>
+          <a:solidFill>
+            <a:srgbClr val="0066FF"/>
+          </a:solidFill>
+          <a:ln/>
+        </p:spPr>
+      </p:sp>
+      <p:sp>
+        <p:nvSpPr>
+          <p:cNvPr id="16" name="Text 14"/>
+          <p:cNvSpPr/>
+          <p:nvPr/>
+        </p:nvSpPr>
+        <p:spPr>
+          <a:xfrm>
+            <a:off x="9436608" y="2606040"/>
+            <a:ext cx="914400" cy="914400"/>
+          </a:xfrm>
+          <a:prstGeom prst="rect">
+            <a:avLst/>
+          </a:prstGeom>
+          <a:noFill/>
+          <a:ln/>
+        </p:spPr>
+        <p:txBody>
+          <a:bodyPr wrap="square" lIns="0" tIns="0" rIns="0" bIns="0" rtlCol="0" anchor="ctr"/>
+          <a:lstStyle/>
+          <a:p>
+            <a:pPr algn="ctr" indent="0" marL="0">
+              <a:buNone/>
+            </a:pPr>
+            <a:r>
+              <a:rPr lang="en-US" sz="2200" b="1" dirty="0">
+                <a:solidFill>
+                  <a:srgbClr val="FFFFFF"/>
+                </a:solidFill>
+                <a:latin typeface="Space Grotesk" pitchFamily="34" charset="0"/>
+                <a:ea typeface="Space Grotesk" pitchFamily="34" charset="-122"/>
+                <a:cs typeface="Space Grotesk" pitchFamily="34" charset="-120"/>
+              </a:rPr>
+              <a:t>AC</a:t>
+            </a:r>
+            <a:endParaRPr lang="en-US" sz="2200" dirty="0"/>
+          </a:p>
+        </p:txBody>
+      </p:sp>
+      <p:sp>
+        <p:nvSpPr>
+          <p:cNvPr id="17" name="Text 15"/>
+          <p:cNvSpPr/>
+          <p:nvPr/>
+        </p:nvSpPr>
+        <p:spPr>
+          <a:xfrm>
+            <a:off x="8339328" y="3749040"/>
+            <a:ext cx="3108960" cy="365760"/>
+          </a:xfrm>
+          <a:prstGeom prst="rect">
+            <a:avLst/>
+          </a:prstGeom>
+          <a:noFill/>
+          <a:ln/>
+        </p:spPr>
+        <p:txBody>
+          <a:bodyPr wrap="square" lIns="0" tIns="0" rIns="0" bIns="0" rtlCol="0" anchor="ctr"/>
+          <a:lstStyle/>
+          <a:p>
+            <a:pPr algn="ctr" indent="0" marL="0">
+              <a:buNone/>
+            </a:pPr>
+            <a:r>
+              <a:rPr lang="en-US" sz="1600" b="1" dirty="0">
+                <a:solidFill>
+                  <a:srgbClr val="0A0A0A"/>
+                </a:solidFill>
+                <a:latin typeface="Space Grotesk" pitchFamily="34" charset="0"/>
+                <a:ea typeface="Space Grotesk" pitchFamily="34" charset="-122"/>
+                <a:cs typeface="Space Grotesk" pitchFamily="34" charset="-120"/>
+              </a:rPr>
+              <a:t>Adrien Charles</a:t>
+            </a:r>
+            <a:endParaRPr lang="en-US" sz="1600" dirty="0"/>
+          </a:p>
+        </p:txBody>
+      </p:sp>
+      <p:sp>
+        <p:nvSpPr>
+          <p:cNvPr id="18" name="Text 16"/>
+          <p:cNvSpPr/>
+          <p:nvPr/>
+        </p:nvSpPr>
+        <p:spPr>
+          <a:xfrm>
+            <a:off x="8339328" y="4160520"/>
+            <a:ext cx="3108960" cy="365760"/>
+          </a:xfrm>
+          <a:prstGeom prst="rect">
+            <a:avLst/>
+          </a:prstGeom>
+          <a:noFill/>
+          <a:ln/>
+        </p:spPr>
+        <p:txBody>
+          <a:bodyPr wrap="square" lIns="0" tIns="0" rIns="0" bIns="0" rtlCol="0" anchor="ctr"/>
+          <a:lstStyle/>
+          <a:p>
+            <a:pPr algn="ctr" indent="0" marL="0">
+              <a:buNone/>
+            </a:pPr>
+            <a:r>
+              <a:rPr lang="en-US" sz="1150" dirty="0">
+                <a:solidFill>
+                  <a:srgbClr val="9296A6"/>
+                </a:solidFill>
+                <a:latin typeface="JetBrains Mono" pitchFamily="34" charset="0"/>
+                <a:ea typeface="JetBrains Mono" pitchFamily="34" charset="-122"/>
+                <a:cs typeface="JetBrains Mono" pitchFamily="34" charset="-120"/>
+              </a:rPr>
+              <a:t>Produit</a:t>
+            </a:r>
+            <a:endParaRPr lang="en-US" sz="1150" dirty="0"/>
+          </a:p>
+        </p:txBody>
+      </p:sp>
+      <p:sp>
+        <p:nvSpPr>
+          <p:cNvPr id="19" name="Text 17"/>
+          <p:cNvSpPr/>
+          <p:nvPr/>
+        </p:nvSpPr>
+        <p:spPr>
+          <a:xfrm>
+            <a:off x="11185855" y="6400800"/>
+            <a:ext cx="548640" cy="274320"/>
+          </a:xfrm>
+          <a:prstGeom prst="rect">
+            <a:avLst/>
+          </a:prstGeom>
+          <a:noFill/>
+          <a:ln/>
+        </p:spPr>
+        <p:txBody>
+          <a:bodyPr wrap="square" lIns="0" tIns="0" rIns="0" bIns="0" rtlCol="0" anchor="ctr"/>
+          <a:lstStyle/>
+          <a:p>
+            <a:pPr algn="r" indent="0" marL="0">
+              <a:buNone/>
+            </a:pPr>
+            <a:r>
+              <a:rPr lang="en-US" sz="1000" dirty="0">
+                <a:solidFill>
+                  <a:srgbClr val="9296A6"/>
+                </a:solidFill>
+                <a:latin typeface="JetBrains Mono" pitchFamily="34" charset="0"/>
+                <a:ea typeface="JetBrains Mono" pitchFamily="34" charset="-122"/>
+                <a:cs typeface="JetBrains Mono" pitchFamily="34" charset="-120"/>
+              </a:rPr>
+              <a:t>12</a:t>
+            </a:r>
+            <a:endParaRPr lang="en-US" sz="1000" dirty="0"/>
+          </a:p>
+        </p:txBody>
+      </p:sp>
+    </p:spTree>
+  </p:cSld>
+  <p:clrMapOvr>
+    <a:masterClrMapping/>
+  </p:clrMapOvr>
+</p:sld>
+</file>
+
+<file path=ppt/slides/slide13.xml><?xml version="1.0" encoding="utf-8"?>
+<p:sld xmlns:a="http://schemas.openxmlformats.org/drawingml/2006/main" xmlns:r="http://schemas.openxmlformats.org/officeDocument/2006/relationships" xmlns:p="http://schemas.openxmlformats.org/presentationml/2006/main">
+  <p:cSld name="Slide 13">
     <p:bg>
       <p:bgPr>
         <a:solidFill>
@@ -4620,7 +4923,7 @@
                 <a:ea typeface="Montserrat" pitchFamily="34" charset="-122"/>
                 <a:cs typeface="Montserrat" pitchFamily="34" charset="-120"/>
               </a:rPr>
-              <a:t>Modéliser, vérifier, superviser</a:t>
+              <a:t>Trois écrans, une continuité</a:t>
             </a:r>
             <a:endParaRPr lang="en-US" sz="1800" dirty="0"/>
           </a:p>
@@ -5755,46 +6058,12 @@
         </p:nvSpPr>
         <p:spPr>
           <a:xfrm>
-            <a:off x="640080" y="2103120"/>
-            <a:ext cx="3474720" cy="3474720"/>
+            <a:off x="640080" y="2286000"/>
+            <a:ext cx="10908792" cy="1024128"/>
           </a:xfrm>
           <a:prstGeom prst="roundRect">
             <a:avLst>
-              <a:gd name="adj" fmla="val 2632"/>
-            </a:avLst>
-          </a:prstGeom>
-          <a:solidFill>
-            <a:srgbClr val="FFFFFF"/>
-          </a:solidFill>
-          <a:ln w="12700">
-            <a:solidFill>
-              <a:srgbClr val="E8E8EE"/>
-            </a:solidFill>
-            <a:prstDash val="solid"/>
-          </a:ln>
-          <a:effectLst>
-            <a:outerShdw sx="100000" sy="100000" kx="0" ky="0" algn="bl" rotWithShape="0" blurRad="114300" dist="38100" dir="5400000">
-              <a:srgbClr val="10122A">
-                <a:alpha val="12000"/>
-              </a:srgbClr>
-            </a:outerShdw>
-          </a:effectLst>
-        </p:spPr>
-      </p:sp>
-      <p:sp>
-        <p:nvSpPr>
-          <p:cNvPr id="5" name="Shape 3"/>
-          <p:cNvSpPr/>
-          <p:nvPr/>
-        </p:nvSpPr>
-        <p:spPr>
-          <a:xfrm>
-            <a:off x="960120" y="2468880"/>
-            <a:ext cx="457200" cy="457200"/>
-          </a:xfrm>
-          <a:prstGeom prst="roundRect">
-            <a:avLst>
-              <a:gd name="adj" fmla="val 14000"/>
+              <a:gd name="adj" fmla="val 7143"/>
             </a:avLst>
           </a:prstGeom>
           <a:solidFill>
@@ -5805,53 +6074,55 @@
       </p:sp>
       <p:sp>
         <p:nvSpPr>
-          <p:cNvPr id="6" name="Text 4"/>
-          <p:cNvSpPr/>
-          <p:nvPr/>
-        </p:nvSpPr>
-        <p:spPr>
-          <a:xfrm>
-            <a:off x="960120" y="2468880"/>
-            <a:ext cx="457200" cy="457200"/>
-          </a:xfrm>
-          <a:prstGeom prst="rect">
-            <a:avLst/>
-          </a:prstGeom>
-          <a:noFill/>
-          <a:ln/>
-        </p:spPr>
-        <p:txBody>
-          <a:bodyPr wrap="square" lIns="0" tIns="0" rIns="0" bIns="0" rtlCol="0" anchor="ctr"/>
-          <a:lstStyle/>
-          <a:p>
-            <a:pPr algn="ctr" indent="0" marL="0">
-              <a:buNone/>
-            </a:pPr>
-            <a:r>
-              <a:rPr lang="en-US" sz="1300" b="1" dirty="0">
-                <a:solidFill>
-                  <a:srgbClr val="FFFFFF"/>
+          <p:cNvPr id="5" name="Text 3"/>
+          <p:cNvSpPr/>
+          <p:nvPr/>
+        </p:nvSpPr>
+        <p:spPr>
+          <a:xfrm>
+            <a:off x="1051560" y="2286000"/>
+            <a:ext cx="640080" cy="1024128"/>
+          </a:xfrm>
+          <a:prstGeom prst="rect">
+            <a:avLst/>
+          </a:prstGeom>
+          <a:noFill/>
+          <a:ln/>
+        </p:spPr>
+        <p:txBody>
+          <a:bodyPr wrap="square" lIns="0" tIns="0" rIns="0" bIns="0" rtlCol="0" anchor="ctr"/>
+          <a:lstStyle/>
+          <a:p>
+            <a:pPr indent="0" marL="0">
+              <a:buNone/>
+            </a:pPr>
+            <a:r>
+              <a:rPr lang="en-US" sz="1400" b="1" dirty="0">
+                <a:solidFill>
+                  <a:srgbClr val="FFFFFF">
+                    <a:alpha val="75000"/>
+                  </a:srgbClr>
                 </a:solidFill>
                 <a:latin typeface="JetBrains Mono" pitchFamily="34" charset="0"/>
                 <a:ea typeface="JetBrains Mono" pitchFamily="34" charset="-122"/>
                 <a:cs typeface="JetBrains Mono" pitchFamily="34" charset="-120"/>
               </a:rPr>
-              <a:t>1</a:t>
-            </a:r>
-            <a:endParaRPr lang="en-US" sz="1300" dirty="0"/>
-          </a:p>
-        </p:txBody>
-      </p:sp>
-      <p:sp>
-        <p:nvSpPr>
-          <p:cNvPr id="7" name="Text 5"/>
-          <p:cNvSpPr/>
-          <p:nvPr/>
-        </p:nvSpPr>
-        <p:spPr>
-          <a:xfrm>
-            <a:off x="960120" y="3108960"/>
-            <a:ext cx="2834640" cy="457200"/>
+              <a:t>01</a:t>
+            </a:r>
+            <a:endParaRPr lang="en-US" sz="1400" dirty="0"/>
+          </a:p>
+        </p:txBody>
+      </p:sp>
+      <p:sp>
+        <p:nvSpPr>
+          <p:cNvPr id="6" name="Text 4"/>
+          <p:cNvSpPr/>
+          <p:nvPr/>
+        </p:nvSpPr>
+        <p:spPr>
+          <a:xfrm>
+            <a:off x="1783080" y="2286000"/>
+            <a:ext cx="3657600" cy="1024128"/>
           </a:xfrm>
           <a:prstGeom prst="rect">
             <a:avLst/>
@@ -5867,9 +6138,9 @@
               <a:buNone/>
             </a:pPr>
             <a:r>
-              <a:rPr lang="en-US" sz="1900" b="1" dirty="0">
-                <a:solidFill>
-                  <a:srgbClr val="0A0A0A"/>
+              <a:rPr lang="en-US" sz="2400" b="1" dirty="0">
+                <a:solidFill>
+                  <a:srgbClr val="FFFFFF"/>
                 </a:solidFill>
                 <a:latin typeface="Space Grotesk" pitchFamily="34" charset="0"/>
                 <a:ea typeface="Space Grotesk" pitchFamily="34" charset="-122"/>
@@ -5877,100 +6148,63 @@
               </a:rPr>
               <a:t>Spécification</a:t>
             </a:r>
-            <a:endParaRPr lang="en-US" sz="1900" dirty="0"/>
-          </a:p>
-        </p:txBody>
-      </p:sp>
-      <p:sp>
-        <p:nvSpPr>
-          <p:cNvPr id="8" name="Text 6"/>
-          <p:cNvSpPr/>
-          <p:nvPr/>
-        </p:nvSpPr>
-        <p:spPr>
-          <a:xfrm>
-            <a:off x="960120" y="3611880"/>
-            <a:ext cx="2880360" cy="1737360"/>
-          </a:xfrm>
-          <a:prstGeom prst="rect">
-            <a:avLst/>
-          </a:prstGeom>
-          <a:noFill/>
-          <a:ln/>
-        </p:spPr>
-        <p:txBody>
-          <a:bodyPr wrap="square" lIns="0" tIns="0" rIns="0" bIns="0" rtlCol="0" anchor="t"/>
-          <a:lstStyle/>
-          <a:p>
-            <a:pPr indent="0" marL="0">
-              <a:lnSpc>
-                <a:spcPct val="120000"/>
-              </a:lnSpc>
-              <a:buNone/>
-            </a:pPr>
-            <a:r>
-              <a:rPr lang="en-US" sz="1300" dirty="0">
-                <a:solidFill>
-                  <a:srgbClr val="535462"/>
+            <a:endParaRPr lang="en-US" sz="2400" dirty="0"/>
+          </a:p>
+        </p:txBody>
+      </p:sp>
+      <p:sp>
+        <p:nvSpPr>
+          <p:cNvPr id="7" name="Text 5"/>
+          <p:cNvSpPr/>
+          <p:nvPr/>
+        </p:nvSpPr>
+        <p:spPr>
+          <a:xfrm>
+            <a:off x="5577840" y="2286000"/>
+            <a:ext cx="5486400" cy="1024128"/>
+          </a:xfrm>
+          <a:prstGeom prst="rect">
+            <a:avLst/>
+          </a:prstGeom>
+          <a:noFill/>
+          <a:ln/>
+        </p:spPr>
+        <p:txBody>
+          <a:bodyPr wrap="square" lIns="0" tIns="0" rIns="0" bIns="0" rtlCol="0" anchor="ctr"/>
+          <a:lstStyle/>
+          <a:p>
+            <a:pPr algn="r" indent="0" marL="0">
+              <a:buNone/>
+            </a:pPr>
+            <a:r>
+              <a:rPr lang="en-US" sz="1400" dirty="0">
+                <a:solidFill>
+                  <a:srgbClr val="FFFFFF"/>
                 </a:solidFill>
                 <a:latin typeface="Montserrat" pitchFamily="34" charset="0"/>
                 <a:ea typeface="Montserrat" pitchFamily="34" charset="-122"/>
                 <a:cs typeface="Montserrat" pitchFamily="34" charset="-120"/>
               </a:rPr>
-              <a:t>Transformer l'intention produit en spécifications fonctionnelles, techniques et data. Cartographier parcours clés et règles métier.</a:t>
-            </a:r>
-            <a:endParaRPr lang="en-US" sz="1300" dirty="0"/>
-          </a:p>
-        </p:txBody>
-      </p:sp>
-      <p:sp>
-        <p:nvSpPr>
-          <p:cNvPr id="9" name="Shape 7"/>
-          <p:cNvSpPr/>
-          <p:nvPr/>
-        </p:nvSpPr>
-        <p:spPr>
-          <a:xfrm>
-            <a:off x="4398264" y="2103120"/>
-            <a:ext cx="3474720" cy="3474720"/>
+              <a:t>Transformer l'intention en spécifications exploitables.</a:t>
+            </a:r>
+            <a:endParaRPr lang="en-US" sz="1400" dirty="0"/>
+          </a:p>
+        </p:txBody>
+      </p:sp>
+      <p:sp>
+        <p:nvSpPr>
+          <p:cNvPr id="8" name="Shape 6"/>
+          <p:cNvSpPr/>
+          <p:nvPr/>
+        </p:nvSpPr>
+        <p:spPr>
+          <a:xfrm>
+            <a:off x="640080" y="3474720"/>
+            <a:ext cx="10908792" cy="1024128"/>
           </a:xfrm>
           <a:prstGeom prst="roundRect">
             <a:avLst>
-              <a:gd name="adj" fmla="val 2632"/>
-            </a:avLst>
-          </a:prstGeom>
-          <a:solidFill>
-            <a:srgbClr val="FFFFFF"/>
-          </a:solidFill>
-          <a:ln w="12700">
-            <a:solidFill>
-              <a:srgbClr val="E8E8EE"/>
-            </a:solidFill>
-            <a:prstDash val="solid"/>
-          </a:ln>
-          <a:effectLst>
-            <a:outerShdw sx="100000" sy="100000" kx="0" ky="0" algn="bl" rotWithShape="0" blurRad="114300" dist="38100" dir="5400000">
-              <a:srgbClr val="10122A">
-                <a:alpha val="12000"/>
-              </a:srgbClr>
-            </a:outerShdw>
-          </a:effectLst>
-        </p:spPr>
-      </p:sp>
-      <p:sp>
-        <p:nvSpPr>
-          <p:cNvPr id="10" name="Shape 8"/>
-          <p:cNvSpPr/>
-          <p:nvPr/>
-        </p:nvSpPr>
-        <p:spPr>
-          <a:xfrm>
-            <a:off x="4718304" y="2468880"/>
-            <a:ext cx="457200" cy="457200"/>
-          </a:xfrm>
-          <a:prstGeom prst="roundRect">
-            <a:avLst>
-              <a:gd name="adj" fmla="val 14000"/>
+              <a:gd name="adj" fmla="val 7143"/>
             </a:avLst>
           </a:prstGeom>
           <a:solidFill>
@@ -5981,53 +6215,55 @@
       </p:sp>
       <p:sp>
         <p:nvSpPr>
-          <p:cNvPr id="11" name="Text 9"/>
-          <p:cNvSpPr/>
-          <p:nvPr/>
-        </p:nvSpPr>
-        <p:spPr>
-          <a:xfrm>
-            <a:off x="4718304" y="2468880"/>
-            <a:ext cx="457200" cy="457200"/>
-          </a:xfrm>
-          <a:prstGeom prst="rect">
-            <a:avLst/>
-          </a:prstGeom>
-          <a:noFill/>
-          <a:ln/>
-        </p:spPr>
-        <p:txBody>
-          <a:bodyPr wrap="square" lIns="0" tIns="0" rIns="0" bIns="0" rtlCol="0" anchor="ctr"/>
-          <a:lstStyle/>
-          <a:p>
-            <a:pPr algn="ctr" indent="0" marL="0">
-              <a:buNone/>
-            </a:pPr>
-            <a:r>
-              <a:rPr lang="en-US" sz="1300" b="1" dirty="0">
-                <a:solidFill>
-                  <a:srgbClr val="FFFFFF"/>
+          <p:cNvPr id="9" name="Text 7"/>
+          <p:cNvSpPr/>
+          <p:nvPr/>
+        </p:nvSpPr>
+        <p:spPr>
+          <a:xfrm>
+            <a:off x="1051560" y="3474720"/>
+            <a:ext cx="640080" cy="1024128"/>
+          </a:xfrm>
+          <a:prstGeom prst="rect">
+            <a:avLst/>
+          </a:prstGeom>
+          <a:noFill/>
+          <a:ln/>
+        </p:spPr>
+        <p:txBody>
+          <a:bodyPr wrap="square" lIns="0" tIns="0" rIns="0" bIns="0" rtlCol="0" anchor="ctr"/>
+          <a:lstStyle/>
+          <a:p>
+            <a:pPr indent="0" marL="0">
+              <a:buNone/>
+            </a:pPr>
+            <a:r>
+              <a:rPr lang="en-US" sz="1400" b="1" dirty="0">
+                <a:solidFill>
+                  <a:srgbClr val="FFFFFF">
+                    <a:alpha val="75000"/>
+                  </a:srgbClr>
                 </a:solidFill>
                 <a:latin typeface="JetBrains Mono" pitchFamily="34" charset="0"/>
                 <a:ea typeface="JetBrains Mono" pitchFamily="34" charset="-122"/>
                 <a:cs typeface="JetBrains Mono" pitchFamily="34" charset="-120"/>
               </a:rPr>
-              <a:t>2</a:t>
-            </a:r>
-            <a:endParaRPr lang="en-US" sz="1300" dirty="0"/>
-          </a:p>
-        </p:txBody>
-      </p:sp>
-      <p:sp>
-        <p:nvSpPr>
-          <p:cNvPr id="12" name="Text 10"/>
-          <p:cNvSpPr/>
-          <p:nvPr/>
-        </p:nvSpPr>
-        <p:spPr>
-          <a:xfrm>
-            <a:off x="4718304" y="3108960"/>
-            <a:ext cx="2834640" cy="457200"/>
+              <a:t>02</a:t>
+            </a:r>
+            <a:endParaRPr lang="en-US" sz="1400" dirty="0"/>
+          </a:p>
+        </p:txBody>
+      </p:sp>
+      <p:sp>
+        <p:nvSpPr>
+          <p:cNvPr id="10" name="Text 8"/>
+          <p:cNvSpPr/>
+          <p:nvPr/>
+        </p:nvSpPr>
+        <p:spPr>
+          <a:xfrm>
+            <a:off x="1783080" y="3474720"/>
+            <a:ext cx="3657600" cy="1024128"/>
           </a:xfrm>
           <a:prstGeom prst="rect">
             <a:avLst/>
@@ -6043,9 +6279,9 @@
               <a:buNone/>
             </a:pPr>
             <a:r>
-              <a:rPr lang="en-US" sz="1900" b="1" dirty="0">
-                <a:solidFill>
-                  <a:srgbClr val="0A0A0A"/>
+              <a:rPr lang="en-US" sz="2400" b="1" dirty="0">
+                <a:solidFill>
+                  <a:srgbClr val="FFFFFF"/>
                 </a:solidFill>
                 <a:latin typeface="Space Grotesk" pitchFamily="34" charset="0"/>
                 <a:ea typeface="Space Grotesk" pitchFamily="34" charset="-122"/>
@@ -6053,100 +6289,63 @@
               </a:rPr>
               <a:t>Cohérence</a:t>
             </a:r>
-            <a:endParaRPr lang="en-US" sz="1900" dirty="0"/>
-          </a:p>
-        </p:txBody>
-      </p:sp>
-      <p:sp>
-        <p:nvSpPr>
-          <p:cNvPr id="13" name="Text 11"/>
-          <p:cNvSpPr/>
-          <p:nvPr/>
-        </p:nvSpPr>
-        <p:spPr>
-          <a:xfrm>
-            <a:off x="4718304" y="3611880"/>
-            <a:ext cx="2880360" cy="1737360"/>
-          </a:xfrm>
-          <a:prstGeom prst="rect">
-            <a:avLst/>
-          </a:prstGeom>
-          <a:noFill/>
-          <a:ln/>
-        </p:spPr>
-        <p:txBody>
-          <a:bodyPr wrap="square" lIns="0" tIns="0" rIns="0" bIns="0" rtlCol="0" anchor="t"/>
-          <a:lstStyle/>
-          <a:p>
-            <a:pPr indent="0" marL="0">
-              <a:lnSpc>
-                <a:spcPct val="120000"/>
-              </a:lnSpc>
-              <a:buNone/>
-            </a:pPr>
-            <a:r>
-              <a:rPr lang="en-US" sz="1300" dirty="0">
-                <a:solidFill>
-                  <a:srgbClr val="535462"/>
+            <a:endParaRPr lang="en-US" sz="2400" dirty="0"/>
+          </a:p>
+        </p:txBody>
+      </p:sp>
+      <p:sp>
+        <p:nvSpPr>
+          <p:cNvPr id="11" name="Text 9"/>
+          <p:cNvSpPr/>
+          <p:nvPr/>
+        </p:nvSpPr>
+        <p:spPr>
+          <a:xfrm>
+            <a:off x="5577840" y="3474720"/>
+            <a:ext cx="5486400" cy="1024128"/>
+          </a:xfrm>
+          <a:prstGeom prst="rect">
+            <a:avLst/>
+          </a:prstGeom>
+          <a:noFill/>
+          <a:ln/>
+        </p:spPr>
+        <p:txBody>
+          <a:bodyPr wrap="square" lIns="0" tIns="0" rIns="0" bIns="0" rtlCol="0" anchor="ctr"/>
+          <a:lstStyle/>
+          <a:p>
+            <a:pPr algn="r" indent="0" marL="0">
+              <a:buNone/>
+            </a:pPr>
+            <a:r>
+              <a:rPr lang="en-US" sz="1400" dirty="0">
+                <a:solidFill>
+                  <a:srgbClr val="FFFFFF"/>
                 </a:solidFill>
                 <a:latin typeface="Montserrat" pitchFamily="34" charset="0"/>
                 <a:ea typeface="Montserrat" pitchFamily="34" charset="-122"/>
                 <a:cs typeface="Montserrat" pitchFamily="34" charset="-120"/>
               </a:rPr>
-              <a:t>Un moteur de contrôle pour repérer les écarts avant, pendant et après le développement.</a:t>
-            </a:r>
-            <a:endParaRPr lang="en-US" sz="1300" dirty="0"/>
-          </a:p>
-        </p:txBody>
-      </p:sp>
-      <p:sp>
-        <p:nvSpPr>
-          <p:cNvPr id="14" name="Shape 12"/>
-          <p:cNvSpPr/>
-          <p:nvPr/>
-        </p:nvSpPr>
-        <p:spPr>
-          <a:xfrm>
-            <a:off x="8156448" y="2103120"/>
-            <a:ext cx="3474720" cy="3474720"/>
+              <a:t>Repérer les écarts avant, pendant et après le build.</a:t>
+            </a:r>
+            <a:endParaRPr lang="en-US" sz="1400" dirty="0"/>
+          </a:p>
+        </p:txBody>
+      </p:sp>
+      <p:sp>
+        <p:nvSpPr>
+          <p:cNvPr id="12" name="Shape 10"/>
+          <p:cNvSpPr/>
+          <p:nvPr/>
+        </p:nvSpPr>
+        <p:spPr>
+          <a:xfrm>
+            <a:off x="640080" y="4663440"/>
+            <a:ext cx="10908792" cy="1024128"/>
           </a:xfrm>
           <a:prstGeom prst="roundRect">
             <a:avLst>
-              <a:gd name="adj" fmla="val 2632"/>
-            </a:avLst>
-          </a:prstGeom>
-          <a:solidFill>
-            <a:srgbClr val="FFFFFF"/>
-          </a:solidFill>
-          <a:ln w="12700">
-            <a:solidFill>
-              <a:srgbClr val="E8E8EE"/>
-            </a:solidFill>
-            <a:prstDash val="solid"/>
-          </a:ln>
-          <a:effectLst>
-            <a:outerShdw sx="100000" sy="100000" kx="0" ky="0" algn="bl" rotWithShape="0" blurRad="114300" dist="38100" dir="5400000">
-              <a:srgbClr val="10122A">
-                <a:alpha val="12000"/>
-              </a:srgbClr>
-            </a:outerShdw>
-          </a:effectLst>
-        </p:spPr>
-      </p:sp>
-      <p:sp>
-        <p:nvSpPr>
-          <p:cNvPr id="15" name="Shape 13"/>
-          <p:cNvSpPr/>
-          <p:nvPr/>
-        </p:nvSpPr>
-        <p:spPr>
-          <a:xfrm>
-            <a:off x="8476488" y="2468880"/>
-            <a:ext cx="457200" cy="457200"/>
-          </a:xfrm>
-          <a:prstGeom prst="roundRect">
-            <a:avLst>
-              <a:gd name="adj" fmla="val 14000"/>
+              <a:gd name="adj" fmla="val 7143"/>
             </a:avLst>
           </a:prstGeom>
           <a:solidFill>
@@ -6157,53 +6356,55 @@
       </p:sp>
       <p:sp>
         <p:nvSpPr>
-          <p:cNvPr id="16" name="Text 14"/>
-          <p:cNvSpPr/>
-          <p:nvPr/>
-        </p:nvSpPr>
-        <p:spPr>
-          <a:xfrm>
-            <a:off x="8476488" y="2468880"/>
-            <a:ext cx="457200" cy="457200"/>
-          </a:xfrm>
-          <a:prstGeom prst="rect">
-            <a:avLst/>
-          </a:prstGeom>
-          <a:noFill/>
-          <a:ln/>
-        </p:spPr>
-        <p:txBody>
-          <a:bodyPr wrap="square" lIns="0" tIns="0" rIns="0" bIns="0" rtlCol="0" anchor="ctr"/>
-          <a:lstStyle/>
-          <a:p>
-            <a:pPr algn="ctr" indent="0" marL="0">
-              <a:buNone/>
-            </a:pPr>
-            <a:r>
-              <a:rPr lang="en-US" sz="1300" b="1" dirty="0">
-                <a:solidFill>
-                  <a:srgbClr val="FFFFFF"/>
+          <p:cNvPr id="13" name="Text 11"/>
+          <p:cNvSpPr/>
+          <p:nvPr/>
+        </p:nvSpPr>
+        <p:spPr>
+          <a:xfrm>
+            <a:off x="1051560" y="4663440"/>
+            <a:ext cx="640080" cy="1024128"/>
+          </a:xfrm>
+          <a:prstGeom prst="rect">
+            <a:avLst/>
+          </a:prstGeom>
+          <a:noFill/>
+          <a:ln/>
+        </p:spPr>
+        <p:txBody>
+          <a:bodyPr wrap="square" lIns="0" tIns="0" rIns="0" bIns="0" rtlCol="0" anchor="ctr"/>
+          <a:lstStyle/>
+          <a:p>
+            <a:pPr indent="0" marL="0">
+              <a:buNone/>
+            </a:pPr>
+            <a:r>
+              <a:rPr lang="en-US" sz="1400" b="1" dirty="0">
+                <a:solidFill>
+                  <a:srgbClr val="0A0A0A">
+                    <a:alpha val="75000"/>
+                  </a:srgbClr>
                 </a:solidFill>
                 <a:latin typeface="JetBrains Mono" pitchFamily="34" charset="0"/>
                 <a:ea typeface="JetBrains Mono" pitchFamily="34" charset="-122"/>
                 <a:cs typeface="JetBrains Mono" pitchFamily="34" charset="-120"/>
               </a:rPr>
-              <a:t>3</a:t>
-            </a:r>
-            <a:endParaRPr lang="en-US" sz="1300" dirty="0"/>
-          </a:p>
-        </p:txBody>
-      </p:sp>
-      <p:sp>
-        <p:nvSpPr>
-          <p:cNvPr id="17" name="Text 15"/>
-          <p:cNvSpPr/>
-          <p:nvPr/>
-        </p:nvSpPr>
-        <p:spPr>
-          <a:xfrm>
-            <a:off x="8476488" y="3108960"/>
-            <a:ext cx="2834640" cy="457200"/>
+              <a:t>03</a:t>
+            </a:r>
+            <a:endParaRPr lang="en-US" sz="1400" dirty="0"/>
+          </a:p>
+        </p:txBody>
+      </p:sp>
+      <p:sp>
+        <p:nvSpPr>
+          <p:cNvPr id="14" name="Text 12"/>
+          <p:cNvSpPr/>
+          <p:nvPr/>
+        </p:nvSpPr>
+        <p:spPr>
+          <a:xfrm>
+            <a:off x="1783080" y="4663440"/>
+            <a:ext cx="3657600" cy="1024128"/>
           </a:xfrm>
           <a:prstGeom prst="rect">
             <a:avLst/>
@@ -6219,7 +6420,7 @@
               <a:buNone/>
             </a:pPr>
             <a:r>
-              <a:rPr lang="en-US" sz="1900" b="1" dirty="0">
+              <a:rPr lang="en-US" sz="2400" b="1" dirty="0">
                 <a:solidFill>
                   <a:srgbClr val="0A0A0A"/>
                 </a:solidFill>
@@ -6229,55 +6430,52 @@
               </a:rPr>
               <a:t>Supervision</a:t>
             </a:r>
-            <a:endParaRPr lang="en-US" sz="1900" dirty="0"/>
-          </a:p>
-        </p:txBody>
-      </p:sp>
-      <p:sp>
-        <p:nvSpPr>
-          <p:cNvPr id="18" name="Text 16"/>
-          <p:cNvSpPr/>
-          <p:nvPr/>
-        </p:nvSpPr>
-        <p:spPr>
-          <a:xfrm>
-            <a:off x="8476488" y="3611880"/>
-            <a:ext cx="2880360" cy="1737360"/>
-          </a:xfrm>
-          <a:prstGeom prst="rect">
-            <a:avLst/>
-          </a:prstGeom>
-          <a:noFill/>
-          <a:ln/>
-        </p:spPr>
-        <p:txBody>
-          <a:bodyPr wrap="square" lIns="0" tIns="0" rIns="0" bIns="0" rtlCol="0" anchor="t"/>
-          <a:lstStyle/>
-          <a:p>
-            <a:pPr indent="0" marL="0">
-              <a:lnSpc>
-                <a:spcPct val="120000"/>
-              </a:lnSpc>
-              <a:buNone/>
-            </a:pPr>
-            <a:r>
-              <a:rPr lang="en-US" sz="1300" dirty="0">
-                <a:solidFill>
-                  <a:srgbClr val="535462"/>
+            <a:endParaRPr lang="en-US" sz="2400" dirty="0"/>
+          </a:p>
+        </p:txBody>
+      </p:sp>
+      <p:sp>
+        <p:nvSpPr>
+          <p:cNvPr id="15" name="Text 13"/>
+          <p:cNvSpPr/>
+          <p:nvPr/>
+        </p:nvSpPr>
+        <p:spPr>
+          <a:xfrm>
+            <a:off x="5577840" y="4663440"/>
+            <a:ext cx="5486400" cy="1024128"/>
+          </a:xfrm>
+          <a:prstGeom prst="rect">
+            <a:avLst/>
+          </a:prstGeom>
+          <a:noFill/>
+          <a:ln/>
+        </p:spPr>
+        <p:txBody>
+          <a:bodyPr wrap="square" lIns="0" tIns="0" rIns="0" bIns="0" rtlCol="0" anchor="ctr"/>
+          <a:lstStyle/>
+          <a:p>
+            <a:pPr algn="r" indent="0" marL="0">
+              <a:buNone/>
+            </a:pPr>
+            <a:r>
+              <a:rPr lang="en-US" sz="1400" dirty="0">
+                <a:solidFill>
+                  <a:srgbClr val="0A0A0A"/>
                 </a:solidFill>
                 <a:latin typeface="Montserrat" pitchFamily="34" charset="0"/>
                 <a:ea typeface="Montserrat" pitchFamily="34" charset="-122"/>
                 <a:cs typeface="Montserrat" pitchFamily="34" charset="-120"/>
               </a:rPr>
-              <a:t>Une vue consolidée pour encadrer les pratiques, contrôler les risques et mesurer la valeur réellement créée.</a:t>
-            </a:r>
-            <a:endParaRPr lang="en-US" sz="1300" dirty="0"/>
-          </a:p>
-        </p:txBody>
-      </p:sp>
-      <p:sp>
-        <p:nvSpPr>
-          <p:cNvPr id="19" name="Text 17"/>
+              <a:t>Encadrer les pratiques et mesurer la valeur créée.</a:t>
+            </a:r>
+            <a:endParaRPr lang="en-US" sz="1400" dirty="0"/>
+          </a:p>
+        </p:txBody>
+      </p:sp>
+      <p:sp>
+        <p:nvSpPr>
+          <p:cNvPr id="16" name="Text 14"/>
           <p:cNvSpPr/>
           <p:nvPr/>
         </p:nvSpPr>
@@ -6379,7 +6577,7 @@
                 <a:ea typeface="JetBrains Mono" pitchFamily="34" charset="-122"/>
                 <a:cs typeface="JetBrains Mono" pitchFamily="34" charset="-120"/>
               </a:rPr>
-              <a:t>LE PRODUIT</a:t>
+              <a:t>SPÉCIFICATION PRODUIT</a:t>
             </a:r>
             <a:endParaRPr lang="en-US" sz="1100" dirty="0"/>
           </a:p>
@@ -6394,7 +6592,7 @@
         <p:spPr>
           <a:xfrm>
             <a:off x="640080" y="960120"/>
-            <a:ext cx="6400800" cy="822960"/>
+            <a:ext cx="5669280" cy="822960"/>
           </a:xfrm>
           <a:prstGeom prst="rect">
             <a:avLst/>
@@ -6418,7 +6616,7 @@
                 <a:ea typeface="Space Grotesk" pitchFamily="34" charset="-122"/>
                 <a:cs typeface="Space Grotesk" pitchFamily="34" charset="-120"/>
               </a:rPr>
-              <a:t>Modéliser, vérifier, superviser</a:t>
+              <a:t>Une modélisation produit partagée</a:t>
             </a:r>
             <a:endParaRPr lang="en-US" sz="3000" dirty="0"/>
           </a:p>
@@ -6432,8 +6630,50 @@
         </p:nvSpPr>
         <p:spPr>
           <a:xfrm>
-            <a:off x="640080" y="2011680"/>
-            <a:ext cx="4754880" cy="3108960"/>
+            <a:off x="640080" y="1828800"/>
+            <a:ext cx="4937760" cy="914400"/>
+          </a:xfrm>
+          <a:prstGeom prst="rect">
+            <a:avLst/>
+          </a:prstGeom>
+          <a:noFill/>
+          <a:ln/>
+        </p:spPr>
+        <p:txBody>
+          <a:bodyPr wrap="square" lIns="0" tIns="0" rIns="0" bIns="0" rtlCol="0" anchor="ctr"/>
+          <a:lstStyle/>
+          <a:p>
+            <a:pPr indent="0" marL="0">
+              <a:lnSpc>
+                <a:spcPct val="120000"/>
+              </a:lnSpc>
+              <a:buNone/>
+            </a:pPr>
+            <a:r>
+              <a:rPr lang="en-US" sz="1450" i="1" dirty="0">
+                <a:solidFill>
+                  <a:srgbClr val="535462"/>
+                </a:solidFill>
+                <a:latin typeface="Montserrat" pitchFamily="34" charset="0"/>
+                <a:ea typeface="Montserrat" pitchFamily="34" charset="-122"/>
+                <a:cs typeface="Montserrat" pitchFamily="34" charset="-120"/>
+              </a:rPr>
+              <a:t>Une base de connaissance centralisée : équipes et agents IA partagent la même compréhension de ce qui doit être construit.</a:t>
+            </a:r>
+            <a:endParaRPr lang="en-US" sz="1450" dirty="0"/>
+          </a:p>
+        </p:txBody>
+      </p:sp>
+      <p:sp>
+        <p:nvSpPr>
+          <p:cNvPr id="5" name="Text 3"/>
+          <p:cNvSpPr/>
+          <p:nvPr/>
+        </p:nvSpPr>
+        <p:spPr>
+          <a:xfrm>
+            <a:off x="640080" y="3017520"/>
+            <a:ext cx="4846320" cy="2194560"/>
           </a:xfrm>
           <a:prstGeom prst="rect">
             <a:avLst/>
@@ -6453,7 +6693,7 @@
               <a:buChar char="•"/>
             </a:pPr>
             <a:r>
-              <a:rPr lang="en-US" sz="1500" dirty="0">
+              <a:rPr lang="en-US" sz="1450" dirty="0">
                 <a:solidFill>
                   <a:srgbClr val="1A1A1A"/>
                 </a:solidFill>
@@ -6461,9 +6701,9 @@
                 <a:ea typeface="Montserrat" pitchFamily="34" charset="-122"/>
                 <a:cs typeface="Montserrat" pitchFamily="34" charset="-120"/>
               </a:rPr>
-              <a:t>Cartographie des parcours clés et des règles métier.</a:t>
-            </a:r>
-            <a:endParaRPr lang="en-US" sz="1500" dirty="0"/>
+              <a:t>Vision produit, features &amp; priorisation.</a:t>
+            </a:r>
+            <a:endParaRPr lang="en-US" sz="1450" dirty="0"/>
           </a:p>
           <a:p>
             <a:pPr marL="203200" indent="-203200">
@@ -6474,7 +6714,7 @@
               <a:buChar char="•"/>
             </a:pPr>
             <a:r>
-              <a:rPr lang="en-US" sz="1500" dirty="0">
+              <a:rPr lang="en-US" sz="1450" dirty="0">
                 <a:solidFill>
                   <a:srgbClr val="1A1A1A"/>
                 </a:solidFill>
@@ -6482,20 +6722,17 @@
                 <a:ea typeface="Montserrat" pitchFamily="34" charset="-122"/>
                 <a:cs typeface="Montserrat" pitchFamily="34" charset="-120"/>
               </a:rPr>
-              <a:t>Spécifications prêtes pour l'IA, ciblées par agent.</a:t>
-            </a:r>
-            <a:endParaRPr lang="en-US" sz="1500" dirty="0"/>
+              <a:t>Cartographie des parcours clés &amp; règles métier.</a:t>
+            </a:r>
+            <a:endParaRPr lang="en-US" sz="1450" dirty="0"/>
           </a:p>
           <a:p>
             <a:pPr marL="203200" indent="-203200">
-              <a:spcAft>
-                <a:spcPts val="1000"/>
-              </a:spcAft>
               <a:buSzPct val="100000"/>
               <a:buChar char="•"/>
             </a:pPr>
             <a:r>
-              <a:rPr lang="en-US" sz="1500" dirty="0">
+              <a:rPr lang="en-US" sz="1450" dirty="0">
                 <a:solidFill>
                   <a:srgbClr val="1A1A1A"/>
                 </a:solidFill>
@@ -6503,121 +6740,39 @@
                 <a:ea typeface="Montserrat" pitchFamily="34" charset="-122"/>
                 <a:cs typeface="Montserrat" pitchFamily="34" charset="-120"/>
               </a:rPr>
-              <a:t>Détection des ambiguïtés et simulation avant le build.</a:t>
-            </a:r>
-            <a:endParaRPr lang="en-US" sz="1500" dirty="0"/>
-          </a:p>
-          <a:p>
-            <a:pPr marL="203200" indent="-203200">
-              <a:buSzPct val="100000"/>
-              <a:buChar char="•"/>
-            </a:pPr>
-            <a:r>
-              <a:rPr lang="en-US" sz="1500" dirty="0">
-                <a:solidFill>
-                  <a:srgbClr val="1A1A1A"/>
-                </a:solidFill>
-                <a:latin typeface="Montserrat" pitchFamily="34" charset="0"/>
-                <a:ea typeface="Montserrat" pitchFamily="34" charset="-122"/>
-                <a:cs typeface="Montserrat" pitchFamily="34" charset="-120"/>
-              </a:rPr>
-              <a:t>Comparaison entre implémentation et spécification initiale.</a:t>
-            </a:r>
-            <a:endParaRPr lang="en-US" sz="1500" dirty="0"/>
-          </a:p>
-        </p:txBody>
-      </p:sp>
-      <p:sp>
-        <p:nvSpPr>
-          <p:cNvPr id="5" name="Shape 3"/>
-          <p:cNvSpPr/>
-          <p:nvPr/>
-        </p:nvSpPr>
-        <p:spPr>
-          <a:xfrm>
-            <a:off x="5943600" y="1828800"/>
-            <a:ext cx="5605272" cy="4206240"/>
-          </a:xfrm>
-          <a:prstGeom prst="roundRect">
-            <a:avLst>
-              <a:gd name="adj" fmla="val 2174"/>
-            </a:avLst>
-          </a:prstGeom>
-          <a:solidFill>
-            <a:srgbClr val="FAFAFC"/>
-          </a:solidFill>
-          <a:ln w="12700">
-            <a:solidFill>
-              <a:srgbClr val="E8E8EE"/>
-            </a:solidFill>
-            <a:prstDash val="solid"/>
-          </a:ln>
-        </p:spPr>
-      </p:sp>
-      <p:sp>
-        <p:nvSpPr>
-          <p:cNvPr id="6" name="Shape 4"/>
-          <p:cNvSpPr/>
-          <p:nvPr/>
-        </p:nvSpPr>
-        <p:spPr>
-          <a:xfrm>
-            <a:off x="8138160" y="3657600"/>
-            <a:ext cx="502920" cy="502920"/>
-          </a:xfrm>
-          <a:prstGeom prst="roundRect">
-            <a:avLst>
-              <a:gd name="adj" fmla="val 18182"/>
-            </a:avLst>
-          </a:prstGeom>
-          <a:solidFill>
-            <a:srgbClr val="E3E6EF"/>
-          </a:solidFill>
-          <a:ln/>
-        </p:spPr>
-      </p:sp>
-      <p:sp>
-        <p:nvSpPr>
-          <p:cNvPr id="7" name="Text 5"/>
-          <p:cNvSpPr/>
-          <p:nvPr/>
-        </p:nvSpPr>
-        <p:spPr>
-          <a:xfrm>
-            <a:off x="5943600" y="4297680"/>
-            <a:ext cx="5605272" cy="365760"/>
-          </a:xfrm>
-          <a:prstGeom prst="rect">
-            <a:avLst/>
-          </a:prstGeom>
-          <a:noFill/>
-          <a:ln/>
-        </p:spPr>
-        <p:txBody>
-          <a:bodyPr wrap="square" lIns="0" tIns="0" rIns="0" bIns="0" rtlCol="0" anchor="ctr"/>
-          <a:lstStyle/>
-          <a:p>
-            <a:pPr algn="ctr" indent="0" marL="0">
-              <a:buNone/>
-            </a:pPr>
-            <a:r>
-              <a:rPr lang="en-US" sz="1100" dirty="0">
-                <a:solidFill>
-                  <a:srgbClr val="9296A6"/>
-                </a:solidFill>
-                <a:latin typeface="JetBrains Mono" pitchFamily="34" charset="0"/>
-                <a:ea typeface="JetBrains Mono" pitchFamily="34" charset="-122"/>
-                <a:cs typeface="JetBrains Mono" pitchFamily="34" charset="-120"/>
-              </a:rPr>
-              <a:t>Capture produit</a:t>
-            </a:r>
-            <a:endParaRPr lang="en-US" sz="1100" dirty="0"/>
-          </a:p>
-        </p:txBody>
-      </p:sp>
-      <p:sp>
-        <p:nvSpPr>
-          <p:cNvPr id="8" name="Text 6"/>
+              <a:t>Spécifications fonctionnelle, technique &amp; data.</a:t>
+            </a:r>
+            <a:endParaRPr lang="en-US" sz="1450" dirty="0"/>
+          </a:p>
+        </p:txBody>
+      </p:sp>
+      <p:pic>
+        <p:nvPicPr>
+          <p:cNvPr id="6" name="Image 0" descr="m-exp.png">    </p:cNvPr>
+          <p:cNvPicPr>
+            <a:picLocks noChangeAspect="1"/>
+          </p:cNvPicPr>
+          <p:nvPr/>
+        </p:nvPicPr>
+        <p:blipFill>
+          <a:blip r:embed="rId1"/>
+          <a:stretch>
+            <a:fillRect/>
+          </a:stretch>
+        </p:blipFill>
+        <p:spPr>
+          <a:xfrm>
+            <a:off x="5943600" y="1691640"/>
+            <a:ext cx="5605272" cy="3648456"/>
+          </a:xfrm>
+          <a:prstGeom prst="rect">
+            <a:avLst/>
+          </a:prstGeom>
+        </p:spPr>
+      </p:pic>
+      <p:sp>
+        <p:nvSpPr>
+          <p:cNvPr id="7" name="Text 4"/>
           <p:cNvSpPr/>
           <p:nvPr/>
         </p:nvSpPr>
@@ -6686,15 +6841,39 @@
           <a:chExt cx="0" cy="0"/>
         </a:xfrm>
       </p:grpSpPr>
-      <p:sp>
-        <p:nvSpPr>
-          <p:cNvPr id="2" name="Text 0"/>
-          <p:cNvSpPr/>
-          <p:nvPr/>
-        </p:nvSpPr>
-        <p:spPr>
-          <a:xfrm>
-            <a:off x="640080" y="640080"/>
+      <p:pic>
+        <p:nvPicPr>
+          <p:cNvPr id="2" name="Image 0" descr="m-coh.png">    </p:cNvPr>
+          <p:cNvPicPr>
+            <a:picLocks noChangeAspect="1"/>
+          </p:cNvPicPr>
+          <p:nvPr/>
+        </p:nvPicPr>
+        <p:blipFill>
+          <a:blip r:embed="rId1"/>
+          <a:stretch>
+            <a:fillRect/>
+          </a:stretch>
+        </p:blipFill>
+        <p:spPr>
+          <a:xfrm>
+            <a:off x="640080" y="1371600"/>
+            <a:ext cx="4389120" cy="3639312"/>
+          </a:xfrm>
+          <a:prstGeom prst="rect">
+            <a:avLst/>
+          </a:prstGeom>
+        </p:spPr>
+      </p:pic>
+      <p:sp>
+        <p:nvSpPr>
+          <p:cNvPr id="3" name="Text 0"/>
+          <p:cNvSpPr/>
+          <p:nvPr/>
+        </p:nvSpPr>
+        <p:spPr>
+          <a:xfrm>
+            <a:off x="5486400" y="1554480"/>
             <a:ext cx="8229600" cy="274320"/>
           </a:xfrm>
           <a:prstGeom prst="rect">
@@ -6713,13 +6892,13 @@
             <a:r>
               <a:rPr lang="en-US" sz="1100" b="1" spc="250" kern="0" dirty="0">
                 <a:solidFill>
-                  <a:srgbClr val="1FA98A"/>
+                  <a:srgbClr val="FA5FB2"/>
                 </a:solidFill>
                 <a:latin typeface="JetBrains Mono" pitchFamily="34" charset="0"/>
                 <a:ea typeface="JetBrains Mono" pitchFamily="34" charset="-122"/>
                 <a:cs typeface="JetBrains Mono" pitchFamily="34" charset="-120"/>
               </a:rPr>
-              <a:t>CE QUE ÇA CHANGE</a:t>
+              <a:t>COHÉRENCE</a:t>
             </a:r>
             <a:endParaRPr lang="en-US" sz="1100" dirty="0"/>
           </a:p>
@@ -6727,14 +6906,14 @@
       </p:sp>
       <p:sp>
         <p:nvSpPr>
-          <p:cNvPr id="3" name="Text 1"/>
-          <p:cNvSpPr/>
-          <p:nvPr/>
-        </p:nvSpPr>
-        <p:spPr>
-          <a:xfrm>
-            <a:off x="640080" y="960120"/>
-            <a:ext cx="10058400" cy="822960"/>
+          <p:cNvPr id="4" name="Text 1"/>
+          <p:cNvSpPr/>
+          <p:nvPr/>
+        </p:nvSpPr>
+        <p:spPr>
+          <a:xfrm>
+            <a:off x="5486400" y="1874520"/>
+            <a:ext cx="6035040" cy="1371600"/>
           </a:xfrm>
           <a:prstGeom prst="rect">
             <a:avLst/>
@@ -6747,10 +6926,13 @@
           <a:lstStyle/>
           <a:p>
             <a:pPr indent="0" marL="0">
-              <a:buNone/>
-            </a:pPr>
-            <a:r>
-              <a:rPr lang="en-US" sz="3000" b="1" dirty="0">
+              <a:lnSpc>
+                <a:spcPct val="105000"/>
+              </a:lnSpc>
+              <a:buNone/>
+            </a:pPr>
+            <a:r>
+              <a:rPr lang="en-US" sz="2600" b="1" dirty="0">
                 <a:solidFill>
                   <a:srgbClr val="0A0A0A"/>
                 </a:solidFill>
@@ -6758,117 +6940,41 @@
                 <a:ea typeface="Space Grotesk" pitchFamily="34" charset="-122"/>
                 <a:cs typeface="Space Grotesk" pitchFamily="34" charset="-120"/>
               </a:rPr>
-              <a:t>Plus vite, sans perdre le contrôle</a:t>
-            </a:r>
-            <a:endParaRPr lang="en-US" sz="3000" dirty="0"/>
-          </a:p>
-        </p:txBody>
-      </p:sp>
-      <p:sp>
-        <p:nvSpPr>
-          <p:cNvPr id="4" name="Shape 2"/>
-          <p:cNvSpPr/>
-          <p:nvPr/>
-        </p:nvSpPr>
-        <p:spPr>
-          <a:xfrm>
-            <a:off x="640080" y="2286000"/>
-            <a:ext cx="3474720" cy="2743200"/>
-          </a:xfrm>
-          <a:prstGeom prst="roundRect">
-            <a:avLst>
-              <a:gd name="adj" fmla="val 3333"/>
-            </a:avLst>
-          </a:prstGeom>
-          <a:solidFill>
-            <a:srgbClr val="FFFFFF"/>
-          </a:solidFill>
-          <a:ln w="12700">
-            <a:solidFill>
-              <a:srgbClr val="E8E8EE"/>
-            </a:solidFill>
-            <a:prstDash val="solid"/>
-          </a:ln>
-          <a:effectLst>
-            <a:outerShdw sx="100000" sy="100000" kx="0" ky="0" algn="bl" rotWithShape="0" blurRad="114300" dist="38100" dir="5400000">
-              <a:srgbClr val="10122A">
-                <a:alpha val="12000"/>
-              </a:srgbClr>
-            </a:outerShdw>
-          </a:effectLst>
-        </p:spPr>
-      </p:sp>
-      <p:sp>
-        <p:nvSpPr>
-          <p:cNvPr id="5" name="Text 3"/>
-          <p:cNvSpPr/>
-          <p:nvPr/>
-        </p:nvSpPr>
-        <p:spPr>
-          <a:xfrm>
-            <a:off x="932688" y="2697480"/>
-            <a:ext cx="2926080" cy="1097280"/>
-          </a:xfrm>
-          <a:prstGeom prst="rect">
-            <a:avLst/>
-          </a:prstGeom>
-          <a:noFill/>
-          <a:ln/>
-        </p:spPr>
-        <p:txBody>
-          <a:bodyPr wrap="square" lIns="0" tIns="0" rIns="0" bIns="0" rtlCol="0" anchor="t"/>
+              <a:t>Une continuité vérifiable entre l'intention, l'expérience et l'implémentation.</a:t>
+            </a:r>
+            <a:endParaRPr lang="en-US" sz="2600" dirty="0"/>
+          </a:p>
+        </p:txBody>
+      </p:sp>
+      <p:sp>
+        <p:nvSpPr>
+          <p:cNvPr id="5" name="Text 2"/>
+          <p:cNvSpPr/>
+          <p:nvPr/>
+        </p:nvSpPr>
+        <p:spPr>
+          <a:xfrm>
+            <a:off x="5486400" y="3200400"/>
+            <a:ext cx="5943600" cy="731520"/>
+          </a:xfrm>
+          <a:prstGeom prst="rect">
+            <a:avLst/>
+          </a:prstGeom>
+          <a:noFill/>
+          <a:ln/>
+        </p:spPr>
+        <p:txBody>
+          <a:bodyPr wrap="square" lIns="0" tIns="0" rIns="0" bIns="0" rtlCol="0" anchor="ctr"/>
           <a:lstStyle/>
           <a:p>
             <a:pPr indent="0" marL="0">
               <a:lnSpc>
-                <a:spcPct val="98000"/>
+                <a:spcPct val="120000"/>
               </a:lnSpc>
               <a:buNone/>
             </a:pPr>
             <a:r>
-              <a:rPr lang="en-US" sz="2600" b="1" dirty="0">
-                <a:solidFill>
-                  <a:srgbClr val="FFA101"/>
-                </a:solidFill>
-                <a:latin typeface="Space Grotesk" pitchFamily="34" charset="0"/>
-                <a:ea typeface="Space Grotesk" pitchFamily="34" charset="-122"/>
-                <a:cs typeface="Space Grotesk" pitchFamily="34" charset="-120"/>
-              </a:rPr>
-              <a:t>Moins de rework</a:t>
-            </a:r>
-            <a:endParaRPr lang="en-US" sz="2600" dirty="0"/>
-          </a:p>
-        </p:txBody>
-      </p:sp>
-      <p:sp>
-        <p:nvSpPr>
-          <p:cNvPr id="6" name="Text 4"/>
-          <p:cNvSpPr/>
-          <p:nvPr/>
-        </p:nvSpPr>
-        <p:spPr>
-          <a:xfrm>
-            <a:off x="932688" y="3886200"/>
-            <a:ext cx="2926080" cy="914400"/>
-          </a:xfrm>
-          <a:prstGeom prst="rect">
-            <a:avLst/>
-          </a:prstGeom>
-          <a:noFill/>
-          <a:ln/>
-        </p:spPr>
-        <p:txBody>
-          <a:bodyPr wrap="square" lIns="0" tIns="0" rIns="0" bIns="0" rtlCol="0" anchor="ctr"/>
-          <a:lstStyle/>
-          <a:p>
-            <a:pPr indent="0" marL="0">
-              <a:lnSpc>
-                <a:spcPct val="115000"/>
-              </a:lnSpc>
-              <a:buNone/>
-            </a:pPr>
-            <a:r>
-              <a:rPr lang="en-US" sz="1350" dirty="0">
+              <a:rPr lang="en-US" sz="1400" i="1" dirty="0">
                 <a:solidFill>
                   <a:srgbClr val="535462"/>
                 </a:solidFill>
@@ -6876,251 +6982,97 @@
                 <a:ea typeface="Montserrat" pitchFamily="34" charset="-122"/>
                 <a:cs typeface="Montserrat" pitchFamily="34" charset="-120"/>
               </a:rPr>
-              <a:t>des specs claires, moins d'allers-retours</a:t>
-            </a:r>
-            <a:endParaRPr lang="en-US" sz="1350" dirty="0"/>
-          </a:p>
-        </p:txBody>
-      </p:sp>
-      <p:sp>
-        <p:nvSpPr>
-          <p:cNvPr id="7" name="Shape 5"/>
-          <p:cNvSpPr/>
-          <p:nvPr/>
-        </p:nvSpPr>
-        <p:spPr>
-          <a:xfrm>
-            <a:off x="4398264" y="2286000"/>
-            <a:ext cx="3474720" cy="2743200"/>
-          </a:xfrm>
-          <a:prstGeom prst="roundRect">
-            <a:avLst>
-              <a:gd name="adj" fmla="val 3333"/>
-            </a:avLst>
-          </a:prstGeom>
-          <a:solidFill>
-            <a:srgbClr val="FFFFFF"/>
-          </a:solidFill>
-          <a:ln w="12700">
-            <a:solidFill>
-              <a:srgbClr val="E8E8EE"/>
-            </a:solidFill>
-            <a:prstDash val="solid"/>
-          </a:ln>
-          <a:effectLst>
-            <a:outerShdw sx="100000" sy="100000" kx="0" ky="0" algn="bl" rotWithShape="0" blurRad="114300" dist="38100" dir="5400000">
-              <a:srgbClr val="10122A">
-                <a:alpha val="12000"/>
-              </a:srgbClr>
-            </a:outerShdw>
-          </a:effectLst>
-        </p:spPr>
-      </p:sp>
-      <p:sp>
-        <p:nvSpPr>
-          <p:cNvPr id="8" name="Text 6"/>
-          <p:cNvSpPr/>
-          <p:nvPr/>
-        </p:nvSpPr>
-        <p:spPr>
-          <a:xfrm>
-            <a:off x="4690872" y="2697480"/>
-            <a:ext cx="2926080" cy="1097280"/>
-          </a:xfrm>
-          <a:prstGeom prst="rect">
-            <a:avLst/>
-          </a:prstGeom>
-          <a:noFill/>
-          <a:ln/>
-        </p:spPr>
-        <p:txBody>
-          <a:bodyPr wrap="square" lIns="0" tIns="0" rIns="0" bIns="0" rtlCol="0" anchor="t"/>
-          <a:lstStyle/>
-          <a:p>
-            <a:pPr indent="0" marL="0">
-              <a:lnSpc>
-                <a:spcPct val="98000"/>
-              </a:lnSpc>
-              <a:buNone/>
-            </a:pPr>
-            <a:r>
-              <a:rPr lang="en-US" sz="2600" b="1" dirty="0">
-                <a:solidFill>
-                  <a:srgbClr val="8047F4"/>
-                </a:solidFill>
-                <a:latin typeface="Space Grotesk" pitchFamily="34" charset="0"/>
-                <a:ea typeface="Space Grotesk" pitchFamily="34" charset="-122"/>
-                <a:cs typeface="Space Grotesk" pitchFamily="34" charset="-120"/>
-              </a:rPr>
-              <a:t>Moins d'oublis</a:t>
-            </a:r>
-            <a:endParaRPr lang="en-US" sz="2600" dirty="0"/>
-          </a:p>
-        </p:txBody>
-      </p:sp>
-      <p:sp>
-        <p:nvSpPr>
-          <p:cNvPr id="9" name="Text 7"/>
-          <p:cNvSpPr/>
-          <p:nvPr/>
-        </p:nvSpPr>
-        <p:spPr>
-          <a:xfrm>
-            <a:off x="4690872" y="3886200"/>
-            <a:ext cx="2926080" cy="914400"/>
-          </a:xfrm>
-          <a:prstGeom prst="rect">
-            <a:avLst/>
-          </a:prstGeom>
-          <a:noFill/>
-          <a:ln/>
-        </p:spPr>
-        <p:txBody>
-          <a:bodyPr wrap="square" lIns="0" tIns="0" rIns="0" bIns="0" rtlCol="0" anchor="ctr"/>
-          <a:lstStyle/>
-          <a:p>
-            <a:pPr indent="0" marL="0">
-              <a:lnSpc>
-                <a:spcPct val="115000"/>
-              </a:lnSpc>
-              <a:buNone/>
-            </a:pPr>
-            <a:r>
-              <a:rPr lang="en-US" sz="1350" dirty="0">
-                <a:solidFill>
-                  <a:srgbClr val="535462"/>
+              <a:t>Un moteur de contrôle pour repérer les écarts avant, pendant et après le développement.</a:t>
+            </a:r>
+            <a:endParaRPr lang="en-US" sz="1400" dirty="0"/>
+          </a:p>
+        </p:txBody>
+      </p:sp>
+      <p:sp>
+        <p:nvSpPr>
+          <p:cNvPr id="6" name="Text 3"/>
+          <p:cNvSpPr/>
+          <p:nvPr/>
+        </p:nvSpPr>
+        <p:spPr>
+          <a:xfrm>
+            <a:off x="5486400" y="4114800"/>
+            <a:ext cx="5943600" cy="1645920"/>
+          </a:xfrm>
+          <a:prstGeom prst="rect">
+            <a:avLst/>
+          </a:prstGeom>
+          <a:noFill/>
+          <a:ln/>
+        </p:spPr>
+        <p:txBody>
+          <a:bodyPr wrap="square" lIns="0" tIns="0" rIns="0" bIns="0" rtlCol="0" anchor="ctr"/>
+          <a:lstStyle/>
+          <a:p>
+            <a:pPr marL="203200" indent="-203200">
+              <a:spcAft>
+                <a:spcPts val="900"/>
+              </a:spcAft>
+              <a:buSzPct val="100000"/>
+              <a:buChar char="•"/>
+            </a:pPr>
+            <a:r>
+              <a:rPr lang="en-US" sz="1400" dirty="0">
+                <a:solidFill>
+                  <a:srgbClr val="1A1A1A"/>
                 </a:solidFill>
                 <a:latin typeface="Montserrat" pitchFamily="34" charset="0"/>
                 <a:ea typeface="Montserrat" pitchFamily="34" charset="-122"/>
                 <a:cs typeface="Montserrat" pitchFamily="34" charset="-120"/>
               </a:rPr>
-              <a:t>états et parcours couverts de bout en bout</a:t>
-            </a:r>
-            <a:endParaRPr lang="en-US" sz="1350" dirty="0"/>
-          </a:p>
-        </p:txBody>
-      </p:sp>
-      <p:sp>
-        <p:nvSpPr>
-          <p:cNvPr id="10" name="Shape 8"/>
-          <p:cNvSpPr/>
-          <p:nvPr/>
-        </p:nvSpPr>
-        <p:spPr>
-          <a:xfrm>
-            <a:off x="8156448" y="2286000"/>
-            <a:ext cx="3474720" cy="2743200"/>
-          </a:xfrm>
-          <a:prstGeom prst="roundRect">
-            <a:avLst>
-              <a:gd name="adj" fmla="val 3333"/>
-            </a:avLst>
-          </a:prstGeom>
-          <a:solidFill>
-            <a:srgbClr val="FFFFFF"/>
-          </a:solidFill>
-          <a:ln w="12700">
-            <a:solidFill>
-              <a:srgbClr val="E8E8EE"/>
-            </a:solidFill>
-            <a:prstDash val="solid"/>
-          </a:ln>
-          <a:effectLst>
-            <a:outerShdw sx="100000" sy="100000" kx="0" ky="0" algn="bl" rotWithShape="0" blurRad="114300" dist="38100" dir="5400000">
-              <a:srgbClr val="10122A">
-                <a:alpha val="12000"/>
-              </a:srgbClr>
-            </a:outerShdw>
-          </a:effectLst>
-        </p:spPr>
-      </p:sp>
-      <p:sp>
-        <p:nvSpPr>
-          <p:cNvPr id="11" name="Text 9"/>
-          <p:cNvSpPr/>
-          <p:nvPr/>
-        </p:nvSpPr>
-        <p:spPr>
-          <a:xfrm>
-            <a:off x="8449056" y="2697480"/>
-            <a:ext cx="2926080" cy="1097280"/>
-          </a:xfrm>
-          <a:prstGeom prst="rect">
-            <a:avLst/>
-          </a:prstGeom>
-          <a:noFill/>
-          <a:ln/>
-        </p:spPr>
-        <p:txBody>
-          <a:bodyPr wrap="square" lIns="0" tIns="0" rIns="0" bIns="0" rtlCol="0" anchor="t"/>
-          <a:lstStyle/>
-          <a:p>
-            <a:pPr indent="0" marL="0">
-              <a:lnSpc>
-                <a:spcPct val="98000"/>
-              </a:lnSpc>
-              <a:buNone/>
-            </a:pPr>
-            <a:r>
-              <a:rPr lang="en-US" sz="2600" b="1" dirty="0">
-                <a:solidFill>
-                  <a:srgbClr val="0066FF"/>
-                </a:solidFill>
-                <a:latin typeface="Space Grotesk" pitchFamily="34" charset="0"/>
-                <a:ea typeface="Space Grotesk" pitchFamily="34" charset="-122"/>
-                <a:cs typeface="Space Grotesk" pitchFamily="34" charset="-120"/>
-              </a:rPr>
-              <a:t>Alignement vérifiable</a:t>
-            </a:r>
-            <a:endParaRPr lang="en-US" sz="2600" dirty="0"/>
-          </a:p>
-        </p:txBody>
-      </p:sp>
-      <p:sp>
-        <p:nvSpPr>
-          <p:cNvPr id="12" name="Text 10"/>
-          <p:cNvSpPr/>
-          <p:nvPr/>
-        </p:nvSpPr>
-        <p:spPr>
-          <a:xfrm>
-            <a:off x="8449056" y="3886200"/>
-            <a:ext cx="2926080" cy="914400"/>
-          </a:xfrm>
-          <a:prstGeom prst="rect">
-            <a:avLst/>
-          </a:prstGeom>
-          <a:noFill/>
-          <a:ln/>
-        </p:spPr>
-        <p:txBody>
-          <a:bodyPr wrap="square" lIns="0" tIns="0" rIns="0" bIns="0" rtlCol="0" anchor="ctr"/>
-          <a:lstStyle/>
-          <a:p>
-            <a:pPr indent="0" marL="0">
-              <a:lnSpc>
-                <a:spcPct val="115000"/>
-              </a:lnSpc>
-              <a:buNone/>
-            </a:pPr>
-            <a:r>
-              <a:rPr lang="en-US" sz="1350" dirty="0">
-                <a:solidFill>
-                  <a:srgbClr val="535462"/>
+              <a:t>Détection des ambiguïtés, contradictions et manques.</a:t>
+            </a:r>
+            <a:endParaRPr lang="en-US" sz="1400" dirty="0"/>
+          </a:p>
+          <a:p>
+            <a:pPr marL="203200" indent="-203200">
+              <a:spcAft>
+                <a:spcPts val="900"/>
+              </a:spcAft>
+              <a:buSzPct val="100000"/>
+              <a:buChar char="•"/>
+            </a:pPr>
+            <a:r>
+              <a:rPr lang="en-US" sz="1400" dirty="0">
+                <a:solidFill>
+                  <a:srgbClr val="1A1A1A"/>
                 </a:solidFill>
                 <a:latin typeface="Montserrat" pitchFamily="34" charset="0"/>
                 <a:ea typeface="Montserrat" pitchFamily="34" charset="-122"/>
                 <a:cs typeface="Montserrat" pitchFamily="34" charset="-120"/>
               </a:rPr>
-              <a:t>intention ↔ implémentation, en continu</a:t>
-            </a:r>
-            <a:endParaRPr lang="en-US" sz="1350" dirty="0"/>
-          </a:p>
-        </p:txBody>
-      </p:sp>
-      <p:sp>
-        <p:nvSpPr>
-          <p:cNvPr id="13" name="Text 11"/>
+              <a:t>Simulation des comportements avant le build.</a:t>
+            </a:r>
+            <a:endParaRPr lang="en-US" sz="1400" dirty="0"/>
+          </a:p>
+          <a:p>
+            <a:pPr marL="203200" indent="-203200">
+              <a:buSzPct val="100000"/>
+              <a:buChar char="•"/>
+            </a:pPr>
+            <a:r>
+              <a:rPr lang="en-US" sz="1400" dirty="0">
+                <a:solidFill>
+                  <a:srgbClr val="1A1A1A"/>
+                </a:solidFill>
+                <a:latin typeface="Montserrat" pitchFamily="34" charset="0"/>
+                <a:ea typeface="Montserrat" pitchFamily="34" charset="-122"/>
+                <a:cs typeface="Montserrat" pitchFamily="34" charset="-120"/>
+              </a:rPr>
+              <a:t>Comparaison entre implémentation et spécification.</a:t>
+            </a:r>
+            <a:endParaRPr lang="en-US" sz="1400" dirty="0"/>
+          </a:p>
+        </p:txBody>
+      </p:sp>
+      <p:sp>
+        <p:nvSpPr>
+          <p:cNvPr id="7" name="Text 4"/>
           <p:cNvSpPr/>
           <p:nvPr/>
         </p:nvSpPr>
@@ -7216,13 +7168,13 @@
             <a:r>
               <a:rPr lang="en-US" sz="1100" b="1" spc="250" kern="0" dirty="0">
                 <a:solidFill>
-                  <a:srgbClr val="1FA98A"/>
+                  <a:srgbClr val="8047F4"/>
                 </a:solidFill>
                 <a:latin typeface="JetBrains Mono" pitchFamily="34" charset="0"/>
                 <a:ea typeface="JetBrains Mono" pitchFamily="34" charset="-122"/>
                 <a:cs typeface="JetBrains Mono" pitchFamily="34" charset="-120"/>
               </a:rPr>
-              <a:t>POUR QUI</a:t>
+              <a:t>SUPERVISION</a:t>
             </a:r>
             <a:endParaRPr lang="en-US" sz="1100" dirty="0"/>
           </a:p>
@@ -7237,7 +7189,7 @@
         <p:spPr>
           <a:xfrm>
             <a:off x="640080" y="960120"/>
-            <a:ext cx="10058400" cy="822960"/>
+            <a:ext cx="5669280" cy="822960"/>
           </a:xfrm>
           <a:prstGeom prst="rect">
             <a:avLst/>
@@ -7261,7 +7213,7 @@
                 <a:ea typeface="Space Grotesk" pitchFamily="34" charset="-122"/>
                 <a:cs typeface="Space Grotesk" pitchFamily="34" charset="-120"/>
               </a:rPr>
-              <a:t>Chaque expertise fait avancer le produit</a:t>
+              <a:t>Un usage de l'IA visible et mesurable</a:t>
             </a:r>
             <a:endParaRPr lang="en-US" sz="3000" dirty="0"/>
           </a:p>
@@ -7269,36 +7221,14 @@
       </p:sp>
       <p:sp>
         <p:nvSpPr>
-          <p:cNvPr id="4" name="Shape 2"/>
-          <p:cNvSpPr/>
-          <p:nvPr/>
-        </p:nvSpPr>
-        <p:spPr>
-          <a:xfrm>
-            <a:off x="640080" y="2011680"/>
-            <a:ext cx="457200" cy="457200"/>
-          </a:xfrm>
-          <a:prstGeom prst="roundRect">
-            <a:avLst>
-              <a:gd name="adj" fmla="val 16000"/>
-            </a:avLst>
-          </a:prstGeom>
-          <a:solidFill>
-            <a:srgbClr val="0066FF"/>
-          </a:solidFill>
-          <a:ln/>
-        </p:spPr>
-      </p:sp>
-      <p:sp>
-        <p:nvSpPr>
-          <p:cNvPr id="5" name="Text 3"/>
-          <p:cNvSpPr/>
-          <p:nvPr/>
-        </p:nvSpPr>
-        <p:spPr>
-          <a:xfrm>
-            <a:off x="1353312" y="1975104"/>
-            <a:ext cx="10424160" cy="530352"/>
+          <p:cNvPr id="4" name="Text 2"/>
+          <p:cNvSpPr/>
+          <p:nvPr/>
+        </p:nvSpPr>
+        <p:spPr>
+          <a:xfrm>
+            <a:off x="640080" y="1828800"/>
+            <a:ext cx="4937760" cy="914400"/>
           </a:xfrm>
           <a:prstGeom prst="rect">
             <a:avLst/>
@@ -7311,24 +7241,13 @@
           <a:lstStyle/>
           <a:p>
             <a:pPr indent="0" marL="0">
-              <a:buNone/>
-            </a:pPr>
-            <a:r>
-              <a:rPr lang="en-US" sz="1700" b="1" dirty="0">
-                <a:solidFill>
-                  <a:srgbClr val="0A0A0A"/>
-                </a:solidFill>
-                <a:latin typeface="Space Grotesk" pitchFamily="34" charset="0"/>
-                <a:ea typeface="Space Grotesk" pitchFamily="34" charset="-122"/>
-                <a:cs typeface="Space Grotesk" pitchFamily="34" charset="-120"/>
-              </a:rPr>
-              <a:t>Produit  </a:t>
-            </a:r>
-            <a:pPr indent="0" marL="0">
-              <a:buNone/>
-            </a:pPr>
-            <a:r>
-              <a:rPr lang="en-US" sz="1400" dirty="0">
+              <a:lnSpc>
+                <a:spcPct val="120000"/>
+              </a:lnSpc>
+              <a:buNone/>
+            </a:pPr>
+            <a:r>
+              <a:rPr lang="en-US" sz="1450" i="1" dirty="0">
                 <a:solidFill>
                   <a:srgbClr val="535462"/>
                 </a:solidFill>
@@ -7336,315 +7255,142 @@
                 <a:ea typeface="Montserrat" pitchFamily="34" charset="-122"/>
                 <a:cs typeface="Montserrat" pitchFamily="34" charset="-120"/>
               </a:rPr>
-              <a:t>Transformer l'intention produit en spécifications.</a:t>
-            </a:r>
-            <a:endParaRPr lang="en-US" sz="1700" dirty="0"/>
-          </a:p>
-        </p:txBody>
-      </p:sp>
-      <p:sp>
-        <p:nvSpPr>
-          <p:cNvPr id="6" name="Shape 4"/>
-          <p:cNvSpPr/>
-          <p:nvPr/>
-        </p:nvSpPr>
-        <p:spPr>
-          <a:xfrm>
-            <a:off x="640080" y="2761488"/>
-            <a:ext cx="457200" cy="457200"/>
-          </a:xfrm>
-          <a:prstGeom prst="roundRect">
-            <a:avLst>
-              <a:gd name="adj" fmla="val 16000"/>
-            </a:avLst>
-          </a:prstGeom>
-          <a:solidFill>
-            <a:srgbClr val="FA5FB2"/>
-          </a:solidFill>
-          <a:ln/>
-        </p:spPr>
-      </p:sp>
-      <p:sp>
-        <p:nvSpPr>
-          <p:cNvPr id="7" name="Text 5"/>
-          <p:cNvSpPr/>
-          <p:nvPr/>
-        </p:nvSpPr>
-        <p:spPr>
-          <a:xfrm>
-            <a:off x="1353312" y="2724912"/>
-            <a:ext cx="10424160" cy="530352"/>
-          </a:xfrm>
-          <a:prstGeom prst="rect">
-            <a:avLst/>
-          </a:prstGeom>
-          <a:noFill/>
-          <a:ln/>
-        </p:spPr>
-        <p:txBody>
-          <a:bodyPr wrap="square" lIns="0" tIns="0" rIns="0" bIns="0" rtlCol="0" anchor="ctr"/>
-          <a:lstStyle/>
-          <a:p>
-            <a:pPr indent="0" marL="0">
-              <a:buNone/>
-            </a:pPr>
-            <a:r>
-              <a:rPr lang="en-US" sz="1700" b="1" dirty="0">
-                <a:solidFill>
-                  <a:srgbClr val="0A0A0A"/>
-                </a:solidFill>
-                <a:latin typeface="Space Grotesk" pitchFamily="34" charset="0"/>
-                <a:ea typeface="Space Grotesk" pitchFamily="34" charset="-122"/>
-                <a:cs typeface="Space Grotesk" pitchFamily="34" charset="-120"/>
-              </a:rPr>
-              <a:t>Design  </a:t>
-            </a:r>
-            <a:pPr indent="0" marL="0">
-              <a:buNone/>
-            </a:pPr>
-            <a:r>
-              <a:rPr lang="en-US" sz="1400" dirty="0">
-                <a:solidFill>
-                  <a:srgbClr val="535462"/>
+              <a:t>Une vue consolidée pour encadrer les pratiques, contrôler les risques et mesurer la valeur réellement créée.</a:t>
+            </a:r>
+            <a:endParaRPr lang="en-US" sz="1450" dirty="0"/>
+          </a:p>
+        </p:txBody>
+      </p:sp>
+      <p:sp>
+        <p:nvSpPr>
+          <p:cNvPr id="5" name="Text 3"/>
+          <p:cNvSpPr/>
+          <p:nvPr/>
+        </p:nvSpPr>
+        <p:spPr>
+          <a:xfrm>
+            <a:off x="640080" y="3017520"/>
+            <a:ext cx="4846320" cy="2377440"/>
+          </a:xfrm>
+          <a:prstGeom prst="rect">
+            <a:avLst/>
+          </a:prstGeom>
+          <a:noFill/>
+          <a:ln/>
+        </p:spPr>
+        <p:txBody>
+          <a:bodyPr wrap="square" lIns="0" tIns="0" rIns="0" bIns="0" rtlCol="0" anchor="ctr"/>
+          <a:lstStyle/>
+          <a:p>
+            <a:pPr marL="203200" indent="-203200">
+              <a:spcAft>
+                <a:spcPts val="1000"/>
+              </a:spcAft>
+              <a:buSzPct val="100000"/>
+              <a:buChar char="•"/>
+            </a:pPr>
+            <a:r>
+              <a:rPr lang="en-US" sz="1450" dirty="0">
+                <a:solidFill>
+                  <a:srgbClr val="1A1A1A"/>
                 </a:solidFill>
                 <a:latin typeface="Montserrat" pitchFamily="34" charset="0"/>
                 <a:ea typeface="Montserrat" pitchFamily="34" charset="-122"/>
                 <a:cs typeface="Montserrat" pitchFamily="34" charset="-120"/>
               </a:rPr>
-              <a:t>Concevoir des parcours cohérents de bout en bout.</a:t>
-            </a:r>
-            <a:endParaRPr lang="en-US" sz="1700" dirty="0"/>
-          </a:p>
-        </p:txBody>
-      </p:sp>
-      <p:sp>
-        <p:nvSpPr>
-          <p:cNvPr id="8" name="Shape 6"/>
-          <p:cNvSpPr/>
-          <p:nvPr/>
-        </p:nvSpPr>
-        <p:spPr>
-          <a:xfrm>
-            <a:off x="640080" y="3511296"/>
-            <a:ext cx="457200" cy="457200"/>
-          </a:xfrm>
-          <a:prstGeom prst="roundRect">
-            <a:avLst>
-              <a:gd name="adj" fmla="val 16000"/>
-            </a:avLst>
-          </a:prstGeom>
-          <a:solidFill>
-            <a:srgbClr val="8047F4"/>
-          </a:solidFill>
-          <a:ln/>
-        </p:spPr>
-      </p:sp>
-      <p:sp>
-        <p:nvSpPr>
-          <p:cNvPr id="9" name="Text 7"/>
-          <p:cNvSpPr/>
-          <p:nvPr/>
-        </p:nvSpPr>
-        <p:spPr>
-          <a:xfrm>
-            <a:off x="1353312" y="3474720"/>
-            <a:ext cx="10424160" cy="530352"/>
-          </a:xfrm>
-          <a:prstGeom prst="rect">
-            <a:avLst/>
-          </a:prstGeom>
-          <a:noFill/>
-          <a:ln/>
-        </p:spPr>
-        <p:txBody>
-          <a:bodyPr wrap="square" lIns="0" tIns="0" rIns="0" bIns="0" rtlCol="0" anchor="ctr"/>
-          <a:lstStyle/>
-          <a:p>
-            <a:pPr indent="0" marL="0">
-              <a:buNone/>
-            </a:pPr>
-            <a:r>
-              <a:rPr lang="en-US" sz="1700" b="1" dirty="0">
-                <a:solidFill>
-                  <a:srgbClr val="0A0A0A"/>
-                </a:solidFill>
-                <a:latin typeface="Space Grotesk" pitchFamily="34" charset="0"/>
-                <a:ea typeface="Space Grotesk" pitchFamily="34" charset="-122"/>
-                <a:cs typeface="Space Grotesk" pitchFamily="34" charset="-120"/>
-              </a:rPr>
-              <a:t>Développement  </a:t>
-            </a:r>
-            <a:pPr indent="0" marL="0">
-              <a:buNone/>
-            </a:pPr>
-            <a:r>
-              <a:rPr lang="en-US" sz="1400" dirty="0">
-                <a:solidFill>
-                  <a:srgbClr val="535462"/>
+              <a:t>Performance des projets.</a:t>
+            </a:r>
+            <a:endParaRPr lang="en-US" sz="1450" dirty="0"/>
+          </a:p>
+          <a:p>
+            <a:pPr marL="203200" indent="-203200">
+              <a:spcAft>
+                <a:spcPts val="1000"/>
+              </a:spcAft>
+              <a:buSzPct val="100000"/>
+              <a:buChar char="•"/>
+            </a:pPr>
+            <a:r>
+              <a:rPr lang="en-US" sz="1450" dirty="0">
+                <a:solidFill>
+                  <a:srgbClr val="1A1A1A"/>
                 </a:solidFill>
                 <a:latin typeface="Montserrat" pitchFamily="34" charset="0"/>
                 <a:ea typeface="Montserrat" pitchFamily="34" charset="-122"/>
                 <a:cs typeface="Montserrat" pitchFamily="34" charset="-120"/>
               </a:rPr>
-              <a:t>Construire à partir d'une spécification vérifiable.</a:t>
-            </a:r>
-            <a:endParaRPr lang="en-US" sz="1700" dirty="0"/>
-          </a:p>
-        </p:txBody>
-      </p:sp>
-      <p:sp>
-        <p:nvSpPr>
-          <p:cNvPr id="10" name="Shape 8"/>
-          <p:cNvSpPr/>
-          <p:nvPr/>
-        </p:nvSpPr>
-        <p:spPr>
-          <a:xfrm>
-            <a:off x="640080" y="4261104"/>
-            <a:ext cx="457200" cy="457200"/>
-          </a:xfrm>
-          <a:prstGeom prst="roundRect">
-            <a:avLst>
-              <a:gd name="adj" fmla="val 16000"/>
-            </a:avLst>
-          </a:prstGeom>
-          <a:solidFill>
-            <a:srgbClr val="1FA98A"/>
-          </a:solidFill>
-          <a:ln/>
-        </p:spPr>
-      </p:sp>
-      <p:sp>
-        <p:nvSpPr>
-          <p:cNvPr id="11" name="Text 9"/>
-          <p:cNvSpPr/>
-          <p:nvPr/>
-        </p:nvSpPr>
-        <p:spPr>
-          <a:xfrm>
-            <a:off x="1353312" y="4224528"/>
-            <a:ext cx="10424160" cy="530352"/>
-          </a:xfrm>
-          <a:prstGeom prst="rect">
-            <a:avLst/>
-          </a:prstGeom>
-          <a:noFill/>
-          <a:ln/>
-        </p:spPr>
-        <p:txBody>
-          <a:bodyPr wrap="square" lIns="0" tIns="0" rIns="0" bIns="0" rtlCol="0" anchor="ctr"/>
-          <a:lstStyle/>
-          <a:p>
-            <a:pPr indent="0" marL="0">
-              <a:buNone/>
-            </a:pPr>
-            <a:r>
-              <a:rPr lang="en-US" sz="1700" b="1" dirty="0">
-                <a:solidFill>
-                  <a:srgbClr val="0A0A0A"/>
-                </a:solidFill>
-                <a:latin typeface="Space Grotesk" pitchFamily="34" charset="0"/>
-                <a:ea typeface="Space Grotesk" pitchFamily="34" charset="-122"/>
-                <a:cs typeface="Space Grotesk" pitchFamily="34" charset="-120"/>
-              </a:rPr>
-              <a:t>Management  </a:t>
-            </a:r>
-            <a:pPr indent="0" marL="0">
-              <a:buNone/>
-            </a:pPr>
-            <a:r>
-              <a:rPr lang="en-US" sz="1400" dirty="0">
-                <a:solidFill>
-                  <a:srgbClr val="535462"/>
+              <a:t>Consommation, qualité &amp; coûts.</a:t>
+            </a:r>
+            <a:endParaRPr lang="en-US" sz="1450" dirty="0"/>
+          </a:p>
+          <a:p>
+            <a:pPr marL="203200" indent="-203200">
+              <a:spcAft>
+                <a:spcPts val="1000"/>
+              </a:spcAft>
+              <a:buSzPct val="100000"/>
+              <a:buChar char="•"/>
+            </a:pPr>
+            <a:r>
+              <a:rPr lang="en-US" sz="1450" dirty="0">
+                <a:solidFill>
+                  <a:srgbClr val="1A1A1A"/>
                 </a:solidFill>
                 <a:latin typeface="Montserrat" pitchFamily="34" charset="0"/>
                 <a:ea typeface="Montserrat" pitchFamily="34" charset="-122"/>
                 <a:cs typeface="Montserrat" pitchFamily="34" charset="-120"/>
               </a:rPr>
-              <a:t>Garder l'alignement, la qualité et le contrôle.</a:t>
-            </a:r>
-            <a:endParaRPr lang="en-US" sz="1700" dirty="0"/>
-          </a:p>
-        </p:txBody>
-      </p:sp>
-      <p:sp>
-        <p:nvSpPr>
-          <p:cNvPr id="12" name="Shape 10"/>
-          <p:cNvSpPr/>
-          <p:nvPr/>
-        </p:nvSpPr>
-        <p:spPr>
-          <a:xfrm>
-            <a:off x="640080" y="5010912"/>
-            <a:ext cx="457200" cy="457200"/>
-          </a:xfrm>
-          <a:prstGeom prst="roundRect">
-            <a:avLst>
-              <a:gd name="adj" fmla="val 16000"/>
-            </a:avLst>
-          </a:prstGeom>
-          <a:solidFill>
-            <a:srgbClr val="FFA101"/>
-          </a:solidFill>
-          <a:ln/>
-        </p:spPr>
-      </p:sp>
-      <p:sp>
-        <p:nvSpPr>
-          <p:cNvPr id="13" name="Text 11"/>
-          <p:cNvSpPr/>
-          <p:nvPr/>
-        </p:nvSpPr>
-        <p:spPr>
-          <a:xfrm>
-            <a:off x="1353312" y="4974336"/>
-            <a:ext cx="10424160" cy="530352"/>
-          </a:xfrm>
-          <a:prstGeom prst="rect">
-            <a:avLst/>
-          </a:prstGeom>
-          <a:noFill/>
-          <a:ln/>
-        </p:spPr>
-        <p:txBody>
-          <a:bodyPr wrap="square" lIns="0" tIns="0" rIns="0" bIns="0" rtlCol="0" anchor="ctr"/>
-          <a:lstStyle/>
-          <a:p>
-            <a:pPr indent="0" marL="0">
-              <a:buNone/>
-            </a:pPr>
-            <a:r>
-              <a:rPr lang="en-US" sz="1700" b="1" dirty="0">
-                <a:solidFill>
-                  <a:srgbClr val="0A0A0A"/>
-                </a:solidFill>
-                <a:latin typeface="Space Grotesk" pitchFamily="34" charset="0"/>
-                <a:ea typeface="Space Grotesk" pitchFamily="34" charset="-122"/>
-                <a:cs typeface="Space Grotesk" pitchFamily="34" charset="-120"/>
-              </a:rPr>
-              <a:t>Finance  </a:t>
-            </a:r>
-            <a:pPr indent="0" marL="0">
-              <a:buNone/>
-            </a:pPr>
-            <a:r>
-              <a:rPr lang="en-US" sz="1400" dirty="0">
-                <a:solidFill>
-                  <a:srgbClr val="535462"/>
+              <a:t>Partage des meilleures pratiques.</a:t>
+            </a:r>
+            <a:endParaRPr lang="en-US" sz="1450" dirty="0"/>
+          </a:p>
+          <a:p>
+            <a:pPr marL="203200" indent="-203200">
+              <a:buSzPct val="100000"/>
+              <a:buChar char="•"/>
+            </a:pPr>
+            <a:r>
+              <a:rPr lang="en-US" sz="1450" dirty="0">
+                <a:solidFill>
+                  <a:srgbClr val="1A1A1A"/>
                 </a:solidFill>
                 <a:latin typeface="Montserrat" pitchFamily="34" charset="0"/>
                 <a:ea typeface="Montserrat" pitchFamily="34" charset="-122"/>
                 <a:cs typeface="Montserrat" pitchFamily="34" charset="-120"/>
               </a:rPr>
-              <a:t>Piloter l'usage et la rentabilité réelle de l'IA.</a:t>
-            </a:r>
-            <a:endParaRPr lang="en-US" sz="1700" dirty="0"/>
-          </a:p>
-        </p:txBody>
-      </p:sp>
-      <p:sp>
-        <p:nvSpPr>
-          <p:cNvPr id="14" name="Text 12"/>
+              <a:t>Détection rapide des comportements hors cadre.</a:t>
+            </a:r>
+            <a:endParaRPr lang="en-US" sz="1450" dirty="0"/>
+          </a:p>
+        </p:txBody>
+      </p:sp>
+      <p:pic>
+        <p:nvPicPr>
+          <p:cNvPr id="6" name="Image 0" descr="m-act.png">    </p:cNvPr>
+          <p:cNvPicPr>
+            <a:picLocks noChangeAspect="1"/>
+          </p:cNvPicPr>
+          <p:nvPr/>
+        </p:nvPicPr>
+        <p:blipFill>
+          <a:blip r:embed="rId1"/>
+          <a:stretch>
+            <a:fillRect/>
+          </a:stretch>
+        </p:blipFill>
+        <p:spPr>
+          <a:xfrm>
+            <a:off x="5943600" y="1691640"/>
+            <a:ext cx="5605272" cy="3648456"/>
+          </a:xfrm>
+          <a:prstGeom prst="rect">
+            <a:avLst/>
+          </a:prstGeom>
+        </p:spPr>
+      </p:pic>
+      <p:sp>
+        <p:nvSpPr>
+          <p:cNvPr id="7" name="Text 4"/>
           <p:cNvSpPr/>
           <p:nvPr/>
         </p:nvSpPr>
@@ -7695,7 +7441,7 @@
     <p:bg>
       <p:bgPr>
         <a:solidFill>
-          <a:srgbClr val="FAFAFC"/>
+          <a:srgbClr val="FFFFFF"/>
         </a:solidFill>
       </p:bgPr>
     </p:bg>
@@ -7721,8 +7467,8 @@
         </p:nvSpPr>
         <p:spPr>
           <a:xfrm>
-            <a:off x="548640" y="640080"/>
-            <a:ext cx="1828800" cy="1463040"/>
+            <a:off x="640080" y="640080"/>
+            <a:ext cx="8229600" cy="274320"/>
           </a:xfrm>
           <a:prstGeom prst="rect">
             <a:avLst/>
@@ -7738,30 +7484,91 @@
               <a:buNone/>
             </a:pPr>
             <a:r>
-              <a:rPr lang="en-US" sz="13000" b="1" dirty="0">
-                <a:solidFill>
-                  <a:srgbClr val="BB46F5"/>
+              <a:rPr lang="en-US" sz="1100" b="1" spc="250" kern="0" dirty="0">
+                <a:solidFill>
+                  <a:srgbClr val="1FA98A"/>
+                </a:solidFill>
+                <a:latin typeface="JetBrains Mono" pitchFamily="34" charset="0"/>
+                <a:ea typeface="JetBrains Mono" pitchFamily="34" charset="-122"/>
+                <a:cs typeface="JetBrains Mono" pitchFamily="34" charset="-120"/>
+              </a:rPr>
+              <a:t>POUR QUI</a:t>
+            </a:r>
+            <a:endParaRPr lang="en-US" sz="1100" dirty="0"/>
+          </a:p>
+        </p:txBody>
+      </p:sp>
+      <p:sp>
+        <p:nvSpPr>
+          <p:cNvPr id="3" name="Text 1"/>
+          <p:cNvSpPr/>
+          <p:nvPr/>
+        </p:nvSpPr>
+        <p:spPr>
+          <a:xfrm>
+            <a:off x="640080" y="960120"/>
+            <a:ext cx="10058400" cy="822960"/>
+          </a:xfrm>
+          <a:prstGeom prst="rect">
+            <a:avLst/>
+          </a:prstGeom>
+          <a:noFill/>
+          <a:ln/>
+        </p:spPr>
+        <p:txBody>
+          <a:bodyPr wrap="square" lIns="0" tIns="0" rIns="0" bIns="0" rtlCol="0" anchor="ctr"/>
+          <a:lstStyle/>
+          <a:p>
+            <a:pPr indent="0" marL="0">
+              <a:buNone/>
+            </a:pPr>
+            <a:r>
+              <a:rPr lang="en-US" sz="3000" b="1" dirty="0">
+                <a:solidFill>
+                  <a:srgbClr val="0A0A0A"/>
                 </a:solidFill>
                 <a:latin typeface="Space Grotesk" pitchFamily="34" charset="0"/>
                 <a:ea typeface="Space Grotesk" pitchFamily="34" charset="-122"/>
                 <a:cs typeface="Space Grotesk" pitchFamily="34" charset="-120"/>
               </a:rPr>
-              <a:t>“</a:t>
-            </a:r>
-            <a:endParaRPr lang="en-US" sz="13000" dirty="0"/>
-          </a:p>
-        </p:txBody>
-      </p:sp>
-      <p:sp>
-        <p:nvSpPr>
-          <p:cNvPr id="3" name="Text 1"/>
-          <p:cNvSpPr/>
-          <p:nvPr/>
-        </p:nvSpPr>
-        <p:spPr>
-          <a:xfrm>
-            <a:off x="640080" y="2286000"/>
-            <a:ext cx="10607040" cy="1828800"/>
+              <a:t>Chaque expertise fait avancer le produit</a:t>
+            </a:r>
+            <a:endParaRPr lang="en-US" sz="3000" dirty="0"/>
+          </a:p>
+        </p:txBody>
+      </p:sp>
+      <p:sp>
+        <p:nvSpPr>
+          <p:cNvPr id="4" name="Shape 2"/>
+          <p:cNvSpPr/>
+          <p:nvPr/>
+        </p:nvSpPr>
+        <p:spPr>
+          <a:xfrm>
+            <a:off x="640080" y="2011680"/>
+            <a:ext cx="457200" cy="457200"/>
+          </a:xfrm>
+          <a:prstGeom prst="roundRect">
+            <a:avLst>
+              <a:gd name="adj" fmla="val 16000"/>
+            </a:avLst>
+          </a:prstGeom>
+          <a:solidFill>
+            <a:srgbClr val="0066FF"/>
+          </a:solidFill>
+          <a:ln/>
+        </p:spPr>
+      </p:sp>
+      <p:sp>
+        <p:nvSpPr>
+          <p:cNvPr id="5" name="Text 3"/>
+          <p:cNvSpPr/>
+          <p:nvPr/>
+        </p:nvSpPr>
+        <p:spPr>
+          <a:xfrm>
+            <a:off x="1353312" y="1975104"/>
+            <a:ext cx="10424160" cy="530352"/>
           </a:xfrm>
           <a:prstGeom prst="rect">
             <a:avLst/>
@@ -7774,13 +7581,10 @@
           <a:lstStyle/>
           <a:p>
             <a:pPr indent="0" marL="0">
-              <a:lnSpc>
-                <a:spcPct val="110000"/>
-              </a:lnSpc>
-              <a:buNone/>
-            </a:pPr>
-            <a:r>
-              <a:rPr lang="en-US" sz="3800" b="1" i="1" dirty="0">
+              <a:buNone/>
+            </a:pPr>
+            <a:r>
+              <a:rPr lang="en-US" sz="1700" b="1" dirty="0">
                 <a:solidFill>
                   <a:srgbClr val="0A0A0A"/>
                 </a:solidFill>
@@ -7788,77 +7592,329 @@
                 <a:ea typeface="Space Grotesk" pitchFamily="34" charset="-122"/>
                 <a:cs typeface="Space Grotesk" pitchFamily="34" charset="-120"/>
               </a:rPr>
-              <a:t>De l'intention produit à l'implémentation, sans dérive.</a:t>
-            </a:r>
-            <a:endParaRPr lang="en-US" sz="3800" dirty="0"/>
-          </a:p>
-        </p:txBody>
-      </p:sp>
-      <p:sp>
-        <p:nvSpPr>
-          <p:cNvPr id="4" name="Text 2"/>
-          <p:cNvSpPr/>
-          <p:nvPr/>
-        </p:nvSpPr>
-        <p:spPr>
-          <a:xfrm>
-            <a:off x="640080" y="4754880"/>
-            <a:ext cx="8229600" cy="731520"/>
-          </a:xfrm>
-          <a:prstGeom prst="rect">
-            <a:avLst/>
-          </a:prstGeom>
-          <a:noFill/>
-          <a:ln/>
-        </p:spPr>
-        <p:txBody>
-          <a:bodyPr wrap="square" lIns="0" tIns="0" rIns="0" bIns="0" rtlCol="0" anchor="ctr"/>
-          <a:lstStyle/>
-          <a:p>
+              <a:t>Produit  </a:t>
+            </a:r>
             <a:pPr indent="0" marL="0">
-              <a:lnSpc>
-                <a:spcPct val="120000"/>
-              </a:lnSpc>
-              <a:buNone/>
-            </a:pPr>
-            <a:r>
-              <a:rPr lang="en-US" sz="1500" b="1" dirty="0">
-                <a:solidFill>
-                  <a:srgbClr val="0A0A0A"/>
+              <a:buNone/>
+            </a:pPr>
+            <a:r>
+              <a:rPr lang="en-US" sz="1400" dirty="0">
+                <a:solidFill>
+                  <a:srgbClr val="535462"/>
                 </a:solidFill>
                 <a:latin typeface="Montserrat" pitchFamily="34" charset="0"/>
                 <a:ea typeface="Montserrat" pitchFamily="34" charset="-122"/>
                 <a:cs typeface="Montserrat" pitchFamily="34" charset="-120"/>
               </a:rPr>
-              <a:t>Lyriks</a:t>
-            </a:r>
-            <a:endParaRPr lang="en-US" sz="1500" dirty="0"/>
-          </a:p>
+              <a:t>Transformer l'intention produit en spécifications.</a:t>
+            </a:r>
+            <a:endParaRPr lang="en-US" sz="1700" dirty="0"/>
+          </a:p>
+        </p:txBody>
+      </p:sp>
+      <p:sp>
+        <p:nvSpPr>
+          <p:cNvPr id="6" name="Shape 4"/>
+          <p:cNvSpPr/>
+          <p:nvPr/>
+        </p:nvSpPr>
+        <p:spPr>
+          <a:xfrm>
+            <a:off x="640080" y="2761488"/>
+            <a:ext cx="457200" cy="457200"/>
+          </a:xfrm>
+          <a:prstGeom prst="roundRect">
+            <a:avLst>
+              <a:gd name="adj" fmla="val 16000"/>
+            </a:avLst>
+          </a:prstGeom>
+          <a:solidFill>
+            <a:srgbClr val="FA5FB2"/>
+          </a:solidFill>
+          <a:ln/>
+        </p:spPr>
+      </p:sp>
+      <p:sp>
+        <p:nvSpPr>
+          <p:cNvPr id="7" name="Text 5"/>
+          <p:cNvSpPr/>
+          <p:nvPr/>
+        </p:nvSpPr>
+        <p:spPr>
+          <a:xfrm>
+            <a:off x="1353312" y="2724912"/>
+            <a:ext cx="10424160" cy="530352"/>
+          </a:xfrm>
+          <a:prstGeom prst="rect">
+            <a:avLst/>
+          </a:prstGeom>
+          <a:noFill/>
+          <a:ln/>
+        </p:spPr>
+        <p:txBody>
+          <a:bodyPr wrap="square" lIns="0" tIns="0" rIns="0" bIns="0" rtlCol="0" anchor="ctr"/>
+          <a:lstStyle/>
           <a:p>
             <a:pPr indent="0" marL="0">
-              <a:lnSpc>
-                <a:spcPct val="120000"/>
-              </a:lnSpc>
-              <a:buNone/>
-            </a:pPr>
-            <a:r>
-              <a:rPr lang="en-US" sz="1200" dirty="0">
-                <a:solidFill>
-                  <a:srgbClr val="9296A6"/>
-                </a:solidFill>
-                <a:latin typeface="JetBrains Mono" pitchFamily="34" charset="0"/>
-                <a:ea typeface="JetBrains Mono" pitchFamily="34" charset="-122"/>
-                <a:cs typeface="JetBrains Mono" pitchFamily="34" charset="-120"/>
-              </a:rPr>
-              <a:t>La cohérence produit à l'ère de l'IA</a:t>
-            </a:r>
-            <a:endParaRPr lang="en-US" sz="1500" dirty="0"/>
-          </a:p>
-        </p:txBody>
-      </p:sp>
-      <p:sp>
-        <p:nvSpPr>
-          <p:cNvPr id="5" name="Text 3"/>
+              <a:buNone/>
+            </a:pPr>
+            <a:r>
+              <a:rPr lang="en-US" sz="1700" b="1" dirty="0">
+                <a:solidFill>
+                  <a:srgbClr val="0A0A0A"/>
+                </a:solidFill>
+                <a:latin typeface="Space Grotesk" pitchFamily="34" charset="0"/>
+                <a:ea typeface="Space Grotesk" pitchFamily="34" charset="-122"/>
+                <a:cs typeface="Space Grotesk" pitchFamily="34" charset="-120"/>
+              </a:rPr>
+              <a:t>Design  </a:t>
+            </a:r>
+            <a:pPr indent="0" marL="0">
+              <a:buNone/>
+            </a:pPr>
+            <a:r>
+              <a:rPr lang="en-US" sz="1400" dirty="0">
+                <a:solidFill>
+                  <a:srgbClr val="535462"/>
+                </a:solidFill>
+                <a:latin typeface="Montserrat" pitchFamily="34" charset="0"/>
+                <a:ea typeface="Montserrat" pitchFamily="34" charset="-122"/>
+                <a:cs typeface="Montserrat" pitchFamily="34" charset="-120"/>
+              </a:rPr>
+              <a:t>Concevoir des parcours cohérents de bout en bout.</a:t>
+            </a:r>
+            <a:endParaRPr lang="en-US" sz="1700" dirty="0"/>
+          </a:p>
+        </p:txBody>
+      </p:sp>
+      <p:sp>
+        <p:nvSpPr>
+          <p:cNvPr id="8" name="Shape 6"/>
+          <p:cNvSpPr/>
+          <p:nvPr/>
+        </p:nvSpPr>
+        <p:spPr>
+          <a:xfrm>
+            <a:off x="640080" y="3511296"/>
+            <a:ext cx="457200" cy="457200"/>
+          </a:xfrm>
+          <a:prstGeom prst="roundRect">
+            <a:avLst>
+              <a:gd name="adj" fmla="val 16000"/>
+            </a:avLst>
+          </a:prstGeom>
+          <a:solidFill>
+            <a:srgbClr val="8047F4"/>
+          </a:solidFill>
+          <a:ln/>
+        </p:spPr>
+      </p:sp>
+      <p:sp>
+        <p:nvSpPr>
+          <p:cNvPr id="9" name="Text 7"/>
+          <p:cNvSpPr/>
+          <p:nvPr/>
+        </p:nvSpPr>
+        <p:spPr>
+          <a:xfrm>
+            <a:off x="1353312" y="3474720"/>
+            <a:ext cx="10424160" cy="530352"/>
+          </a:xfrm>
+          <a:prstGeom prst="rect">
+            <a:avLst/>
+          </a:prstGeom>
+          <a:noFill/>
+          <a:ln/>
+        </p:spPr>
+        <p:txBody>
+          <a:bodyPr wrap="square" lIns="0" tIns="0" rIns="0" bIns="0" rtlCol="0" anchor="ctr"/>
+          <a:lstStyle/>
+          <a:p>
+            <a:pPr indent="0" marL="0">
+              <a:buNone/>
+            </a:pPr>
+            <a:r>
+              <a:rPr lang="en-US" sz="1700" b="1" dirty="0">
+                <a:solidFill>
+                  <a:srgbClr val="0A0A0A"/>
+                </a:solidFill>
+                <a:latin typeface="Space Grotesk" pitchFamily="34" charset="0"/>
+                <a:ea typeface="Space Grotesk" pitchFamily="34" charset="-122"/>
+                <a:cs typeface="Space Grotesk" pitchFamily="34" charset="-120"/>
+              </a:rPr>
+              <a:t>Développement  </a:t>
+            </a:r>
+            <a:pPr indent="0" marL="0">
+              <a:buNone/>
+            </a:pPr>
+            <a:r>
+              <a:rPr lang="en-US" sz="1400" dirty="0">
+                <a:solidFill>
+                  <a:srgbClr val="535462"/>
+                </a:solidFill>
+                <a:latin typeface="Montserrat" pitchFamily="34" charset="0"/>
+                <a:ea typeface="Montserrat" pitchFamily="34" charset="-122"/>
+                <a:cs typeface="Montserrat" pitchFamily="34" charset="-120"/>
+              </a:rPr>
+              <a:t>Construire à partir d'une spécification vérifiable.</a:t>
+            </a:r>
+            <a:endParaRPr lang="en-US" sz="1700" dirty="0"/>
+          </a:p>
+        </p:txBody>
+      </p:sp>
+      <p:sp>
+        <p:nvSpPr>
+          <p:cNvPr id="10" name="Shape 8"/>
+          <p:cNvSpPr/>
+          <p:nvPr/>
+        </p:nvSpPr>
+        <p:spPr>
+          <a:xfrm>
+            <a:off x="640080" y="4261104"/>
+            <a:ext cx="457200" cy="457200"/>
+          </a:xfrm>
+          <a:prstGeom prst="roundRect">
+            <a:avLst>
+              <a:gd name="adj" fmla="val 16000"/>
+            </a:avLst>
+          </a:prstGeom>
+          <a:solidFill>
+            <a:srgbClr val="1FA98A"/>
+          </a:solidFill>
+          <a:ln/>
+        </p:spPr>
+      </p:sp>
+      <p:sp>
+        <p:nvSpPr>
+          <p:cNvPr id="11" name="Text 9"/>
+          <p:cNvSpPr/>
+          <p:nvPr/>
+        </p:nvSpPr>
+        <p:spPr>
+          <a:xfrm>
+            <a:off x="1353312" y="4224528"/>
+            <a:ext cx="10424160" cy="530352"/>
+          </a:xfrm>
+          <a:prstGeom prst="rect">
+            <a:avLst/>
+          </a:prstGeom>
+          <a:noFill/>
+          <a:ln/>
+        </p:spPr>
+        <p:txBody>
+          <a:bodyPr wrap="square" lIns="0" tIns="0" rIns="0" bIns="0" rtlCol="0" anchor="ctr"/>
+          <a:lstStyle/>
+          <a:p>
+            <a:pPr indent="0" marL="0">
+              <a:buNone/>
+            </a:pPr>
+            <a:r>
+              <a:rPr lang="en-US" sz="1700" b="1" dirty="0">
+                <a:solidFill>
+                  <a:srgbClr val="0A0A0A"/>
+                </a:solidFill>
+                <a:latin typeface="Space Grotesk" pitchFamily="34" charset="0"/>
+                <a:ea typeface="Space Grotesk" pitchFamily="34" charset="-122"/>
+                <a:cs typeface="Space Grotesk" pitchFamily="34" charset="-120"/>
+              </a:rPr>
+              <a:t>Management  </a:t>
+            </a:r>
+            <a:pPr indent="0" marL="0">
+              <a:buNone/>
+            </a:pPr>
+            <a:r>
+              <a:rPr lang="en-US" sz="1400" dirty="0">
+                <a:solidFill>
+                  <a:srgbClr val="535462"/>
+                </a:solidFill>
+                <a:latin typeface="Montserrat" pitchFamily="34" charset="0"/>
+                <a:ea typeface="Montserrat" pitchFamily="34" charset="-122"/>
+                <a:cs typeface="Montserrat" pitchFamily="34" charset="-120"/>
+              </a:rPr>
+              <a:t>Garder l'alignement, la qualité et le contrôle.</a:t>
+            </a:r>
+            <a:endParaRPr lang="en-US" sz="1700" dirty="0"/>
+          </a:p>
+        </p:txBody>
+      </p:sp>
+      <p:sp>
+        <p:nvSpPr>
+          <p:cNvPr id="12" name="Shape 10"/>
+          <p:cNvSpPr/>
+          <p:nvPr/>
+        </p:nvSpPr>
+        <p:spPr>
+          <a:xfrm>
+            <a:off x="640080" y="5010912"/>
+            <a:ext cx="457200" cy="457200"/>
+          </a:xfrm>
+          <a:prstGeom prst="roundRect">
+            <a:avLst>
+              <a:gd name="adj" fmla="val 16000"/>
+            </a:avLst>
+          </a:prstGeom>
+          <a:solidFill>
+            <a:srgbClr val="FFA101"/>
+          </a:solidFill>
+          <a:ln/>
+        </p:spPr>
+      </p:sp>
+      <p:sp>
+        <p:nvSpPr>
+          <p:cNvPr id="13" name="Text 11"/>
+          <p:cNvSpPr/>
+          <p:nvPr/>
+        </p:nvSpPr>
+        <p:spPr>
+          <a:xfrm>
+            <a:off x="1353312" y="4974336"/>
+            <a:ext cx="10424160" cy="530352"/>
+          </a:xfrm>
+          <a:prstGeom prst="rect">
+            <a:avLst/>
+          </a:prstGeom>
+          <a:noFill/>
+          <a:ln/>
+        </p:spPr>
+        <p:txBody>
+          <a:bodyPr wrap="square" lIns="0" tIns="0" rIns="0" bIns="0" rtlCol="0" anchor="ctr"/>
+          <a:lstStyle/>
+          <a:p>
+            <a:pPr indent="0" marL="0">
+              <a:buNone/>
+            </a:pPr>
+            <a:r>
+              <a:rPr lang="en-US" sz="1700" b="1" dirty="0">
+                <a:solidFill>
+                  <a:srgbClr val="0A0A0A"/>
+                </a:solidFill>
+                <a:latin typeface="Space Grotesk" pitchFamily="34" charset="0"/>
+                <a:ea typeface="Space Grotesk" pitchFamily="34" charset="-122"/>
+                <a:cs typeface="Space Grotesk" pitchFamily="34" charset="-120"/>
+              </a:rPr>
+              <a:t>Finance  </a:t>
+            </a:r>
+            <a:pPr indent="0" marL="0">
+              <a:buNone/>
+            </a:pPr>
+            <a:r>
+              <a:rPr lang="en-US" sz="1400" dirty="0">
+                <a:solidFill>
+                  <a:srgbClr val="535462"/>
+                </a:solidFill>
+                <a:latin typeface="Montserrat" pitchFamily="34" charset="0"/>
+                <a:ea typeface="Montserrat" pitchFamily="34" charset="-122"/>
+                <a:cs typeface="Montserrat" pitchFamily="34" charset="-120"/>
+              </a:rPr>
+              <a:t>Piloter l'usage et la rentabilité réelle de l'IA.</a:t>
+            </a:r>
+            <a:endParaRPr lang="en-US" sz="1700" dirty="0"/>
+          </a:p>
+        </p:txBody>
+      </p:sp>
+      <p:sp>
+        <p:nvSpPr>
+          <p:cNvPr id="14" name="Text 12"/>
           <p:cNvSpPr/>
           <p:nvPr/>
         </p:nvSpPr>

--- a/public/reference/lyriks-template.pptx
+++ b/public/reference/lyriks-template.pptx
@@ -18,9 +18,10 @@
     <p:sldId id="266" r:id="rId12"/>
     <p:sldId id="267" r:id="rId13"/>
     <p:sldId id="268" r:id="rId14"/>
+    <p:sldId id="269" r:id="rId15"/>
   </p:sldIdLst>
   <p:notesMasterIdLst>
-    <p:notesMasterId r:id="rId15"/>
+    <p:notesMasterId r:id="rId16"/>
   </p:notesMasterIdLst>
   <p:sldSz cx="12191695" cy="6858000"/>
   <p:notesSz cx="6858000" cy="12191695"/>
@@ -890,6 +891,94 @@
             <a:fld id="{F7021451-1387-4CA6-816F-3879F97B5CBC}" type="slidenum">
               <a:rPr lang="en-US"/>
               <a:t>13</a:t>
+            </a:fld>
+            <a:endParaRPr lang="en-US"/>
+          </a:p>
+        </p:txBody>
+      </p:sp>
+    </p:spTree>
+    <p:extLst>
+      <p:ext uri="{BB962C8B-B14F-4D97-AF65-F5344CB8AC3E}">
+        <p14:creationId xmlns:p14="http://schemas.microsoft.com/office/powerpoint/2010/main" val="1024086991"/>
+      </p:ext>
+    </p:extLst>
+  </p:cSld>
+  <p:clrMapOvr>
+    <a:masterClrMapping/>
+  </p:clrMapOvr>
+</p:notes>
+</file>
+
+<file path=ppt/notesSlides/notesSlide14.xml><?xml version="1.0" encoding="utf-8"?>
+<p:notes xmlns:a="http://schemas.openxmlformats.org/drawingml/2006/main" xmlns:r="http://schemas.openxmlformats.org/officeDocument/2006/relationships" xmlns:p="http://schemas.openxmlformats.org/presentationml/2006/main">
+  <p:cSld>
+    <p:spTree>
+      <p:nvGrpSpPr>
+        <p:cNvPr id="1" name=""/>
+        <p:cNvGrpSpPr/>
+        <p:nvPr/>
+      </p:nvGrpSpPr>
+      <p:grpSpPr>
+        <a:xfrm>
+          <a:off x="0" y="0"/>
+          <a:ext cx="0" cy="0"/>
+          <a:chOff x="0" y="0"/>
+          <a:chExt cx="0" cy="0"/>
+        </a:xfrm>
+      </p:grpSpPr>
+      <p:sp>
+        <p:nvSpPr>
+          <p:cNvPr id="2" name="Slide Image Placeholder 1"/>
+          <p:cNvSpPr>
+            <a:spLocks noGrp="1" noRot="1" noChangeAspect="1"/>
+          </p:cNvSpPr>
+          <p:nvPr>
+            <p:ph type="sldImg"/>
+          </p:nvPr>
+        </p:nvSpPr>
+        <p:spPr/>
+      </p:sp>
+      <p:sp>
+        <p:nvSpPr>
+          <p:cNvPr id="3" name="Notes Placeholder 2"/>
+          <p:cNvSpPr>
+            <a:spLocks noGrp="1"/>
+          </p:cNvSpPr>
+          <p:nvPr>
+            <p:ph type="body" idx="1"/>
+          </p:nvPr>
+        </p:nvSpPr>
+        <p:spPr/>
+        <p:txBody>
+          <a:bodyPr/>
+          <a:lstStyle/>
+          <a:p>
+            <a:r>
+              <a:rPr lang="en-US" dirty="0"/>
+              <a:t/>
+            </a:r>
+            <a:endParaRPr lang="en-US" dirty="0"/>
+          </a:p>
+        </p:txBody>
+      </p:sp>
+      <p:sp>
+        <p:nvSpPr>
+          <p:cNvPr id="4" name="Slide Number Placeholder 3"/>
+          <p:cNvSpPr>
+            <a:spLocks noGrp="1"/>
+          </p:cNvSpPr>
+          <p:nvPr>
+            <p:ph type="sldNum" sz="quarter" idx="10"/>
+          </p:nvPr>
+        </p:nvSpPr>
+        <p:spPr/>
+        <p:txBody>
+          <a:bodyPr/>
+          <a:lstStyle/>
+          <a:p>
+            <a:fld id="{F7021451-1387-4CA6-816F-3879F97B5CBC}" type="slidenum">
+              <a:rPr lang="en-US"/>
+              <a:t>14</a:t>
             </a:fld>
             <a:endParaRPr lang="en-US"/>
           </a:p>
@@ -2352,6 +2441,859 @@
     <p:bg>
       <p:bgPr>
         <a:solidFill>
+          <a:srgbClr val="FFFFFF"/>
+        </a:solidFill>
+      </p:bgPr>
+    </p:bg>
+    <p:spTree>
+      <p:nvGrpSpPr>
+        <p:cNvPr id="1" name=""/>
+        <p:cNvGrpSpPr/>
+        <p:nvPr/>
+      </p:nvGrpSpPr>
+      <p:grpSpPr>
+        <a:xfrm>
+          <a:off x="0" y="0"/>
+          <a:ext cx="0" cy="0"/>
+          <a:chOff x="0" y="0"/>
+          <a:chExt cx="0" cy="0"/>
+        </a:xfrm>
+      </p:grpSpPr>
+      <p:sp>
+        <p:nvSpPr>
+          <p:cNvPr id="2" name="Text 0"/>
+          <p:cNvSpPr/>
+          <p:nvPr/>
+        </p:nvSpPr>
+        <p:spPr>
+          <a:xfrm>
+            <a:off x="640080" y="640080"/>
+            <a:ext cx="8229600" cy="274320"/>
+          </a:xfrm>
+          <a:prstGeom prst="rect">
+            <a:avLst/>
+          </a:prstGeom>
+          <a:noFill/>
+          <a:ln/>
+        </p:spPr>
+        <p:txBody>
+          <a:bodyPr wrap="square" lIns="0" tIns="0" rIns="0" bIns="0" rtlCol="0" anchor="ctr"/>
+          <a:lstStyle/>
+          <a:p>
+            <a:pPr indent="0" marL="0">
+              <a:buNone/>
+            </a:pPr>
+            <a:r>
+              <a:rPr lang="en-US" sz="1100" b="1" spc="250" kern="0" dirty="0">
+                <a:solidFill>
+                  <a:srgbClr val="FFA101"/>
+                </a:solidFill>
+                <a:latin typeface="JetBrains Mono" pitchFamily="34" charset="0"/>
+                <a:ea typeface="JetBrains Mono" pitchFamily="34" charset="-122"/>
+                <a:cs typeface="JetBrains Mono" pitchFamily="34" charset="-120"/>
+              </a:rPr>
+              <a:t>CAS D'USAGE</a:t>
+            </a:r>
+            <a:endParaRPr lang="en-US" sz="1100" dirty="0"/>
+          </a:p>
+        </p:txBody>
+      </p:sp>
+      <p:sp>
+        <p:nvSpPr>
+          <p:cNvPr id="3" name="Text 1"/>
+          <p:cNvSpPr/>
+          <p:nvPr/>
+        </p:nvSpPr>
+        <p:spPr>
+          <a:xfrm>
+            <a:off x="640080" y="960120"/>
+            <a:ext cx="10058400" cy="822960"/>
+          </a:xfrm>
+          <a:prstGeom prst="rect">
+            <a:avLst/>
+          </a:prstGeom>
+          <a:noFill/>
+          <a:ln/>
+        </p:spPr>
+        <p:txBody>
+          <a:bodyPr wrap="square" lIns="0" tIns="0" rIns="0" bIns="0" rtlCol="0" anchor="ctr"/>
+          <a:lstStyle/>
+          <a:p>
+            <a:pPr indent="0" marL="0">
+              <a:buNone/>
+            </a:pPr>
+            <a:r>
+              <a:rPr lang="en-US" sz="3000" b="1" dirty="0">
+                <a:solidFill>
+                  <a:srgbClr val="0A0A0A"/>
+                </a:solidFill>
+                <a:latin typeface="Space Grotesk" pitchFamily="34" charset="0"/>
+                <a:ea typeface="Space Grotesk" pitchFamily="34" charset="-122"/>
+                <a:cs typeface="Space Grotesk" pitchFamily="34" charset="-120"/>
+              </a:rPr>
+              <a:t>Ce que Lyriks débloque</a:t>
+            </a:r>
+            <a:endParaRPr lang="en-US" sz="3000" dirty="0"/>
+          </a:p>
+        </p:txBody>
+      </p:sp>
+      <p:sp>
+        <p:nvSpPr>
+          <p:cNvPr id="4" name="Shape 2"/>
+          <p:cNvSpPr/>
+          <p:nvPr/>
+        </p:nvSpPr>
+        <p:spPr>
+          <a:xfrm>
+            <a:off x="640080" y="2011680"/>
+            <a:ext cx="5276088" cy="1691640"/>
+          </a:xfrm>
+          <a:prstGeom prst="roundRect">
+            <a:avLst>
+              <a:gd name="adj" fmla="val 5405"/>
+            </a:avLst>
+          </a:prstGeom>
+          <a:solidFill>
+            <a:srgbClr val="FFFFFF"/>
+          </a:solidFill>
+          <a:ln w="12700">
+            <a:solidFill>
+              <a:srgbClr val="E8E8EE"/>
+            </a:solidFill>
+            <a:prstDash val="solid"/>
+          </a:ln>
+          <a:effectLst>
+            <a:outerShdw sx="100000" sy="100000" kx="0" ky="0" algn="bl" rotWithShape="0" blurRad="114300" dist="38100" dir="5400000">
+              <a:srgbClr val="10122A">
+                <a:alpha val="12000"/>
+              </a:srgbClr>
+            </a:outerShdw>
+          </a:effectLst>
+        </p:spPr>
+      </p:sp>
+      <p:sp>
+        <p:nvSpPr>
+          <p:cNvPr id="5" name="Shape 3"/>
+          <p:cNvSpPr/>
+          <p:nvPr/>
+        </p:nvSpPr>
+        <p:spPr>
+          <a:xfrm>
+            <a:off x="960120" y="2331720"/>
+            <a:ext cx="457200" cy="457200"/>
+          </a:xfrm>
+          <a:prstGeom prst="roundRect">
+            <a:avLst>
+              <a:gd name="adj" fmla="val 16000"/>
+            </a:avLst>
+          </a:prstGeom>
+          <a:solidFill>
+            <a:srgbClr val="0066FF"/>
+          </a:solidFill>
+          <a:ln/>
+        </p:spPr>
+      </p:sp>
+      <p:sp>
+        <p:nvSpPr>
+          <p:cNvPr id="6" name="Text 4"/>
+          <p:cNvSpPr/>
+          <p:nvPr/>
+        </p:nvSpPr>
+        <p:spPr>
+          <a:xfrm>
+            <a:off x="960120" y="2331720"/>
+            <a:ext cx="457200" cy="457200"/>
+          </a:xfrm>
+          <a:prstGeom prst="rect">
+            <a:avLst/>
+          </a:prstGeom>
+          <a:noFill/>
+          <a:ln/>
+        </p:spPr>
+        <p:txBody>
+          <a:bodyPr wrap="square" lIns="0" tIns="0" rIns="0" bIns="0" rtlCol="0" anchor="ctr"/>
+          <a:lstStyle/>
+          <a:p>
+            <a:pPr algn="ctr" indent="0" marL="0">
+              <a:buNone/>
+            </a:pPr>
+            <a:r>
+              <a:rPr lang="en-US" sz="1300" b="1" dirty="0">
+                <a:solidFill>
+                  <a:srgbClr val="FFFFFF"/>
+                </a:solidFill>
+                <a:latin typeface="JetBrains Mono" pitchFamily="34" charset="0"/>
+                <a:ea typeface="JetBrains Mono" pitchFamily="34" charset="-122"/>
+                <a:cs typeface="JetBrains Mono" pitchFamily="34" charset="-120"/>
+              </a:rPr>
+              <a:t>1</a:t>
+            </a:r>
+            <a:endParaRPr lang="en-US" sz="1300" dirty="0"/>
+          </a:p>
+        </p:txBody>
+      </p:sp>
+      <p:sp>
+        <p:nvSpPr>
+          <p:cNvPr id="7" name="Text 5"/>
+          <p:cNvSpPr/>
+          <p:nvPr/>
+        </p:nvSpPr>
+        <p:spPr>
+          <a:xfrm>
+            <a:off x="1600200" y="2304288"/>
+            <a:ext cx="4023360" cy="548640"/>
+          </a:xfrm>
+          <a:prstGeom prst="rect">
+            <a:avLst/>
+          </a:prstGeom>
+          <a:noFill/>
+          <a:ln/>
+        </p:spPr>
+        <p:txBody>
+          <a:bodyPr wrap="square" lIns="0" tIns="0" rIns="0" bIns="0" rtlCol="0" anchor="ctr"/>
+          <a:lstStyle/>
+          <a:p>
+            <a:pPr indent="0" marL="0">
+              <a:buNone/>
+            </a:pPr>
+            <a:r>
+              <a:rPr lang="en-US" sz="1700" b="1" dirty="0">
+                <a:solidFill>
+                  <a:srgbClr val="0A0A0A"/>
+                </a:solidFill>
+                <a:latin typeface="Space Grotesk" pitchFamily="34" charset="0"/>
+                <a:ea typeface="Space Grotesk" pitchFamily="34" charset="-122"/>
+                <a:cs typeface="Space Grotesk" pitchFamily="34" charset="-120"/>
+              </a:rPr>
+              <a:t>Gagner du temps</a:t>
+            </a:r>
+            <a:endParaRPr lang="en-US" sz="1700" dirty="0"/>
+          </a:p>
+        </p:txBody>
+      </p:sp>
+      <p:sp>
+        <p:nvSpPr>
+          <p:cNvPr id="8" name="Text 6"/>
+          <p:cNvSpPr/>
+          <p:nvPr/>
+        </p:nvSpPr>
+        <p:spPr>
+          <a:xfrm>
+            <a:off x="960120" y="2926080"/>
+            <a:ext cx="4663440" cy="685800"/>
+          </a:xfrm>
+          <a:prstGeom prst="rect">
+            <a:avLst/>
+          </a:prstGeom>
+          <a:noFill/>
+          <a:ln/>
+        </p:spPr>
+        <p:txBody>
+          <a:bodyPr wrap="square" lIns="0" tIns="0" rIns="0" bIns="0" rtlCol="0" anchor="ctr"/>
+          <a:lstStyle/>
+          <a:p>
+            <a:pPr indent="0" marL="0">
+              <a:lnSpc>
+                <a:spcPct val="115000"/>
+              </a:lnSpc>
+              <a:buNone/>
+            </a:pPr>
+            <a:r>
+              <a:rPr lang="en-US" sz="1300" dirty="0">
+                <a:solidFill>
+                  <a:srgbClr val="535462"/>
+                </a:solidFill>
+                <a:latin typeface="Montserrat" pitchFamily="34" charset="0"/>
+                <a:ea typeface="Montserrat" pitchFamily="34" charset="-122"/>
+                <a:cs typeface="Montserrat" pitchFamily="34" charset="-120"/>
+              </a:rPr>
+              <a:t>Des specs claires et réutilisables : moins de rework, moins d'allers-retours, des délais tenus.</a:t>
+            </a:r>
+            <a:endParaRPr lang="en-US" sz="1300" dirty="0"/>
+          </a:p>
+        </p:txBody>
+      </p:sp>
+      <p:sp>
+        <p:nvSpPr>
+          <p:cNvPr id="9" name="Shape 7"/>
+          <p:cNvSpPr/>
+          <p:nvPr/>
+        </p:nvSpPr>
+        <p:spPr>
+          <a:xfrm>
+            <a:off x="6272784" y="2011680"/>
+            <a:ext cx="5276088" cy="1691640"/>
+          </a:xfrm>
+          <a:prstGeom prst="roundRect">
+            <a:avLst>
+              <a:gd name="adj" fmla="val 5405"/>
+            </a:avLst>
+          </a:prstGeom>
+          <a:solidFill>
+            <a:srgbClr val="FFFFFF"/>
+          </a:solidFill>
+          <a:ln w="12700">
+            <a:solidFill>
+              <a:srgbClr val="E8E8EE"/>
+            </a:solidFill>
+            <a:prstDash val="solid"/>
+          </a:ln>
+          <a:effectLst>
+            <a:outerShdw sx="100000" sy="100000" kx="0" ky="0" algn="bl" rotWithShape="0" blurRad="114300" dist="38100" dir="5400000">
+              <a:srgbClr val="10122A">
+                <a:alpha val="12000"/>
+              </a:srgbClr>
+            </a:outerShdw>
+          </a:effectLst>
+        </p:spPr>
+      </p:sp>
+      <p:sp>
+        <p:nvSpPr>
+          <p:cNvPr id="10" name="Shape 8"/>
+          <p:cNvSpPr/>
+          <p:nvPr/>
+        </p:nvSpPr>
+        <p:spPr>
+          <a:xfrm>
+            <a:off x="6592824" y="2331720"/>
+            <a:ext cx="457200" cy="457200"/>
+          </a:xfrm>
+          <a:prstGeom prst="roundRect">
+            <a:avLst>
+              <a:gd name="adj" fmla="val 16000"/>
+            </a:avLst>
+          </a:prstGeom>
+          <a:solidFill>
+            <a:srgbClr val="FFA101"/>
+          </a:solidFill>
+          <a:ln/>
+        </p:spPr>
+      </p:sp>
+      <p:sp>
+        <p:nvSpPr>
+          <p:cNvPr id="11" name="Text 9"/>
+          <p:cNvSpPr/>
+          <p:nvPr/>
+        </p:nvSpPr>
+        <p:spPr>
+          <a:xfrm>
+            <a:off x="6592824" y="2331720"/>
+            <a:ext cx="457200" cy="457200"/>
+          </a:xfrm>
+          <a:prstGeom prst="rect">
+            <a:avLst/>
+          </a:prstGeom>
+          <a:noFill/>
+          <a:ln/>
+        </p:spPr>
+        <p:txBody>
+          <a:bodyPr wrap="square" lIns="0" tIns="0" rIns="0" bIns="0" rtlCol="0" anchor="ctr"/>
+          <a:lstStyle/>
+          <a:p>
+            <a:pPr algn="ctr" indent="0" marL="0">
+              <a:buNone/>
+            </a:pPr>
+            <a:r>
+              <a:rPr lang="en-US" sz="1300" b="1" dirty="0">
+                <a:solidFill>
+                  <a:srgbClr val="FFFFFF"/>
+                </a:solidFill>
+                <a:latin typeface="JetBrains Mono" pitchFamily="34" charset="0"/>
+                <a:ea typeface="JetBrains Mono" pitchFamily="34" charset="-122"/>
+                <a:cs typeface="JetBrains Mono" pitchFamily="34" charset="-120"/>
+              </a:rPr>
+              <a:t>2</a:t>
+            </a:r>
+            <a:endParaRPr lang="en-US" sz="1300" dirty="0"/>
+          </a:p>
+        </p:txBody>
+      </p:sp>
+      <p:sp>
+        <p:nvSpPr>
+          <p:cNvPr id="12" name="Text 10"/>
+          <p:cNvSpPr/>
+          <p:nvPr/>
+        </p:nvSpPr>
+        <p:spPr>
+          <a:xfrm>
+            <a:off x="7232904" y="2304288"/>
+            <a:ext cx="4023360" cy="548640"/>
+          </a:xfrm>
+          <a:prstGeom prst="rect">
+            <a:avLst/>
+          </a:prstGeom>
+          <a:noFill/>
+          <a:ln/>
+        </p:spPr>
+        <p:txBody>
+          <a:bodyPr wrap="square" lIns="0" tIns="0" rIns="0" bIns="0" rtlCol="0" anchor="ctr"/>
+          <a:lstStyle/>
+          <a:p>
+            <a:pPr indent="0" marL="0">
+              <a:buNone/>
+            </a:pPr>
+            <a:r>
+              <a:rPr lang="en-US" sz="1700" b="1" dirty="0">
+                <a:solidFill>
+                  <a:srgbClr val="0A0A0A"/>
+                </a:solidFill>
+                <a:latin typeface="Space Grotesk" pitchFamily="34" charset="0"/>
+                <a:ea typeface="Space Grotesk" pitchFamily="34" charset="-122"/>
+                <a:cs typeface="Space Grotesk" pitchFamily="34" charset="-120"/>
+              </a:rPr>
+              <a:t>Maîtriser les coûts de l'IA</a:t>
+            </a:r>
+            <a:endParaRPr lang="en-US" sz="1700" dirty="0"/>
+          </a:p>
+        </p:txBody>
+      </p:sp>
+      <p:sp>
+        <p:nvSpPr>
+          <p:cNvPr id="13" name="Text 11"/>
+          <p:cNvSpPr/>
+          <p:nvPr/>
+        </p:nvSpPr>
+        <p:spPr>
+          <a:xfrm>
+            <a:off x="6592824" y="2926080"/>
+            <a:ext cx="4663440" cy="685800"/>
+          </a:xfrm>
+          <a:prstGeom prst="rect">
+            <a:avLst/>
+          </a:prstGeom>
+          <a:noFill/>
+          <a:ln/>
+        </p:spPr>
+        <p:txBody>
+          <a:bodyPr wrap="square" lIns="0" tIns="0" rIns="0" bIns="0" rtlCol="0" anchor="ctr"/>
+          <a:lstStyle/>
+          <a:p>
+            <a:pPr indent="0" marL="0">
+              <a:lnSpc>
+                <a:spcPct val="115000"/>
+              </a:lnSpc>
+              <a:buNone/>
+            </a:pPr>
+            <a:r>
+              <a:rPr lang="en-US" sz="1300" dirty="0">
+                <a:solidFill>
+                  <a:srgbClr val="535462"/>
+                </a:solidFill>
+                <a:latin typeface="Montserrat" pitchFamily="34" charset="0"/>
+                <a:ea typeface="Montserrat" pitchFamily="34" charset="-122"/>
+                <a:cs typeface="Montserrat" pitchFamily="34" charset="-120"/>
+              </a:rPr>
+              <a:t>Une visibilité sur la consommation et le coût réel de l'usage de l'IA.</a:t>
+            </a:r>
+            <a:endParaRPr lang="en-US" sz="1300" dirty="0"/>
+          </a:p>
+        </p:txBody>
+      </p:sp>
+      <p:sp>
+        <p:nvSpPr>
+          <p:cNvPr id="14" name="Shape 12"/>
+          <p:cNvSpPr/>
+          <p:nvPr/>
+        </p:nvSpPr>
+        <p:spPr>
+          <a:xfrm>
+            <a:off x="640080" y="3886200"/>
+            <a:ext cx="5276088" cy="1691640"/>
+          </a:xfrm>
+          <a:prstGeom prst="roundRect">
+            <a:avLst>
+              <a:gd name="adj" fmla="val 5405"/>
+            </a:avLst>
+          </a:prstGeom>
+          <a:solidFill>
+            <a:srgbClr val="FFFFFF"/>
+          </a:solidFill>
+          <a:ln w="12700">
+            <a:solidFill>
+              <a:srgbClr val="E8E8EE"/>
+            </a:solidFill>
+            <a:prstDash val="solid"/>
+          </a:ln>
+          <a:effectLst>
+            <a:outerShdw sx="100000" sy="100000" kx="0" ky="0" algn="bl" rotWithShape="0" blurRad="114300" dist="38100" dir="5400000">
+              <a:srgbClr val="10122A">
+                <a:alpha val="12000"/>
+              </a:srgbClr>
+            </a:outerShdw>
+          </a:effectLst>
+        </p:spPr>
+      </p:sp>
+      <p:sp>
+        <p:nvSpPr>
+          <p:cNvPr id="15" name="Shape 13"/>
+          <p:cNvSpPr/>
+          <p:nvPr/>
+        </p:nvSpPr>
+        <p:spPr>
+          <a:xfrm>
+            <a:off x="960120" y="4206240"/>
+            <a:ext cx="457200" cy="457200"/>
+          </a:xfrm>
+          <a:prstGeom prst="roundRect">
+            <a:avLst>
+              <a:gd name="adj" fmla="val 16000"/>
+            </a:avLst>
+          </a:prstGeom>
+          <a:solidFill>
+            <a:srgbClr val="8047F4"/>
+          </a:solidFill>
+          <a:ln/>
+        </p:spPr>
+      </p:sp>
+      <p:sp>
+        <p:nvSpPr>
+          <p:cNvPr id="16" name="Text 14"/>
+          <p:cNvSpPr/>
+          <p:nvPr/>
+        </p:nvSpPr>
+        <p:spPr>
+          <a:xfrm>
+            <a:off x="960120" y="4206240"/>
+            <a:ext cx="457200" cy="457200"/>
+          </a:xfrm>
+          <a:prstGeom prst="rect">
+            <a:avLst/>
+          </a:prstGeom>
+          <a:noFill/>
+          <a:ln/>
+        </p:spPr>
+        <p:txBody>
+          <a:bodyPr wrap="square" lIns="0" tIns="0" rIns="0" bIns="0" rtlCol="0" anchor="ctr"/>
+          <a:lstStyle/>
+          <a:p>
+            <a:pPr algn="ctr" indent="0" marL="0">
+              <a:buNone/>
+            </a:pPr>
+            <a:r>
+              <a:rPr lang="en-US" sz="1300" b="1" dirty="0">
+                <a:solidFill>
+                  <a:srgbClr val="FFFFFF"/>
+                </a:solidFill>
+                <a:latin typeface="JetBrains Mono" pitchFamily="34" charset="0"/>
+                <a:ea typeface="JetBrains Mono" pitchFamily="34" charset="-122"/>
+                <a:cs typeface="JetBrains Mono" pitchFamily="34" charset="-120"/>
+              </a:rPr>
+              <a:t>3</a:t>
+            </a:r>
+            <a:endParaRPr lang="en-US" sz="1300" dirty="0"/>
+          </a:p>
+        </p:txBody>
+      </p:sp>
+      <p:sp>
+        <p:nvSpPr>
+          <p:cNvPr id="17" name="Text 15"/>
+          <p:cNvSpPr/>
+          <p:nvPr/>
+        </p:nvSpPr>
+        <p:spPr>
+          <a:xfrm>
+            <a:off x="1600200" y="4178808"/>
+            <a:ext cx="4023360" cy="548640"/>
+          </a:xfrm>
+          <a:prstGeom prst="rect">
+            <a:avLst/>
+          </a:prstGeom>
+          <a:noFill/>
+          <a:ln/>
+        </p:spPr>
+        <p:txBody>
+          <a:bodyPr wrap="square" lIns="0" tIns="0" rIns="0" bIns="0" rtlCol="0" anchor="ctr"/>
+          <a:lstStyle/>
+          <a:p>
+            <a:pPr indent="0" marL="0">
+              <a:buNone/>
+            </a:pPr>
+            <a:r>
+              <a:rPr lang="en-US" sz="1700" b="1" dirty="0">
+                <a:solidFill>
+                  <a:srgbClr val="0A0A0A"/>
+                </a:solidFill>
+                <a:latin typeface="Space Grotesk" pitchFamily="34" charset="0"/>
+                <a:ea typeface="Space Grotesk" pitchFamily="34" charset="-122"/>
+                <a:cs typeface="Space Grotesk" pitchFamily="34" charset="-120"/>
+              </a:rPr>
+              <a:t>Reprendre le legacy en main</a:t>
+            </a:r>
+            <a:endParaRPr lang="en-US" sz="1700" dirty="0"/>
+          </a:p>
+        </p:txBody>
+      </p:sp>
+      <p:sp>
+        <p:nvSpPr>
+          <p:cNvPr id="18" name="Text 16"/>
+          <p:cNvSpPr/>
+          <p:nvPr/>
+        </p:nvSpPr>
+        <p:spPr>
+          <a:xfrm>
+            <a:off x="960120" y="4800600"/>
+            <a:ext cx="4663440" cy="685800"/>
+          </a:xfrm>
+          <a:prstGeom prst="rect">
+            <a:avLst/>
+          </a:prstGeom>
+          <a:noFill/>
+          <a:ln/>
+        </p:spPr>
+        <p:txBody>
+          <a:bodyPr wrap="square" lIns="0" tIns="0" rIns="0" bIns="0" rtlCol="0" anchor="ctr"/>
+          <a:lstStyle/>
+          <a:p>
+            <a:pPr indent="0" marL="0">
+              <a:lnSpc>
+                <a:spcPct val="115000"/>
+              </a:lnSpc>
+              <a:buNone/>
+            </a:pPr>
+            <a:r>
+              <a:rPr lang="en-US" sz="1300" dirty="0">
+                <a:solidFill>
+                  <a:srgbClr val="535462"/>
+                </a:solidFill>
+                <a:latin typeface="Montserrat" pitchFamily="34" charset="0"/>
+                <a:ea typeface="Montserrat" pitchFamily="34" charset="-122"/>
+                <a:cs typeface="Montserrat" pitchFamily="34" charset="-120"/>
+              </a:rPr>
+              <a:t>Re-cartographier l'existant et retrouver de la maîtrise sur le legacy.</a:t>
+            </a:r>
+            <a:endParaRPr lang="en-US" sz="1300" dirty="0"/>
+          </a:p>
+        </p:txBody>
+      </p:sp>
+      <p:sp>
+        <p:nvSpPr>
+          <p:cNvPr id="19" name="Shape 17"/>
+          <p:cNvSpPr/>
+          <p:nvPr/>
+        </p:nvSpPr>
+        <p:spPr>
+          <a:xfrm>
+            <a:off x="6272784" y="3886200"/>
+            <a:ext cx="5276088" cy="1691640"/>
+          </a:xfrm>
+          <a:prstGeom prst="roundRect">
+            <a:avLst>
+              <a:gd name="adj" fmla="val 5405"/>
+            </a:avLst>
+          </a:prstGeom>
+          <a:solidFill>
+            <a:srgbClr val="FFFFFF"/>
+          </a:solidFill>
+          <a:ln w="12700">
+            <a:solidFill>
+              <a:srgbClr val="E8E8EE"/>
+            </a:solidFill>
+            <a:prstDash val="solid"/>
+          </a:ln>
+          <a:effectLst>
+            <a:outerShdw sx="100000" sy="100000" kx="0" ky="0" algn="bl" rotWithShape="0" blurRad="114300" dist="38100" dir="5400000">
+              <a:srgbClr val="10122A">
+                <a:alpha val="12000"/>
+              </a:srgbClr>
+            </a:outerShdw>
+          </a:effectLst>
+        </p:spPr>
+      </p:sp>
+      <p:sp>
+        <p:nvSpPr>
+          <p:cNvPr id="20" name="Shape 18"/>
+          <p:cNvSpPr/>
+          <p:nvPr/>
+        </p:nvSpPr>
+        <p:spPr>
+          <a:xfrm>
+            <a:off x="6592824" y="4206240"/>
+            <a:ext cx="457200" cy="457200"/>
+          </a:xfrm>
+          <a:prstGeom prst="roundRect">
+            <a:avLst>
+              <a:gd name="adj" fmla="val 16000"/>
+            </a:avLst>
+          </a:prstGeom>
+          <a:solidFill>
+            <a:srgbClr val="1FA98A"/>
+          </a:solidFill>
+          <a:ln/>
+        </p:spPr>
+      </p:sp>
+      <p:sp>
+        <p:nvSpPr>
+          <p:cNvPr id="21" name="Text 19"/>
+          <p:cNvSpPr/>
+          <p:nvPr/>
+        </p:nvSpPr>
+        <p:spPr>
+          <a:xfrm>
+            <a:off x="6592824" y="4206240"/>
+            <a:ext cx="457200" cy="457200"/>
+          </a:xfrm>
+          <a:prstGeom prst="rect">
+            <a:avLst/>
+          </a:prstGeom>
+          <a:noFill/>
+          <a:ln/>
+        </p:spPr>
+        <p:txBody>
+          <a:bodyPr wrap="square" lIns="0" tIns="0" rIns="0" bIns="0" rtlCol="0" anchor="ctr"/>
+          <a:lstStyle/>
+          <a:p>
+            <a:pPr algn="ctr" indent="0" marL="0">
+              <a:buNone/>
+            </a:pPr>
+            <a:r>
+              <a:rPr lang="en-US" sz="1300" b="1" dirty="0">
+                <a:solidFill>
+                  <a:srgbClr val="FFFFFF"/>
+                </a:solidFill>
+                <a:latin typeface="JetBrains Mono" pitchFamily="34" charset="0"/>
+                <a:ea typeface="JetBrains Mono" pitchFamily="34" charset="-122"/>
+                <a:cs typeface="JetBrains Mono" pitchFamily="34" charset="-120"/>
+              </a:rPr>
+              <a:t>4</a:t>
+            </a:r>
+            <a:endParaRPr lang="en-US" sz="1300" dirty="0"/>
+          </a:p>
+        </p:txBody>
+      </p:sp>
+      <p:sp>
+        <p:nvSpPr>
+          <p:cNvPr id="22" name="Text 20"/>
+          <p:cNvSpPr/>
+          <p:nvPr/>
+        </p:nvSpPr>
+        <p:spPr>
+          <a:xfrm>
+            <a:off x="7232904" y="4178808"/>
+            <a:ext cx="4023360" cy="548640"/>
+          </a:xfrm>
+          <a:prstGeom prst="rect">
+            <a:avLst/>
+          </a:prstGeom>
+          <a:noFill/>
+          <a:ln/>
+        </p:spPr>
+        <p:txBody>
+          <a:bodyPr wrap="square" lIns="0" tIns="0" rIns="0" bIns="0" rtlCol="0" anchor="ctr"/>
+          <a:lstStyle/>
+          <a:p>
+            <a:pPr indent="0" marL="0">
+              <a:buNone/>
+            </a:pPr>
+            <a:r>
+              <a:rPr lang="en-US" sz="1700" b="1" dirty="0">
+                <a:solidFill>
+                  <a:srgbClr val="0A0A0A"/>
+                </a:solidFill>
+                <a:latin typeface="Space Grotesk" pitchFamily="34" charset="0"/>
+                <a:ea typeface="Space Grotesk" pitchFamily="34" charset="-122"/>
+                <a:cs typeface="Space Grotesk" pitchFamily="34" charset="-120"/>
+              </a:rPr>
+              <a:t>Superviser les ways of working</a:t>
+            </a:r>
+            <a:endParaRPr lang="en-US" sz="1700" dirty="0"/>
+          </a:p>
+        </p:txBody>
+      </p:sp>
+      <p:sp>
+        <p:nvSpPr>
+          <p:cNvPr id="23" name="Text 21"/>
+          <p:cNvSpPr/>
+          <p:nvPr/>
+        </p:nvSpPr>
+        <p:spPr>
+          <a:xfrm>
+            <a:off x="6592824" y="4800600"/>
+            <a:ext cx="4663440" cy="685800"/>
+          </a:xfrm>
+          <a:prstGeom prst="rect">
+            <a:avLst/>
+          </a:prstGeom>
+          <a:noFill/>
+          <a:ln/>
+        </p:spPr>
+        <p:txBody>
+          <a:bodyPr wrap="square" lIns="0" tIns="0" rIns="0" bIns="0" rtlCol="0" anchor="ctr"/>
+          <a:lstStyle/>
+          <a:p>
+            <a:pPr indent="0" marL="0">
+              <a:lnSpc>
+                <a:spcPct val="115000"/>
+              </a:lnSpc>
+              <a:buNone/>
+            </a:pPr>
+            <a:r>
+              <a:rPr lang="en-US" sz="1300" dirty="0">
+                <a:solidFill>
+                  <a:srgbClr val="535462"/>
+                </a:solidFill>
+                <a:latin typeface="Montserrat" pitchFamily="34" charset="0"/>
+                <a:ea typeface="Montserrat" pitchFamily="34" charset="-122"/>
+                <a:cs typeface="Montserrat" pitchFamily="34" charset="-120"/>
+              </a:rPr>
+              <a:t>Rendre les méthodes de travail visibles, encadrées et mesurables.</a:t>
+            </a:r>
+            <a:endParaRPr lang="en-US" sz="1300" dirty="0"/>
+          </a:p>
+        </p:txBody>
+      </p:sp>
+      <p:sp>
+        <p:nvSpPr>
+          <p:cNvPr id="24" name="Text 22"/>
+          <p:cNvSpPr/>
+          <p:nvPr/>
+        </p:nvSpPr>
+        <p:spPr>
+          <a:xfrm>
+            <a:off x="11185855" y="6400800"/>
+            <a:ext cx="548640" cy="274320"/>
+          </a:xfrm>
+          <a:prstGeom prst="rect">
+            <a:avLst/>
+          </a:prstGeom>
+          <a:noFill/>
+          <a:ln/>
+        </p:spPr>
+        <p:txBody>
+          <a:bodyPr wrap="square" lIns="0" tIns="0" rIns="0" bIns="0" rtlCol="0" anchor="ctr"/>
+          <a:lstStyle/>
+          <a:p>
+            <a:pPr algn="r" indent="0" marL="0">
+              <a:buNone/>
+            </a:pPr>
+            <a:r>
+              <a:rPr lang="en-US" sz="1000" dirty="0">
+                <a:solidFill>
+                  <a:srgbClr val="9296A6"/>
+                </a:solidFill>
+                <a:latin typeface="JetBrains Mono" pitchFamily="34" charset="0"/>
+                <a:ea typeface="JetBrains Mono" pitchFamily="34" charset="-122"/>
+                <a:cs typeface="JetBrains Mono" pitchFamily="34" charset="-120"/>
+              </a:rPr>
+              <a:t>10</a:t>
+            </a:r>
+            <a:endParaRPr lang="en-US" sz="1000" dirty="0"/>
+          </a:p>
+        </p:txBody>
+      </p:sp>
+    </p:spTree>
+  </p:cSld>
+  <p:clrMapOvr>
+    <a:masterClrMapping/>
+  </p:clrMapOvr>
+</p:sld>
+</file>
+
+<file path=ppt/slides/slide11.xml><?xml version="1.0" encoding="utf-8"?>
+<p:sld xmlns:a="http://schemas.openxmlformats.org/drawingml/2006/main" xmlns:r="http://schemas.openxmlformats.org/officeDocument/2006/relationships" xmlns:p="http://schemas.openxmlformats.org/presentationml/2006/main">
+  <p:cSld name="Slide 11">
+    <p:bg>
+      <p:bgPr>
+        <a:solidFill>
           <a:srgbClr val="FAFAFC"/>
         </a:solidFill>
       </p:bgPr>
@@ -2516,953 +3458,6 @@
       <p:sp>
         <p:nvSpPr>
           <p:cNvPr id="5" name="Text 3"/>
-          <p:cNvSpPr/>
-          <p:nvPr/>
-        </p:nvSpPr>
-        <p:spPr>
-          <a:xfrm>
-            <a:off x="11185855" y="6400800"/>
-            <a:ext cx="548640" cy="274320"/>
-          </a:xfrm>
-          <a:prstGeom prst="rect">
-            <a:avLst/>
-          </a:prstGeom>
-          <a:noFill/>
-          <a:ln/>
-        </p:spPr>
-        <p:txBody>
-          <a:bodyPr wrap="square" lIns="0" tIns="0" rIns="0" bIns="0" rtlCol="0" anchor="ctr"/>
-          <a:lstStyle/>
-          <a:p>
-            <a:pPr algn="r" indent="0" marL="0">
-              <a:buNone/>
-            </a:pPr>
-            <a:r>
-              <a:rPr lang="en-US" sz="1000" dirty="0">
-                <a:solidFill>
-                  <a:srgbClr val="9296A6"/>
-                </a:solidFill>
-                <a:latin typeface="JetBrains Mono" pitchFamily="34" charset="0"/>
-                <a:ea typeface="JetBrains Mono" pitchFamily="34" charset="-122"/>
-                <a:cs typeface="JetBrains Mono" pitchFamily="34" charset="-120"/>
-              </a:rPr>
-              <a:t>10</a:t>
-            </a:r>
-            <a:endParaRPr lang="en-US" sz="1000" dirty="0"/>
-          </a:p>
-        </p:txBody>
-      </p:sp>
-    </p:spTree>
-  </p:cSld>
-  <p:clrMapOvr>
-    <a:masterClrMapping/>
-  </p:clrMapOvr>
-</p:sld>
-</file>
-
-<file path=ppt/slides/slide11.xml><?xml version="1.0" encoding="utf-8"?>
-<p:sld xmlns:a="http://schemas.openxmlformats.org/drawingml/2006/main" xmlns:r="http://schemas.openxmlformats.org/officeDocument/2006/relationships" xmlns:p="http://schemas.openxmlformats.org/presentationml/2006/main">
-  <p:cSld name="Slide 11">
-    <p:bg>
-      <p:bgPr>
-        <a:solidFill>
-          <a:srgbClr val="FFFFFF"/>
-        </a:solidFill>
-      </p:bgPr>
-    </p:bg>
-    <p:spTree>
-      <p:nvGrpSpPr>
-        <p:cNvPr id="1" name=""/>
-        <p:cNvGrpSpPr/>
-        <p:nvPr/>
-      </p:nvGrpSpPr>
-      <p:grpSpPr>
-        <a:xfrm>
-          <a:off x="0" y="0"/>
-          <a:ext cx="0" cy="0"/>
-          <a:chOff x="0" y="0"/>
-          <a:chExt cx="0" cy="0"/>
-        </a:xfrm>
-      </p:grpSpPr>
-      <p:sp>
-        <p:nvSpPr>
-          <p:cNvPr id="2" name="Text 0"/>
-          <p:cNvSpPr/>
-          <p:nvPr/>
-        </p:nvSpPr>
-        <p:spPr>
-          <a:xfrm>
-            <a:off x="640080" y="640080"/>
-            <a:ext cx="8229600" cy="274320"/>
-          </a:xfrm>
-          <a:prstGeom prst="rect">
-            <a:avLst/>
-          </a:prstGeom>
-          <a:noFill/>
-          <a:ln/>
-        </p:spPr>
-        <p:txBody>
-          <a:bodyPr wrap="square" lIns="0" tIns="0" rIns="0" bIns="0" rtlCol="0" anchor="ctr"/>
-          <a:lstStyle/>
-          <a:p>
-            <a:pPr indent="0" marL="0">
-              <a:buNone/>
-            </a:pPr>
-            <a:r>
-              <a:rPr lang="en-US" sz="1100" b="1" spc="250" kern="0" dirty="0">
-                <a:solidFill>
-                  <a:srgbClr val="FA5FB2"/>
-                </a:solidFill>
-                <a:latin typeface="JetBrains Mono" pitchFamily="34" charset="0"/>
-                <a:ea typeface="JetBrains Mono" pitchFamily="34" charset="-122"/>
-                <a:cs typeface="JetBrains Mono" pitchFamily="34" charset="-120"/>
-              </a:rPr>
-              <a:t>OFFRES &amp; DÉPLOIEMENT</a:t>
-            </a:r>
-            <a:endParaRPr lang="en-US" sz="1100" dirty="0"/>
-          </a:p>
-        </p:txBody>
-      </p:sp>
-      <p:sp>
-        <p:nvSpPr>
-          <p:cNvPr id="3" name="Text 1"/>
-          <p:cNvSpPr/>
-          <p:nvPr/>
-        </p:nvSpPr>
-        <p:spPr>
-          <a:xfrm>
-            <a:off x="640080" y="960120"/>
-            <a:ext cx="10058400" cy="822960"/>
-          </a:xfrm>
-          <a:prstGeom prst="rect">
-            <a:avLst/>
-          </a:prstGeom>
-          <a:noFill/>
-          <a:ln/>
-        </p:spPr>
-        <p:txBody>
-          <a:bodyPr wrap="square" lIns="0" tIns="0" rIns="0" bIns="0" rtlCol="0" anchor="ctr"/>
-          <a:lstStyle/>
-          <a:p>
-            <a:pPr indent="0" marL="0">
-              <a:buNone/>
-            </a:pPr>
-            <a:r>
-              <a:rPr lang="en-US" sz="3000" b="1" dirty="0">
-                <a:solidFill>
-                  <a:srgbClr val="0A0A0A"/>
-                </a:solidFill>
-                <a:latin typeface="Space Grotesk" pitchFamily="34" charset="0"/>
-                <a:ea typeface="Space Grotesk" pitchFamily="34" charset="-122"/>
-                <a:cs typeface="Space Grotesk" pitchFamily="34" charset="-120"/>
-              </a:rPr>
-              <a:t>Choisissez votre mode de déploiement</a:t>
-            </a:r>
-            <a:endParaRPr lang="en-US" sz="3000" dirty="0"/>
-          </a:p>
-        </p:txBody>
-      </p:sp>
-      <p:sp>
-        <p:nvSpPr>
-          <p:cNvPr id="4" name="Shape 2"/>
-          <p:cNvSpPr/>
-          <p:nvPr/>
-        </p:nvSpPr>
-        <p:spPr>
-          <a:xfrm>
-            <a:off x="640080" y="1965960"/>
-            <a:ext cx="3474720" cy="4160520"/>
-          </a:xfrm>
-          <a:prstGeom prst="roundRect">
-            <a:avLst>
-              <a:gd name="adj" fmla="val 2632"/>
-            </a:avLst>
-          </a:prstGeom>
-          <a:solidFill>
-            <a:srgbClr val="FFFFFF"/>
-          </a:solidFill>
-          <a:ln w="12700">
-            <a:solidFill>
-              <a:srgbClr val="E8E8EE"/>
-            </a:solidFill>
-            <a:prstDash val="solid"/>
-          </a:ln>
-          <a:effectLst>
-            <a:outerShdw sx="100000" sy="100000" kx="0" ky="0" algn="bl" rotWithShape="0" blurRad="114300" dist="38100" dir="5400000">
-              <a:srgbClr val="10122A">
-                <a:alpha val="12000"/>
-              </a:srgbClr>
-            </a:outerShdw>
-          </a:effectLst>
-        </p:spPr>
-      </p:sp>
-      <p:sp>
-        <p:nvSpPr>
-          <p:cNvPr id="5" name="Text 3"/>
-          <p:cNvSpPr/>
-          <p:nvPr/>
-        </p:nvSpPr>
-        <p:spPr>
-          <a:xfrm>
-            <a:off x="932688" y="2240280"/>
-            <a:ext cx="2926080" cy="411480"/>
-          </a:xfrm>
-          <a:prstGeom prst="rect">
-            <a:avLst/>
-          </a:prstGeom>
-          <a:noFill/>
-          <a:ln/>
-        </p:spPr>
-        <p:txBody>
-          <a:bodyPr wrap="square" lIns="0" tIns="0" rIns="0" bIns="0" rtlCol="0" anchor="ctr"/>
-          <a:lstStyle/>
-          <a:p>
-            <a:pPr indent="0" marL="0">
-              <a:buNone/>
-            </a:pPr>
-            <a:r>
-              <a:rPr lang="en-US" sz="2000" b="1" dirty="0">
-                <a:solidFill>
-                  <a:srgbClr val="BB46F5"/>
-                </a:solidFill>
-                <a:latin typeface="Space Grotesk" pitchFamily="34" charset="0"/>
-                <a:ea typeface="Space Grotesk" pitchFamily="34" charset="-122"/>
-                <a:cs typeface="Space Grotesk" pitchFamily="34" charset="-120"/>
-              </a:rPr>
-              <a:t>Community</a:t>
-            </a:r>
-            <a:endParaRPr lang="en-US" sz="2000" dirty="0"/>
-          </a:p>
-        </p:txBody>
-      </p:sp>
-      <p:sp>
-        <p:nvSpPr>
-          <p:cNvPr id="6" name="Text 4"/>
-          <p:cNvSpPr/>
-          <p:nvPr/>
-        </p:nvSpPr>
-        <p:spPr>
-          <a:xfrm>
-            <a:off x="932688" y="2670048"/>
-            <a:ext cx="2926080" cy="320040"/>
-          </a:xfrm>
-          <a:prstGeom prst="rect">
-            <a:avLst/>
-          </a:prstGeom>
-          <a:noFill/>
-          <a:ln/>
-        </p:spPr>
-        <p:txBody>
-          <a:bodyPr wrap="square" lIns="0" tIns="0" rIns="0" bIns="0" rtlCol="0" anchor="ctr"/>
-          <a:lstStyle/>
-          <a:p>
-            <a:pPr indent="0" marL="0">
-              <a:buNone/>
-            </a:pPr>
-            <a:r>
-              <a:rPr lang="en-US" sz="1050" spc="50" kern="0" dirty="0">
-                <a:solidFill>
-                  <a:srgbClr val="9296A6"/>
-                </a:solidFill>
-                <a:latin typeface="JetBrains Mono" pitchFamily="34" charset="0"/>
-                <a:ea typeface="JetBrains Mono" pitchFamily="34" charset="-122"/>
-                <a:cs typeface="JetBrains Mono" pitchFamily="34" charset="-120"/>
-              </a:rPr>
-              <a:t>Open source · AGPL</a:t>
-            </a:r>
-            <a:endParaRPr lang="en-US" sz="1050" dirty="0"/>
-          </a:p>
-        </p:txBody>
-      </p:sp>
-      <p:sp>
-        <p:nvSpPr>
-          <p:cNvPr id="7" name="Text 5"/>
-          <p:cNvSpPr/>
-          <p:nvPr/>
-        </p:nvSpPr>
-        <p:spPr>
-          <a:xfrm>
-            <a:off x="932688" y="3154680"/>
-            <a:ext cx="2926080" cy="2103120"/>
-          </a:xfrm>
-          <a:prstGeom prst="rect">
-            <a:avLst/>
-          </a:prstGeom>
-          <a:noFill/>
-          <a:ln/>
-        </p:spPr>
-        <p:txBody>
-          <a:bodyPr wrap="square" lIns="0" tIns="0" rIns="0" bIns="0" rtlCol="0" anchor="ctr"/>
-          <a:lstStyle/>
-          <a:p>
-            <a:pPr marL="177800" indent="-177800">
-              <a:lnSpc>
-                <a:spcPct val="105000"/>
-              </a:lnSpc>
-              <a:spcAft>
-                <a:spcPts val="900"/>
-              </a:spcAft>
-              <a:buSzPct val="100000"/>
-              <a:buChar char="•"/>
-            </a:pPr>
-            <a:r>
-              <a:rPr lang="en-US" sz="1200" dirty="0">
-                <a:solidFill>
-                  <a:srgbClr val="1A1A1A"/>
-                </a:solidFill>
-                <a:latin typeface="Montserrat" pitchFamily="34" charset="0"/>
-                <a:ea typeface="Montserrat" pitchFamily="34" charset="-122"/>
-                <a:cs typeface="Montserrat" pitchFamily="34" charset="-120"/>
-              </a:rPr>
-              <a:t>Self-hébergé, sur vos serveurs</a:t>
-            </a:r>
-            <a:endParaRPr lang="en-US" sz="1200" dirty="0"/>
-          </a:p>
-          <a:p>
-            <a:pPr marL="177800" indent="-177800">
-              <a:lnSpc>
-                <a:spcPct val="105000"/>
-              </a:lnSpc>
-              <a:spcAft>
-                <a:spcPts val="900"/>
-              </a:spcAft>
-              <a:buSzPct val="100000"/>
-              <a:buChar char="•"/>
-            </a:pPr>
-            <a:r>
-              <a:rPr lang="en-US" sz="1200" dirty="0">
-                <a:solidFill>
-                  <a:srgbClr val="1A1A1A"/>
-                </a:solidFill>
-                <a:latin typeface="Montserrat" pitchFamily="34" charset="0"/>
-                <a:ea typeface="Montserrat" pitchFamily="34" charset="-122"/>
-                <a:cs typeface="Montserrat" pitchFamily="34" charset="-120"/>
-              </a:rPr>
-              <a:t>Modélisation produit complète</a:t>
-            </a:r>
-            <a:endParaRPr lang="en-US" sz="1200" dirty="0"/>
-          </a:p>
-          <a:p>
-            <a:pPr marL="177800" indent="-177800">
-              <a:lnSpc>
-                <a:spcPct val="105000"/>
-              </a:lnSpc>
-              <a:spcAft>
-                <a:spcPts val="900"/>
-              </a:spcAft>
-              <a:buSzPct val="100000"/>
-              <a:buChar char="•"/>
-            </a:pPr>
-            <a:r>
-              <a:rPr lang="en-US" sz="1200" dirty="0">
-                <a:solidFill>
-                  <a:srgbClr val="1A1A1A"/>
-                </a:solidFill>
-                <a:latin typeface="Montserrat" pitchFamily="34" charset="0"/>
-                <a:ea typeface="Montserrat" pitchFamily="34" charset="-122"/>
-                <a:cs typeface="Montserrat" pitchFamily="34" charset="-120"/>
-              </a:rPr>
-              <a:t>Spécifications prêtes pour l'IA</a:t>
-            </a:r>
-            <a:endParaRPr lang="en-US" sz="1200" dirty="0"/>
-          </a:p>
-          <a:p>
-            <a:pPr marL="177800" indent="-177800">
-              <a:lnSpc>
-                <a:spcPct val="105000"/>
-              </a:lnSpc>
-              <a:buSzPct val="100000"/>
-              <a:buChar char="•"/>
-            </a:pPr>
-            <a:r>
-              <a:rPr lang="en-US" sz="1200" dirty="0">
-                <a:solidFill>
-                  <a:srgbClr val="1A1A1A"/>
-                </a:solidFill>
-                <a:latin typeface="Montserrat" pitchFamily="34" charset="0"/>
-                <a:ea typeface="Montserrat" pitchFamily="34" charset="-122"/>
-                <a:cs typeface="Montserrat" pitchFamily="34" charset="-120"/>
-              </a:rPr>
-              <a:t>Contrôles de cohérence essentiels</a:t>
-            </a:r>
-            <a:endParaRPr lang="en-US" sz="1200" dirty="0"/>
-          </a:p>
-        </p:txBody>
-      </p:sp>
-      <p:sp>
-        <p:nvSpPr>
-          <p:cNvPr id="8" name="Text 6"/>
-          <p:cNvSpPr/>
-          <p:nvPr/>
-        </p:nvSpPr>
-        <p:spPr>
-          <a:xfrm>
-            <a:off x="932688" y="5532120"/>
-            <a:ext cx="2926080" cy="365760"/>
-          </a:xfrm>
-          <a:prstGeom prst="rect">
-            <a:avLst/>
-          </a:prstGeom>
-          <a:noFill/>
-          <a:ln/>
-        </p:spPr>
-        <p:txBody>
-          <a:bodyPr wrap="square" lIns="0" tIns="0" rIns="0" bIns="0" rtlCol="0" anchor="ctr"/>
-          <a:lstStyle/>
-          <a:p>
-            <a:pPr indent="0" marL="0">
-              <a:buNone/>
-            </a:pPr>
-            <a:r>
-              <a:rPr lang="en-US" sz="1250" b="1" dirty="0">
-                <a:solidFill>
-                  <a:srgbClr val="BB46F5"/>
-                </a:solidFill>
-                <a:latin typeface="Montserrat" pitchFamily="34" charset="0"/>
-                <a:ea typeface="Montserrat" pitchFamily="34" charset="-122"/>
-                <a:cs typeface="Montserrat" pitchFamily="34" charset="-120"/>
-              </a:rPr>
-              <a:t>Voir sur GitHub  →</a:t>
-            </a:r>
-            <a:endParaRPr lang="en-US" sz="1250" dirty="0"/>
-          </a:p>
-        </p:txBody>
-      </p:sp>
-      <p:sp>
-        <p:nvSpPr>
-          <p:cNvPr id="9" name="Shape 7"/>
-          <p:cNvSpPr/>
-          <p:nvPr/>
-        </p:nvSpPr>
-        <p:spPr>
-          <a:xfrm>
-            <a:off x="4398264" y="1965960"/>
-            <a:ext cx="3474720" cy="4160520"/>
-          </a:xfrm>
-          <a:prstGeom prst="roundRect">
-            <a:avLst>
-              <a:gd name="adj" fmla="val 2632"/>
-            </a:avLst>
-          </a:prstGeom>
-          <a:solidFill>
-            <a:srgbClr val="FFFFFF"/>
-          </a:solidFill>
-          <a:ln w="12700">
-            <a:solidFill>
-              <a:srgbClr val="E8E8EE"/>
-            </a:solidFill>
-            <a:prstDash val="solid"/>
-          </a:ln>
-          <a:effectLst>
-            <a:outerShdw sx="100000" sy="100000" kx="0" ky="0" algn="bl" rotWithShape="0" blurRad="114300" dist="38100" dir="5400000">
-              <a:srgbClr val="10122A">
-                <a:alpha val="12000"/>
-              </a:srgbClr>
-            </a:outerShdw>
-          </a:effectLst>
-        </p:spPr>
-      </p:sp>
-      <p:sp>
-        <p:nvSpPr>
-          <p:cNvPr id="10" name="Text 8"/>
-          <p:cNvSpPr/>
-          <p:nvPr/>
-        </p:nvSpPr>
-        <p:spPr>
-          <a:xfrm>
-            <a:off x="4690872" y="2240280"/>
-            <a:ext cx="2926080" cy="411480"/>
-          </a:xfrm>
-          <a:prstGeom prst="rect">
-            <a:avLst/>
-          </a:prstGeom>
-          <a:noFill/>
-          <a:ln/>
-        </p:spPr>
-        <p:txBody>
-          <a:bodyPr wrap="square" lIns="0" tIns="0" rIns="0" bIns="0" rtlCol="0" anchor="ctr"/>
-          <a:lstStyle/>
-          <a:p>
-            <a:pPr indent="0" marL="0">
-              <a:buNone/>
-            </a:pPr>
-            <a:r>
-              <a:rPr lang="en-US" sz="2000" b="1" dirty="0">
-                <a:solidFill>
-                  <a:srgbClr val="0066FF"/>
-                </a:solidFill>
-                <a:latin typeface="Space Grotesk" pitchFamily="34" charset="0"/>
-                <a:ea typeface="Space Grotesk" pitchFamily="34" charset="-122"/>
-                <a:cs typeface="Space Grotesk" pitchFamily="34" charset="-120"/>
-              </a:rPr>
-              <a:t>Enterprise</a:t>
-            </a:r>
-            <a:endParaRPr lang="en-US" sz="2000" dirty="0"/>
-          </a:p>
-        </p:txBody>
-      </p:sp>
-      <p:sp>
-        <p:nvSpPr>
-          <p:cNvPr id="11" name="Text 9"/>
-          <p:cNvSpPr/>
-          <p:nvPr/>
-        </p:nvSpPr>
-        <p:spPr>
-          <a:xfrm>
-            <a:off x="4690872" y="2670048"/>
-            <a:ext cx="2926080" cy="320040"/>
-          </a:xfrm>
-          <a:prstGeom prst="rect">
-            <a:avLst/>
-          </a:prstGeom>
-          <a:noFill/>
-          <a:ln/>
-        </p:spPr>
-        <p:txBody>
-          <a:bodyPr wrap="square" lIns="0" tIns="0" rIns="0" bIns="0" rtlCol="0" anchor="ctr"/>
-          <a:lstStyle/>
-          <a:p>
-            <a:pPr indent="0" marL="0">
-              <a:buNone/>
-            </a:pPr>
-            <a:r>
-              <a:rPr lang="en-US" sz="1050" spc="50" kern="0" dirty="0">
-                <a:solidFill>
-                  <a:srgbClr val="9296A6"/>
-                </a:solidFill>
-                <a:latin typeface="JetBrains Mono" pitchFamily="34" charset="0"/>
-                <a:ea typeface="JetBrains Mono" pitchFamily="34" charset="-122"/>
-                <a:cs typeface="JetBrains Mono" pitchFamily="34" charset="-120"/>
-              </a:rPr>
-              <a:t>Licence annuelle · self-service</a:t>
-            </a:r>
-            <a:endParaRPr lang="en-US" sz="1050" dirty="0"/>
-          </a:p>
-        </p:txBody>
-      </p:sp>
-      <p:sp>
-        <p:nvSpPr>
-          <p:cNvPr id="12" name="Text 10"/>
-          <p:cNvSpPr/>
-          <p:nvPr/>
-        </p:nvSpPr>
-        <p:spPr>
-          <a:xfrm>
-            <a:off x="4690872" y="3154680"/>
-            <a:ext cx="2926080" cy="2103120"/>
-          </a:xfrm>
-          <a:prstGeom prst="rect">
-            <a:avLst/>
-          </a:prstGeom>
-          <a:noFill/>
-          <a:ln/>
-        </p:spPr>
-        <p:txBody>
-          <a:bodyPr wrap="square" lIns="0" tIns="0" rIns="0" bIns="0" rtlCol="0" anchor="ctr"/>
-          <a:lstStyle/>
-          <a:p>
-            <a:pPr marL="177800" indent="-177800">
-              <a:lnSpc>
-                <a:spcPct val="105000"/>
-              </a:lnSpc>
-              <a:spcAft>
-                <a:spcPts val="900"/>
-              </a:spcAft>
-              <a:buSzPct val="100000"/>
-              <a:buChar char="•"/>
-            </a:pPr>
-            <a:r>
-              <a:rPr lang="en-US" sz="1200" dirty="0">
-                <a:solidFill>
-                  <a:srgbClr val="1A1A1A"/>
-                </a:solidFill>
-                <a:latin typeface="Montserrat" pitchFamily="34" charset="0"/>
-                <a:ea typeface="Montserrat" pitchFamily="34" charset="-122"/>
-                <a:cs typeface="Montserrat" pitchFamily="34" charset="-120"/>
-              </a:rPr>
-              <a:t>Équipes multi-utilisateurs</a:t>
-            </a:r>
-            <a:endParaRPr lang="en-US" sz="1200" dirty="0"/>
-          </a:p>
-          <a:p>
-            <a:pPr marL="177800" indent="-177800">
-              <a:lnSpc>
-                <a:spcPct val="105000"/>
-              </a:lnSpc>
-              <a:spcAft>
-                <a:spcPts val="900"/>
-              </a:spcAft>
-              <a:buSzPct val="100000"/>
-              <a:buChar char="•"/>
-            </a:pPr>
-            <a:r>
-              <a:rPr lang="en-US" sz="1200" dirty="0">
-                <a:solidFill>
-                  <a:srgbClr val="1A1A1A"/>
-                </a:solidFill>
-                <a:latin typeface="Montserrat" pitchFamily="34" charset="0"/>
-                <a:ea typeface="Montserrat" pitchFamily="34" charset="-122"/>
-                <a:cs typeface="Montserrat" pitchFamily="34" charset="-120"/>
-              </a:rPr>
-              <a:t>Gestion des droits &amp; rôles</a:t>
-            </a:r>
-            <a:endParaRPr lang="en-US" sz="1200" dirty="0"/>
-          </a:p>
-          <a:p>
-            <a:pPr marL="177800" indent="-177800">
-              <a:lnSpc>
-                <a:spcPct val="105000"/>
-              </a:lnSpc>
-              <a:spcAft>
-                <a:spcPts val="900"/>
-              </a:spcAft>
-              <a:buSzPct val="100000"/>
-              <a:buChar char="•"/>
-            </a:pPr>
-            <a:r>
-              <a:rPr lang="en-US" sz="1200" dirty="0">
-                <a:solidFill>
-                  <a:srgbClr val="1A1A1A"/>
-                </a:solidFill>
-                <a:latin typeface="Montserrat" pitchFamily="34" charset="0"/>
-                <a:ea typeface="Montserrat" pitchFamily="34" charset="-122"/>
-                <a:cs typeface="Montserrat" pitchFamily="34" charset="-120"/>
-              </a:rPr>
-              <a:t>Collaboration en temps réel</a:t>
-            </a:r>
-            <a:endParaRPr lang="en-US" sz="1200" dirty="0"/>
-          </a:p>
-          <a:p>
-            <a:pPr marL="177800" indent="-177800">
-              <a:lnSpc>
-                <a:spcPct val="105000"/>
-              </a:lnSpc>
-              <a:buSzPct val="100000"/>
-              <a:buChar char="•"/>
-            </a:pPr>
-            <a:r>
-              <a:rPr lang="en-US" sz="1200" dirty="0">
-                <a:solidFill>
-                  <a:srgbClr val="1A1A1A"/>
-                </a:solidFill>
-                <a:latin typeface="Montserrat" pitchFamily="34" charset="0"/>
-                <a:ea typeface="Montserrat" pitchFamily="34" charset="-122"/>
-                <a:cs typeface="Montserrat" pitchFamily="34" charset="-120"/>
-              </a:rPr>
-              <a:t>Vérification après implémentation</a:t>
-            </a:r>
-            <a:endParaRPr lang="en-US" sz="1200" dirty="0"/>
-          </a:p>
-        </p:txBody>
-      </p:sp>
-      <p:sp>
-        <p:nvSpPr>
-          <p:cNvPr id="13" name="Text 11"/>
-          <p:cNvSpPr/>
-          <p:nvPr/>
-        </p:nvSpPr>
-        <p:spPr>
-          <a:xfrm>
-            <a:off x="4690872" y="5532120"/>
-            <a:ext cx="2926080" cy="365760"/>
-          </a:xfrm>
-          <a:prstGeom prst="rect">
-            <a:avLst/>
-          </a:prstGeom>
-          <a:noFill/>
-          <a:ln/>
-        </p:spPr>
-        <p:txBody>
-          <a:bodyPr wrap="square" lIns="0" tIns="0" rIns="0" bIns="0" rtlCol="0" anchor="ctr"/>
-          <a:lstStyle/>
-          <a:p>
-            <a:pPr indent="0" marL="0">
-              <a:buNone/>
-            </a:pPr>
-            <a:r>
-              <a:rPr lang="en-US" sz="1250" b="1" dirty="0">
-                <a:solidFill>
-                  <a:srgbClr val="0066FF"/>
-                </a:solidFill>
-                <a:latin typeface="Montserrat" pitchFamily="34" charset="0"/>
-                <a:ea typeface="Montserrat" pitchFamily="34" charset="-122"/>
-                <a:cs typeface="Montserrat" pitchFamily="34" charset="-120"/>
-              </a:rPr>
-              <a:t>Demander un devis  →</a:t>
-            </a:r>
-            <a:endParaRPr lang="en-US" sz="1250" dirty="0"/>
-          </a:p>
-        </p:txBody>
-      </p:sp>
-      <p:sp>
-        <p:nvSpPr>
-          <p:cNvPr id="14" name="Shape 12"/>
-          <p:cNvSpPr/>
-          <p:nvPr/>
-        </p:nvSpPr>
-        <p:spPr>
-          <a:xfrm>
-            <a:off x="8156448" y="1965960"/>
-            <a:ext cx="3474720" cy="4160520"/>
-          </a:xfrm>
-          <a:prstGeom prst="roundRect">
-            <a:avLst>
-              <a:gd name="adj" fmla="val 2632"/>
-            </a:avLst>
-          </a:prstGeom>
-          <a:solidFill>
-            <a:srgbClr val="FFFFFF"/>
-          </a:solidFill>
-          <a:ln w="12700">
-            <a:solidFill>
-              <a:srgbClr val="E8E8EE"/>
-            </a:solidFill>
-            <a:prstDash val="solid"/>
-          </a:ln>
-          <a:effectLst>
-            <a:outerShdw sx="100000" sy="100000" kx="0" ky="0" algn="bl" rotWithShape="0" blurRad="114300" dist="38100" dir="5400000">
-              <a:srgbClr val="10122A">
-                <a:alpha val="12000"/>
-              </a:srgbClr>
-            </a:outerShdw>
-          </a:effectLst>
-        </p:spPr>
-      </p:sp>
-      <p:sp>
-        <p:nvSpPr>
-          <p:cNvPr id="15" name="Text 13"/>
-          <p:cNvSpPr/>
-          <p:nvPr/>
-        </p:nvSpPr>
-        <p:spPr>
-          <a:xfrm>
-            <a:off x="8449056" y="2240280"/>
-            <a:ext cx="2926080" cy="411480"/>
-          </a:xfrm>
-          <a:prstGeom prst="rect">
-            <a:avLst/>
-          </a:prstGeom>
-          <a:noFill/>
-          <a:ln/>
-        </p:spPr>
-        <p:txBody>
-          <a:bodyPr wrap="square" lIns="0" tIns="0" rIns="0" bIns="0" rtlCol="0" anchor="ctr"/>
-          <a:lstStyle/>
-          <a:p>
-            <a:pPr indent="0" marL="0">
-              <a:buNone/>
-            </a:pPr>
-            <a:r>
-              <a:rPr lang="en-US" sz="2000" b="1" dirty="0">
-                <a:solidFill>
-                  <a:srgbClr val="FFA101"/>
-                </a:solidFill>
-                <a:latin typeface="Space Grotesk" pitchFamily="34" charset="0"/>
-                <a:ea typeface="Space Grotesk" pitchFamily="34" charset="-122"/>
-                <a:cs typeface="Space Grotesk" pitchFamily="34" charset="-120"/>
-              </a:rPr>
-              <a:t>Managé</a:t>
-            </a:r>
-            <a:endParaRPr lang="en-US" sz="2000" dirty="0"/>
-          </a:p>
-        </p:txBody>
-      </p:sp>
-      <p:sp>
-        <p:nvSpPr>
-          <p:cNvPr id="16" name="Text 14"/>
-          <p:cNvSpPr/>
-          <p:nvPr/>
-        </p:nvSpPr>
-        <p:spPr>
-          <a:xfrm>
-            <a:off x="8449056" y="2670048"/>
-            <a:ext cx="2926080" cy="320040"/>
-          </a:xfrm>
-          <a:prstGeom prst="rect">
-            <a:avLst/>
-          </a:prstGeom>
-          <a:noFill/>
-          <a:ln/>
-        </p:spPr>
-        <p:txBody>
-          <a:bodyPr wrap="square" lIns="0" tIns="0" rIns="0" bIns="0" rtlCol="0" anchor="ctr"/>
-          <a:lstStyle/>
-          <a:p>
-            <a:pPr indent="0" marL="0">
-              <a:buNone/>
-            </a:pPr>
-            <a:r>
-              <a:rPr lang="en-US" sz="1050" spc="50" kern="0" dirty="0">
-                <a:solidFill>
-                  <a:srgbClr val="9296A6"/>
-                </a:solidFill>
-                <a:latin typeface="JetBrains Mono" pitchFamily="34" charset="0"/>
-                <a:ea typeface="JetBrains Mono" pitchFamily="34" charset="-122"/>
-                <a:cs typeface="JetBrains Mono" pitchFamily="34" charset="-120"/>
-              </a:rPr>
-              <a:t>Hébergé &amp; opéré par Lyriks</a:t>
-            </a:r>
-            <a:endParaRPr lang="en-US" sz="1050" dirty="0"/>
-          </a:p>
-        </p:txBody>
-      </p:sp>
-      <p:sp>
-        <p:nvSpPr>
-          <p:cNvPr id="17" name="Text 15"/>
-          <p:cNvSpPr/>
-          <p:nvPr/>
-        </p:nvSpPr>
-        <p:spPr>
-          <a:xfrm>
-            <a:off x="8449056" y="3154680"/>
-            <a:ext cx="2926080" cy="2103120"/>
-          </a:xfrm>
-          <a:prstGeom prst="rect">
-            <a:avLst/>
-          </a:prstGeom>
-          <a:noFill/>
-          <a:ln/>
-        </p:spPr>
-        <p:txBody>
-          <a:bodyPr wrap="square" lIns="0" tIns="0" rIns="0" bIns="0" rtlCol="0" anchor="ctr"/>
-          <a:lstStyle/>
-          <a:p>
-            <a:pPr marL="177800" indent="-177800">
-              <a:lnSpc>
-                <a:spcPct val="105000"/>
-              </a:lnSpc>
-              <a:spcAft>
-                <a:spcPts val="900"/>
-              </a:spcAft>
-              <a:buSzPct val="100000"/>
-              <a:buChar char="•"/>
-            </a:pPr>
-            <a:r>
-              <a:rPr lang="en-US" sz="1200" dirty="0">
-                <a:solidFill>
-                  <a:srgbClr val="1A1A1A"/>
-                </a:solidFill>
-                <a:latin typeface="Montserrat" pitchFamily="34" charset="0"/>
-                <a:ea typeface="Montserrat" pitchFamily="34" charset="-122"/>
-                <a:cs typeface="Montserrat" pitchFamily="34" charset="-120"/>
-              </a:rPr>
-              <a:t>Infogérance complète &amp; SLA</a:t>
-            </a:r>
-            <a:endParaRPr lang="en-US" sz="1200" dirty="0"/>
-          </a:p>
-          <a:p>
-            <a:pPr marL="177800" indent="-177800">
-              <a:lnSpc>
-                <a:spcPct val="105000"/>
-              </a:lnSpc>
-              <a:spcAft>
-                <a:spcPts val="900"/>
-              </a:spcAft>
-              <a:buSzPct val="100000"/>
-              <a:buChar char="•"/>
-            </a:pPr>
-            <a:r>
-              <a:rPr lang="en-US" sz="1200" dirty="0">
-                <a:solidFill>
-                  <a:srgbClr val="1A1A1A"/>
-                </a:solidFill>
-                <a:latin typeface="Montserrat" pitchFamily="34" charset="0"/>
-                <a:ea typeface="Montserrat" pitchFamily="34" charset="-122"/>
-                <a:cs typeface="Montserrat" pitchFamily="34" charset="-120"/>
-              </a:rPr>
-              <a:t>Supervision avancée des usages IA</a:t>
-            </a:r>
-            <a:endParaRPr lang="en-US" sz="1200" dirty="0"/>
-          </a:p>
-          <a:p>
-            <a:pPr marL="177800" indent="-177800">
-              <a:lnSpc>
-                <a:spcPct val="105000"/>
-              </a:lnSpc>
-              <a:spcAft>
-                <a:spcPts val="900"/>
-              </a:spcAft>
-              <a:buSzPct val="100000"/>
-              <a:buChar char="•"/>
-            </a:pPr>
-            <a:r>
-              <a:rPr lang="en-US" sz="1200" dirty="0">
-                <a:solidFill>
-                  <a:srgbClr val="1A1A1A"/>
-                </a:solidFill>
-                <a:latin typeface="Montserrat" pitchFamily="34" charset="0"/>
-                <a:ea typeface="Montserrat" pitchFamily="34" charset="-122"/>
-                <a:cs typeface="Montserrat" pitchFamily="34" charset="-120"/>
-              </a:rPr>
-              <a:t>SSO &amp; sécurité avancée</a:t>
-            </a:r>
-            <a:endParaRPr lang="en-US" sz="1200" dirty="0"/>
-          </a:p>
-          <a:p>
-            <a:pPr marL="177800" indent="-177800">
-              <a:lnSpc>
-                <a:spcPct val="105000"/>
-              </a:lnSpc>
-              <a:buSzPct val="100000"/>
-              <a:buChar char="•"/>
-            </a:pPr>
-            <a:r>
-              <a:rPr lang="en-US" sz="1200" dirty="0">
-                <a:solidFill>
-                  <a:srgbClr val="1A1A1A"/>
-                </a:solidFill>
-                <a:latin typeface="Montserrat" pitchFamily="34" charset="0"/>
-                <a:ea typeface="Montserrat" pitchFamily="34" charset="-122"/>
-                <a:cs typeface="Montserrat" pitchFamily="34" charset="-120"/>
-              </a:rPr>
-              <a:t>Accompagnement dédié</a:t>
-            </a:r>
-            <a:endParaRPr lang="en-US" sz="1200" dirty="0"/>
-          </a:p>
-        </p:txBody>
-      </p:sp>
-      <p:sp>
-        <p:nvSpPr>
-          <p:cNvPr id="18" name="Text 16"/>
-          <p:cNvSpPr/>
-          <p:nvPr/>
-        </p:nvSpPr>
-        <p:spPr>
-          <a:xfrm>
-            <a:off x="8449056" y="5532120"/>
-            <a:ext cx="2926080" cy="365760"/>
-          </a:xfrm>
-          <a:prstGeom prst="rect">
-            <a:avLst/>
-          </a:prstGeom>
-          <a:noFill/>
-          <a:ln/>
-        </p:spPr>
-        <p:txBody>
-          <a:bodyPr wrap="square" lIns="0" tIns="0" rIns="0" bIns="0" rtlCol="0" anchor="ctr"/>
-          <a:lstStyle/>
-          <a:p>
-            <a:pPr indent="0" marL="0">
-              <a:buNone/>
-            </a:pPr>
-            <a:r>
-              <a:rPr lang="en-US" sz="1250" b="1" dirty="0">
-                <a:solidFill>
-                  <a:srgbClr val="FFA101"/>
-                </a:solidFill>
-                <a:latin typeface="Montserrat" pitchFamily="34" charset="0"/>
-                <a:ea typeface="Montserrat" pitchFamily="34" charset="-122"/>
-                <a:cs typeface="Montserrat" pitchFamily="34" charset="-120"/>
-              </a:rPr>
-              <a:t>Contacter l'équipe  →</a:t>
-            </a:r>
-            <a:endParaRPr lang="en-US" sz="1250" dirty="0"/>
-          </a:p>
-        </p:txBody>
-      </p:sp>
-      <p:sp>
-        <p:nvSpPr>
-          <p:cNvPr id="19" name="Text 17"/>
           <p:cNvSpPr/>
           <p:nvPr/>
         </p:nvSpPr>
@@ -3558,13 +3553,13 @@
             <a:r>
               <a:rPr lang="en-US" sz="1100" b="1" spc="250" kern="0" dirty="0">
                 <a:solidFill>
-                  <a:srgbClr val="8047F4"/>
+                  <a:srgbClr val="FA5FB2"/>
                 </a:solidFill>
                 <a:latin typeface="JetBrains Mono" pitchFamily="34" charset="0"/>
                 <a:ea typeface="JetBrains Mono" pitchFamily="34" charset="-122"/>
                 <a:cs typeface="JetBrains Mono" pitchFamily="34" charset="-120"/>
               </a:rPr>
-              <a:t>L'ÉQUIPE</a:t>
+              <a:t>OFFRES &amp; DÉPLOIEMENT</a:t>
             </a:r>
             <a:endParaRPr lang="en-US" sz="1100" dirty="0"/>
           </a:p>
@@ -3603,7 +3598,7 @@
                 <a:ea typeface="Space Grotesk" pitchFamily="34" charset="-122"/>
                 <a:cs typeface="Space Grotesk" pitchFamily="34" charset="-120"/>
               </a:rPr>
-              <a:t>Les voix de Lyriks</a:t>
+              <a:t>Choisissez votre mode de déploiement</a:t>
             </a:r>
             <a:endParaRPr lang="en-US" sz="3000" dirty="0"/>
           </a:p>
@@ -3617,12 +3612,12 @@
         </p:nvSpPr>
         <p:spPr>
           <a:xfrm>
-            <a:off x="640080" y="2194560"/>
-            <a:ext cx="3474720" cy="2926080"/>
+            <a:off x="640080" y="1965960"/>
+            <a:ext cx="3474720" cy="4160520"/>
           </a:xfrm>
           <a:prstGeom prst="roundRect">
             <a:avLst>
-              <a:gd name="adj" fmla="val 3125"/>
+              <a:gd name="adj" fmla="val 2632"/>
             </a:avLst>
           </a:prstGeom>
           <a:solidFill>
@@ -3645,128 +3640,69 @@
       </p:sp>
       <p:sp>
         <p:nvSpPr>
-          <p:cNvPr id="5" name="Shape 3"/>
-          <p:cNvSpPr/>
-          <p:nvPr/>
-        </p:nvSpPr>
-        <p:spPr>
-          <a:xfrm>
-            <a:off x="1920240" y="2606040"/>
-            <a:ext cx="914400" cy="914400"/>
-          </a:xfrm>
-          <a:prstGeom prst="ellipse">
-            <a:avLst/>
-          </a:prstGeom>
-          <a:solidFill>
-            <a:srgbClr val="FFA101"/>
-          </a:solidFill>
-          <a:ln/>
-        </p:spPr>
-      </p:sp>
-      <p:sp>
-        <p:nvSpPr>
-          <p:cNvPr id="6" name="Text 4"/>
-          <p:cNvSpPr/>
-          <p:nvPr/>
-        </p:nvSpPr>
-        <p:spPr>
-          <a:xfrm>
-            <a:off x="1920240" y="2606040"/>
-            <a:ext cx="914400" cy="914400"/>
-          </a:xfrm>
-          <a:prstGeom prst="rect">
-            <a:avLst/>
-          </a:prstGeom>
-          <a:noFill/>
-          <a:ln/>
-        </p:spPr>
-        <p:txBody>
-          <a:bodyPr wrap="square" lIns="0" tIns="0" rIns="0" bIns="0" rtlCol="0" anchor="ctr"/>
-          <a:lstStyle/>
-          <a:p>
-            <a:pPr algn="ctr" indent="0" marL="0">
-              <a:buNone/>
-            </a:pPr>
-            <a:r>
-              <a:rPr lang="en-US" sz="2200" b="1" dirty="0">
-                <a:solidFill>
-                  <a:srgbClr val="FFFFFF"/>
+          <p:cNvPr id="5" name="Text 3"/>
+          <p:cNvSpPr/>
+          <p:nvPr/>
+        </p:nvSpPr>
+        <p:spPr>
+          <a:xfrm>
+            <a:off x="932688" y="2240280"/>
+            <a:ext cx="2926080" cy="411480"/>
+          </a:xfrm>
+          <a:prstGeom prst="rect">
+            <a:avLst/>
+          </a:prstGeom>
+          <a:noFill/>
+          <a:ln/>
+        </p:spPr>
+        <p:txBody>
+          <a:bodyPr wrap="square" lIns="0" tIns="0" rIns="0" bIns="0" rtlCol="0" anchor="ctr"/>
+          <a:lstStyle/>
+          <a:p>
+            <a:pPr indent="0" marL="0">
+              <a:buNone/>
+            </a:pPr>
+            <a:r>
+              <a:rPr lang="en-US" sz="2000" b="1" dirty="0">
+                <a:solidFill>
+                  <a:srgbClr val="BB46F5"/>
                 </a:solidFill>
                 <a:latin typeface="Space Grotesk" pitchFamily="34" charset="0"/>
                 <a:ea typeface="Space Grotesk" pitchFamily="34" charset="-122"/>
                 <a:cs typeface="Space Grotesk" pitchFamily="34" charset="-120"/>
               </a:rPr>
-              <a:t>DM</a:t>
-            </a:r>
-            <a:endParaRPr lang="en-US" sz="2200" dirty="0"/>
-          </a:p>
-        </p:txBody>
-      </p:sp>
-      <p:sp>
-        <p:nvSpPr>
-          <p:cNvPr id="7" name="Text 5"/>
-          <p:cNvSpPr/>
-          <p:nvPr/>
-        </p:nvSpPr>
-        <p:spPr>
-          <a:xfrm>
-            <a:off x="822960" y="3749040"/>
-            <a:ext cx="3108960" cy="365760"/>
-          </a:xfrm>
-          <a:prstGeom prst="rect">
-            <a:avLst/>
-          </a:prstGeom>
-          <a:noFill/>
-          <a:ln/>
-        </p:spPr>
-        <p:txBody>
-          <a:bodyPr wrap="square" lIns="0" tIns="0" rIns="0" bIns="0" rtlCol="0" anchor="ctr"/>
-          <a:lstStyle/>
-          <a:p>
-            <a:pPr algn="ctr" indent="0" marL="0">
-              <a:buNone/>
-            </a:pPr>
-            <a:r>
-              <a:rPr lang="en-US" sz="1600" b="1" dirty="0">
-                <a:solidFill>
-                  <a:srgbClr val="0A0A0A"/>
-                </a:solidFill>
-                <a:latin typeface="Space Grotesk" pitchFamily="34" charset="0"/>
-                <a:ea typeface="Space Grotesk" pitchFamily="34" charset="-122"/>
-                <a:cs typeface="Space Grotesk" pitchFamily="34" charset="-120"/>
-              </a:rPr>
-              <a:t>David Mabboux</a:t>
-            </a:r>
-            <a:endParaRPr lang="en-US" sz="1600" dirty="0"/>
-          </a:p>
-        </p:txBody>
-      </p:sp>
-      <p:sp>
-        <p:nvSpPr>
-          <p:cNvPr id="8" name="Text 6"/>
-          <p:cNvSpPr/>
-          <p:nvPr/>
-        </p:nvSpPr>
-        <p:spPr>
-          <a:xfrm>
-            <a:off x="822960" y="4160520"/>
-            <a:ext cx="3108960" cy="365760"/>
-          </a:xfrm>
-          <a:prstGeom prst="rect">
-            <a:avLst/>
-          </a:prstGeom>
-          <a:noFill/>
-          <a:ln/>
-        </p:spPr>
-        <p:txBody>
-          <a:bodyPr wrap="square" lIns="0" tIns="0" rIns="0" bIns="0" rtlCol="0" anchor="ctr"/>
-          <a:lstStyle/>
-          <a:p>
-            <a:pPr algn="ctr" indent="0" marL="0">
-              <a:buNone/>
-            </a:pPr>
-            <a:r>
-              <a:rPr lang="en-US" sz="1150" dirty="0">
+              <a:t>Community</a:t>
+            </a:r>
+            <a:endParaRPr lang="en-US" sz="2000" dirty="0"/>
+          </a:p>
+        </p:txBody>
+      </p:sp>
+      <p:sp>
+        <p:nvSpPr>
+          <p:cNvPr id="6" name="Text 4"/>
+          <p:cNvSpPr/>
+          <p:nvPr/>
+        </p:nvSpPr>
+        <p:spPr>
+          <a:xfrm>
+            <a:off x="932688" y="2670048"/>
+            <a:ext cx="2926080" cy="320040"/>
+          </a:xfrm>
+          <a:prstGeom prst="rect">
+            <a:avLst/>
+          </a:prstGeom>
+          <a:noFill/>
+          <a:ln/>
+        </p:spPr>
+        <p:txBody>
+          <a:bodyPr wrap="square" lIns="0" tIns="0" rIns="0" bIns="0" rtlCol="0" anchor="ctr"/>
+          <a:lstStyle/>
+          <a:p>
+            <a:pPr indent="0" marL="0">
+              <a:buNone/>
+            </a:pPr>
+            <a:r>
+              <a:rPr lang="en-US" sz="1050" spc="50" kern="0" dirty="0">
                 <a:solidFill>
                   <a:srgbClr val="9296A6"/>
                 </a:solidFill>
@@ -3774,9 +3710,163 @@
                 <a:ea typeface="JetBrains Mono" pitchFamily="34" charset="-122"/>
                 <a:cs typeface="JetBrains Mono" pitchFamily="34" charset="-120"/>
               </a:rPr>
-              <a:t>Business</a:t>
-            </a:r>
-            <a:endParaRPr lang="en-US" sz="1150" dirty="0"/>
+              <a:t>Open source · AGPL</a:t>
+            </a:r>
+            <a:endParaRPr lang="en-US" sz="1050" dirty="0"/>
+          </a:p>
+        </p:txBody>
+      </p:sp>
+      <p:sp>
+        <p:nvSpPr>
+          <p:cNvPr id="7" name="Text 5"/>
+          <p:cNvSpPr/>
+          <p:nvPr/>
+        </p:nvSpPr>
+        <p:spPr>
+          <a:xfrm>
+            <a:off x="932688" y="3154680"/>
+            <a:ext cx="2926080" cy="2103120"/>
+          </a:xfrm>
+          <a:prstGeom prst="rect">
+            <a:avLst/>
+          </a:prstGeom>
+          <a:noFill/>
+          <a:ln/>
+        </p:spPr>
+        <p:txBody>
+          <a:bodyPr wrap="square" lIns="0" tIns="0" rIns="0" bIns="0" rtlCol="0" anchor="ctr"/>
+          <a:lstStyle/>
+          <a:p>
+            <a:pPr marL="177800" indent="-177800">
+              <a:lnSpc>
+                <a:spcPct val="105000"/>
+              </a:lnSpc>
+              <a:spcAft>
+                <a:spcPts val="900"/>
+              </a:spcAft>
+              <a:buSzPct val="100000"/>
+              <a:buChar char="•"/>
+            </a:pPr>
+            <a:r>
+              <a:rPr lang="en-US" sz="1200" dirty="0">
+                <a:solidFill>
+                  <a:srgbClr val="1A1A1A"/>
+                </a:solidFill>
+                <a:latin typeface="Montserrat" pitchFamily="34" charset="0"/>
+                <a:ea typeface="Montserrat" pitchFamily="34" charset="-122"/>
+                <a:cs typeface="Montserrat" pitchFamily="34" charset="-120"/>
+              </a:rPr>
+              <a:t>Self-hébergé, sur vos serveurs</a:t>
+            </a:r>
+            <a:endParaRPr lang="en-US" sz="1200" dirty="0"/>
+          </a:p>
+          <a:p>
+            <a:pPr marL="177800" indent="-177800">
+              <a:lnSpc>
+                <a:spcPct val="105000"/>
+              </a:lnSpc>
+              <a:spcAft>
+                <a:spcPts val="900"/>
+              </a:spcAft>
+              <a:buSzPct val="100000"/>
+              <a:buChar char="•"/>
+            </a:pPr>
+            <a:r>
+              <a:rPr lang="en-US" sz="1200" dirty="0">
+                <a:solidFill>
+                  <a:srgbClr val="1A1A1A"/>
+                </a:solidFill>
+                <a:latin typeface="Montserrat" pitchFamily="34" charset="0"/>
+                <a:ea typeface="Montserrat" pitchFamily="34" charset="-122"/>
+                <a:cs typeface="Montserrat" pitchFamily="34" charset="-120"/>
+              </a:rPr>
+              <a:t>Modélisation produit complète</a:t>
+            </a:r>
+            <a:endParaRPr lang="en-US" sz="1200" dirty="0"/>
+          </a:p>
+          <a:p>
+            <a:pPr marL="177800" indent="-177800">
+              <a:lnSpc>
+                <a:spcPct val="105000"/>
+              </a:lnSpc>
+              <a:spcAft>
+                <a:spcPts val="900"/>
+              </a:spcAft>
+              <a:buSzPct val="100000"/>
+              <a:buChar char="•"/>
+            </a:pPr>
+            <a:r>
+              <a:rPr lang="en-US" sz="1200" dirty="0">
+                <a:solidFill>
+                  <a:srgbClr val="1A1A1A"/>
+                </a:solidFill>
+                <a:latin typeface="Montserrat" pitchFamily="34" charset="0"/>
+                <a:ea typeface="Montserrat" pitchFamily="34" charset="-122"/>
+                <a:cs typeface="Montserrat" pitchFamily="34" charset="-120"/>
+              </a:rPr>
+              <a:t>Spécifications prêtes pour l'IA</a:t>
+            </a:r>
+            <a:endParaRPr lang="en-US" sz="1200" dirty="0"/>
+          </a:p>
+          <a:p>
+            <a:pPr marL="177800" indent="-177800">
+              <a:lnSpc>
+                <a:spcPct val="105000"/>
+              </a:lnSpc>
+              <a:buSzPct val="100000"/>
+              <a:buChar char="•"/>
+            </a:pPr>
+            <a:r>
+              <a:rPr lang="en-US" sz="1200" dirty="0">
+                <a:solidFill>
+                  <a:srgbClr val="1A1A1A"/>
+                </a:solidFill>
+                <a:latin typeface="Montserrat" pitchFamily="34" charset="0"/>
+                <a:ea typeface="Montserrat" pitchFamily="34" charset="-122"/>
+                <a:cs typeface="Montserrat" pitchFamily="34" charset="-120"/>
+              </a:rPr>
+              <a:t>Contrôles de cohérence essentiels</a:t>
+            </a:r>
+            <a:endParaRPr lang="en-US" sz="1200" dirty="0"/>
+          </a:p>
+        </p:txBody>
+      </p:sp>
+      <p:sp>
+        <p:nvSpPr>
+          <p:cNvPr id="8" name="Text 6"/>
+          <p:cNvSpPr/>
+          <p:nvPr/>
+        </p:nvSpPr>
+        <p:spPr>
+          <a:xfrm>
+            <a:off x="932688" y="5532120"/>
+            <a:ext cx="2926080" cy="365760"/>
+          </a:xfrm>
+          <a:prstGeom prst="rect">
+            <a:avLst/>
+          </a:prstGeom>
+          <a:noFill/>
+          <a:ln/>
+        </p:spPr>
+        <p:txBody>
+          <a:bodyPr wrap="square" lIns="0" tIns="0" rIns="0" bIns="0" rtlCol="0" anchor="ctr"/>
+          <a:lstStyle/>
+          <a:p>
+            <a:pPr indent="0" marL="0">
+              <a:buNone/>
+            </a:pPr>
+            <a:r>
+              <a:rPr lang="en-US" sz="1250" b="1" dirty="0">
+                <a:solidFill>
+                  <a:srgbClr val="BB46F5"/>
+                </a:solidFill>
+                <a:latin typeface="Montserrat" pitchFamily="34" charset="0"/>
+                <a:ea typeface="Montserrat" pitchFamily="34" charset="-122"/>
+                <a:cs typeface="Montserrat" pitchFamily="34" charset="-120"/>
+              </a:rPr>
+              <a:t>Voir sur GitHub  →</a:t>
+            </a:r>
+            <a:endParaRPr lang="en-US" sz="1250" dirty="0"/>
           </a:p>
         </p:txBody>
       </p:sp>
@@ -3788,12 +3878,12 @@
         </p:nvSpPr>
         <p:spPr>
           <a:xfrm>
-            <a:off x="4398264" y="2194560"/>
-            <a:ext cx="3474720" cy="2926080"/>
+            <a:off x="4398264" y="1965960"/>
+            <a:ext cx="3474720" cy="4160520"/>
           </a:xfrm>
           <a:prstGeom prst="roundRect">
             <a:avLst>
-              <a:gd name="adj" fmla="val 3125"/>
+              <a:gd name="adj" fmla="val 2632"/>
             </a:avLst>
           </a:prstGeom>
           <a:solidFill>
@@ -3816,128 +3906,69 @@
       </p:sp>
       <p:sp>
         <p:nvSpPr>
-          <p:cNvPr id="10" name="Shape 8"/>
-          <p:cNvSpPr/>
-          <p:nvPr/>
-        </p:nvSpPr>
-        <p:spPr>
-          <a:xfrm>
-            <a:off x="5678424" y="2606040"/>
-            <a:ext cx="914400" cy="914400"/>
-          </a:xfrm>
-          <a:prstGeom prst="ellipse">
-            <a:avLst/>
-          </a:prstGeom>
-          <a:solidFill>
-            <a:srgbClr val="BB46F5"/>
-          </a:solidFill>
-          <a:ln/>
-        </p:spPr>
-      </p:sp>
-      <p:sp>
-        <p:nvSpPr>
-          <p:cNvPr id="11" name="Text 9"/>
-          <p:cNvSpPr/>
-          <p:nvPr/>
-        </p:nvSpPr>
-        <p:spPr>
-          <a:xfrm>
-            <a:off x="5678424" y="2606040"/>
-            <a:ext cx="914400" cy="914400"/>
-          </a:xfrm>
-          <a:prstGeom prst="rect">
-            <a:avLst/>
-          </a:prstGeom>
-          <a:noFill/>
-          <a:ln/>
-        </p:spPr>
-        <p:txBody>
-          <a:bodyPr wrap="square" lIns="0" tIns="0" rIns="0" bIns="0" rtlCol="0" anchor="ctr"/>
-          <a:lstStyle/>
-          <a:p>
-            <a:pPr algn="ctr" indent="0" marL="0">
-              <a:buNone/>
-            </a:pPr>
-            <a:r>
-              <a:rPr lang="en-US" sz="2200" b="1" dirty="0">
-                <a:solidFill>
-                  <a:srgbClr val="FFFFFF"/>
+          <p:cNvPr id="10" name="Text 8"/>
+          <p:cNvSpPr/>
+          <p:nvPr/>
+        </p:nvSpPr>
+        <p:spPr>
+          <a:xfrm>
+            <a:off x="4690872" y="2240280"/>
+            <a:ext cx="2926080" cy="411480"/>
+          </a:xfrm>
+          <a:prstGeom prst="rect">
+            <a:avLst/>
+          </a:prstGeom>
+          <a:noFill/>
+          <a:ln/>
+        </p:spPr>
+        <p:txBody>
+          <a:bodyPr wrap="square" lIns="0" tIns="0" rIns="0" bIns="0" rtlCol="0" anchor="ctr"/>
+          <a:lstStyle/>
+          <a:p>
+            <a:pPr indent="0" marL="0">
+              <a:buNone/>
+            </a:pPr>
+            <a:r>
+              <a:rPr lang="en-US" sz="2000" b="1" dirty="0">
+                <a:solidFill>
+                  <a:srgbClr val="0066FF"/>
                 </a:solidFill>
                 <a:latin typeface="Space Grotesk" pitchFamily="34" charset="0"/>
                 <a:ea typeface="Space Grotesk" pitchFamily="34" charset="-122"/>
                 <a:cs typeface="Space Grotesk" pitchFamily="34" charset="-120"/>
               </a:rPr>
-              <a:t>AB</a:t>
-            </a:r>
-            <a:endParaRPr lang="en-US" sz="2200" dirty="0"/>
-          </a:p>
-        </p:txBody>
-      </p:sp>
-      <p:sp>
-        <p:nvSpPr>
-          <p:cNvPr id="12" name="Text 10"/>
-          <p:cNvSpPr/>
-          <p:nvPr/>
-        </p:nvSpPr>
-        <p:spPr>
-          <a:xfrm>
-            <a:off x="4581144" y="3749040"/>
-            <a:ext cx="3108960" cy="365760"/>
-          </a:xfrm>
-          <a:prstGeom prst="rect">
-            <a:avLst/>
-          </a:prstGeom>
-          <a:noFill/>
-          <a:ln/>
-        </p:spPr>
-        <p:txBody>
-          <a:bodyPr wrap="square" lIns="0" tIns="0" rIns="0" bIns="0" rtlCol="0" anchor="ctr"/>
-          <a:lstStyle/>
-          <a:p>
-            <a:pPr algn="ctr" indent="0" marL="0">
-              <a:buNone/>
-            </a:pPr>
-            <a:r>
-              <a:rPr lang="en-US" sz="1600" b="1" dirty="0">
-                <a:solidFill>
-                  <a:srgbClr val="0A0A0A"/>
-                </a:solidFill>
-                <a:latin typeface="Space Grotesk" pitchFamily="34" charset="0"/>
-                <a:ea typeface="Space Grotesk" pitchFamily="34" charset="-122"/>
-                <a:cs typeface="Space Grotesk" pitchFamily="34" charset="-120"/>
-              </a:rPr>
-              <a:t>Adrien Basso Blandin</a:t>
-            </a:r>
-            <a:endParaRPr lang="en-US" sz="1600" dirty="0"/>
-          </a:p>
-        </p:txBody>
-      </p:sp>
-      <p:sp>
-        <p:nvSpPr>
-          <p:cNvPr id="13" name="Text 11"/>
-          <p:cNvSpPr/>
-          <p:nvPr/>
-        </p:nvSpPr>
-        <p:spPr>
-          <a:xfrm>
-            <a:off x="4581144" y="4160520"/>
-            <a:ext cx="3108960" cy="365760"/>
-          </a:xfrm>
-          <a:prstGeom prst="rect">
-            <a:avLst/>
-          </a:prstGeom>
-          <a:noFill/>
-          <a:ln/>
-        </p:spPr>
-        <p:txBody>
-          <a:bodyPr wrap="square" lIns="0" tIns="0" rIns="0" bIns="0" rtlCol="0" anchor="ctr"/>
-          <a:lstStyle/>
-          <a:p>
-            <a:pPr algn="ctr" indent="0" marL="0">
-              <a:buNone/>
-            </a:pPr>
-            <a:r>
-              <a:rPr lang="en-US" sz="1150" dirty="0">
+              <a:t>Enterprise</a:t>
+            </a:r>
+            <a:endParaRPr lang="en-US" sz="2000" dirty="0"/>
+          </a:p>
+        </p:txBody>
+      </p:sp>
+      <p:sp>
+        <p:nvSpPr>
+          <p:cNvPr id="11" name="Text 9"/>
+          <p:cNvSpPr/>
+          <p:nvPr/>
+        </p:nvSpPr>
+        <p:spPr>
+          <a:xfrm>
+            <a:off x="4690872" y="2670048"/>
+            <a:ext cx="2926080" cy="320040"/>
+          </a:xfrm>
+          <a:prstGeom prst="rect">
+            <a:avLst/>
+          </a:prstGeom>
+          <a:noFill/>
+          <a:ln/>
+        </p:spPr>
+        <p:txBody>
+          <a:bodyPr wrap="square" lIns="0" tIns="0" rIns="0" bIns="0" rtlCol="0" anchor="ctr"/>
+          <a:lstStyle/>
+          <a:p>
+            <a:pPr indent="0" marL="0">
+              <a:buNone/>
+            </a:pPr>
+            <a:r>
+              <a:rPr lang="en-US" sz="1050" spc="50" kern="0" dirty="0">
                 <a:solidFill>
                   <a:srgbClr val="9296A6"/>
                 </a:solidFill>
@@ -3945,9 +3976,163 @@
                 <a:ea typeface="JetBrains Mono" pitchFamily="34" charset="-122"/>
                 <a:cs typeface="JetBrains Mono" pitchFamily="34" charset="-120"/>
               </a:rPr>
-              <a:t>Cohérence</a:t>
-            </a:r>
-            <a:endParaRPr lang="en-US" sz="1150" dirty="0"/>
+              <a:t>Licence annuelle · self-service</a:t>
+            </a:r>
+            <a:endParaRPr lang="en-US" sz="1050" dirty="0"/>
+          </a:p>
+        </p:txBody>
+      </p:sp>
+      <p:sp>
+        <p:nvSpPr>
+          <p:cNvPr id="12" name="Text 10"/>
+          <p:cNvSpPr/>
+          <p:nvPr/>
+        </p:nvSpPr>
+        <p:spPr>
+          <a:xfrm>
+            <a:off x="4690872" y="3154680"/>
+            <a:ext cx="2926080" cy="2103120"/>
+          </a:xfrm>
+          <a:prstGeom prst="rect">
+            <a:avLst/>
+          </a:prstGeom>
+          <a:noFill/>
+          <a:ln/>
+        </p:spPr>
+        <p:txBody>
+          <a:bodyPr wrap="square" lIns="0" tIns="0" rIns="0" bIns="0" rtlCol="0" anchor="ctr"/>
+          <a:lstStyle/>
+          <a:p>
+            <a:pPr marL="177800" indent="-177800">
+              <a:lnSpc>
+                <a:spcPct val="105000"/>
+              </a:lnSpc>
+              <a:spcAft>
+                <a:spcPts val="900"/>
+              </a:spcAft>
+              <a:buSzPct val="100000"/>
+              <a:buChar char="•"/>
+            </a:pPr>
+            <a:r>
+              <a:rPr lang="en-US" sz="1200" dirty="0">
+                <a:solidFill>
+                  <a:srgbClr val="1A1A1A"/>
+                </a:solidFill>
+                <a:latin typeface="Montserrat" pitchFamily="34" charset="0"/>
+                <a:ea typeface="Montserrat" pitchFamily="34" charset="-122"/>
+                <a:cs typeface="Montserrat" pitchFamily="34" charset="-120"/>
+              </a:rPr>
+              <a:t>Équipes multi-utilisateurs</a:t>
+            </a:r>
+            <a:endParaRPr lang="en-US" sz="1200" dirty="0"/>
+          </a:p>
+          <a:p>
+            <a:pPr marL="177800" indent="-177800">
+              <a:lnSpc>
+                <a:spcPct val="105000"/>
+              </a:lnSpc>
+              <a:spcAft>
+                <a:spcPts val="900"/>
+              </a:spcAft>
+              <a:buSzPct val="100000"/>
+              <a:buChar char="•"/>
+            </a:pPr>
+            <a:r>
+              <a:rPr lang="en-US" sz="1200" dirty="0">
+                <a:solidFill>
+                  <a:srgbClr val="1A1A1A"/>
+                </a:solidFill>
+                <a:latin typeface="Montserrat" pitchFamily="34" charset="0"/>
+                <a:ea typeface="Montserrat" pitchFamily="34" charset="-122"/>
+                <a:cs typeface="Montserrat" pitchFamily="34" charset="-120"/>
+              </a:rPr>
+              <a:t>Gestion des droits &amp; rôles</a:t>
+            </a:r>
+            <a:endParaRPr lang="en-US" sz="1200" dirty="0"/>
+          </a:p>
+          <a:p>
+            <a:pPr marL="177800" indent="-177800">
+              <a:lnSpc>
+                <a:spcPct val="105000"/>
+              </a:lnSpc>
+              <a:spcAft>
+                <a:spcPts val="900"/>
+              </a:spcAft>
+              <a:buSzPct val="100000"/>
+              <a:buChar char="•"/>
+            </a:pPr>
+            <a:r>
+              <a:rPr lang="en-US" sz="1200" dirty="0">
+                <a:solidFill>
+                  <a:srgbClr val="1A1A1A"/>
+                </a:solidFill>
+                <a:latin typeface="Montserrat" pitchFamily="34" charset="0"/>
+                <a:ea typeface="Montserrat" pitchFamily="34" charset="-122"/>
+                <a:cs typeface="Montserrat" pitchFamily="34" charset="-120"/>
+              </a:rPr>
+              <a:t>Collaboration en temps réel</a:t>
+            </a:r>
+            <a:endParaRPr lang="en-US" sz="1200" dirty="0"/>
+          </a:p>
+          <a:p>
+            <a:pPr marL="177800" indent="-177800">
+              <a:lnSpc>
+                <a:spcPct val="105000"/>
+              </a:lnSpc>
+              <a:buSzPct val="100000"/>
+              <a:buChar char="•"/>
+            </a:pPr>
+            <a:r>
+              <a:rPr lang="en-US" sz="1200" dirty="0">
+                <a:solidFill>
+                  <a:srgbClr val="1A1A1A"/>
+                </a:solidFill>
+                <a:latin typeface="Montserrat" pitchFamily="34" charset="0"/>
+                <a:ea typeface="Montserrat" pitchFamily="34" charset="-122"/>
+                <a:cs typeface="Montserrat" pitchFamily="34" charset="-120"/>
+              </a:rPr>
+              <a:t>Vérification après implémentation</a:t>
+            </a:r>
+            <a:endParaRPr lang="en-US" sz="1200" dirty="0"/>
+          </a:p>
+        </p:txBody>
+      </p:sp>
+      <p:sp>
+        <p:nvSpPr>
+          <p:cNvPr id="13" name="Text 11"/>
+          <p:cNvSpPr/>
+          <p:nvPr/>
+        </p:nvSpPr>
+        <p:spPr>
+          <a:xfrm>
+            <a:off x="4690872" y="5532120"/>
+            <a:ext cx="2926080" cy="365760"/>
+          </a:xfrm>
+          <a:prstGeom prst="rect">
+            <a:avLst/>
+          </a:prstGeom>
+          <a:noFill/>
+          <a:ln/>
+        </p:spPr>
+        <p:txBody>
+          <a:bodyPr wrap="square" lIns="0" tIns="0" rIns="0" bIns="0" rtlCol="0" anchor="ctr"/>
+          <a:lstStyle/>
+          <a:p>
+            <a:pPr indent="0" marL="0">
+              <a:buNone/>
+            </a:pPr>
+            <a:r>
+              <a:rPr lang="en-US" sz="1250" b="1" dirty="0">
+                <a:solidFill>
+                  <a:srgbClr val="0066FF"/>
+                </a:solidFill>
+                <a:latin typeface="Montserrat" pitchFamily="34" charset="0"/>
+                <a:ea typeface="Montserrat" pitchFamily="34" charset="-122"/>
+                <a:cs typeface="Montserrat" pitchFamily="34" charset="-120"/>
+              </a:rPr>
+              <a:t>Demander un devis  →</a:t>
+            </a:r>
+            <a:endParaRPr lang="en-US" sz="1250" dirty="0"/>
           </a:p>
         </p:txBody>
       </p:sp>
@@ -3959,12 +4144,12 @@
         </p:nvSpPr>
         <p:spPr>
           <a:xfrm>
-            <a:off x="8156448" y="2194560"/>
-            <a:ext cx="3474720" cy="2926080"/>
+            <a:off x="8156448" y="1965960"/>
+            <a:ext cx="3474720" cy="4160520"/>
           </a:xfrm>
           <a:prstGeom prst="roundRect">
             <a:avLst>
-              <a:gd name="adj" fmla="val 3125"/>
+              <a:gd name="adj" fmla="val 2632"/>
             </a:avLst>
           </a:prstGeom>
           <a:solidFill>
@@ -3987,128 +4172,69 @@
       </p:sp>
       <p:sp>
         <p:nvSpPr>
-          <p:cNvPr id="15" name="Shape 13"/>
-          <p:cNvSpPr/>
-          <p:nvPr/>
-        </p:nvSpPr>
-        <p:spPr>
-          <a:xfrm>
-            <a:off x="9436608" y="2606040"/>
-            <a:ext cx="914400" cy="914400"/>
-          </a:xfrm>
-          <a:prstGeom prst="ellipse">
-            <a:avLst/>
-          </a:prstGeom>
-          <a:solidFill>
-            <a:srgbClr val="0066FF"/>
-          </a:solidFill>
-          <a:ln/>
-        </p:spPr>
-      </p:sp>
-      <p:sp>
-        <p:nvSpPr>
-          <p:cNvPr id="16" name="Text 14"/>
-          <p:cNvSpPr/>
-          <p:nvPr/>
-        </p:nvSpPr>
-        <p:spPr>
-          <a:xfrm>
-            <a:off x="9436608" y="2606040"/>
-            <a:ext cx="914400" cy="914400"/>
-          </a:xfrm>
-          <a:prstGeom prst="rect">
-            <a:avLst/>
-          </a:prstGeom>
-          <a:noFill/>
-          <a:ln/>
-        </p:spPr>
-        <p:txBody>
-          <a:bodyPr wrap="square" lIns="0" tIns="0" rIns="0" bIns="0" rtlCol="0" anchor="ctr"/>
-          <a:lstStyle/>
-          <a:p>
-            <a:pPr algn="ctr" indent="0" marL="0">
-              <a:buNone/>
-            </a:pPr>
-            <a:r>
-              <a:rPr lang="en-US" sz="2200" b="1" dirty="0">
-                <a:solidFill>
-                  <a:srgbClr val="FFFFFF"/>
+          <p:cNvPr id="15" name="Text 13"/>
+          <p:cNvSpPr/>
+          <p:nvPr/>
+        </p:nvSpPr>
+        <p:spPr>
+          <a:xfrm>
+            <a:off x="8449056" y="2240280"/>
+            <a:ext cx="2926080" cy="411480"/>
+          </a:xfrm>
+          <a:prstGeom prst="rect">
+            <a:avLst/>
+          </a:prstGeom>
+          <a:noFill/>
+          <a:ln/>
+        </p:spPr>
+        <p:txBody>
+          <a:bodyPr wrap="square" lIns="0" tIns="0" rIns="0" bIns="0" rtlCol="0" anchor="ctr"/>
+          <a:lstStyle/>
+          <a:p>
+            <a:pPr indent="0" marL="0">
+              <a:buNone/>
+            </a:pPr>
+            <a:r>
+              <a:rPr lang="en-US" sz="2000" b="1" dirty="0">
+                <a:solidFill>
+                  <a:srgbClr val="FFA101"/>
                 </a:solidFill>
                 <a:latin typeface="Space Grotesk" pitchFamily="34" charset="0"/>
                 <a:ea typeface="Space Grotesk" pitchFamily="34" charset="-122"/>
                 <a:cs typeface="Space Grotesk" pitchFamily="34" charset="-120"/>
               </a:rPr>
-              <a:t>AC</a:t>
-            </a:r>
-            <a:endParaRPr lang="en-US" sz="2200" dirty="0"/>
-          </a:p>
-        </p:txBody>
-      </p:sp>
-      <p:sp>
-        <p:nvSpPr>
-          <p:cNvPr id="17" name="Text 15"/>
-          <p:cNvSpPr/>
-          <p:nvPr/>
-        </p:nvSpPr>
-        <p:spPr>
-          <a:xfrm>
-            <a:off x="8339328" y="3749040"/>
-            <a:ext cx="3108960" cy="365760"/>
-          </a:xfrm>
-          <a:prstGeom prst="rect">
-            <a:avLst/>
-          </a:prstGeom>
-          <a:noFill/>
-          <a:ln/>
-        </p:spPr>
-        <p:txBody>
-          <a:bodyPr wrap="square" lIns="0" tIns="0" rIns="0" bIns="0" rtlCol="0" anchor="ctr"/>
-          <a:lstStyle/>
-          <a:p>
-            <a:pPr algn="ctr" indent="0" marL="0">
-              <a:buNone/>
-            </a:pPr>
-            <a:r>
-              <a:rPr lang="en-US" sz="1600" b="1" dirty="0">
-                <a:solidFill>
-                  <a:srgbClr val="0A0A0A"/>
-                </a:solidFill>
-                <a:latin typeface="Space Grotesk" pitchFamily="34" charset="0"/>
-                <a:ea typeface="Space Grotesk" pitchFamily="34" charset="-122"/>
-                <a:cs typeface="Space Grotesk" pitchFamily="34" charset="-120"/>
-              </a:rPr>
-              <a:t>Adrien Charles</a:t>
-            </a:r>
-            <a:endParaRPr lang="en-US" sz="1600" dirty="0"/>
-          </a:p>
-        </p:txBody>
-      </p:sp>
-      <p:sp>
-        <p:nvSpPr>
-          <p:cNvPr id="18" name="Text 16"/>
-          <p:cNvSpPr/>
-          <p:nvPr/>
-        </p:nvSpPr>
-        <p:spPr>
-          <a:xfrm>
-            <a:off x="8339328" y="4160520"/>
-            <a:ext cx="3108960" cy="365760"/>
-          </a:xfrm>
-          <a:prstGeom prst="rect">
-            <a:avLst/>
-          </a:prstGeom>
-          <a:noFill/>
-          <a:ln/>
-        </p:spPr>
-        <p:txBody>
-          <a:bodyPr wrap="square" lIns="0" tIns="0" rIns="0" bIns="0" rtlCol="0" anchor="ctr"/>
-          <a:lstStyle/>
-          <a:p>
-            <a:pPr algn="ctr" indent="0" marL="0">
-              <a:buNone/>
-            </a:pPr>
-            <a:r>
-              <a:rPr lang="en-US" sz="1150" dirty="0">
+              <a:t>Managé</a:t>
+            </a:r>
+            <a:endParaRPr lang="en-US" sz="2000" dirty="0"/>
+          </a:p>
+        </p:txBody>
+      </p:sp>
+      <p:sp>
+        <p:nvSpPr>
+          <p:cNvPr id="16" name="Text 14"/>
+          <p:cNvSpPr/>
+          <p:nvPr/>
+        </p:nvSpPr>
+        <p:spPr>
+          <a:xfrm>
+            <a:off x="8449056" y="2670048"/>
+            <a:ext cx="2926080" cy="320040"/>
+          </a:xfrm>
+          <a:prstGeom prst="rect">
+            <a:avLst/>
+          </a:prstGeom>
+          <a:noFill/>
+          <a:ln/>
+        </p:spPr>
+        <p:txBody>
+          <a:bodyPr wrap="square" lIns="0" tIns="0" rIns="0" bIns="0" rtlCol="0" anchor="ctr"/>
+          <a:lstStyle/>
+          <a:p>
+            <a:pPr indent="0" marL="0">
+              <a:buNone/>
+            </a:pPr>
+            <a:r>
+              <a:rPr lang="en-US" sz="1050" spc="50" kern="0" dirty="0">
                 <a:solidFill>
                   <a:srgbClr val="9296A6"/>
                 </a:solidFill>
@@ -4116,9 +4242,163 @@
                 <a:ea typeface="JetBrains Mono" pitchFamily="34" charset="-122"/>
                 <a:cs typeface="JetBrains Mono" pitchFamily="34" charset="-120"/>
               </a:rPr>
-              <a:t>Produit</a:t>
-            </a:r>
-            <a:endParaRPr lang="en-US" sz="1150" dirty="0"/>
+              <a:t>Hébergé &amp; opéré par Lyriks</a:t>
+            </a:r>
+            <a:endParaRPr lang="en-US" sz="1050" dirty="0"/>
+          </a:p>
+        </p:txBody>
+      </p:sp>
+      <p:sp>
+        <p:nvSpPr>
+          <p:cNvPr id="17" name="Text 15"/>
+          <p:cNvSpPr/>
+          <p:nvPr/>
+        </p:nvSpPr>
+        <p:spPr>
+          <a:xfrm>
+            <a:off x="8449056" y="3154680"/>
+            <a:ext cx="2926080" cy="2103120"/>
+          </a:xfrm>
+          <a:prstGeom prst="rect">
+            <a:avLst/>
+          </a:prstGeom>
+          <a:noFill/>
+          <a:ln/>
+        </p:spPr>
+        <p:txBody>
+          <a:bodyPr wrap="square" lIns="0" tIns="0" rIns="0" bIns="0" rtlCol="0" anchor="ctr"/>
+          <a:lstStyle/>
+          <a:p>
+            <a:pPr marL="177800" indent="-177800">
+              <a:lnSpc>
+                <a:spcPct val="105000"/>
+              </a:lnSpc>
+              <a:spcAft>
+                <a:spcPts val="900"/>
+              </a:spcAft>
+              <a:buSzPct val="100000"/>
+              <a:buChar char="•"/>
+            </a:pPr>
+            <a:r>
+              <a:rPr lang="en-US" sz="1200" dirty="0">
+                <a:solidFill>
+                  <a:srgbClr val="1A1A1A"/>
+                </a:solidFill>
+                <a:latin typeface="Montserrat" pitchFamily="34" charset="0"/>
+                <a:ea typeface="Montserrat" pitchFamily="34" charset="-122"/>
+                <a:cs typeface="Montserrat" pitchFamily="34" charset="-120"/>
+              </a:rPr>
+              <a:t>Infogérance complète &amp; SLA</a:t>
+            </a:r>
+            <a:endParaRPr lang="en-US" sz="1200" dirty="0"/>
+          </a:p>
+          <a:p>
+            <a:pPr marL="177800" indent="-177800">
+              <a:lnSpc>
+                <a:spcPct val="105000"/>
+              </a:lnSpc>
+              <a:spcAft>
+                <a:spcPts val="900"/>
+              </a:spcAft>
+              <a:buSzPct val="100000"/>
+              <a:buChar char="•"/>
+            </a:pPr>
+            <a:r>
+              <a:rPr lang="en-US" sz="1200" dirty="0">
+                <a:solidFill>
+                  <a:srgbClr val="1A1A1A"/>
+                </a:solidFill>
+                <a:latin typeface="Montserrat" pitchFamily="34" charset="0"/>
+                <a:ea typeface="Montserrat" pitchFamily="34" charset="-122"/>
+                <a:cs typeface="Montserrat" pitchFamily="34" charset="-120"/>
+              </a:rPr>
+              <a:t>Supervision avancée des usages IA</a:t>
+            </a:r>
+            <a:endParaRPr lang="en-US" sz="1200" dirty="0"/>
+          </a:p>
+          <a:p>
+            <a:pPr marL="177800" indent="-177800">
+              <a:lnSpc>
+                <a:spcPct val="105000"/>
+              </a:lnSpc>
+              <a:spcAft>
+                <a:spcPts val="900"/>
+              </a:spcAft>
+              <a:buSzPct val="100000"/>
+              <a:buChar char="•"/>
+            </a:pPr>
+            <a:r>
+              <a:rPr lang="en-US" sz="1200" dirty="0">
+                <a:solidFill>
+                  <a:srgbClr val="1A1A1A"/>
+                </a:solidFill>
+                <a:latin typeface="Montserrat" pitchFamily="34" charset="0"/>
+                <a:ea typeface="Montserrat" pitchFamily="34" charset="-122"/>
+                <a:cs typeface="Montserrat" pitchFamily="34" charset="-120"/>
+              </a:rPr>
+              <a:t>SSO &amp; sécurité avancée</a:t>
+            </a:r>
+            <a:endParaRPr lang="en-US" sz="1200" dirty="0"/>
+          </a:p>
+          <a:p>
+            <a:pPr marL="177800" indent="-177800">
+              <a:lnSpc>
+                <a:spcPct val="105000"/>
+              </a:lnSpc>
+              <a:buSzPct val="100000"/>
+              <a:buChar char="•"/>
+            </a:pPr>
+            <a:r>
+              <a:rPr lang="en-US" sz="1200" dirty="0">
+                <a:solidFill>
+                  <a:srgbClr val="1A1A1A"/>
+                </a:solidFill>
+                <a:latin typeface="Montserrat" pitchFamily="34" charset="0"/>
+                <a:ea typeface="Montserrat" pitchFamily="34" charset="-122"/>
+                <a:cs typeface="Montserrat" pitchFamily="34" charset="-120"/>
+              </a:rPr>
+              <a:t>Accompagnement dédié</a:t>
+            </a:r>
+            <a:endParaRPr lang="en-US" sz="1200" dirty="0"/>
+          </a:p>
+        </p:txBody>
+      </p:sp>
+      <p:sp>
+        <p:nvSpPr>
+          <p:cNvPr id="18" name="Text 16"/>
+          <p:cNvSpPr/>
+          <p:nvPr/>
+        </p:nvSpPr>
+        <p:spPr>
+          <a:xfrm>
+            <a:off x="8449056" y="5532120"/>
+            <a:ext cx="2926080" cy="365760"/>
+          </a:xfrm>
+          <a:prstGeom prst="rect">
+            <a:avLst/>
+          </a:prstGeom>
+          <a:noFill/>
+          <a:ln/>
+        </p:spPr>
+        <p:txBody>
+          <a:bodyPr wrap="square" lIns="0" tIns="0" rIns="0" bIns="0" rtlCol="0" anchor="ctr"/>
+          <a:lstStyle/>
+          <a:p>
+            <a:pPr indent="0" marL="0">
+              <a:buNone/>
+            </a:pPr>
+            <a:r>
+              <a:rPr lang="en-US" sz="1250" b="1" dirty="0">
+                <a:solidFill>
+                  <a:srgbClr val="FFA101"/>
+                </a:solidFill>
+                <a:latin typeface="Montserrat" pitchFamily="34" charset="0"/>
+                <a:ea typeface="Montserrat" pitchFamily="34" charset="-122"/>
+                <a:cs typeface="Montserrat" pitchFamily="34" charset="-120"/>
+              </a:rPr>
+              <a:t>Contacter l'équipe  →</a:t>
+            </a:r>
+            <a:endParaRPr lang="en-US" sz="1250" dirty="0"/>
           </a:p>
         </p:txBody>
       </p:sp>
@@ -4172,6 +4452,668 @@
 <file path=ppt/slides/slide13.xml><?xml version="1.0" encoding="utf-8"?>
 <p:sld xmlns:a="http://schemas.openxmlformats.org/drawingml/2006/main" xmlns:r="http://schemas.openxmlformats.org/officeDocument/2006/relationships" xmlns:p="http://schemas.openxmlformats.org/presentationml/2006/main">
   <p:cSld name="Slide 13">
+    <p:bg>
+      <p:bgPr>
+        <a:solidFill>
+          <a:srgbClr val="FFFFFF"/>
+        </a:solidFill>
+      </p:bgPr>
+    </p:bg>
+    <p:spTree>
+      <p:nvGrpSpPr>
+        <p:cNvPr id="1" name=""/>
+        <p:cNvGrpSpPr/>
+        <p:nvPr/>
+      </p:nvGrpSpPr>
+      <p:grpSpPr>
+        <a:xfrm>
+          <a:off x="0" y="0"/>
+          <a:ext cx="0" cy="0"/>
+          <a:chOff x="0" y="0"/>
+          <a:chExt cx="0" cy="0"/>
+        </a:xfrm>
+      </p:grpSpPr>
+      <p:sp>
+        <p:nvSpPr>
+          <p:cNvPr id="2" name="Text 0"/>
+          <p:cNvSpPr/>
+          <p:nvPr/>
+        </p:nvSpPr>
+        <p:spPr>
+          <a:xfrm>
+            <a:off x="640080" y="640080"/>
+            <a:ext cx="8229600" cy="274320"/>
+          </a:xfrm>
+          <a:prstGeom prst="rect">
+            <a:avLst/>
+          </a:prstGeom>
+          <a:noFill/>
+          <a:ln/>
+        </p:spPr>
+        <p:txBody>
+          <a:bodyPr wrap="square" lIns="0" tIns="0" rIns="0" bIns="0" rtlCol="0" anchor="ctr"/>
+          <a:lstStyle/>
+          <a:p>
+            <a:pPr indent="0" marL="0">
+              <a:buNone/>
+            </a:pPr>
+            <a:r>
+              <a:rPr lang="en-US" sz="1100" b="1" spc="250" kern="0" dirty="0">
+                <a:solidFill>
+                  <a:srgbClr val="8047F4"/>
+                </a:solidFill>
+                <a:latin typeface="JetBrains Mono" pitchFamily="34" charset="0"/>
+                <a:ea typeface="JetBrains Mono" pitchFamily="34" charset="-122"/>
+                <a:cs typeface="JetBrains Mono" pitchFamily="34" charset="-120"/>
+              </a:rPr>
+              <a:t>L'ÉQUIPE</a:t>
+            </a:r>
+            <a:endParaRPr lang="en-US" sz="1100" dirty="0"/>
+          </a:p>
+        </p:txBody>
+      </p:sp>
+      <p:sp>
+        <p:nvSpPr>
+          <p:cNvPr id="3" name="Text 1"/>
+          <p:cNvSpPr/>
+          <p:nvPr/>
+        </p:nvSpPr>
+        <p:spPr>
+          <a:xfrm>
+            <a:off x="640080" y="960120"/>
+            <a:ext cx="10058400" cy="822960"/>
+          </a:xfrm>
+          <a:prstGeom prst="rect">
+            <a:avLst/>
+          </a:prstGeom>
+          <a:noFill/>
+          <a:ln/>
+        </p:spPr>
+        <p:txBody>
+          <a:bodyPr wrap="square" lIns="0" tIns="0" rIns="0" bIns="0" rtlCol="0" anchor="ctr"/>
+          <a:lstStyle/>
+          <a:p>
+            <a:pPr indent="0" marL="0">
+              <a:buNone/>
+            </a:pPr>
+            <a:r>
+              <a:rPr lang="en-US" sz="3000" b="1" dirty="0">
+                <a:solidFill>
+                  <a:srgbClr val="0A0A0A"/>
+                </a:solidFill>
+                <a:latin typeface="Space Grotesk" pitchFamily="34" charset="0"/>
+                <a:ea typeface="Space Grotesk" pitchFamily="34" charset="-122"/>
+                <a:cs typeface="Space Grotesk" pitchFamily="34" charset="-120"/>
+              </a:rPr>
+              <a:t>Les voix de Lyriks</a:t>
+            </a:r>
+            <a:endParaRPr lang="en-US" sz="3000" dirty="0"/>
+          </a:p>
+        </p:txBody>
+      </p:sp>
+      <p:sp>
+        <p:nvSpPr>
+          <p:cNvPr id="4" name="Shape 2"/>
+          <p:cNvSpPr/>
+          <p:nvPr/>
+        </p:nvSpPr>
+        <p:spPr>
+          <a:xfrm>
+            <a:off x="640080" y="2194560"/>
+            <a:ext cx="3474720" cy="2926080"/>
+          </a:xfrm>
+          <a:prstGeom prst="roundRect">
+            <a:avLst>
+              <a:gd name="adj" fmla="val 3125"/>
+            </a:avLst>
+          </a:prstGeom>
+          <a:solidFill>
+            <a:srgbClr val="FFFFFF"/>
+          </a:solidFill>
+          <a:ln w="12700">
+            <a:solidFill>
+              <a:srgbClr val="E8E8EE"/>
+            </a:solidFill>
+            <a:prstDash val="solid"/>
+          </a:ln>
+          <a:effectLst>
+            <a:outerShdw sx="100000" sy="100000" kx="0" ky="0" algn="bl" rotWithShape="0" blurRad="114300" dist="38100" dir="5400000">
+              <a:srgbClr val="10122A">
+                <a:alpha val="12000"/>
+              </a:srgbClr>
+            </a:outerShdw>
+          </a:effectLst>
+        </p:spPr>
+      </p:sp>
+      <p:sp>
+        <p:nvSpPr>
+          <p:cNvPr id="5" name="Shape 3"/>
+          <p:cNvSpPr/>
+          <p:nvPr/>
+        </p:nvSpPr>
+        <p:spPr>
+          <a:xfrm>
+            <a:off x="1920240" y="2606040"/>
+            <a:ext cx="914400" cy="914400"/>
+          </a:xfrm>
+          <a:prstGeom prst="ellipse">
+            <a:avLst/>
+          </a:prstGeom>
+          <a:solidFill>
+            <a:srgbClr val="FFA101"/>
+          </a:solidFill>
+          <a:ln/>
+        </p:spPr>
+      </p:sp>
+      <p:sp>
+        <p:nvSpPr>
+          <p:cNvPr id="6" name="Text 4"/>
+          <p:cNvSpPr/>
+          <p:nvPr/>
+        </p:nvSpPr>
+        <p:spPr>
+          <a:xfrm>
+            <a:off x="1920240" y="2606040"/>
+            <a:ext cx="914400" cy="914400"/>
+          </a:xfrm>
+          <a:prstGeom prst="rect">
+            <a:avLst/>
+          </a:prstGeom>
+          <a:noFill/>
+          <a:ln/>
+        </p:spPr>
+        <p:txBody>
+          <a:bodyPr wrap="square" lIns="0" tIns="0" rIns="0" bIns="0" rtlCol="0" anchor="ctr"/>
+          <a:lstStyle/>
+          <a:p>
+            <a:pPr algn="ctr" indent="0" marL="0">
+              <a:buNone/>
+            </a:pPr>
+            <a:r>
+              <a:rPr lang="en-US" sz="2200" b="1" dirty="0">
+                <a:solidFill>
+                  <a:srgbClr val="FFFFFF"/>
+                </a:solidFill>
+                <a:latin typeface="Space Grotesk" pitchFamily="34" charset="0"/>
+                <a:ea typeface="Space Grotesk" pitchFamily="34" charset="-122"/>
+                <a:cs typeface="Space Grotesk" pitchFamily="34" charset="-120"/>
+              </a:rPr>
+              <a:t>DM</a:t>
+            </a:r>
+            <a:endParaRPr lang="en-US" sz="2200" dirty="0"/>
+          </a:p>
+        </p:txBody>
+      </p:sp>
+      <p:sp>
+        <p:nvSpPr>
+          <p:cNvPr id="7" name="Text 5"/>
+          <p:cNvSpPr/>
+          <p:nvPr/>
+        </p:nvSpPr>
+        <p:spPr>
+          <a:xfrm>
+            <a:off x="822960" y="3749040"/>
+            <a:ext cx="3108960" cy="365760"/>
+          </a:xfrm>
+          <a:prstGeom prst="rect">
+            <a:avLst/>
+          </a:prstGeom>
+          <a:noFill/>
+          <a:ln/>
+        </p:spPr>
+        <p:txBody>
+          <a:bodyPr wrap="square" lIns="0" tIns="0" rIns="0" bIns="0" rtlCol="0" anchor="ctr"/>
+          <a:lstStyle/>
+          <a:p>
+            <a:pPr algn="ctr" indent="0" marL="0">
+              <a:buNone/>
+            </a:pPr>
+            <a:r>
+              <a:rPr lang="en-US" sz="1600" b="1" dirty="0">
+                <a:solidFill>
+                  <a:srgbClr val="0A0A0A"/>
+                </a:solidFill>
+                <a:latin typeface="Space Grotesk" pitchFamily="34" charset="0"/>
+                <a:ea typeface="Space Grotesk" pitchFamily="34" charset="-122"/>
+                <a:cs typeface="Space Grotesk" pitchFamily="34" charset="-120"/>
+              </a:rPr>
+              <a:t>David Mabboux</a:t>
+            </a:r>
+            <a:endParaRPr lang="en-US" sz="1600" dirty="0"/>
+          </a:p>
+        </p:txBody>
+      </p:sp>
+      <p:sp>
+        <p:nvSpPr>
+          <p:cNvPr id="8" name="Text 6"/>
+          <p:cNvSpPr/>
+          <p:nvPr/>
+        </p:nvSpPr>
+        <p:spPr>
+          <a:xfrm>
+            <a:off x="822960" y="4160520"/>
+            <a:ext cx="3108960" cy="365760"/>
+          </a:xfrm>
+          <a:prstGeom prst="rect">
+            <a:avLst/>
+          </a:prstGeom>
+          <a:noFill/>
+          <a:ln/>
+        </p:spPr>
+        <p:txBody>
+          <a:bodyPr wrap="square" lIns="0" tIns="0" rIns="0" bIns="0" rtlCol="0" anchor="ctr"/>
+          <a:lstStyle/>
+          <a:p>
+            <a:pPr algn="ctr" indent="0" marL="0">
+              <a:buNone/>
+            </a:pPr>
+            <a:r>
+              <a:rPr lang="en-US" sz="1150" dirty="0">
+                <a:solidFill>
+                  <a:srgbClr val="9296A6"/>
+                </a:solidFill>
+                <a:latin typeface="JetBrains Mono" pitchFamily="34" charset="0"/>
+                <a:ea typeface="JetBrains Mono" pitchFamily="34" charset="-122"/>
+                <a:cs typeface="JetBrains Mono" pitchFamily="34" charset="-120"/>
+              </a:rPr>
+              <a:t>Business</a:t>
+            </a:r>
+            <a:endParaRPr lang="en-US" sz="1150" dirty="0"/>
+          </a:p>
+        </p:txBody>
+      </p:sp>
+      <p:sp>
+        <p:nvSpPr>
+          <p:cNvPr id="9" name="Shape 7"/>
+          <p:cNvSpPr/>
+          <p:nvPr/>
+        </p:nvSpPr>
+        <p:spPr>
+          <a:xfrm>
+            <a:off x="4398264" y="2194560"/>
+            <a:ext cx="3474720" cy="2926080"/>
+          </a:xfrm>
+          <a:prstGeom prst="roundRect">
+            <a:avLst>
+              <a:gd name="adj" fmla="val 3125"/>
+            </a:avLst>
+          </a:prstGeom>
+          <a:solidFill>
+            <a:srgbClr val="FFFFFF"/>
+          </a:solidFill>
+          <a:ln w="12700">
+            <a:solidFill>
+              <a:srgbClr val="E8E8EE"/>
+            </a:solidFill>
+            <a:prstDash val="solid"/>
+          </a:ln>
+          <a:effectLst>
+            <a:outerShdw sx="100000" sy="100000" kx="0" ky="0" algn="bl" rotWithShape="0" blurRad="114300" dist="38100" dir="5400000">
+              <a:srgbClr val="10122A">
+                <a:alpha val="12000"/>
+              </a:srgbClr>
+            </a:outerShdw>
+          </a:effectLst>
+        </p:spPr>
+      </p:sp>
+      <p:sp>
+        <p:nvSpPr>
+          <p:cNvPr id="10" name="Shape 8"/>
+          <p:cNvSpPr/>
+          <p:nvPr/>
+        </p:nvSpPr>
+        <p:spPr>
+          <a:xfrm>
+            <a:off x="5678424" y="2606040"/>
+            <a:ext cx="914400" cy="914400"/>
+          </a:xfrm>
+          <a:prstGeom prst="ellipse">
+            <a:avLst/>
+          </a:prstGeom>
+          <a:solidFill>
+            <a:srgbClr val="BB46F5"/>
+          </a:solidFill>
+          <a:ln/>
+        </p:spPr>
+      </p:sp>
+      <p:sp>
+        <p:nvSpPr>
+          <p:cNvPr id="11" name="Text 9"/>
+          <p:cNvSpPr/>
+          <p:nvPr/>
+        </p:nvSpPr>
+        <p:spPr>
+          <a:xfrm>
+            <a:off x="5678424" y="2606040"/>
+            <a:ext cx="914400" cy="914400"/>
+          </a:xfrm>
+          <a:prstGeom prst="rect">
+            <a:avLst/>
+          </a:prstGeom>
+          <a:noFill/>
+          <a:ln/>
+        </p:spPr>
+        <p:txBody>
+          <a:bodyPr wrap="square" lIns="0" tIns="0" rIns="0" bIns="0" rtlCol="0" anchor="ctr"/>
+          <a:lstStyle/>
+          <a:p>
+            <a:pPr algn="ctr" indent="0" marL="0">
+              <a:buNone/>
+            </a:pPr>
+            <a:r>
+              <a:rPr lang="en-US" sz="2200" b="1" dirty="0">
+                <a:solidFill>
+                  <a:srgbClr val="FFFFFF"/>
+                </a:solidFill>
+                <a:latin typeface="Space Grotesk" pitchFamily="34" charset="0"/>
+                <a:ea typeface="Space Grotesk" pitchFamily="34" charset="-122"/>
+                <a:cs typeface="Space Grotesk" pitchFamily="34" charset="-120"/>
+              </a:rPr>
+              <a:t>AB</a:t>
+            </a:r>
+            <a:endParaRPr lang="en-US" sz="2200" dirty="0"/>
+          </a:p>
+        </p:txBody>
+      </p:sp>
+      <p:sp>
+        <p:nvSpPr>
+          <p:cNvPr id="12" name="Text 10"/>
+          <p:cNvSpPr/>
+          <p:nvPr/>
+        </p:nvSpPr>
+        <p:spPr>
+          <a:xfrm>
+            <a:off x="4581144" y="3749040"/>
+            <a:ext cx="3108960" cy="365760"/>
+          </a:xfrm>
+          <a:prstGeom prst="rect">
+            <a:avLst/>
+          </a:prstGeom>
+          <a:noFill/>
+          <a:ln/>
+        </p:spPr>
+        <p:txBody>
+          <a:bodyPr wrap="square" lIns="0" tIns="0" rIns="0" bIns="0" rtlCol="0" anchor="ctr"/>
+          <a:lstStyle/>
+          <a:p>
+            <a:pPr algn="ctr" indent="0" marL="0">
+              <a:buNone/>
+            </a:pPr>
+            <a:r>
+              <a:rPr lang="en-US" sz="1600" b="1" dirty="0">
+                <a:solidFill>
+                  <a:srgbClr val="0A0A0A"/>
+                </a:solidFill>
+                <a:latin typeface="Space Grotesk" pitchFamily="34" charset="0"/>
+                <a:ea typeface="Space Grotesk" pitchFamily="34" charset="-122"/>
+                <a:cs typeface="Space Grotesk" pitchFamily="34" charset="-120"/>
+              </a:rPr>
+              <a:t>Adrien Basso Blandin</a:t>
+            </a:r>
+            <a:endParaRPr lang="en-US" sz="1600" dirty="0"/>
+          </a:p>
+        </p:txBody>
+      </p:sp>
+      <p:sp>
+        <p:nvSpPr>
+          <p:cNvPr id="13" name="Text 11"/>
+          <p:cNvSpPr/>
+          <p:nvPr/>
+        </p:nvSpPr>
+        <p:spPr>
+          <a:xfrm>
+            <a:off x="4581144" y="4160520"/>
+            <a:ext cx="3108960" cy="365760"/>
+          </a:xfrm>
+          <a:prstGeom prst="rect">
+            <a:avLst/>
+          </a:prstGeom>
+          <a:noFill/>
+          <a:ln/>
+        </p:spPr>
+        <p:txBody>
+          <a:bodyPr wrap="square" lIns="0" tIns="0" rIns="0" bIns="0" rtlCol="0" anchor="ctr"/>
+          <a:lstStyle/>
+          <a:p>
+            <a:pPr algn="ctr" indent="0" marL="0">
+              <a:buNone/>
+            </a:pPr>
+            <a:r>
+              <a:rPr lang="en-US" sz="1150" dirty="0">
+                <a:solidFill>
+                  <a:srgbClr val="9296A6"/>
+                </a:solidFill>
+                <a:latin typeface="JetBrains Mono" pitchFamily="34" charset="0"/>
+                <a:ea typeface="JetBrains Mono" pitchFamily="34" charset="-122"/>
+                <a:cs typeface="JetBrains Mono" pitchFamily="34" charset="-120"/>
+              </a:rPr>
+              <a:t>Cohérence</a:t>
+            </a:r>
+            <a:endParaRPr lang="en-US" sz="1150" dirty="0"/>
+          </a:p>
+        </p:txBody>
+      </p:sp>
+      <p:sp>
+        <p:nvSpPr>
+          <p:cNvPr id="14" name="Shape 12"/>
+          <p:cNvSpPr/>
+          <p:nvPr/>
+        </p:nvSpPr>
+        <p:spPr>
+          <a:xfrm>
+            <a:off x="8156448" y="2194560"/>
+            <a:ext cx="3474720" cy="2926080"/>
+          </a:xfrm>
+          <a:prstGeom prst="roundRect">
+            <a:avLst>
+              <a:gd name="adj" fmla="val 3125"/>
+            </a:avLst>
+          </a:prstGeom>
+          <a:solidFill>
+            <a:srgbClr val="FFFFFF"/>
+          </a:solidFill>
+          <a:ln w="12700">
+            <a:solidFill>
+              <a:srgbClr val="E8E8EE"/>
+            </a:solidFill>
+            <a:prstDash val="solid"/>
+          </a:ln>
+          <a:effectLst>
+            <a:outerShdw sx="100000" sy="100000" kx="0" ky="0" algn="bl" rotWithShape="0" blurRad="114300" dist="38100" dir="5400000">
+              <a:srgbClr val="10122A">
+                <a:alpha val="12000"/>
+              </a:srgbClr>
+            </a:outerShdw>
+          </a:effectLst>
+        </p:spPr>
+      </p:sp>
+      <p:sp>
+        <p:nvSpPr>
+          <p:cNvPr id="15" name="Shape 13"/>
+          <p:cNvSpPr/>
+          <p:nvPr/>
+        </p:nvSpPr>
+        <p:spPr>
+          <a:xfrm>
+            <a:off x="9436608" y="2606040"/>
+            <a:ext cx="914400" cy="914400"/>
+          </a:xfrm>
+          <a:prstGeom prst="ellipse">
+            <a:avLst/>
+          </a:prstGeom>
+          <a:solidFill>
+            <a:srgbClr val="0066FF"/>
+          </a:solidFill>
+          <a:ln/>
+        </p:spPr>
+      </p:sp>
+      <p:sp>
+        <p:nvSpPr>
+          <p:cNvPr id="16" name="Text 14"/>
+          <p:cNvSpPr/>
+          <p:nvPr/>
+        </p:nvSpPr>
+        <p:spPr>
+          <a:xfrm>
+            <a:off x="9436608" y="2606040"/>
+            <a:ext cx="914400" cy="914400"/>
+          </a:xfrm>
+          <a:prstGeom prst="rect">
+            <a:avLst/>
+          </a:prstGeom>
+          <a:noFill/>
+          <a:ln/>
+        </p:spPr>
+        <p:txBody>
+          <a:bodyPr wrap="square" lIns="0" tIns="0" rIns="0" bIns="0" rtlCol="0" anchor="ctr"/>
+          <a:lstStyle/>
+          <a:p>
+            <a:pPr algn="ctr" indent="0" marL="0">
+              <a:buNone/>
+            </a:pPr>
+            <a:r>
+              <a:rPr lang="en-US" sz="2200" b="1" dirty="0">
+                <a:solidFill>
+                  <a:srgbClr val="FFFFFF"/>
+                </a:solidFill>
+                <a:latin typeface="Space Grotesk" pitchFamily="34" charset="0"/>
+                <a:ea typeface="Space Grotesk" pitchFamily="34" charset="-122"/>
+                <a:cs typeface="Space Grotesk" pitchFamily="34" charset="-120"/>
+              </a:rPr>
+              <a:t>AC</a:t>
+            </a:r>
+            <a:endParaRPr lang="en-US" sz="2200" dirty="0"/>
+          </a:p>
+        </p:txBody>
+      </p:sp>
+      <p:sp>
+        <p:nvSpPr>
+          <p:cNvPr id="17" name="Text 15"/>
+          <p:cNvSpPr/>
+          <p:nvPr/>
+        </p:nvSpPr>
+        <p:spPr>
+          <a:xfrm>
+            <a:off x="8339328" y="3749040"/>
+            <a:ext cx="3108960" cy="365760"/>
+          </a:xfrm>
+          <a:prstGeom prst="rect">
+            <a:avLst/>
+          </a:prstGeom>
+          <a:noFill/>
+          <a:ln/>
+        </p:spPr>
+        <p:txBody>
+          <a:bodyPr wrap="square" lIns="0" tIns="0" rIns="0" bIns="0" rtlCol="0" anchor="ctr"/>
+          <a:lstStyle/>
+          <a:p>
+            <a:pPr algn="ctr" indent="0" marL="0">
+              <a:buNone/>
+            </a:pPr>
+            <a:r>
+              <a:rPr lang="en-US" sz="1600" b="1" dirty="0">
+                <a:solidFill>
+                  <a:srgbClr val="0A0A0A"/>
+                </a:solidFill>
+                <a:latin typeface="Space Grotesk" pitchFamily="34" charset="0"/>
+                <a:ea typeface="Space Grotesk" pitchFamily="34" charset="-122"/>
+                <a:cs typeface="Space Grotesk" pitchFamily="34" charset="-120"/>
+              </a:rPr>
+              <a:t>Adrien Charles</a:t>
+            </a:r>
+            <a:endParaRPr lang="en-US" sz="1600" dirty="0"/>
+          </a:p>
+        </p:txBody>
+      </p:sp>
+      <p:sp>
+        <p:nvSpPr>
+          <p:cNvPr id="18" name="Text 16"/>
+          <p:cNvSpPr/>
+          <p:nvPr/>
+        </p:nvSpPr>
+        <p:spPr>
+          <a:xfrm>
+            <a:off x="8339328" y="4160520"/>
+            <a:ext cx="3108960" cy="365760"/>
+          </a:xfrm>
+          <a:prstGeom prst="rect">
+            <a:avLst/>
+          </a:prstGeom>
+          <a:noFill/>
+          <a:ln/>
+        </p:spPr>
+        <p:txBody>
+          <a:bodyPr wrap="square" lIns="0" tIns="0" rIns="0" bIns="0" rtlCol="0" anchor="ctr"/>
+          <a:lstStyle/>
+          <a:p>
+            <a:pPr algn="ctr" indent="0" marL="0">
+              <a:buNone/>
+            </a:pPr>
+            <a:r>
+              <a:rPr lang="en-US" sz="1150" dirty="0">
+                <a:solidFill>
+                  <a:srgbClr val="9296A6"/>
+                </a:solidFill>
+                <a:latin typeface="JetBrains Mono" pitchFamily="34" charset="0"/>
+                <a:ea typeface="JetBrains Mono" pitchFamily="34" charset="-122"/>
+                <a:cs typeface="JetBrains Mono" pitchFamily="34" charset="-120"/>
+              </a:rPr>
+              <a:t>Produit</a:t>
+            </a:r>
+            <a:endParaRPr lang="en-US" sz="1150" dirty="0"/>
+          </a:p>
+        </p:txBody>
+      </p:sp>
+      <p:sp>
+        <p:nvSpPr>
+          <p:cNvPr id="19" name="Text 17"/>
+          <p:cNvSpPr/>
+          <p:nvPr/>
+        </p:nvSpPr>
+        <p:spPr>
+          <a:xfrm>
+            <a:off x="11185855" y="6400800"/>
+            <a:ext cx="548640" cy="274320"/>
+          </a:xfrm>
+          <a:prstGeom prst="rect">
+            <a:avLst/>
+          </a:prstGeom>
+          <a:noFill/>
+          <a:ln/>
+        </p:spPr>
+        <p:txBody>
+          <a:bodyPr wrap="square" lIns="0" tIns="0" rIns="0" bIns="0" rtlCol="0" anchor="ctr"/>
+          <a:lstStyle/>
+          <a:p>
+            <a:pPr algn="r" indent="0" marL="0">
+              <a:buNone/>
+            </a:pPr>
+            <a:r>
+              <a:rPr lang="en-US" sz="1000" dirty="0">
+                <a:solidFill>
+                  <a:srgbClr val="9296A6"/>
+                </a:solidFill>
+                <a:latin typeface="JetBrains Mono" pitchFamily="34" charset="0"/>
+                <a:ea typeface="JetBrains Mono" pitchFamily="34" charset="-122"/>
+                <a:cs typeface="JetBrains Mono" pitchFamily="34" charset="-120"/>
+              </a:rPr>
+              <a:t>13</a:t>
+            </a:r>
+            <a:endParaRPr lang="en-US" sz="1000" dirty="0"/>
+          </a:p>
+        </p:txBody>
+      </p:sp>
+    </p:spTree>
+  </p:cSld>
+  <p:clrMapOvr>
+    <a:masterClrMapping/>
+  </p:clrMapOvr>
+</p:sld>
+</file>
+
+<file path=ppt/slides/slide14.xml><?xml version="1.0" encoding="utf-8"?>
+<p:sld xmlns:a="http://schemas.openxmlformats.org/drawingml/2006/main" xmlns:r="http://schemas.openxmlformats.org/officeDocument/2006/relationships" xmlns:p="http://schemas.openxmlformats.org/presentationml/2006/main">
+  <p:cSld name="Slide 14">
     <p:bg>
       <p:bgPr>
         <a:solidFill>
